--- a/第六週(10-15)/第六週_第2節_簡報.pptx
+++ b/第六週(10-15)/第六週_第2節_簡報.pptx
@@ -581,7 +581,7 @@
                 <a:ea typeface="Arial Unicode MS"/>
                 <a:cs typeface="Arial Unicode MS"/>
               </a:rPr>
-              <a:t>。</a:t>
+              <a:t>。第三種叫</a:t>
             </a:r>
             <a:r>
               <a:rPr sz="1200" b="1" lang="zh-TW" dirty="0">
@@ -592,7 +592,7 @@
                 <a:ea typeface="Arial Unicode MS"/>
                 <a:cs typeface="Arial Unicode MS"/>
               </a:rPr>
-              <a:t>慣性感測器</a:t>
+              <a:t>慣性量測單元</a:t>
             </a:r>
             <a:r>
               <a:rPr sz="1200" lang="zh-TW" dirty="0">
@@ -603,7 +603,29 @@
                 <a:ea typeface="Arial Unicode MS"/>
                 <a:cs typeface="Arial Unicode MS"/>
               </a:rPr>
-              <a:t>也不看任何東西，它告訴你</a:t>
+              <a:t>，英文縮寫 </a:t>
+            </a:r>
+            <a:r>
+              <a:rPr sz="1200" b="1" lang="zh-TW" dirty="0">
+                <a:solidFill>
+                  <a:srgbClr val="000000"/>
+                </a:solidFill>
+                <a:latin typeface="Arial Unicode MS"/>
+                <a:ea typeface="Arial Unicode MS"/>
+                <a:cs typeface="Arial Unicode MS"/>
+              </a:rPr>
+              <a:t>IMU</a:t>
+            </a:r>
+            <a:r>
+              <a:rPr sz="1200" lang="zh-TW" dirty="0">
+                <a:solidFill>
+                  <a:srgbClr val="000000"/>
+                </a:solidFill>
+                <a:latin typeface="Arial Unicode MS"/>
+                <a:ea typeface="Arial Unicode MS"/>
+                <a:cs typeface="Arial Unicode MS"/>
+              </a:rPr>
+              <a:t>，它也不看任何東西，它告訴你</a:t>
             </a:r>
             <a:r>
               <a:rPr sz="1200" b="1" lang="zh-TW" dirty="0">
@@ -647,7 +669,7 @@
                 <a:ea typeface="Arial Unicode MS"/>
                 <a:cs typeface="Arial Unicode MS"/>
               </a:rPr>
-              <a:t>後面兩種，各位的手機裡都有：地圖定位用的是衛星，轉螢幕用的是慣性。今天把它們的規格表打開，看車上用的那一顆跟手機裡那一顆差在哪。
+              <a:t>後面兩種，各位的手機裡都有：地圖定位用的是衛星，轉螢幕用的是 IMU。今天把它們的規格表打開，看車上用的那一顆跟手機裡那一顆差在哪。
 </a:t>
             </a:r>
           </a:p>
@@ -790,7 +812,7 @@
                 <a:ea typeface="Arial Unicode MS"/>
                 <a:cs typeface="Arial Unicode MS"/>
               </a:rPr>
-              <a:t>第三段，慣性感測器，英文叫 </a:t>
+              <a:t>第三段，</a:t>
             </a:r>
             <a:r>
               <a:rPr sz="1200" b="1" lang="zh-TW" dirty="0">
@@ -801,6 +823,28 @@
                 <a:ea typeface="Arial Unicode MS"/>
                 <a:cs typeface="Arial Unicode MS"/>
               </a:rPr>
+              <a:t>慣性量測單元</a:t>
+            </a:r>
+            <a:r>
+              <a:rPr sz="1200" lang="zh-TW" dirty="0">
+                <a:solidFill>
+                  <a:srgbClr val="000000"/>
+                </a:solidFill>
+                <a:latin typeface="Arial Unicode MS"/>
+                <a:ea typeface="Arial Unicode MS"/>
+                <a:cs typeface="Arial Unicode MS"/>
+              </a:rPr>
+              <a:t>，英文縮寫 </a:t>
+            </a:r>
+            <a:r>
+              <a:rPr sz="1200" b="1" lang="zh-TW" dirty="0">
+                <a:solidFill>
+                  <a:srgbClr val="000000"/>
+                </a:solidFill>
+                <a:latin typeface="Arial Unicode MS"/>
+                <a:ea typeface="Arial Unicode MS"/>
+                <a:cs typeface="Arial Unicode MS"/>
+              </a:rPr>
               <a:t>IMU</a:t>
             </a:r>
             <a:r>
@@ -812,7 +856,7 @@
                 <a:ea typeface="Arial Unicode MS"/>
                 <a:cs typeface="Arial Unicode MS"/>
               </a:rPr>
-              <a:t>。
+              <a:t>，以下都叫它 IMU。
 </a:t>
             </a:r>
           </a:p>
@@ -945,6 +989,28 @@
                 <a:cs typeface="Arial Unicode MS"/>
               </a:rPr>
               <a:t>。
+</a:t>
+            </a:r>
+          </a:p>
+          <a:p>
+            <a:pPr algn="l">
+              <a:spcBef>
+                <a:spcPts val="0"/>
+              </a:spcBef>
+              <a:spcAft>
+                <a:spcPts val="200"/>
+              </a:spcAft>
+            </a:pPr>
+            <a:r>
+              <a:rPr sz="1200" lang="zh-TW" dirty="0">
+                <a:solidFill>
+                  <a:srgbClr val="000000"/>
+                </a:solidFill>
+                <a:latin typeface="Arial Unicode MS"/>
+                <a:ea typeface="Arial Unicode MS"/>
+                <a:cs typeface="Arial Unicode MS"/>
+              </a:rPr>
+              <a:t>各位可以試試看，閉上眼睛走直線。前幾步還好，走十步、二十步就歪了，而且自己不知道歪了多少。IMU 就像閉著眼睛走路的人。
 </a:t>
             </a:r>
           </a:p>
@@ -1075,41 +1141,19 @@
                 <a:spcPts val="0"/>
               </a:spcBef>
               <a:spcAft>
-                <a:spcPts val="200"/>
+                <a:spcPts val="142"/>
               </a:spcAft>
             </a:pPr>
             <a:r>
-              <a:rPr sz="1200" lang="zh-TW" dirty="0">
-                <a:solidFill>
-                  <a:srgbClr val="000000"/>
-                </a:solidFill>
-                <a:latin typeface="Arial Unicode MS"/>
-                <a:ea typeface="Arial Unicode MS"/>
-                <a:cs typeface="Arial Unicode MS"/>
-              </a:rPr>
-              <a:t>第一顆，TDK 的 </a:t>
-            </a:r>
-            <a:r>
-              <a:rPr sz="1200" b="1" lang="zh-TW" dirty="0">
-                <a:solidFill>
-                  <a:srgbClr val="000000"/>
-                </a:solidFill>
-                <a:latin typeface="Arial Unicode MS"/>
-                <a:ea typeface="Arial Unicode MS"/>
-                <a:cs typeface="Arial Unicode MS"/>
-              </a:rPr>
-              <a:t>ICM-20948</a:t>
-            </a:r>
-            <a:r>
-              <a:rPr sz="1200" lang="zh-TW" dirty="0">
-                <a:solidFill>
-                  <a:srgbClr val="000000"/>
-                </a:solidFill>
-                <a:latin typeface="Arial Unicode MS"/>
-                <a:ea typeface="Arial Unicode MS"/>
-                <a:cs typeface="Arial Unicode MS"/>
-              </a:rPr>
-              <a:t>。三乘三公釐，九軸，手機、手錶、無人機裡面都是這一類。左邊是規格書第十一頁陀螺儀那張表。
+              <a:rPr sz="850" lang="zh-TW" dirty="0">
+                <a:solidFill>
+                  <a:srgbClr val="000000"/>
+                </a:solidFill>
+                <a:latin typeface="Arial Unicode MS"/>
+                <a:ea typeface="Arial Unicode MS"/>
+                <a:cs typeface="Arial Unicode MS"/>
+              </a:rPr>
+              <a:t>看表之前，先看陀螺儀裡面長什麼樣子。播左下那支 Bosch 的動畫，一分半，英文旁白，看動畫就懂。
 </a:t>
             </a:r>
           </a:p>
@@ -1119,41 +1163,63 @@
                 <a:spcPts val="0"/>
               </a:spcBef>
               <a:spcAft>
-                <a:spcPts val="200"/>
+                <a:spcPts val="142"/>
               </a:spcAft>
             </a:pPr>
             <a:r>
-              <a:rPr sz="1200" lang="zh-TW" dirty="0">
-                <a:solidFill>
-                  <a:srgbClr val="000000"/>
-                </a:solidFill>
-                <a:latin typeface="Arial Unicode MS"/>
-                <a:ea typeface="Arial Unicode MS"/>
-                <a:cs typeface="Arial Unicode MS"/>
-              </a:rPr>
-              <a:t>從上往下。</a:t>
-            </a:r>
-            <a:r>
-              <a:rPr sz="1200" b="1" lang="zh-TW" dirty="0">
-                <a:solidFill>
-                  <a:srgbClr val="000000"/>
-                </a:solidFill>
-                <a:latin typeface="Arial Unicode MS"/>
-                <a:ea typeface="Arial Unicode MS"/>
-                <a:cs typeface="Arial Unicode MS"/>
-              </a:rPr>
-              <a:t>Full-Scale Range，量程，最大正負兩千度每秒。</a:t>
-            </a:r>
-            <a:r>
-              <a:rPr sz="1200" lang="zh-TW" dirty="0">
-                <a:solidFill>
-                  <a:srgbClr val="000000"/>
-                </a:solidFill>
-                <a:latin typeface="Arial Unicode MS"/>
-                <a:ea typeface="Arial Unicode MS"/>
-                <a:cs typeface="Arial Unicode MS"/>
-              </a:rPr>
-              <a:t>一秒轉五圈半。這個數字等一下工業級那顆也一樣，所以量程不是等級的差別。
+              <a:rPr sz="850" lang="zh-TW" dirty="0">
+                <a:solidFill>
+                  <a:srgbClr val="000000"/>
+                </a:solidFill>
+                <a:latin typeface="Arial Unicode MS"/>
+                <a:ea typeface="Arial Unicode MS"/>
+                <a:cs typeface="Arial Unicode MS"/>
+              </a:rPr>
+              <a:t>這顆是車上 ESP 用的，量車子有沒有繞著自己轉，也就是有沒有</a:t>
+            </a:r>
+            <a:r>
+              <a:rPr sz="850" b="1" lang="zh-TW" dirty="0">
+                <a:solidFill>
+                  <a:srgbClr val="000000"/>
+                </a:solidFill>
+                <a:latin typeface="Arial Unicode MS"/>
+                <a:ea typeface="Arial Unicode MS"/>
+                <a:cs typeface="Arial Unicode MS"/>
+              </a:rPr>
+              <a:t>打滑</a:t>
+            </a:r>
+            <a:r>
+              <a:rPr sz="850" lang="zh-TW" dirty="0">
+                <a:solidFill>
+                  <a:srgbClr val="000000"/>
+                </a:solidFill>
+                <a:latin typeface="Arial Unicode MS"/>
+                <a:ea typeface="Arial Unicode MS"/>
+                <a:cs typeface="Arial Unicode MS"/>
+              </a:rPr>
+              <a:t>。</a:t>
+            </a:r>
+            <a:r>
+              <a:rPr sz="850" b="1" lang="zh-TW" dirty="0">
+                <a:solidFill>
+                  <a:srgbClr val="000000"/>
+                </a:solidFill>
+                <a:latin typeface="Arial Unicode MS"/>
+                <a:ea typeface="Arial Unicode MS"/>
+                <a:cs typeface="Arial Unicode MS"/>
+              </a:rPr>
+              <a:t>0:17</a:t>
+            </a:r>
+            <a:r>
+              <a:rPr sz="850" lang="zh-TW" dirty="0">
+                <a:solidFill>
+                  <a:srgbClr val="000000"/>
+                </a:solidFill>
+                <a:latin typeface="Arial Unicode MS"/>
+                <a:ea typeface="Arial Unicode MS"/>
+                <a:cs typeface="Arial Unicode MS"/>
+              </a:rPr>
+              <a:t> 旁白說它裝在車子重心附近，例如安全氣囊的控制器裡。
 </a:t>
             </a:r>
           </a:p>
@@ -1163,63 +1229,118 @@
                 <a:spcPts val="0"/>
               </a:spcBef>
               <a:spcAft>
-                <a:spcPts val="200"/>
+                <a:spcPts val="142"/>
               </a:spcAft>
             </a:pPr>
             <a:r>
-              <a:rPr sz="1200" lang="zh-TW" dirty="0">
-                <a:solidFill>
-                  <a:srgbClr val="000000"/>
-                </a:solidFill>
-                <a:latin typeface="Arial Unicode MS"/>
-                <a:ea typeface="Arial Unicode MS"/>
-                <a:cs typeface="Arial Unicode MS"/>
-              </a:rPr>
-              <a:t>中間那一塊，</a:t>
-            </a:r>
-            <a:r>
-              <a:rPr sz="1200" b="1" lang="zh-TW" dirty="0">
-                <a:solidFill>
-                  <a:srgbClr val="000000"/>
-                </a:solidFill>
-                <a:latin typeface="Arial Unicode MS"/>
-                <a:ea typeface="Arial Unicode MS"/>
-                <a:cs typeface="Arial Unicode MS"/>
-              </a:rPr>
-              <a:t>ZERO-RATE OUTPUT</a:t>
-            </a:r>
-            <a:r>
-              <a:rPr sz="1200" lang="zh-TW" dirty="0">
-                <a:solidFill>
-                  <a:srgbClr val="000000"/>
-                </a:solidFill>
-                <a:latin typeface="Arial Unicode MS"/>
-                <a:ea typeface="Arial Unicode MS"/>
-                <a:cs typeface="Arial Unicode MS"/>
-              </a:rPr>
-              <a:t>，零偏。</a:t>
-            </a:r>
-            <a:r>
-              <a:rPr sz="1200" b="1" lang="zh-TW" dirty="0">
-                <a:solidFill>
-                  <a:srgbClr val="000000"/>
-                </a:solidFill>
-                <a:latin typeface="Arial Unicode MS"/>
-                <a:ea typeface="Arial Unicode MS"/>
-                <a:cs typeface="Arial Unicode MS"/>
-              </a:rPr>
-              <a:t>Initial ZRO Tolerance，正負 5 dps。</a:t>
-            </a:r>
-            <a:r>
-              <a:rPr sz="1200" lang="zh-TW" dirty="0">
-                <a:solidFill>
-                  <a:srgbClr val="000000"/>
-                </a:solidFill>
-                <a:latin typeface="Arial Unicode MS"/>
-                <a:ea typeface="Arial Unicode MS"/>
-                <a:cs typeface="Arial Unicode MS"/>
-              </a:rPr>
-              <a:t>意思是：這顆晶片放在桌上完全不動，它可能告訴你「我正在以每秒五度轉」。一分鐘就轉了三百度，轉了快一圈。所以每一顆用之前都要先靜止放一下，把這個零偏量出來扣掉。
+              <a:rPr sz="850" b="1" lang="zh-TW" dirty="0">
+                <a:solidFill>
+                  <a:srgbClr val="000000"/>
+                </a:solidFill>
+                <a:latin typeface="Arial Unicode MS"/>
+                <a:ea typeface="Arial Unicode MS"/>
+                <a:cs typeface="Arial Unicode MS"/>
+              </a:rPr>
+              <a:t>0:24</a:t>
+            </a:r>
+            <a:r>
+              <a:rPr sz="850" lang="zh-TW" dirty="0">
+                <a:solidFill>
+                  <a:srgbClr val="000000"/>
+                </a:solidFill>
+                <a:latin typeface="Arial Unicode MS"/>
+                <a:ea typeface="Arial Unicode MS"/>
+                <a:cs typeface="Arial Unicode MS"/>
+              </a:rPr>
+              <a:t> 開始看裡面：沒有在轉的東西，是兩組</a:t>
+            </a:r>
+            <a:r>
+              <a:rPr sz="850" b="1" lang="zh-TW" dirty="0">
+                <a:solidFill>
+                  <a:srgbClr val="000000"/>
+                </a:solidFill>
+                <a:latin typeface="Arial Unicode MS"/>
+                <a:ea typeface="Arial Unicode MS"/>
+                <a:cs typeface="Arial Unicode MS"/>
+              </a:rPr>
+              <a:t>梳子形狀</a:t>
+            </a:r>
+            <a:r>
+              <a:rPr sz="850" lang="zh-TW" dirty="0">
+                <a:solidFill>
+                  <a:srgbClr val="000000"/>
+                </a:solidFill>
+                <a:latin typeface="Arial Unicode MS"/>
+                <a:ea typeface="Arial Unicode MS"/>
+                <a:cs typeface="Arial Unicode MS"/>
+              </a:rPr>
+              <a:t>的結構，用彈簧連著，一直來回振動。車子直直開，它就只是振動。</a:t>
+            </a:r>
+            <a:r>
+              <a:rPr sz="850" b="1" lang="zh-TW" dirty="0">
+                <a:solidFill>
+                  <a:srgbClr val="000000"/>
+                </a:solidFill>
+                <a:latin typeface="Arial Unicode MS"/>
+                <a:ea typeface="Arial Unicode MS"/>
+                <a:cs typeface="Arial Unicode MS"/>
+              </a:rPr>
+              <a:t>0:57</a:t>
+            </a:r>
+            <a:r>
+              <a:rPr sz="850" lang="zh-TW" dirty="0">
+                <a:solidFill>
+                  <a:srgbClr val="000000"/>
+                </a:solidFill>
+                <a:latin typeface="Arial Unicode MS"/>
+                <a:ea typeface="Arial Unicode MS"/>
+                <a:cs typeface="Arial Unicode MS"/>
+              </a:rPr>
+              <a:t> 車子轉方向，有一股力，叫</a:t>
+            </a:r>
+            <a:r>
+              <a:rPr sz="850" b="1" lang="zh-TW" dirty="0">
+                <a:solidFill>
+                  <a:srgbClr val="000000"/>
+                </a:solidFill>
+                <a:latin typeface="Arial Unicode MS"/>
+                <a:ea typeface="Arial Unicode MS"/>
+                <a:cs typeface="Arial Unicode MS"/>
+              </a:rPr>
+              <a:t>科氏力</a:t>
+            </a:r>
+            <a:r>
+              <a:rPr sz="850" lang="zh-TW" dirty="0">
+                <a:solidFill>
+                  <a:srgbClr val="000000"/>
+                </a:solidFill>
+                <a:latin typeface="Arial Unicode MS"/>
+                <a:ea typeface="Arial Unicode MS"/>
+                <a:cs typeface="Arial Unicode MS"/>
+              </a:rPr>
+              <a:t>，把結構往旁邊推一點點，梳齒之間的電容就變了；變多少，代表轉多快。</a:t>
+            </a:r>
+            <a:r>
+              <a:rPr sz="850" b="1" lang="zh-TW" dirty="0">
+                <a:solidFill>
+                  <a:srgbClr val="000000"/>
+                </a:solidFill>
+                <a:latin typeface="Arial Unicode MS"/>
+                <a:ea typeface="Arial Unicode MS"/>
+                <a:cs typeface="Arial Unicode MS"/>
+              </a:rPr>
+              <a:t>1:11</a:t>
+            </a:r>
+            <a:r>
+              <a:rPr sz="850" lang="zh-TW" dirty="0">
+                <a:solidFill>
+                  <a:srgbClr val="000000"/>
+                </a:solidFill>
+                <a:latin typeface="Arial Unicode MS"/>
+                <a:ea typeface="Arial Unicode MS"/>
+                <a:cs typeface="Arial Unicode MS"/>
+              </a:rPr>
+              <a:t> 旁白說，它量得到的位移小到像原子核那麼小。
 </a:t>
             </a:r>
           </a:p>
@@ -1229,63 +1350,19 @@
                 <a:spcPts val="0"/>
               </a:spcBef>
               <a:spcAft>
-                <a:spcPts val="200"/>
+                <a:spcPts val="142"/>
               </a:spcAft>
             </a:pPr>
             <a:r>
-              <a:rPr sz="1200" lang="zh-TW" dirty="0">
-                <a:solidFill>
-                  <a:srgbClr val="000000"/>
-                </a:solidFill>
-                <a:latin typeface="Arial Unicode MS"/>
-                <a:ea typeface="Arial Unicode MS"/>
-                <a:cs typeface="Arial Unicode MS"/>
-              </a:rPr>
-              <a:t>下一行，</a:t>
-            </a:r>
-            <a:r>
-              <a:rPr sz="1200" b="1" lang="zh-TW" dirty="0">
-                <a:solidFill>
-                  <a:srgbClr val="000000"/>
-                </a:solidFill>
-                <a:latin typeface="Arial Unicode MS"/>
-                <a:ea typeface="Arial Unicode MS"/>
-                <a:cs typeface="Arial Unicode MS"/>
-              </a:rPr>
-              <a:t>ZRO Variation Over Temperature，正負 0.05 dps 每 °C。</a:t>
-            </a:r>
-            <a:r>
-              <a:rPr sz="1200" lang="zh-TW" dirty="0">
-                <a:solidFill>
-                  <a:srgbClr val="000000"/>
-                </a:solidFill>
-                <a:latin typeface="Arial Unicode MS"/>
-                <a:ea typeface="Arial Unicode MS"/>
-                <a:cs typeface="Arial Unicode MS"/>
-              </a:rPr>
-              <a:t>扣掉零偏之後，溫度一變它又跑掉。車子從地下室開到太陽底下，差十度，就是 </a:t>
-            </a:r>
-            <a:r>
-              <a:rPr sz="1200" b="1" lang="zh-TW" dirty="0">
-                <a:solidFill>
-                  <a:srgbClr val="000000"/>
-                </a:solidFill>
-                <a:latin typeface="Arial Unicode MS"/>
-                <a:ea typeface="Arial Unicode MS"/>
-                <a:cs typeface="Arial Unicode MS"/>
-              </a:rPr>
-              <a:t>0.5 度每秒</a:t>
-            </a:r>
-            <a:r>
-              <a:rPr sz="1200" lang="zh-TW" dirty="0">
-                <a:solidFill>
-                  <a:srgbClr val="000000"/>
-                </a:solidFill>
-                <a:latin typeface="Arial Unicode MS"/>
-                <a:ea typeface="Arial Unicode MS"/>
-                <a:cs typeface="Arial Unicode MS"/>
-              </a:rPr>
-              <a:t>。本課估算手機級的漂移，用的就是這個數字。
+              <a:rPr sz="850" lang="zh-TW" dirty="0">
+                <a:solidFill>
+                  <a:srgbClr val="000000"/>
+                </a:solidFill>
+                <a:latin typeface="Arial Unicode MS"/>
+                <a:ea typeface="Arial Unicode MS"/>
+                <a:cs typeface="Arial Unicode MS"/>
+              </a:rPr>
+              <a:t>位移這麼小，溫度變一點、零件差一點，讀數就會偏。等一下表上那一行「零偏」，講的就是這個。手機裡的 ICM-20948 也是這樣量轉動，只是等級不一樣。
 </a:t>
             </a:r>
           </a:p>
@@ -1295,41 +1372,41 @@
                 <a:spcPts val="0"/>
               </a:spcBef>
               <a:spcAft>
-                <a:spcPts val="200"/>
+                <a:spcPts val="142"/>
               </a:spcAft>
             </a:pPr>
             <a:r>
-              <a:rPr sz="1200" lang="zh-TW" dirty="0">
-                <a:solidFill>
-                  <a:srgbClr val="000000"/>
-                </a:solidFill>
-                <a:latin typeface="Arial Unicode MS"/>
-                <a:ea typeface="Arial Unicode MS"/>
-                <a:cs typeface="Arial Unicode MS"/>
-              </a:rPr>
-              <a:t>現在請各位在整張表上找一行：</a:t>
-            </a:r>
-            <a:r>
-              <a:rPr sz="1200" b="1" lang="zh-TW" dirty="0">
-                <a:solidFill>
-                  <a:srgbClr val="000000"/>
-                </a:solidFill>
-                <a:latin typeface="Arial Unicode MS"/>
-                <a:ea typeface="Arial Unicode MS"/>
-                <a:cs typeface="Arial Unicode MS"/>
-              </a:rPr>
-              <a:t>in-run bias stability</a:t>
-            </a:r>
-            <a:r>
-              <a:rPr sz="1200" lang="zh-TW" dirty="0">
-                <a:solidFill>
-                  <a:srgbClr val="000000"/>
-                </a:solidFill>
-                <a:latin typeface="Arial Unicode MS"/>
-                <a:ea typeface="Arial Unicode MS"/>
-                <a:cs typeface="Arial Unicode MS"/>
-              </a:rPr>
-              <a:t>，長時間偏差穩定度——它靜止放一個小時，讀數會慢慢飄多少。
+              <a:rPr sz="850" lang="zh-TW" dirty="0">
+                <a:solidFill>
+                  <a:srgbClr val="000000"/>
+                </a:solidFill>
+                <a:latin typeface="Arial Unicode MS"/>
+                <a:ea typeface="Arial Unicode MS"/>
+                <a:cs typeface="Arial Unicode MS"/>
+              </a:rPr>
+              <a:t>第一顆，TDK 的 </a:t>
+            </a:r>
+            <a:r>
+              <a:rPr sz="850" b="1" lang="zh-TW" dirty="0">
+                <a:solidFill>
+                  <a:srgbClr val="000000"/>
+                </a:solidFill>
+                <a:latin typeface="Arial Unicode MS"/>
+                <a:ea typeface="Arial Unicode MS"/>
+                <a:cs typeface="Arial Unicode MS"/>
+              </a:rPr>
+              <a:t>ICM-20948</a:t>
+            </a:r>
+            <a:r>
+              <a:rPr sz="850" lang="zh-TW" dirty="0">
+                <a:solidFill>
+                  <a:srgbClr val="000000"/>
+                </a:solidFill>
+                <a:latin typeface="Arial Unicode MS"/>
+                <a:ea typeface="Arial Unicode MS"/>
+                <a:cs typeface="Arial Unicode MS"/>
+              </a:rPr>
+              <a:t>。三乘三公釐，九軸，手機、手錶、無人機裡面都是這一類。左邊是規格書第十一頁陀螺儀那張表。
 </a:t>
             </a:r>
           </a:p>
@@ -1339,41 +1416,41 @@
                 <a:spcPts val="0"/>
               </a:spcBef>
               <a:spcAft>
-                <a:spcPts val="200"/>
+                <a:spcPts val="142"/>
               </a:spcAft>
             </a:pPr>
             <a:r>
-              <a:rPr sz="1200" lang="zh-TW" dirty="0">
-                <a:solidFill>
-                  <a:srgbClr val="000000"/>
-                </a:solidFill>
-                <a:latin typeface="Arial Unicode MS"/>
-                <a:ea typeface="Arial Unicode MS"/>
-                <a:cs typeface="Arial Unicode MS"/>
-              </a:rPr>
-              <a:t>找不到。這份規格書沒有這一行。不是漏印，是這一顆的客戶不在乎：手機轉螢幕只要知道「現在轉了沒」，不需要知道一分鐘以後偏了幾度。規格書第一頁自己寫的用途是手機、平板、穿戴，</a:t>
-            </a:r>
-            <a:r>
-              <a:rPr sz="1200" b="1" lang="zh-TW" dirty="0">
-                <a:solidFill>
-                  <a:srgbClr val="000000"/>
-                </a:solidFill>
-                <a:latin typeface="Arial Unicode MS"/>
-                <a:ea typeface="Arial Unicode MS"/>
-                <a:cs typeface="Arial Unicode MS"/>
-              </a:rPr>
-              <a:t>沒有寫車</a:t>
-            </a:r>
-            <a:r>
-              <a:rPr sz="1200" lang="zh-TW" dirty="0">
-                <a:solidFill>
-                  <a:srgbClr val="000000"/>
-                </a:solidFill>
-                <a:latin typeface="Arial Unicode MS"/>
-                <a:ea typeface="Arial Unicode MS"/>
-                <a:cs typeface="Arial Unicode MS"/>
-              </a:rPr>
-              <a:t>。
+              <a:rPr sz="850" lang="zh-TW" dirty="0">
+                <a:solidFill>
+                  <a:srgbClr val="000000"/>
+                </a:solidFill>
+                <a:latin typeface="Arial Unicode MS"/>
+                <a:ea typeface="Arial Unicode MS"/>
+                <a:cs typeface="Arial Unicode MS"/>
+              </a:rPr>
+              <a:t>從上往下。</a:t>
+            </a:r>
+            <a:r>
+              <a:rPr sz="850" b="1" lang="zh-TW" dirty="0">
+                <a:solidFill>
+                  <a:srgbClr val="000000"/>
+                </a:solidFill>
+                <a:latin typeface="Arial Unicode MS"/>
+                <a:ea typeface="Arial Unicode MS"/>
+                <a:cs typeface="Arial Unicode MS"/>
+              </a:rPr>
+              <a:t>Full-Scale Range，量程，最大正負兩千度每秒。</a:t>
+            </a:r>
+            <a:r>
+              <a:rPr sz="850" lang="zh-TW" dirty="0">
+                <a:solidFill>
+                  <a:srgbClr val="000000"/>
+                </a:solidFill>
+                <a:latin typeface="Arial Unicode MS"/>
+                <a:ea typeface="Arial Unicode MS"/>
+                <a:cs typeface="Arial Unicode MS"/>
+              </a:rPr>
+              <a:t>一秒轉五圈半。這個數字等一下工業級那顆也一樣，所以量程不是等級的差別。
 </a:t>
             </a:r>
           </a:p>
@@ -1383,11 +1460,231 @@
                 <a:spcPts val="0"/>
               </a:spcBef>
               <a:spcAft>
-                <a:spcPts val="200"/>
+                <a:spcPts val="142"/>
               </a:spcAft>
             </a:pPr>
             <a:r>
-              <a:rPr sz="1200" lang="zh-TW" dirty="0">
+              <a:rPr sz="850" lang="zh-TW" dirty="0">
+                <a:solidFill>
+                  <a:srgbClr val="000000"/>
+                </a:solidFill>
+                <a:latin typeface="Arial Unicode MS"/>
+                <a:ea typeface="Arial Unicode MS"/>
+                <a:cs typeface="Arial Unicode MS"/>
+              </a:rPr>
+              <a:t>中間那一塊，</a:t>
+            </a:r>
+            <a:r>
+              <a:rPr sz="850" b="1" lang="zh-TW" dirty="0">
+                <a:solidFill>
+                  <a:srgbClr val="000000"/>
+                </a:solidFill>
+                <a:latin typeface="Arial Unicode MS"/>
+                <a:ea typeface="Arial Unicode MS"/>
+                <a:cs typeface="Arial Unicode MS"/>
+              </a:rPr>
+              <a:t>ZERO-RATE OUTPUT</a:t>
+            </a:r>
+            <a:r>
+              <a:rPr sz="850" lang="zh-TW" dirty="0">
+                <a:solidFill>
+                  <a:srgbClr val="000000"/>
+                </a:solidFill>
+                <a:latin typeface="Arial Unicode MS"/>
+                <a:ea typeface="Arial Unicode MS"/>
+                <a:cs typeface="Arial Unicode MS"/>
+              </a:rPr>
+              <a:t>，零偏。</a:t>
+            </a:r>
+            <a:r>
+              <a:rPr sz="850" b="1" lang="zh-TW" dirty="0">
+                <a:solidFill>
+                  <a:srgbClr val="000000"/>
+                </a:solidFill>
+                <a:latin typeface="Arial Unicode MS"/>
+                <a:ea typeface="Arial Unicode MS"/>
+                <a:cs typeface="Arial Unicode MS"/>
+              </a:rPr>
+              <a:t>Initial ZRO Tolerance，正負 5 dps。</a:t>
+            </a:r>
+            <a:r>
+              <a:rPr sz="850" lang="zh-TW" dirty="0">
+                <a:solidFill>
+                  <a:srgbClr val="000000"/>
+                </a:solidFill>
+                <a:latin typeface="Arial Unicode MS"/>
+                <a:ea typeface="Arial Unicode MS"/>
+                <a:cs typeface="Arial Unicode MS"/>
+              </a:rPr>
+              <a:t>意思是：這顆晶片放在桌上完全不動，它可能告訴你「我正在以每秒五度轉」。一分鐘就轉了三百度，轉了快一圈。就像一台體重計，沒人站上去也顯示兩公斤。所以每一顆用之前都要先靜止放一下，把這個零偏量出來扣掉，就是先歸零。
+</a:t>
+            </a:r>
+          </a:p>
+          <a:p>
+            <a:pPr algn="l">
+              <a:spcBef>
+                <a:spcPts val="0"/>
+              </a:spcBef>
+              <a:spcAft>
+                <a:spcPts val="142"/>
+              </a:spcAft>
+            </a:pPr>
+            <a:r>
+              <a:rPr sz="850" lang="zh-TW" dirty="0">
+                <a:solidFill>
+                  <a:srgbClr val="000000"/>
+                </a:solidFill>
+                <a:latin typeface="Arial Unicode MS"/>
+                <a:ea typeface="Arial Unicode MS"/>
+                <a:cs typeface="Arial Unicode MS"/>
+              </a:rPr>
+              <a:t>下一行，</a:t>
+            </a:r>
+            <a:r>
+              <a:rPr sz="850" b="1" lang="zh-TW" dirty="0">
+                <a:solidFill>
+                  <a:srgbClr val="000000"/>
+                </a:solidFill>
+                <a:latin typeface="Arial Unicode MS"/>
+                <a:ea typeface="Arial Unicode MS"/>
+                <a:cs typeface="Arial Unicode MS"/>
+              </a:rPr>
+              <a:t>ZRO Variation Over Temperature，正負 0.05 dps 每 °C。</a:t>
+            </a:r>
+            <a:r>
+              <a:rPr sz="850" lang="zh-TW" dirty="0">
+                <a:solidFill>
+                  <a:srgbClr val="000000"/>
+                </a:solidFill>
+                <a:latin typeface="Arial Unicode MS"/>
+                <a:ea typeface="Arial Unicode MS"/>
+                <a:cs typeface="Arial Unicode MS"/>
+              </a:rPr>
+              <a:t>扣掉零偏之後，溫度一變它又跑掉，像體重計歸零以後，搬到冷氣房又不準了。車子從地下室開到太陽底下，差十度，就是 </a:t>
+            </a:r>
+            <a:r>
+              <a:rPr sz="850" b="1" lang="zh-TW" dirty="0">
+                <a:solidFill>
+                  <a:srgbClr val="000000"/>
+                </a:solidFill>
+                <a:latin typeface="Arial Unicode MS"/>
+                <a:ea typeface="Arial Unicode MS"/>
+                <a:cs typeface="Arial Unicode MS"/>
+              </a:rPr>
+              <a:t>0.5 度每秒</a:t>
+            </a:r>
+            <a:r>
+              <a:rPr sz="850" lang="zh-TW" dirty="0">
+                <a:solidFill>
+                  <a:srgbClr val="000000"/>
+                </a:solidFill>
+                <a:latin typeface="Arial Unicode MS"/>
+                <a:ea typeface="Arial Unicode MS"/>
+                <a:cs typeface="Arial Unicode MS"/>
+              </a:rPr>
+              <a:t>。本課估算手機級的漂移，用的就是這個數字。
+</a:t>
+            </a:r>
+          </a:p>
+          <a:p>
+            <a:pPr algn="l">
+              <a:spcBef>
+                <a:spcPts val="0"/>
+              </a:spcBef>
+              <a:spcAft>
+                <a:spcPts val="142"/>
+              </a:spcAft>
+            </a:pPr>
+            <a:r>
+              <a:rPr sz="850" lang="zh-TW" dirty="0">
+                <a:solidFill>
+                  <a:srgbClr val="000000"/>
+                </a:solidFill>
+                <a:latin typeface="Arial Unicode MS"/>
+                <a:ea typeface="Arial Unicode MS"/>
+                <a:cs typeface="Arial Unicode MS"/>
+              </a:rPr>
+              <a:t>現在請各位在整張表上找一行：</a:t>
+            </a:r>
+            <a:r>
+              <a:rPr sz="850" b="1" lang="zh-TW" dirty="0">
+                <a:solidFill>
+                  <a:srgbClr val="000000"/>
+                </a:solidFill>
+                <a:latin typeface="Arial Unicode MS"/>
+                <a:ea typeface="Arial Unicode MS"/>
+                <a:cs typeface="Arial Unicode MS"/>
+              </a:rPr>
+              <a:t>in-run bias stability</a:t>
+            </a:r>
+            <a:r>
+              <a:rPr sz="850" lang="zh-TW" dirty="0">
+                <a:solidFill>
+                  <a:srgbClr val="000000"/>
+                </a:solidFill>
+                <a:latin typeface="Arial Unicode MS"/>
+                <a:ea typeface="Arial Unicode MS"/>
+                <a:cs typeface="Arial Unicode MS"/>
+              </a:rPr>
+              <a:t>，長時間偏差穩定度——它靜止放一個小時，讀數會慢慢飄多少。
+</a:t>
+            </a:r>
+          </a:p>
+          <a:p>
+            <a:pPr algn="l">
+              <a:spcBef>
+                <a:spcPts val="0"/>
+              </a:spcBef>
+              <a:spcAft>
+                <a:spcPts val="142"/>
+              </a:spcAft>
+            </a:pPr>
+            <a:r>
+              <a:rPr sz="850" lang="zh-TW" dirty="0">
+                <a:solidFill>
+                  <a:srgbClr val="000000"/>
+                </a:solidFill>
+                <a:latin typeface="Arial Unicode MS"/>
+                <a:ea typeface="Arial Unicode MS"/>
+                <a:cs typeface="Arial Unicode MS"/>
+              </a:rPr>
+              <a:t>找不到。這份規格書沒有這一行。不是漏印，是這一顆的客戶不在乎：手機轉螢幕只要知道「現在轉了沒」，不需要知道一分鐘以後偏了幾度。規格書第一頁自己寫的用途是手機、平板、穿戴，</a:t>
+            </a:r>
+            <a:r>
+              <a:rPr sz="850" b="1" lang="zh-TW" dirty="0">
+                <a:solidFill>
+                  <a:srgbClr val="000000"/>
+                </a:solidFill>
+                <a:latin typeface="Arial Unicode MS"/>
+                <a:ea typeface="Arial Unicode MS"/>
+                <a:cs typeface="Arial Unicode MS"/>
+              </a:rPr>
+              <a:t>沒有寫車</a:t>
+            </a:r>
+            <a:r>
+              <a:rPr sz="850" lang="zh-TW" dirty="0">
+                <a:solidFill>
+                  <a:srgbClr val="000000"/>
+                </a:solidFill>
+                <a:latin typeface="Arial Unicode MS"/>
+                <a:ea typeface="Arial Unicode MS"/>
+                <a:cs typeface="Arial Unicode MS"/>
+              </a:rPr>
+              <a:t>。
+</a:t>
+            </a:r>
+          </a:p>
+          <a:p>
+            <a:pPr algn="l">
+              <a:spcBef>
+                <a:spcPts val="0"/>
+              </a:spcBef>
+              <a:spcAft>
+                <a:spcPts val="142"/>
+              </a:spcAft>
+            </a:pPr>
+            <a:r>
+              <a:rPr sz="850" lang="zh-TW" dirty="0">
                 <a:solidFill>
                   <a:srgbClr val="000000"/>
                 </a:solidFill>
@@ -1398,7 +1695,7 @@
               <a:t>這就是上週講過的那件事又來一次：</a:t>
             </a:r>
             <a:r>
-              <a:rPr sz="1200" b="1" lang="zh-TW" dirty="0">
+              <a:rPr sz="850" b="1" lang="zh-TW" dirty="0">
                 <a:solidFill>
                   <a:srgbClr val="000000"/>
                 </a:solidFill>
@@ -1659,7 +1956,7 @@
                 <a:ea typeface="Arial Unicode MS"/>
                 <a:cs typeface="Arial Unicode MS"/>
               </a:rPr>
-              <a:t>，後面寫 1 σ。意思是這顆靜止放著，一個小時偏差只飄八度，一分鐘零點一三度。</a:t>
+              <a:t>，後面寫 1 σ。意思是這顆靜止放著，一個小時偏差只飄八度，一分鐘零點一三度。用手錶來想：便宜的錶一天可能差一分鐘，好的錶一個月才差幾秒。偏差穩定度講的就是這種「走久了會差多少」。</a:t>
             </a:r>
             <a:r>
               <a:rPr sz="1200" b="1" lang="zh-TW" dirty="0">
@@ -2033,7 +2330,7 @@
                 <a:ea typeface="Arial Unicode MS"/>
                 <a:cs typeface="Arial Unicode MS"/>
               </a:rPr>
-              <a:t>所以兩顆差的不是量程。買 IMU 的人最常犯的錯就是比量程。
+              <a:t>所以兩顆差的不是量程。就像兩支錶的錶面都是十二小時，差的是走得準不準。買 IMU 的人最常犯的錯就是比量程。
 </a:t>
             </a:r>
           </a:p>
@@ -2341,7 +2638,7 @@
                 <a:ea typeface="Arial Unicode MS"/>
                 <a:cs typeface="Arial Unicode MS"/>
               </a:rPr>
-              <a:t>時間是平方，所以一開始幾乎沒事，然後突然就很大。
+              <a:t>時間是平方，所以一開始幾乎沒事，然後突然就很大。就像閉著眼睛走路：一開始只歪一點點；走得愈久，方向歪得愈多，偏得也愈來愈快。
 </a:t>
             </a:r>
           </a:p>
@@ -2781,7 +3078,7 @@
                 <a:ea typeface="Arial Unicode MS"/>
                 <a:cs typeface="Arial Unicode MS"/>
               </a:rPr>
-              <a:t>。
+              <a:t>。各位用手機拍過全景照嗎？拍的時候人如果一邊走，接起來的照片就會歪掉。光達轉一圈也是在拍一張全景，車子在動，這張全景就歪了。
 </a:t>
             </a:r>
           </a:p>
@@ -3408,7 +3705,7 @@
                 <a:ea typeface="Arial Unicode MS"/>
                 <a:cs typeface="Arial Unicode MS"/>
               </a:rPr>
-              <a:t>第三句，慣性。</a:t>
+              <a:t>第三句，IMU。</a:t>
             </a:r>
             <a:r>
               <a:rPr sz="1200" lang="zh-TW" dirty="0">
@@ -3420,6 +3717,28 @@
                 <a:cs typeface="Arial Unicode MS"/>
               </a:rPr>
               <a:t>不靠外界所以會飄，等級就是撐多久。工業級 8 °/h 在時速八十撐三十四秒。它是用來補幾秒的洞，不是用來過隧道。
+</a:t>
+            </a:r>
+          </a:p>
+          <a:p>
+            <a:pPr algn="l">
+              <a:spcBef>
+                <a:spcPts val="0"/>
+              </a:spcBef>
+              <a:spcAft>
+                <a:spcPts val="200"/>
+              </a:spcAft>
+            </a:pPr>
+            <a:r>
+              <a:rPr sz="1200" lang="zh-TW" dirty="0">
+                <a:solidFill>
+                  <a:srgbClr val="000000"/>
+                </a:solidFill>
+                <a:latin typeface="Arial Unicode MS"/>
+                <a:ea typeface="Arial Unicode MS"/>
+                <a:cs typeface="Arial Unicode MS"/>
+              </a:rPr>
+              <a:t>三句各配一個例子幫各位記：超音波是先看到閃電、後聽到雷聲，聲音太慢；衛星的 2.5 公尺是射飛鏢，一半在圈裡；IMU 是閉著眼睛走路，愈走愈歪。
 </a:t>
             </a:r>
           </a:p>
@@ -3826,7 +4145,7 @@
                 <a:ea typeface="Arial Unicode MS"/>
                 <a:cs typeface="Arial Unicode MS"/>
               </a:rPr>
-              <a:t>第一段，超音波。第三週講過它的原理：發一聲人耳聽不到的高音，等回音，算時間。跟光達一樣是飛行時間，只是用的是聲音。
+              <a:t>第一段，超音波。第三週講過它的原理：發一聲人耳聽不到的高音，等回音，算時間。跟光達一樣是飛行時間，只是用的是聲音。蝙蝠就是這樣飛的。各位倒車的時候聽過嗶、嗶、嗶，愈靠近牆叫得愈快，那就是超音波在量距離。
 </a:t>
             </a:r>
           </a:p>
@@ -4364,11 +4683,11 @@
                 <a:spcPts val="0"/>
               </a:spcBef>
               <a:spcAft>
-                <a:spcPts val="200"/>
+                <a:spcPts val="133"/>
               </a:spcAft>
             </a:pPr>
             <a:r>
-              <a:rPr sz="1200" lang="zh-TW" dirty="0">
+              <a:rPr sz="800" lang="zh-TW" dirty="0">
                 <a:solidFill>
                   <a:srgbClr val="000000"/>
                 </a:solidFill>
@@ -4386,11 +4705,11 @@
                 <a:spcPts val="0"/>
               </a:spcBef>
               <a:spcAft>
-                <a:spcPts val="200"/>
+                <a:spcPts val="133"/>
               </a:spcAft>
             </a:pPr>
             <a:r>
-              <a:rPr sz="1200" b="1" lang="zh-TW" dirty="0">
+              <a:rPr sz="800" b="1" lang="zh-TW" dirty="0">
                 <a:solidFill>
                   <a:srgbClr val="000000"/>
                 </a:solidFill>
@@ -4401,7 +4720,7 @@
               <a:t>左邊：Max Range 4 公尺，Min Range 2 公分，Measuring Angle 15 度。</a:t>
             </a:r>
             <a:r>
-              <a:rPr sz="1200" lang="zh-TW" dirty="0">
+              <a:rPr sz="800" lang="zh-TW" dirty="0">
                 <a:solidFill>
                   <a:srgbClr val="000000"/>
                 </a:solidFill>
@@ -4419,11 +4738,11 @@
                 <a:spcPts val="0"/>
               </a:spcBef>
               <a:spcAft>
-                <a:spcPts val="200"/>
+                <a:spcPts val="133"/>
               </a:spcAft>
             </a:pPr>
             <a:r>
-              <a:rPr sz="1200" lang="zh-TW" dirty="0">
+              <a:rPr sz="800" lang="zh-TW" dirty="0">
                 <a:solidFill>
                   <a:srgbClr val="000000"/>
                 </a:solidFill>
@@ -4434,7 +4753,7 @@
               <a:t>再看 </a:t>
             </a:r>
             <a:r>
-              <a:rPr sz="1200" b="1" lang="zh-TW" dirty="0">
+              <a:rPr sz="800" b="1" lang="zh-TW" dirty="0">
                 <a:solidFill>
                   <a:srgbClr val="000000"/>
                 </a:solidFill>
@@ -4445,7 +4764,7 @@
               <a:t>Working Frequency，表格印 40Hz</a:t>
             </a:r>
             <a:r>
-              <a:rPr sz="1200" lang="zh-TW" dirty="0">
+              <a:rPr sz="800" lang="zh-TW" dirty="0">
                 <a:solidFill>
                   <a:srgbClr val="000000"/>
                 </a:solidFill>
@@ -4456,7 +4775,7 @@
               <a:t>。各位覺得合理嗎？四十赫茲是人耳聽得到的低音，像低音喇叭。往上看同一頁的內文，寫的是 </a:t>
             </a:r>
             <a:r>
-              <a:rPr sz="1200" b="1" lang="zh-TW" dirty="0">
+              <a:rPr sz="800" b="1" lang="zh-TW" dirty="0">
                 <a:solidFill>
                   <a:srgbClr val="000000"/>
                 </a:solidFill>
@@ -4467,7 +4786,7 @@
               <a:t>eight 40 kHz</a:t>
             </a:r>
             <a:r>
-              <a:rPr sz="1200" lang="zh-TW" dirty="0">
+              <a:rPr sz="800" lang="zh-TW" dirty="0">
                 <a:solidFill>
                   <a:srgbClr val="000000"/>
                 </a:solidFill>
@@ -4485,30 +4804,41 @@
                 <a:spcPts val="0"/>
               </a:spcBef>
               <a:spcAft>
-                <a:spcPts val="200"/>
+                <a:spcPts val="133"/>
               </a:spcAft>
             </a:pPr>
             <a:r>
-              <a:rPr sz="1200" b="1" lang="zh-TW" dirty="0">
-                <a:solidFill>
-                  <a:srgbClr val="000000"/>
-                </a:solidFill>
-                <a:latin typeface="Arial Unicode MS"/>
-                <a:ea typeface="Arial Unicode MS"/>
-                <a:cs typeface="Arial Unicode MS"/>
-              </a:rPr>
-              <a:t>右邊：Bosch 的 6.5 版最遠 5.5 公尺，最近 15 公分，頻率 43 到 60 千赫。</a:t>
-            </a:r>
-            <a:r>
-              <a:rPr sz="1200" lang="zh-TW" dirty="0">
-                <a:solidFill>
-                  <a:srgbClr val="000000"/>
-                </a:solidFill>
-                <a:latin typeface="Arial Unicode MS"/>
-                <a:ea typeface="Arial Unicode MS"/>
-                <a:cs typeface="Arial Unicode MS"/>
-              </a:rPr>
-              <a:t>數字跟左邊差不多，再遠也遠不到哪裡去——這是聲音的物理，下一張講。
+              <a:rPr sz="800" lang="zh-TW" dirty="0">
+                <a:solidFill>
+                  <a:srgbClr val="000000"/>
+                </a:solidFill>
+                <a:latin typeface="Arial Unicode MS"/>
+                <a:ea typeface="Arial Unicode MS"/>
+                <a:cs typeface="Arial Unicode MS"/>
+              </a:rPr>
+              <a:t>這顆怎麼量距離，播底下那支影片看，</a:t>
+            </a:r>
+            <a:r>
+              <a:rPr sz="800" b="1" lang="zh-TW" dirty="0">
+                <a:solidFill>
+                  <a:srgbClr val="000000"/>
+                </a:solidFill>
+                <a:latin typeface="Arial Unicode MS"/>
+                <a:ea typeface="Arial Unicode MS"/>
+                <a:cs typeface="Arial Unicode MS"/>
+              </a:rPr>
+              <a:t>播到 1:12 停</a:t>
+            </a:r>
+            <a:r>
+              <a:rPr sz="800" lang="zh-TW" dirty="0">
+                <a:solidFill>
+                  <a:srgbClr val="000000"/>
+                </a:solidFill>
+                <a:latin typeface="Arial Unicode MS"/>
+                <a:ea typeface="Arial Unicode MS"/>
+                <a:cs typeface="Arial Unicode MS"/>
+              </a:rPr>
+              <a:t>，一分鐘。英文旁白，畫面是動畫，看圖就懂。播之前問一句：「它怎麼知道前面的東西多遠？」
 </a:t>
             </a:r>
           </a:p>
@@ -4518,107 +4848,63 @@
                 <a:spcPts val="0"/>
               </a:spcBef>
               <a:spcAft>
-                <a:spcPts val="200"/>
+                <a:spcPts val="133"/>
               </a:spcAft>
             </a:pPr>
             <a:r>
-              <a:rPr sz="1200" lang="zh-TW" dirty="0">
-                <a:solidFill>
-                  <a:srgbClr val="000000"/>
-                </a:solidFill>
-                <a:latin typeface="Arial Unicode MS"/>
-                <a:ea typeface="Arial Unicode MS"/>
-                <a:cs typeface="Arial Unicode MS"/>
-              </a:rPr>
-              <a:t>那車用的貴在哪？看右表下面那幾行。</a:t>
-            </a:r>
-            <a:r>
-              <a:rPr sz="1200" b="1" lang="zh-TW" dirty="0">
-                <a:solidFill>
-                  <a:srgbClr val="000000"/>
-                </a:solidFill>
-                <a:latin typeface="Arial Unicode MS"/>
-                <a:ea typeface="Arial Unicode MS"/>
-                <a:cs typeface="Arial Unicode MS"/>
-              </a:rPr>
-              <a:t>Blindness detection，它會自己發現被泥巴或冰雪蓋住了</a:t>
-            </a:r>
-            <a:r>
-              <a:rPr sz="1200" lang="zh-TW" dirty="0">
-                <a:solidFill>
-                  <a:srgbClr val="000000"/>
-                </a:solidFill>
-                <a:latin typeface="Arial Unicode MS"/>
-                <a:ea typeface="Arial Unicode MS"/>
-                <a:cs typeface="Arial Unicode MS"/>
-              </a:rPr>
-              <a:t>；左邊那顆被蓋住就安靜地回報「前面沒東西」。</a:t>
-            </a:r>
-            <a:r>
-              <a:rPr sz="1200" b="1" lang="zh-TW" dirty="0">
-                <a:solidFill>
-                  <a:srgbClr val="000000"/>
-                </a:solidFill>
-                <a:latin typeface="Arial Unicode MS"/>
-                <a:ea typeface="Arial Unicode MS"/>
-                <a:cs typeface="Arial Unicode MS"/>
-              </a:rPr>
-              <a:t>Signal coding，訊號編碼</a:t>
-            </a:r>
-            <a:r>
-              <a:rPr sz="1200" lang="zh-TW" dirty="0">
-                <a:solidFill>
-                  <a:srgbClr val="000000"/>
-                </a:solidFill>
-                <a:latin typeface="Arial Unicode MS"/>
-                <a:ea typeface="Arial Unicode MS"/>
-                <a:cs typeface="Arial Unicode MS"/>
-              </a:rPr>
-              <a:t>：車頭裝六顆，每一顆發的聲音有自己的記號，收到回波知道是不是自己發的；左邊那顆分不出來，隔壁那顆的回音它也當成自己的。</a:t>
-            </a:r>
-            <a:r>
-              <a:rPr sz="1200" b="1" lang="zh-TW" dirty="0">
-                <a:solidFill>
-                  <a:srgbClr val="000000"/>
-                </a:solidFill>
-                <a:latin typeface="Arial Unicode MS"/>
-                <a:ea typeface="Arial Unicode MS"/>
-                <a:cs typeface="Arial Unicode MS"/>
-              </a:rPr>
-              <a:t>ASIL B</a:t>
-            </a:r>
-            <a:r>
-              <a:rPr sz="1200" lang="zh-TW" dirty="0">
-                <a:solidFill>
-                  <a:srgbClr val="000000"/>
-                </a:solidFill>
-                <a:latin typeface="Arial Unicode MS"/>
-                <a:ea typeface="Arial Unicode MS"/>
-                <a:cs typeface="Arial Unicode MS"/>
-              </a:rPr>
-              <a:t>，功能安全等級；</a:t>
-            </a:r>
-            <a:r>
-              <a:rPr sz="1200" b="1" lang="zh-TW" dirty="0">
-                <a:solidFill>
-                  <a:srgbClr val="000000"/>
-                </a:solidFill>
-                <a:latin typeface="Arial Unicode MS"/>
-                <a:ea typeface="Arial Unicode MS"/>
-                <a:cs typeface="Arial Unicode MS"/>
-              </a:rPr>
-              <a:t>Fusional capability</a:t>
-            </a:r>
-            <a:r>
-              <a:rPr sz="1200" lang="zh-TW" dirty="0">
-                <a:solidFill>
-                  <a:srgbClr val="000000"/>
-                </a:solidFill>
-                <a:latin typeface="Arial Unicode MS"/>
-                <a:ea typeface="Arial Unicode MS"/>
-                <a:cs typeface="Arial Unicode MS"/>
-              </a:rPr>
-              <a:t>，能和相機雷達融合。
+              <a:rPr sz="800" lang="zh-TW" dirty="0">
+                <a:solidFill>
+                  <a:srgbClr val="000000"/>
+                </a:solidFill>
+                <a:latin typeface="Arial Unicode MS"/>
+                <a:ea typeface="Arial Unicode MS"/>
+                <a:cs typeface="Arial Unicode MS"/>
+              </a:rPr>
+              <a:t>影片一開始唸的就是左表的數字：兩公分到四百公分。</a:t>
+            </a:r>
+            <a:r>
+              <a:rPr sz="800" b="1" lang="zh-TW" dirty="0">
+                <a:solidFill>
+                  <a:srgbClr val="000000"/>
+                </a:solidFill>
+                <a:latin typeface="Arial Unicode MS"/>
+                <a:ea typeface="Arial Unicode MS"/>
+                <a:cs typeface="Arial Unicode MS"/>
+              </a:rPr>
+              <a:t>0:26</a:t>
+            </a:r>
+            <a:r>
+              <a:rPr sz="800" lang="zh-TW" dirty="0">
+                <a:solidFill>
+                  <a:srgbClr val="000000"/>
+                </a:solidFill>
+                <a:latin typeface="Arial Unicode MS"/>
+                <a:ea typeface="Arial Unicode MS"/>
+                <a:cs typeface="Arial Unicode MS"/>
+              </a:rPr>
+              <a:t> 它說發出去的聲音是 </a:t>
+            </a:r>
+            <a:r>
+              <a:rPr sz="800" b="1" lang="zh-TW" dirty="0">
+                <a:solidFill>
+                  <a:srgbClr val="000000"/>
+                </a:solidFill>
+                <a:latin typeface="Arial Unicode MS"/>
+                <a:ea typeface="Arial Unicode MS"/>
+                <a:cs typeface="Arial Unicode MS"/>
+              </a:rPr>
+              <a:t>40 kilohertz</a:t>
+            </a:r>
+            <a:r>
+              <a:rPr sz="800" lang="zh-TW" dirty="0">
+                <a:solidFill>
+                  <a:srgbClr val="000000"/>
+                </a:solidFill>
+                <a:latin typeface="Arial Unicode MS"/>
+                <a:ea typeface="Arial Unicode MS"/>
+                <a:cs typeface="Arial Unicode MS"/>
+              </a:rPr>
+              <a:t>，四十千赫，跟內文一樣，不是表格印的 40Hz。接著動畫：一個圓筒發出聲音，碰到東西彈回來，另一個圓筒收到。
 </a:t>
             </a:r>
           </a:p>
@@ -4628,41 +4914,52 @@
                 <a:spcPts val="0"/>
               </a:spcBef>
               <a:spcAft>
-                <a:spcPts val="200"/>
+                <a:spcPts val="133"/>
               </a:spcAft>
             </a:pPr>
             <a:r>
-              <a:rPr sz="1200" lang="zh-TW" dirty="0">
-                <a:solidFill>
-                  <a:srgbClr val="000000"/>
-                </a:solidFill>
-                <a:latin typeface="Arial Unicode MS"/>
-                <a:ea typeface="Arial Unicode MS"/>
-                <a:cs typeface="Arial Unicode MS"/>
-              </a:rPr>
-              <a:t>還有一行要注意：右表下面的註腳寫 </a:t>
-            </a:r>
-            <a:r>
-              <a:rPr sz="1200" b="1" lang="zh-TW" dirty="0">
-                <a:solidFill>
-                  <a:srgbClr val="000000"/>
-                </a:solidFill>
-                <a:latin typeface="Arial Unicode MS"/>
-                <a:ea typeface="Arial Unicode MS"/>
-                <a:cs typeface="Arial Unicode MS"/>
-              </a:rPr>
-              <a:t>reference object: 75 mm standard pole</a:t>
-            </a:r>
-            <a:r>
-              <a:rPr sz="1200" lang="zh-TW" dirty="0">
-                <a:solidFill>
-                  <a:srgbClr val="000000"/>
-                </a:solidFill>
-                <a:latin typeface="Arial Unicode MS"/>
-                <a:ea typeface="Arial Unicode MS"/>
-                <a:cs typeface="Arial Unicode MS"/>
-              </a:rPr>
-              <a:t>，5.5 公尺是對一根七十五公釐粗的桿子量的。跟上週光達的 10% 反射率一樣，測距後面永遠綁著「對什麼量的」。
+              <a:rPr sz="800" b="1" lang="zh-TW" dirty="0">
+                <a:solidFill>
+                  <a:srgbClr val="000000"/>
+                </a:solidFill>
+                <a:latin typeface="Arial Unicode MS"/>
+                <a:ea typeface="Arial Unicode MS"/>
+                <a:cs typeface="Arial Unicode MS"/>
+              </a:rPr>
+              <a:t>1:01</a:t>
+            </a:r>
+            <a:r>
+              <a:rPr sz="800" lang="zh-TW" dirty="0">
+                <a:solidFill>
+                  <a:srgbClr val="000000"/>
+                </a:solidFill>
+                <a:latin typeface="Arial Unicode MS"/>
+                <a:ea typeface="Arial Unicode MS"/>
+                <a:cs typeface="Arial Unicode MS"/>
+              </a:rPr>
+              <a:t> 出現公式：距離等於時間乘聲速，再</a:t>
+            </a:r>
+            <a:r>
+              <a:rPr sz="800" b="1" lang="zh-TW" dirty="0">
+                <a:solidFill>
+                  <a:srgbClr val="000000"/>
+                </a:solidFill>
+                <a:latin typeface="Arial Unicode MS"/>
+                <a:ea typeface="Arial Unicode MS"/>
+                <a:cs typeface="Arial Unicode MS"/>
+              </a:rPr>
+              <a:t>除以二</a:t>
+            </a:r>
+            <a:r>
+              <a:rPr sz="800" lang="zh-TW" dirty="0">
+                <a:solidFill>
+                  <a:srgbClr val="000000"/>
+                </a:solidFill>
+                <a:latin typeface="Arial Unicode MS"/>
+                <a:ea typeface="Arial Unicode MS"/>
+                <a:cs typeface="Arial Unicode MS"/>
+              </a:rPr>
+              <a:t>。問學生為什麼要除以二？因為聲音去一趟、回來一趟，走了兩倍的路。這個除以二，下一張馬上要用。1:12 以後講接腳和觸發訊號，是給做 Arduino 的人看的，可以不播。
 </a:t>
             </a:r>
           </a:p>
@@ -4672,11 +4969,330 @@
                 <a:spcPts val="0"/>
               </a:spcBef>
               <a:spcAft>
-                <a:spcPts val="200"/>
+                <a:spcPts val="133"/>
               </a:spcAft>
             </a:pPr>
             <a:r>
-              <a:rPr sz="1200" lang="zh-TW" dirty="0">
+              <a:rPr sz="800" b="1" lang="zh-TW" dirty="0">
+                <a:solidFill>
+                  <a:srgbClr val="000000"/>
+                </a:solidFill>
+                <a:latin typeface="Arial Unicode MS"/>
+                <a:ea typeface="Arial Unicode MS"/>
+                <a:cs typeface="Arial Unicode MS"/>
+              </a:rPr>
+              <a:t>右邊：Bosch 的 6.5 版最遠 5.5 公尺，最近 15 公分，頻率 43 到 60 千赫。</a:t>
+            </a:r>
+            <a:r>
+              <a:rPr sz="800" lang="zh-TW" dirty="0">
+                <a:solidFill>
+                  <a:srgbClr val="000000"/>
+                </a:solidFill>
+                <a:latin typeface="Arial Unicode MS"/>
+                <a:ea typeface="Arial Unicode MS"/>
+                <a:cs typeface="Arial Unicode MS"/>
+              </a:rPr>
+              <a:t>數字跟左邊差不多，再遠也遠不到哪裡去——這是聲音的物理，下一張講。
+</a:t>
+            </a:r>
+          </a:p>
+          <a:p>
+            <a:pPr algn="l">
+              <a:spcBef>
+                <a:spcPts val="0"/>
+              </a:spcBef>
+              <a:spcAft>
+                <a:spcPts val="133"/>
+              </a:spcAft>
+            </a:pPr>
+            <a:r>
+              <a:rPr sz="800" lang="zh-TW" dirty="0">
+                <a:solidFill>
+                  <a:srgbClr val="000000"/>
+                </a:solidFill>
+                <a:latin typeface="Arial Unicode MS"/>
+                <a:ea typeface="Arial Unicode MS"/>
+                <a:cs typeface="Arial Unicode MS"/>
+              </a:rPr>
+              <a:t>那車用的貴在哪？看右表下面那幾行。
+</a:t>
+            </a:r>
+          </a:p>
+          <a:p>
+            <a:pPr algn="l">
+              <a:spcBef>
+                <a:spcPts val="0"/>
+              </a:spcBef>
+              <a:spcAft>
+                <a:spcPts val="133"/>
+              </a:spcAft>
+            </a:pPr>
+            <a:r>
+              <a:rPr sz="800" b="1" lang="zh-TW" dirty="0">
+                <a:solidFill>
+                  <a:srgbClr val="000000"/>
+                </a:solidFill>
+                <a:latin typeface="Arial Unicode MS"/>
+                <a:ea typeface="Arial Unicode MS"/>
+                <a:cs typeface="Arial Unicode MS"/>
+              </a:rPr>
+              <a:t>Blindness detection，遮蔽偵測。</a:t>
+            </a:r>
+            <a:r>
+              <a:rPr sz="800" lang="zh-TW" dirty="0">
+                <a:solidFill>
+                  <a:srgbClr val="000000"/>
+                </a:solidFill>
+                <a:latin typeface="Arial Unicode MS"/>
+                <a:ea typeface="Arial Unicode MS"/>
+                <a:cs typeface="Arial Unicode MS"/>
+              </a:rPr>
+              <a:t>探頭被泥巴、冰、雪蓋住的時候，它自己發現「我現在聽不清楚了」，回報給車上的電腦。車子接著做兩件事。第一，</a:t>
+            </a:r>
+            <a:r>
+              <a:rPr sz="800" b="1" lang="zh-TW" dirty="0">
+                <a:solidFill>
+                  <a:srgbClr val="000000"/>
+                </a:solidFill>
+                <a:latin typeface="Arial Unicode MS"/>
+                <a:ea typeface="Arial Unicode MS"/>
+                <a:cs typeface="Arial Unicode MS"/>
+              </a:rPr>
+              <a:t>儀表板跳警告</a:t>
+            </a:r>
+            <a:r>
+              <a:rPr sz="800" lang="zh-TW" dirty="0">
+                <a:solidFill>
+                  <a:srgbClr val="000000"/>
+                </a:solidFill>
+                <a:latin typeface="Arial Unicode MS"/>
+                <a:ea typeface="Arial Unicode MS"/>
+                <a:cs typeface="Arial Unicode MS"/>
+              </a:rPr>
+              <a:t>，告訴駕駛哪一顆被蓋住、請擦乾淨。例如 Lexus 的車主手冊寫的是「停車輔助無法使用，感測器被遮蔽」，畫面上還會標出是哪一顆。第二，</a:t>
+            </a:r>
+            <a:r>
+              <a:rPr sz="800" b="1" lang="zh-TW" dirty="0">
+                <a:solidFill>
+                  <a:srgbClr val="000000"/>
+                </a:solidFill>
+                <a:latin typeface="Arial Unicode MS"/>
+                <a:ea typeface="Arial Unicode MS"/>
+                <a:cs typeface="Arial Unicode MS"/>
+              </a:rPr>
+              <a:t>停車輔助暫停</a:t>
+            </a:r>
+            <a:r>
+              <a:rPr sz="800" lang="zh-TW" dirty="0">
+                <a:solidFill>
+                  <a:srgbClr val="000000"/>
+                </a:solidFill>
+                <a:latin typeface="Arial Unicode MS"/>
+                <a:ea typeface="Arial Unicode MS"/>
+                <a:cs typeface="Arial Unicode MS"/>
+              </a:rPr>
+              <a:t>，不再假裝它在幫你看。駕駛就知道：現在要自己回頭看。
+</a:t>
+            </a:r>
+          </a:p>
+          <a:p>
+            <a:pPr algn="l">
+              <a:spcBef>
+                <a:spcPts val="0"/>
+              </a:spcBef>
+              <a:spcAft>
+                <a:spcPts val="133"/>
+              </a:spcAft>
+            </a:pPr>
+            <a:r>
+              <a:rPr sz="800" lang="zh-TW" dirty="0">
+                <a:solidFill>
+                  <a:srgbClr val="000000"/>
+                </a:solidFill>
+                <a:latin typeface="Arial Unicode MS"/>
+                <a:ea typeface="Arial Unicode MS"/>
+                <a:cs typeface="Arial Unicode MS"/>
+              </a:rPr>
+              <a:t>左邊那顆沒有這個功能。被蓋住了，它收不到回音，就照常回報「前面沒東西」，也不會有任何警告。駕駛以為後面是空的，倒車就撞上去了。像一個人耳朵被摀住了，卻以為四周很安靜。
+</a:t>
+            </a:r>
+          </a:p>
+          <a:p>
+            <a:pPr algn="l">
+              <a:spcBef>
+                <a:spcPts val="0"/>
+              </a:spcBef>
+              <a:spcAft>
+                <a:spcPts val="133"/>
+              </a:spcAft>
+            </a:pPr>
+            <a:r>
+              <a:rPr sz="800" lang="zh-TW" dirty="0">
+                <a:solidFill>
+                  <a:srgbClr val="000000"/>
+                </a:solidFill>
+                <a:latin typeface="Arial Unicode MS"/>
+                <a:ea typeface="Arial Unicode MS"/>
+                <a:cs typeface="Arial Unicode MS"/>
+              </a:rPr>
+              <a:t>所以這一行的差別不是量得比較準，是</a:t>
+            </a:r>
+            <a:r>
+              <a:rPr sz="800" b="1" lang="zh-TW" dirty="0">
+                <a:solidFill>
+                  <a:srgbClr val="000000"/>
+                </a:solidFill>
+                <a:latin typeface="Arial Unicode MS"/>
+                <a:ea typeface="Arial Unicode MS"/>
+                <a:cs typeface="Arial Unicode MS"/>
+              </a:rPr>
+              <a:t>看不到的時候，會不會說自己看不到</a:t>
+            </a:r>
+            <a:r>
+              <a:rPr sz="800" lang="zh-TW" dirty="0">
+                <a:solidFill>
+                  <a:srgbClr val="000000"/>
+                </a:solidFill>
+                <a:latin typeface="Arial Unicode MS"/>
+                <a:ea typeface="Arial Unicode MS"/>
+                <a:cs typeface="Arial Unicode MS"/>
+              </a:rPr>
+              <a:t>。
+</a:t>
+            </a:r>
+          </a:p>
+          <a:p>
+            <a:pPr algn="l">
+              <a:spcBef>
+                <a:spcPts val="0"/>
+              </a:spcBef>
+              <a:spcAft>
+                <a:spcPts val="133"/>
+              </a:spcAft>
+            </a:pPr>
+            <a:r>
+              <a:rPr sz="800" b="1" lang="zh-TW" dirty="0">
+                <a:solidFill>
+                  <a:srgbClr val="000000"/>
+                </a:solidFill>
+                <a:latin typeface="Arial Unicode MS"/>
+                <a:ea typeface="Arial Unicode MS"/>
+                <a:cs typeface="Arial Unicode MS"/>
+              </a:rPr>
+              <a:t>Signal coding，訊號編碼</a:t>
+            </a:r>
+            <a:r>
+              <a:rPr sz="800" lang="zh-TW" dirty="0">
+                <a:solidFill>
+                  <a:srgbClr val="000000"/>
+                </a:solidFill>
+                <a:latin typeface="Arial Unicode MS"/>
+                <a:ea typeface="Arial Unicode MS"/>
+                <a:cs typeface="Arial Unicode MS"/>
+              </a:rPr>
+              <a:t>：車頭裝六顆，每一顆發的聲音有自己的記號，收到回波知道是不是自己發的；左邊那顆分不出來，隔壁那顆的回音它也當成自己的。想像六個人在山谷裡同時喊「喂」，誰也分不出哪一個回音是自己的；如果每個人喊自己的名字，就認得出來。</a:t>
+            </a:r>
+            <a:r>
+              <a:rPr sz="800" b="1" lang="zh-TW" dirty="0">
+                <a:solidFill>
+                  <a:srgbClr val="000000"/>
+                </a:solidFill>
+                <a:latin typeface="Arial Unicode MS"/>
+                <a:ea typeface="Arial Unicode MS"/>
+                <a:cs typeface="Arial Unicode MS"/>
+              </a:rPr>
+              <a:t>ASIL B</a:t>
+            </a:r>
+            <a:r>
+              <a:rPr sz="800" lang="zh-TW" dirty="0">
+                <a:solidFill>
+                  <a:srgbClr val="000000"/>
+                </a:solidFill>
+                <a:latin typeface="Arial Unicode MS"/>
+                <a:ea typeface="Arial Unicode MS"/>
+                <a:cs typeface="Arial Unicode MS"/>
+              </a:rPr>
+              <a:t>，功能安全等級；</a:t>
+            </a:r>
+            <a:r>
+              <a:rPr sz="800" b="1" lang="zh-TW" dirty="0">
+                <a:solidFill>
+                  <a:srgbClr val="000000"/>
+                </a:solidFill>
+                <a:latin typeface="Arial Unicode MS"/>
+                <a:ea typeface="Arial Unicode MS"/>
+                <a:cs typeface="Arial Unicode MS"/>
+              </a:rPr>
+              <a:t>Fusional capability</a:t>
+            </a:r>
+            <a:r>
+              <a:rPr sz="800" lang="zh-TW" dirty="0">
+                <a:solidFill>
+                  <a:srgbClr val="000000"/>
+                </a:solidFill>
+                <a:latin typeface="Arial Unicode MS"/>
+                <a:ea typeface="Arial Unicode MS"/>
+                <a:cs typeface="Arial Unicode MS"/>
+              </a:rPr>
+              <a:t>，能和相機雷達融合。
+</a:t>
+            </a:r>
+          </a:p>
+          <a:p>
+            <a:pPr algn="l">
+              <a:spcBef>
+                <a:spcPts val="0"/>
+              </a:spcBef>
+              <a:spcAft>
+                <a:spcPts val="133"/>
+              </a:spcAft>
+            </a:pPr>
+            <a:r>
+              <a:rPr sz="800" lang="zh-TW" dirty="0">
+                <a:solidFill>
+                  <a:srgbClr val="000000"/>
+                </a:solidFill>
+                <a:latin typeface="Arial Unicode MS"/>
+                <a:ea typeface="Arial Unicode MS"/>
+                <a:cs typeface="Arial Unicode MS"/>
+              </a:rPr>
+              <a:t>還有一行要注意：右表下面的註腳寫 </a:t>
+            </a:r>
+            <a:r>
+              <a:rPr sz="800" b="1" lang="zh-TW" dirty="0">
+                <a:solidFill>
+                  <a:srgbClr val="000000"/>
+                </a:solidFill>
+                <a:latin typeface="Arial Unicode MS"/>
+                <a:ea typeface="Arial Unicode MS"/>
+                <a:cs typeface="Arial Unicode MS"/>
+              </a:rPr>
+              <a:t>reference object: 75 mm standard pole</a:t>
+            </a:r>
+            <a:r>
+              <a:rPr sz="800" lang="zh-TW" dirty="0">
+                <a:solidFill>
+                  <a:srgbClr val="000000"/>
+                </a:solidFill>
+                <a:latin typeface="Arial Unicode MS"/>
+                <a:ea typeface="Arial Unicode MS"/>
+                <a:cs typeface="Arial Unicode MS"/>
+              </a:rPr>
+              <a:t>，5.5 公尺是對一根七十五公釐粗的桿子量的。跟上週光達的 10% 反射率一樣，測距後面永遠綁著「對什麼量的」。
+</a:t>
+            </a:r>
+          </a:p>
+          <a:p>
+            <a:pPr algn="l">
+              <a:spcBef>
+                <a:spcPts val="0"/>
+              </a:spcBef>
+              <a:spcAft>
+                <a:spcPts val="133"/>
+              </a:spcAft>
+            </a:pPr>
+            <a:r>
+              <a:rPr sz="800" lang="zh-TW" dirty="0">
                 <a:solidFill>
                   <a:srgbClr val="000000"/>
                 </a:solidFill>
@@ -4687,7 +5303,7 @@
               <a:t>最後，右表上</a:t>
             </a:r>
             <a:r>
-              <a:rPr sz="1200" b="1" lang="zh-TW" dirty="0">
+              <a:rPr sz="800" b="1" lang="zh-TW" dirty="0">
                 <a:solidFill>
                   <a:srgbClr val="000000"/>
                 </a:solidFill>
@@ -4698,7 +5314,7 @@
               <a:t>沒有波束角</a:t>
             </a:r>
             <a:r>
-              <a:rPr sz="1200" lang="zh-TW" dirty="0">
+              <a:rPr sz="800" lang="zh-TW" dirty="0">
                 <a:solidFill>
                   <a:srgbClr val="000000"/>
                 </a:solidFill>
@@ -4815,11 +5431,11 @@
                 <a:spcPts val="0"/>
               </a:spcBef>
               <a:spcAft>
-                <a:spcPts val="200"/>
+                <a:spcPts val="150"/>
               </a:spcAft>
             </a:pPr>
             <a:r>
-              <a:rPr sz="1200" lang="zh-TW" dirty="0">
+              <a:rPr sz="900" lang="zh-TW" dirty="0">
                 <a:solidFill>
                   <a:srgbClr val="000000"/>
                 </a:solidFill>
@@ -4830,7 +5446,7 @@
               <a:t>為什麼超音波只能看幾公尺？因為</a:t>
             </a:r>
             <a:r>
-              <a:rPr sz="1200" b="1" lang="zh-TW" dirty="0">
+              <a:rPr sz="900" b="1" lang="zh-TW" dirty="0">
                 <a:solidFill>
                   <a:srgbClr val="000000"/>
                 </a:solidFill>
@@ -4841,7 +5457,7 @@
               <a:t>聲音慢</a:t>
             </a:r>
             <a:r>
-              <a:rPr sz="1200" lang="zh-TW" dirty="0">
+              <a:rPr sz="900" lang="zh-TW" dirty="0">
                 <a:solidFill>
                   <a:srgbClr val="000000"/>
                 </a:solidFill>
@@ -4859,22 +5475,22 @@
                 <a:spcPts val="0"/>
               </a:spcBef>
               <a:spcAft>
-                <a:spcPts val="200"/>
+                <a:spcPts val="150"/>
               </a:spcAft>
             </a:pPr>
             <a:r>
-              <a:rPr sz="1200" lang="zh-TW" dirty="0">
-                <a:solidFill>
-                  <a:srgbClr val="000000"/>
-                </a:solidFill>
-                <a:latin typeface="Arial Unicode MS"/>
-                <a:ea typeface="Arial Unicode MS"/>
-                <a:cs typeface="Arial Unicode MS"/>
-              </a:rPr>
-              <a:t>光一秒鐘走三十萬公里，聲音一秒鐘走</a:t>
-            </a:r>
-            <a:r>
-              <a:rPr sz="1200" b="1" lang="zh-TW" dirty="0">
+              <a:rPr sz="900" lang="zh-TW" dirty="0">
+                <a:solidFill>
+                  <a:srgbClr val="000000"/>
+                </a:solidFill>
+                <a:latin typeface="Arial Unicode MS"/>
+                <a:ea typeface="Arial Unicode MS"/>
+                <a:cs typeface="Arial Unicode MS"/>
+              </a:rPr>
+              <a:t>打雷的時候，先看到閃電，過幾秒才聽到雷聲。光一秒鐘走三十萬公里，幾乎不用時間；聲音一秒鐘只走</a:t>
+            </a:r>
+            <a:r>
+              <a:rPr sz="900" b="1" lang="zh-TW" dirty="0">
                 <a:solidFill>
                   <a:srgbClr val="000000"/>
                 </a:solidFill>
@@ -4885,7 +5501,7 @@
               <a:t>三百四十公尺</a:t>
             </a:r>
             <a:r>
-              <a:rPr sz="1200" lang="zh-TW" dirty="0">
+              <a:rPr sz="900" lang="zh-TW" dirty="0">
                 <a:solidFill>
                   <a:srgbClr val="000000"/>
                 </a:solidFill>
@@ -4896,7 +5512,7 @@
               <a:t>。五點五公尺的來回是十一公尺，除以三百四十，等於</a:t>
             </a:r>
             <a:r>
-              <a:rPr sz="1200" b="1" lang="zh-TW" dirty="0">
+              <a:rPr sz="900" b="1" lang="zh-TW" dirty="0">
                 <a:solidFill>
                   <a:srgbClr val="000000"/>
                 </a:solidFill>
@@ -4907,7 +5523,7 @@
               <a:t>三十二毫秒</a:t>
             </a:r>
             <a:r>
-              <a:rPr sz="1200" lang="zh-TW" dirty="0">
+              <a:rPr sz="900" lang="zh-TW" dirty="0">
                 <a:solidFill>
                   <a:srgbClr val="000000"/>
                 </a:solidFill>
@@ -4925,11 +5541,11 @@
                 <a:spcPts val="0"/>
               </a:spcBef>
               <a:spcAft>
-                <a:spcPts val="200"/>
+                <a:spcPts val="150"/>
               </a:spcAft>
             </a:pPr>
             <a:r>
-              <a:rPr sz="1200" lang="zh-TW" dirty="0">
+              <a:rPr sz="900" lang="zh-TW" dirty="0">
                 <a:solidFill>
                   <a:srgbClr val="000000"/>
                 </a:solidFill>
@@ -4947,11 +5563,11 @@
                 <a:spcPts val="0"/>
               </a:spcBef>
               <a:spcAft>
-                <a:spcPts val="200"/>
+                <a:spcPts val="150"/>
               </a:spcAft>
             </a:pPr>
             <a:r>
-              <a:rPr sz="1200" lang="zh-TW" dirty="0">
+              <a:rPr sz="900" lang="zh-TW" dirty="0">
                 <a:solidFill>
                   <a:srgbClr val="000000"/>
                 </a:solidFill>
@@ -4962,7 +5578,7 @@
               <a:t>再加上車速。時速二十，煞停距離四點二公尺，加五公尺餘裕，要看到九點二公尺。超音波最遠五點五，</a:t>
             </a:r>
             <a:r>
-              <a:rPr sz="1200" b="1" lang="zh-TW" dirty="0">
+              <a:rPr sz="900" b="1" lang="zh-TW" dirty="0">
                 <a:solidFill>
                   <a:srgbClr val="000000"/>
                 </a:solidFill>
@@ -4973,7 +5589,7 @@
               <a:t>不夠</a:t>
             </a:r>
             <a:r>
-              <a:rPr sz="1200" lang="zh-TW" dirty="0">
+              <a:rPr sz="900" lang="zh-TW" dirty="0">
                 <a:solidFill>
                   <a:srgbClr val="000000"/>
                 </a:solidFill>
@@ -4991,11 +5607,11 @@
                 <a:spcPts val="0"/>
               </a:spcBef>
               <a:spcAft>
-                <a:spcPts val="200"/>
+                <a:spcPts val="150"/>
               </a:spcAft>
             </a:pPr>
             <a:r>
-              <a:rPr sz="1200" lang="zh-TW" dirty="0">
+              <a:rPr sz="900" lang="zh-TW" dirty="0">
                 <a:solidFill>
                   <a:srgbClr val="000000"/>
                 </a:solidFill>
@@ -5006,7 +5622,7 @@
               <a:t>那它什麼時候過關？</a:t>
             </a:r>
             <a:r>
-              <a:rPr sz="1200" b="1" lang="zh-TW" dirty="0">
+              <a:rPr sz="900" b="1" lang="zh-TW" dirty="0">
                 <a:solidFill>
                   <a:srgbClr val="000000"/>
                 </a:solidFill>
@@ -5017,7 +5633,7 @@
               <a:t>停車場</a:t>
             </a:r>
             <a:r>
-              <a:rPr sz="1200" lang="zh-TW" dirty="0">
+              <a:rPr sz="900" lang="zh-TW" dirty="0">
                 <a:solidFill>
                   <a:srgbClr val="000000"/>
                 </a:solidFill>
@@ -5035,11 +5651,11 @@
                 <a:spcPts val="0"/>
               </a:spcBef>
               <a:spcAft>
-                <a:spcPts val="200"/>
+                <a:spcPts val="150"/>
               </a:spcAft>
             </a:pPr>
             <a:r>
-              <a:rPr sz="1200" lang="zh-TW" dirty="0">
+              <a:rPr sz="900" lang="zh-TW" dirty="0">
                 <a:solidFill>
                   <a:srgbClr val="000000"/>
                 </a:solidFill>
@@ -5050,7 +5666,7 @@
               <a:t>所以超音波只做一件事：</a:t>
             </a:r>
             <a:r>
-              <a:rPr sz="1200" b="1" lang="zh-TW" dirty="0">
+              <a:rPr sz="900" b="1" lang="zh-TW" dirty="0">
                 <a:solidFill>
                   <a:srgbClr val="000000"/>
                 </a:solidFill>
@@ -5061,15 +5677,224 @@
               <a:t>停車、倒車、低速補盲</a:t>
             </a:r>
             <a:r>
-              <a:rPr sz="1200" lang="zh-TW" dirty="0">
-                <a:solidFill>
-                  <a:srgbClr val="000000"/>
-                </a:solidFill>
-                <a:latin typeface="Arial Unicode MS"/>
-                <a:ea typeface="Arial Unicode MS"/>
-                <a:cs typeface="Arial Unicode MS"/>
-              </a:rPr>
-              <a:t>。它是車上最便宜的一顆，一顆幾美元，也是唯一一顆看得到保險桿前面二十公分的。順便講一件事：二〇二二年有一家車廠宣布把超音波從新車上拿掉，改用相機做停車——到今天業界還在吵這樣對不對。</a:t>
+              <a:rPr sz="900" lang="zh-TW" dirty="0">
+                <a:solidFill>
+                  <a:srgbClr val="000000"/>
+                </a:solidFill>
+                <a:latin typeface="Arial Unicode MS"/>
+                <a:ea typeface="Arial Unicode MS"/>
+                <a:cs typeface="Arial Unicode MS"/>
+              </a:rPr>
+              <a:t>。它是車上最便宜的一顆，一顆幾美元，也是唯一一顆看得到保險桿前面二十公分的。順便講一件事：二〇二二年有一家車廠宣布把超音波從新車上拿掉，改用相機做停車——到今天業界還在吵這樣對不對。
+</a:t>
+            </a:r>
+          </a:p>
+          <a:p>
+            <a:pPr algn="l">
+              <a:spcBef>
+                <a:spcPts val="0"/>
+              </a:spcBef>
+              <a:spcAft>
+                <a:spcPts val="150"/>
+              </a:spcAft>
+            </a:pPr>
+            <a:r>
+              <a:rPr sz="900" lang="zh-TW" dirty="0">
+                <a:solidFill>
+                  <a:srgbClr val="000000"/>
+                </a:solidFill>
+                <a:latin typeface="Arial Unicode MS"/>
+                <a:ea typeface="Arial Unicode MS"/>
+                <a:cs typeface="Arial Unicode MS"/>
+              </a:rPr>
+              <a:t>最後看實際的車。底下那支影片是台北一家 Toyota 經銷商的業務在介紹倒車雷達，中文。</a:t>
+            </a:r>
+            <a:r>
+              <a:rPr sz="900" b="1" lang="zh-TW" dirty="0">
+                <a:solidFill>
+                  <a:srgbClr val="000000"/>
+                </a:solidFill>
+                <a:latin typeface="Arial Unicode MS"/>
+                <a:ea typeface="Arial Unicode MS"/>
+                <a:cs typeface="Arial Unicode MS"/>
+              </a:rPr>
+              <a:t>從 2:00 播到 3:07</a:t>
+            </a:r>
+            <a:r>
+              <a:rPr sz="900" lang="zh-TW" dirty="0">
+                <a:solidFill>
+                  <a:srgbClr val="000000"/>
+                </a:solidFill>
+                <a:latin typeface="Arial Unicode MS"/>
+                <a:ea typeface="Arial Unicode MS"/>
+                <a:cs typeface="Arial Unicode MS"/>
+              </a:rPr>
+              <a:t>，一分鐘。播之前問：「嗶聲越來越急，代表什麼？」
+</a:t>
+            </a:r>
+          </a:p>
+          <a:p>
+            <a:pPr algn="l">
+              <a:spcBef>
+                <a:spcPts val="0"/>
+              </a:spcBef>
+              <a:spcAft>
+                <a:spcPts val="150"/>
+              </a:spcAft>
+            </a:pPr>
+            <a:r>
+              <a:rPr sz="900" b="1" lang="zh-TW" dirty="0">
+                <a:solidFill>
+                  <a:srgbClr val="000000"/>
+                </a:solidFill>
+                <a:latin typeface="Arial Unicode MS"/>
+                <a:ea typeface="Arial Unicode MS"/>
+                <a:cs typeface="Arial Unicode MS"/>
+              </a:rPr>
+              <a:t>2:03 他說「平面用電波式的感應」，這句不對</a:t>
+            </a:r>
+            <a:r>
+              <a:rPr sz="900" lang="zh-TW" dirty="0">
+                <a:solidFill>
+                  <a:srgbClr val="000000"/>
+                </a:solidFill>
+                <a:latin typeface="Arial Unicode MS"/>
+                <a:ea typeface="Arial Unicode MS"/>
+                <a:cs typeface="Arial Unicode MS"/>
+              </a:rPr>
+              <a:t>，請學生抓出來。倒車雷達發的是</a:t>
+            </a:r>
+            <a:r>
+              <a:rPr sz="900" b="1" lang="zh-TW" dirty="0">
+                <a:solidFill>
+                  <a:srgbClr val="000000"/>
+                </a:solidFill>
+                <a:latin typeface="Arial Unicode MS"/>
+                <a:ea typeface="Arial Unicode MS"/>
+                <a:cs typeface="Arial Unicode MS"/>
+              </a:rPr>
+              <a:t>超音波，是聲音</a:t>
+            </a:r>
+            <a:r>
+              <a:rPr sz="900" lang="zh-TW" dirty="0">
+                <a:solidFill>
+                  <a:srgbClr val="000000"/>
+                </a:solidFill>
+                <a:latin typeface="Arial Unicode MS"/>
+                <a:ea typeface="Arial Unicode MS"/>
+                <a:cs typeface="Arial Unicode MS"/>
+              </a:rPr>
+              <a:t>，不是電波。如果是電波，就跟第一節的雷達一樣一秒走三十萬公里了。就是因為用聲音，才慢、才只看得到這麼近，剛好接回這一張。
+</a:t>
+            </a:r>
+          </a:p>
+          <a:p>
+            <a:pPr algn="l">
+              <a:spcBef>
+                <a:spcPts val="0"/>
+              </a:spcBef>
+              <a:spcAft>
+                <a:spcPts val="150"/>
+              </a:spcAft>
+            </a:pPr>
+            <a:r>
+              <a:rPr sz="900" lang="zh-TW" dirty="0">
+                <a:solidFill>
+                  <a:srgbClr val="000000"/>
+                </a:solidFill>
+                <a:latin typeface="Arial Unicode MS"/>
+                <a:ea typeface="Arial Unicode MS"/>
+                <a:cs typeface="Arial Unicode MS"/>
+              </a:rPr>
+              <a:t>接著他講偵測範圍：水平一百二十度、垂直五十度。然後是三段聲音：</a:t>
+            </a:r>
+            <a:r>
+              <a:rPr sz="900" b="1" lang="zh-TW" dirty="0">
+                <a:solidFill>
+                  <a:srgbClr val="000000"/>
+                </a:solidFill>
+                <a:latin typeface="Arial Unicode MS"/>
+                <a:ea typeface="Arial Unicode MS"/>
+                <a:cs typeface="Arial Unicode MS"/>
+              </a:rPr>
+              <a:t>綠色</a:t>
+            </a:r>
+            <a:r>
+              <a:rPr sz="900" lang="zh-TW" dirty="0">
+                <a:solidFill>
+                  <a:srgbClr val="000000"/>
+                </a:solidFill>
+                <a:latin typeface="Arial Unicode MS"/>
+                <a:ea typeface="Arial Unicode MS"/>
+                <a:cs typeface="Arial Unicode MS"/>
+              </a:rPr>
+              <a:t>，嗶、嗶、嗶的短聲，障礙物在一百二十到六十公分；</a:t>
+            </a:r>
+            <a:r>
+              <a:rPr sz="900" b="1" lang="zh-TW" dirty="0">
+                <a:solidFill>
+                  <a:srgbClr val="000000"/>
+                </a:solidFill>
+                <a:latin typeface="Arial Unicode MS"/>
+                <a:ea typeface="Arial Unicode MS"/>
+                <a:cs typeface="Arial Unicode MS"/>
+              </a:rPr>
+              <a:t>黃色</a:t>
+            </a:r>
+            <a:r>
+              <a:rPr sz="900" lang="zh-TW" dirty="0">
+                <a:solidFill>
+                  <a:srgbClr val="000000"/>
+                </a:solidFill>
+                <a:latin typeface="Arial Unicode MS"/>
+                <a:ea typeface="Arial Unicode MS"/>
+                <a:cs typeface="Arial Unicode MS"/>
+              </a:rPr>
+              <a:t>，嗶聲變急，六十到四十公分；</a:t>
+            </a:r>
+            <a:r>
+              <a:rPr sz="900" b="1" lang="zh-TW" dirty="0">
+                <a:solidFill>
+                  <a:srgbClr val="000000"/>
+                </a:solidFill>
+                <a:latin typeface="Arial Unicode MS"/>
+                <a:ea typeface="Arial Unicode MS"/>
+                <a:cs typeface="Arial Unicode MS"/>
+              </a:rPr>
+              <a:t>紅色</a:t>
+            </a:r>
+            <a:r>
+              <a:rPr sz="900" lang="zh-TW" dirty="0">
+                <a:solidFill>
+                  <a:srgbClr val="000000"/>
+                </a:solidFill>
+                <a:latin typeface="Arial Unicode MS"/>
+                <a:ea typeface="Arial Unicode MS"/>
+                <a:cs typeface="Arial Unicode MS"/>
+              </a:rPr>
+              <a:t>，長音不停，四十公分以內，要馬上踩煞車。請學生注意這些距離：最遠一百二十公分，比規格表的五點五公尺短很多。停車需要的就是這個距離。
+</a:t>
+            </a:r>
+          </a:p>
+          <a:p>
+            <a:pPr algn="l">
+              <a:spcBef>
+                <a:spcPts val="0"/>
+              </a:spcBef>
+              <a:spcAft>
+                <a:spcPts val="150"/>
+              </a:spcAft>
+            </a:pPr>
+            <a:r>
+              <a:rPr sz="900" lang="zh-TW" dirty="0">
+                <a:solidFill>
+                  <a:srgbClr val="000000"/>
+                </a:solidFill>
+                <a:latin typeface="Arial Unicode MS"/>
+                <a:ea typeface="Arial Unicode MS"/>
+                <a:cs typeface="Arial Unicode MS"/>
+              </a:rPr>
+              <a:t>有時間可以從頭播。前兩分鐘他拿三代探頭比大小：二十年前外掛式、四公分；十年前要在保險桿上鑽洞、二點五公分；現在一點五公分。</a:t>
             </a:r>
           </a:p>
         </p:txBody>
@@ -5278,6 +6103,28 @@
                 <a:ea typeface="Arial Unicode MS"/>
                 <a:cs typeface="Arial Unicode MS"/>
               </a:rPr>
+              <a:t>各位打開手機地圖，那個藍色的點就是衛星定位算出來的。藍點外面那一圈淡淡的圓，是它在告訴你：我可能差這麼多。今天的規格表，講的就是這一圈有多大。
+</a:t>
+            </a:r>
+          </a:p>
+          <a:p>
+            <a:pPr algn="l">
+              <a:spcBef>
+                <a:spcPts val="0"/>
+              </a:spcBef>
+              <a:spcAft>
+                <a:spcPts val="200"/>
+              </a:spcAft>
+            </a:pPr>
+            <a:r>
+              <a:rPr sz="1200" lang="zh-TW" dirty="0">
+                <a:solidFill>
+                  <a:srgbClr val="000000"/>
+                </a:solidFill>
+                <a:latin typeface="Arial Unicode MS"/>
+                <a:ea typeface="Arial Unicode MS"/>
+                <a:cs typeface="Arial Unicode MS"/>
+              </a:rPr>
               <a:t>先講一下名字。各位常說 GPS，GPS 是美國那一套。俄羅斯有 GLONASS，歐洲有 Galileo，中國有北斗。四套合起來叫 </a:t>
             </a:r>
             <a:r>
@@ -5431,11 +6278,11 @@
                 <a:spcPts val="0"/>
               </a:spcBef>
               <a:spcAft>
-                <a:spcPts val="200"/>
+                <a:spcPts val="133"/>
               </a:spcAft>
             </a:pPr>
             <a:r>
-              <a:rPr sz="1200" lang="zh-TW" dirty="0">
+              <a:rPr sz="800" lang="zh-TW" dirty="0">
                 <a:solidFill>
                   <a:srgbClr val="000000"/>
                 </a:solidFill>
@@ -5453,11 +6300,11 @@
                 <a:spcPts val="0"/>
               </a:spcBef>
               <a:spcAft>
-                <a:spcPts val="200"/>
+                <a:spcPts val="133"/>
               </a:spcAft>
             </a:pPr>
             <a:r>
-              <a:rPr sz="1200" lang="zh-TW" dirty="0">
+              <a:rPr sz="800" lang="zh-TW" dirty="0">
                 <a:solidFill>
                   <a:srgbClr val="000000"/>
                 </a:solidFill>
@@ -5468,7 +6315,7 @@
               <a:t>兩萬公里高的地方有幾十顆衛星，每一顆一直在廣播兩件事：</a:t>
             </a:r>
             <a:r>
-              <a:rPr sz="1200" b="1" lang="zh-TW" dirty="0">
+              <a:rPr sz="800" b="1" lang="zh-TW" dirty="0">
                 <a:solidFill>
                   <a:srgbClr val="000000"/>
                 </a:solidFill>
@@ -5479,15 +6326,15 @@
               <a:t>我在哪裡、現在幾點</a:t>
             </a:r>
             <a:r>
-              <a:rPr sz="1200" lang="zh-TW" dirty="0">
-                <a:solidFill>
-                  <a:srgbClr val="000000"/>
-                </a:solidFill>
-                <a:latin typeface="Arial Unicode MS"/>
-                <a:ea typeface="Arial Unicode MS"/>
-                <a:cs typeface="Arial Unicode MS"/>
-              </a:rPr>
-              <a:t>。它們的時鐘是原子鐘，準到十億分之一秒。
+              <a:rPr sz="800" lang="zh-TW" dirty="0">
+                <a:solidFill>
+                  <a:srgbClr val="000000"/>
+                </a:solidFill>
+                <a:latin typeface="Arial Unicode MS"/>
+                <a:ea typeface="Arial Unicode MS"/>
+                <a:cs typeface="Arial Unicode MS"/>
+              </a:rPr>
+              <a:t>。
 </a:t>
             </a:r>
           </a:p>
@@ -5497,19 +6344,19 @@
                 <a:spcPts val="0"/>
               </a:spcBef>
               <a:spcAft>
-                <a:spcPts val="200"/>
+                <a:spcPts val="133"/>
               </a:spcAft>
             </a:pPr>
             <a:r>
-              <a:rPr sz="1200" lang="zh-TW" dirty="0">
-                <a:solidFill>
-                  <a:srgbClr val="000000"/>
-                </a:solidFill>
-                <a:latin typeface="Arial Unicode MS"/>
-                <a:ea typeface="Arial Unicode MS"/>
-                <a:cs typeface="Arial Unicode MS"/>
-              </a:rPr>
-              <a:t>地上的接收機收到訊號，看訊號上寫的發送時間，跟自己的時鐘比，就知道訊號走了多久。乘以光速，就是離那顆衛星多遠。離一顆衛星兩萬公里，你就在以它為中心、半徑兩萬公里的球面上。左圖畫成平面，就是一個圈。
+              <a:rPr sz="800" lang="zh-TW" dirty="0">
+                <a:solidFill>
+                  <a:srgbClr val="000000"/>
+                </a:solidFill>
+                <a:latin typeface="Arial Unicode MS"/>
+                <a:ea typeface="Arial Unicode MS"/>
+                <a:cs typeface="Arial Unicode MS"/>
+              </a:rPr>
+              <a:t>怎麼廣播？用無線電。所有 GPS 衛星用同一個頻率，每一顆有自己的一組編碼，像每個人有自己的口音。接收機手上有每一顆的編碼表，一比對就知道現在聽到的是哪一顆。教室再吵，你也聽得出哪個聲音是你的朋友。
 </a:t>
             </a:r>
           </a:p>
@@ -5519,41 +6366,52 @@
                 <a:spcPts val="0"/>
               </a:spcBef>
               <a:spcAft>
-                <a:spcPts val="200"/>
+                <a:spcPts val="133"/>
               </a:spcAft>
             </a:pPr>
             <a:r>
-              <a:rPr sz="1200" lang="zh-TW" dirty="0">
-                <a:solidFill>
-                  <a:srgbClr val="000000"/>
-                </a:solidFill>
-                <a:latin typeface="Arial Unicode MS"/>
-                <a:ea typeface="Arial Unicode MS"/>
-                <a:cs typeface="Arial Unicode MS"/>
-              </a:rPr>
-              <a:t>三顆衛星，三個圈，交在一個點，就是你。那為什麼要</a:t>
-            </a:r>
-            <a:r>
-              <a:rPr sz="1200" b="1" lang="zh-TW" dirty="0">
-                <a:solidFill>
-                  <a:srgbClr val="000000"/>
-                </a:solidFill>
-                <a:latin typeface="Arial Unicode MS"/>
-                <a:ea typeface="Arial Unicode MS"/>
-                <a:cs typeface="Arial Unicode MS"/>
-              </a:rPr>
-              <a:t>四顆</a:t>
-            </a:r>
-            <a:r>
-              <a:rPr sz="1200" lang="zh-TW" dirty="0">
-                <a:solidFill>
-                  <a:srgbClr val="000000"/>
-                </a:solidFill>
-                <a:latin typeface="Arial Unicode MS"/>
-                <a:ea typeface="Arial Unicode MS"/>
-                <a:cs typeface="Arial Unicode MS"/>
-              </a:rPr>
-              <a:t>？因為接收機的時鐘不是原子鐘，它是幾塊美元的石英，差一微秒就差三百公尺。所以要多一顆衛星，把接收機自己的時鐘誤差也解出來。三個座標加一個時鐘，四個未知數，四顆衛星。
+              <a:rPr sz="800" b="1" lang="zh-TW" dirty="0">
+                <a:solidFill>
+                  <a:srgbClr val="000000"/>
+                </a:solidFill>
+                <a:latin typeface="Arial Unicode MS"/>
+                <a:ea typeface="Arial Unicode MS"/>
+                <a:cs typeface="Arial Unicode MS"/>
+              </a:rPr>
+              <a:t>「我在哪裡」，其實是地面站先幫它算好的。</a:t>
+            </a:r>
+            <a:r>
+              <a:rPr sz="800" lang="zh-TW" dirty="0">
+                <a:solidFill>
+                  <a:srgbClr val="000000"/>
+                </a:solidFill>
+                <a:latin typeface="Arial Unicode MS"/>
+                <a:ea typeface="Arial Unicode MS"/>
+                <a:cs typeface="Arial Unicode MS"/>
+              </a:rPr>
+              <a:t>衛星自己不知道自己在哪。地面有十幾個監測站，位置都量得很準，一直在聽每一顆衛星的訊號。資料送回美國的主控站，算出每顆衛星接下來幾個小時會飛到哪裡，大約一天上傳一次給衛星。衛星把這張預測表存起來，照著唸。這張表叫</a:t>
+            </a:r>
+            <a:r>
+              <a:rPr sz="800" b="1" lang="zh-TW" dirty="0">
+                <a:solidFill>
+                  <a:srgbClr val="000000"/>
+                </a:solidFill>
+                <a:latin typeface="Arial Unicode MS"/>
+                <a:ea typeface="Arial Unicode MS"/>
+                <a:cs typeface="Arial Unicode MS"/>
+              </a:rPr>
+              <a:t>星曆</a:t>
+            </a:r>
+            <a:r>
+              <a:rPr sz="800" lang="zh-TW" dirty="0">
+                <a:solidFill>
+                  <a:srgbClr val="000000"/>
+                </a:solidFill>
+                <a:latin typeface="Arial Unicode MS"/>
+                <a:ea typeface="Arial Unicode MS"/>
+                <a:cs typeface="Arial Unicode MS"/>
+              </a:rPr>
+              <a:t>。
 </a:t>
             </a:r>
           </a:p>
@@ -5563,41 +6421,19 @@
                 <a:spcPts val="0"/>
               </a:spcBef>
               <a:spcAft>
-                <a:spcPts val="200"/>
+                <a:spcPts val="133"/>
               </a:spcAft>
             </a:pPr>
             <a:r>
-              <a:rPr sz="1200" lang="zh-TW" dirty="0">
-                <a:solidFill>
-                  <a:srgbClr val="000000"/>
-                </a:solidFill>
-                <a:latin typeface="Arial Unicode MS"/>
-                <a:ea typeface="Arial Unicode MS"/>
-                <a:cs typeface="Arial Unicode MS"/>
-              </a:rPr>
-              <a:t>這樣算出來的精度，一般是</a:t>
-            </a:r>
-            <a:r>
-              <a:rPr sz="1200" b="1" lang="zh-TW" dirty="0">
-                <a:solidFill>
-                  <a:srgbClr val="000000"/>
-                </a:solidFill>
-                <a:latin typeface="Arial Unicode MS"/>
-                <a:ea typeface="Arial Unicode MS"/>
-                <a:cs typeface="Arial Unicode MS"/>
-              </a:rPr>
-              <a:t>兩到十公尺</a:t>
-            </a:r>
-            <a:r>
-              <a:rPr sz="1200" lang="zh-TW" dirty="0">
-                <a:solidFill>
-                  <a:srgbClr val="000000"/>
-                </a:solidFill>
-                <a:latin typeface="Arial Unicode MS"/>
-                <a:ea typeface="Arial Unicode MS"/>
-                <a:cs typeface="Arial Unicode MS"/>
-              </a:rPr>
-              <a:t>。對導航夠，開到路口它會叫你右轉。對自駕不夠。右邊那格：一個車道才三點五公尺，兩點五公尺的圈，比車道還大。你知道自己在這條路上，不知道在哪一道。
+              <a:rPr sz="800" lang="zh-TW" dirty="0">
+                <a:solidFill>
+                  <a:srgbClr val="000000"/>
+                </a:solidFill>
+                <a:latin typeface="Arial Unicode MS"/>
+                <a:ea typeface="Arial Unicode MS"/>
+                <a:cs typeface="Arial Unicode MS"/>
+              </a:rPr>
+              <a:t>就像公車站的時刻表。客運公司不用每分鐘打電話告訴站牌車子到哪了，每天貼一張新的時刻表就好。衛星的軌道比公車規律得多，一天更新一次就夠準。幾天沒上傳也照樣廣播，只是誤差慢慢變大。
 </a:t>
             </a:r>
           </a:p>
@@ -5607,11 +6443,418 @@
                 <a:spcPts val="0"/>
               </a:spcBef>
               <a:spcAft>
-                <a:spcPts val="200"/>
+                <a:spcPts val="133"/>
               </a:spcAft>
             </a:pPr>
             <a:r>
-              <a:rPr sz="1200" lang="zh-TW" dirty="0">
+              <a:rPr sz="800" b="1" lang="zh-TW" dirty="0">
+                <a:solidFill>
+                  <a:srgbClr val="000000"/>
+                </a:solidFill>
+                <a:latin typeface="Arial Unicode MS"/>
+                <a:ea typeface="Arial Unicode MS"/>
+                <a:cs typeface="Arial Unicode MS"/>
+              </a:rPr>
+              <a:t>「現在幾點」，靠原子鐘。</a:t>
+            </a:r>
+            <a:r>
+              <a:rPr sz="800" lang="zh-TW" dirty="0">
+                <a:solidFill>
+                  <a:srgbClr val="000000"/>
+                </a:solidFill>
+                <a:latin typeface="Arial Unicode MS"/>
+                <a:ea typeface="Arial Unicode MS"/>
+                <a:cs typeface="Arial Unicode MS"/>
+              </a:rPr>
+              <a:t>每一段訊號開頭都寫著「這一段是幾點幾分幾秒發出的」。衛星上的時鐘是原子鐘，地面站還會量出每一顆差多少，把校正值一起廣播。這樣可以準到十億分之一秒。為什麼要這麼準？光在十億分之一秒裡走三十公分，時間差一點點，距離就差很多。
+</a:t>
+            </a:r>
+          </a:p>
+          <a:p>
+            <a:pPr algn="l">
+              <a:spcBef>
+                <a:spcPts val="0"/>
+              </a:spcBef>
+              <a:spcAft>
+                <a:spcPts val="133"/>
+              </a:spcAft>
+            </a:pPr>
+            <a:r>
+              <a:rPr sz="800" lang="zh-TW" dirty="0">
+                <a:solidFill>
+                  <a:srgbClr val="000000"/>
+                </a:solidFill>
+                <a:latin typeface="Arial Unicode MS"/>
+                <a:ea typeface="Arial Unicode MS"/>
+                <a:cs typeface="Arial Unicode MS"/>
+              </a:rPr>
+              <a:t>想成廣播電台的整點報時：「嘟、嘟、嘟、嘟——最後一響，十點整。」你知道電台在哪裡，也知道最後一響是十點整發出的。看自己的錶，記下聽到的時間，就知道聲音走了多久。衛星定位一樣，只是聲音換成光速的無線電。
+</a:t>
+            </a:r>
+          </a:p>
+          <a:p>
+            <a:pPr algn="l">
+              <a:spcBef>
+                <a:spcPts val="0"/>
+              </a:spcBef>
+              <a:spcAft>
+                <a:spcPts val="133"/>
+              </a:spcAft>
+            </a:pPr>
+            <a:r>
+              <a:rPr sz="800" lang="zh-TW" dirty="0">
+                <a:solidFill>
+                  <a:srgbClr val="000000"/>
+                </a:solidFill>
+                <a:latin typeface="Arial Unicode MS"/>
+                <a:ea typeface="Arial Unicode MS"/>
+                <a:cs typeface="Arial Unicode MS"/>
+              </a:rPr>
+              <a:t>地上的接收機收到訊號，看訊號上寫的發送時間，跟自己的時鐘比，就知道訊號走了多久。乘以光速，就是離那顆衛星多遠。離一顆衛星兩萬公里，你就在以它為中心、半徑兩萬公里的球面上。左圖畫成平面，就是一個圈。
+</a:t>
+            </a:r>
+          </a:p>
+          <a:p>
+            <a:pPr algn="l">
+              <a:spcBef>
+                <a:spcPts val="0"/>
+              </a:spcBef>
+              <a:spcAft>
+                <a:spcPts val="133"/>
+              </a:spcAft>
+            </a:pPr>
+            <a:r>
+              <a:rPr sz="800" lang="zh-TW" dirty="0">
+                <a:solidFill>
+                  <a:srgbClr val="000000"/>
+                </a:solidFill>
+                <a:latin typeface="Arial Unicode MS"/>
+                <a:ea typeface="Arial Unicode MS"/>
+                <a:cs typeface="Arial Unicode MS"/>
+              </a:rPr>
+              <a:t>舉個例子。有人告訴你：你離火車站兩公里。你只知道自己在火車站周圍那一圈上。又有人說：你離學校三公里，兩個圈交在兩個點。第三個人說：你離市場一公里，就只剩一個點。衛星定位就是這樣，只是那三個地標在天上。
+</a:t>
+            </a:r>
+          </a:p>
+          <a:p>
+            <a:pPr algn="l">
+              <a:spcBef>
+                <a:spcPts val="0"/>
+              </a:spcBef>
+              <a:spcAft>
+                <a:spcPts val="133"/>
+              </a:spcAft>
+            </a:pPr>
+            <a:r>
+              <a:rPr sz="800" lang="zh-TW" dirty="0">
+                <a:solidFill>
+                  <a:srgbClr val="000000"/>
+                </a:solidFill>
+                <a:latin typeface="Arial Unicode MS"/>
+                <a:ea typeface="Arial Unicode MS"/>
+                <a:cs typeface="Arial Unicode MS"/>
+              </a:rPr>
+              <a:t>看一支一分鐘的影片，TVBS 的科學單元，中文。</a:t>
+            </a:r>
+            <a:r>
+              <a:rPr sz="800" b="1" lang="zh-TW" dirty="0">
+                <a:solidFill>
+                  <a:srgbClr val="000000"/>
+                </a:solidFill>
+                <a:latin typeface="Arial Unicode MS"/>
+                <a:ea typeface="Arial Unicode MS"/>
+                <a:cs typeface="Arial Unicode MS"/>
+              </a:rPr>
+              <a:t>從 0:49 播到結束。</a:t>
+            </a:r>
+            <a:r>
+              <a:rPr sz="800" lang="zh-TW" dirty="0">
+                <a:solidFill>
+                  <a:srgbClr val="000000"/>
+                </a:solidFill>
+                <a:latin typeface="Arial Unicode MS"/>
+                <a:ea typeface="Arial Unicode MS"/>
+                <a:cs typeface="Arial Unicode MS"/>
+              </a:rPr>
+              <a:t>動畫先畫一顆衛星：你在一個球面上。第二顆：兩個球交成一個圈。第三顆：剩下兩個點，因為人在地球上，排掉另一點。</a:t>
+            </a:r>
+            <a:r>
+              <a:rPr sz="800" b="1" lang="zh-TW" dirty="0">
+                <a:solidFill>
+                  <a:srgbClr val="000000"/>
+                </a:solidFill>
+                <a:latin typeface="Arial Unicode MS"/>
+                <a:ea typeface="Arial Unicode MS"/>
+                <a:cs typeface="Arial Unicode MS"/>
+              </a:rPr>
+              <a:t>1:22</a:t>
+            </a:r>
+            <a:r>
+              <a:rPr sz="800" lang="zh-TW" dirty="0">
+                <a:solidFill>
+                  <a:srgbClr val="000000"/>
+                </a:solidFill>
+                <a:latin typeface="Arial Unicode MS"/>
+                <a:ea typeface="Arial Unicode MS"/>
+                <a:cs typeface="Arial Unicode MS"/>
+              </a:rPr>
+              <a:t> 國家太空中心的工程師講的，就是下一段：你不知道自己的時間，所以要第四顆。
+</a:t>
+            </a:r>
+          </a:p>
+          <a:p>
+            <a:pPr algn="l">
+              <a:spcBef>
+                <a:spcPts val="0"/>
+              </a:spcBef>
+              <a:spcAft>
+                <a:spcPts val="133"/>
+              </a:spcAft>
+            </a:pPr>
+            <a:r>
+              <a:rPr sz="800" lang="zh-TW" dirty="0">
+                <a:solidFill>
+                  <a:srgbClr val="000000"/>
+                </a:solidFill>
+                <a:latin typeface="Arial Unicode MS"/>
+                <a:ea typeface="Arial Unicode MS"/>
+                <a:cs typeface="Arial Unicode MS"/>
+              </a:rPr>
+              <a:t>有一件事要更正：影片的標題和旁白都說「</a:t>
+            </a:r>
+            <a:r>
+              <a:rPr sz="800" b="1" lang="zh-TW" dirty="0">
+                <a:solidFill>
+                  <a:srgbClr val="000000"/>
+                </a:solidFill>
+                <a:latin typeface="Arial Unicode MS"/>
+                <a:ea typeface="Arial Unicode MS"/>
+                <a:cs typeface="Arial Unicode MS"/>
+              </a:rPr>
+              <a:t>三角測量</a:t>
+            </a:r>
+            <a:r>
+              <a:rPr sz="800" lang="zh-TW" dirty="0">
+                <a:solidFill>
+                  <a:srgbClr val="000000"/>
+                </a:solidFill>
+                <a:latin typeface="Arial Unicode MS"/>
+                <a:ea typeface="Arial Unicode MS"/>
+                <a:cs typeface="Arial Unicode MS"/>
+              </a:rPr>
+              <a:t>」。三角測量量的是角度；衛星量的是</a:t>
+            </a:r>
+            <a:r>
+              <a:rPr sz="800" b="1" lang="zh-TW" dirty="0">
+                <a:solidFill>
+                  <a:srgbClr val="000000"/>
+                </a:solidFill>
+                <a:latin typeface="Arial Unicode MS"/>
+                <a:ea typeface="Arial Unicode MS"/>
+                <a:cs typeface="Arial Unicode MS"/>
+              </a:rPr>
+              <a:t>距離</a:t>
+            </a:r>
+            <a:r>
+              <a:rPr sz="800" lang="zh-TW" dirty="0">
+                <a:solidFill>
+                  <a:srgbClr val="000000"/>
+                </a:solidFill>
+                <a:latin typeface="Arial Unicode MS"/>
+                <a:ea typeface="Arial Unicode MS"/>
+                <a:cs typeface="Arial Unicode MS"/>
+              </a:rPr>
+              <a:t>，正確的說法是</a:t>
+            </a:r>
+            <a:r>
+              <a:rPr sz="800" b="1" lang="zh-TW" dirty="0">
+                <a:solidFill>
+                  <a:srgbClr val="000000"/>
+                </a:solidFill>
+                <a:latin typeface="Arial Unicode MS"/>
+                <a:ea typeface="Arial Unicode MS"/>
+                <a:cs typeface="Arial Unicode MS"/>
+              </a:rPr>
+              <a:t>三邊測量</a:t>
+            </a:r>
+            <a:r>
+              <a:rPr sz="800" lang="zh-TW" dirty="0">
+                <a:solidFill>
+                  <a:srgbClr val="000000"/>
+                </a:solidFill>
+                <a:latin typeface="Arial Unicode MS"/>
+                <a:ea typeface="Arial Unicode MS"/>
+                <a:cs typeface="Arial Unicode MS"/>
+              </a:rPr>
+              <a:t>。請學生記住：量距離是三邊，量角度是三角。
+</a:t>
+            </a:r>
+          </a:p>
+          <a:p>
+            <a:pPr algn="l">
+              <a:spcBef>
+                <a:spcPts val="0"/>
+              </a:spcBef>
+              <a:spcAft>
+                <a:spcPts val="133"/>
+              </a:spcAft>
+            </a:pPr>
+            <a:r>
+              <a:rPr sz="800" lang="zh-TW" dirty="0">
+                <a:solidFill>
+                  <a:srgbClr val="000000"/>
+                </a:solidFill>
+                <a:latin typeface="Arial Unicode MS"/>
+                <a:ea typeface="Arial Unicode MS"/>
+                <a:cs typeface="Arial Unicode MS"/>
+              </a:rPr>
+              <a:t>三顆衛星，三個圈，交在一個點，就是你。那為什麼要</a:t>
+            </a:r>
+            <a:r>
+              <a:rPr sz="800" b="1" lang="zh-TW" dirty="0">
+                <a:solidFill>
+                  <a:srgbClr val="000000"/>
+                </a:solidFill>
+                <a:latin typeface="Arial Unicode MS"/>
+                <a:ea typeface="Arial Unicode MS"/>
+                <a:cs typeface="Arial Unicode MS"/>
+              </a:rPr>
+              <a:t>四顆</a:t>
+            </a:r>
+            <a:r>
+              <a:rPr sz="800" lang="zh-TW" dirty="0">
+                <a:solidFill>
+                  <a:srgbClr val="000000"/>
+                </a:solidFill>
+                <a:latin typeface="Arial Unicode MS"/>
+                <a:ea typeface="Arial Unicode MS"/>
+                <a:cs typeface="Arial Unicode MS"/>
+              </a:rPr>
+              <a:t>？學生可能會問：接收機的時間不是也要跟衛星一樣準嗎？對，問題就在這裡。接收機的時鐘不是原子鐘，它是幾塊美元的石英，差一微秒就差三百公尺。
+</a:t>
+            </a:r>
+          </a:p>
+          <a:p>
+            <a:pPr algn="l">
+              <a:spcBef>
+                <a:spcPts val="0"/>
+              </a:spcBef>
+              <a:spcAft>
+                <a:spcPts val="133"/>
+              </a:spcAft>
+            </a:pPr>
+            <a:r>
+              <a:rPr sz="800" lang="zh-TW" dirty="0">
+                <a:solidFill>
+                  <a:srgbClr val="000000"/>
+                </a:solidFill>
+                <a:latin typeface="Arial Unicode MS"/>
+                <a:ea typeface="Arial Unicode MS"/>
+                <a:cs typeface="Arial Unicode MS"/>
+              </a:rPr>
+              <a:t>解法是：不去校時，把鐘差當成一個未知數一起解。接收機只有一個時鐘，不管它快多少，對每一顆衛星都快一樣多。所以每個圈都畫得太大，而且大一樣多。三個圈不會交在一點，中間會圍出一個小三角形。把所有圈一起縮小同樣的量，縮到剛好交在一點。那一點就是你，縮了多少，就是你的錶快了多少。平面上兩個座標加一個時鐘，要三個圈；空間裡三個座標加一個時鐘，四個未知數，所以要四顆衛星。
+</a:t>
+            </a:r>
+          </a:p>
+          <a:p>
+            <a:pPr algn="l">
+              <a:spcBef>
+                <a:spcPts val="0"/>
+              </a:spcBef>
+              <a:spcAft>
+                <a:spcPts val="133"/>
+              </a:spcAft>
+            </a:pPr>
+            <a:r>
+              <a:rPr sz="800" lang="zh-TW" dirty="0">
+                <a:solidFill>
+                  <a:srgbClr val="000000"/>
+                </a:solidFill>
+                <a:latin typeface="Arial Unicode MS"/>
+                <a:ea typeface="Arial Unicode MS"/>
+                <a:cs typeface="Arial Unicode MS"/>
+              </a:rPr>
+              <a:t>順便一提：解完以後，接收機也知道自己的錶差多少，所以手機基地台、電網都拿 GPS 接收機來對時。接收機不用一開始就準，它是</a:t>
+            </a:r>
+            <a:r>
+              <a:rPr sz="800" b="1" lang="zh-TW" dirty="0">
+                <a:solidFill>
+                  <a:srgbClr val="000000"/>
+                </a:solidFill>
+                <a:latin typeface="Arial Unicode MS"/>
+                <a:ea typeface="Arial Unicode MS"/>
+                <a:cs typeface="Arial Unicode MS"/>
+              </a:rPr>
+              <a:t>算完才變準</a:t>
+            </a:r>
+            <a:r>
+              <a:rPr sz="800" lang="zh-TW" dirty="0">
+                <a:solidFill>
+                  <a:srgbClr val="000000"/>
+                </a:solidFill>
+                <a:latin typeface="Arial Unicode MS"/>
+                <a:ea typeface="Arial Unicode MS"/>
+                <a:cs typeface="Arial Unicode MS"/>
+              </a:rPr>
+              <a:t>的。
+</a:t>
+            </a:r>
+          </a:p>
+          <a:p>
+            <a:pPr algn="l">
+              <a:spcBef>
+                <a:spcPts val="0"/>
+              </a:spcBef>
+              <a:spcAft>
+                <a:spcPts val="133"/>
+              </a:spcAft>
+            </a:pPr>
+            <a:r>
+              <a:rPr sz="800" lang="zh-TW" dirty="0">
+                <a:solidFill>
+                  <a:srgbClr val="000000"/>
+                </a:solidFill>
+                <a:latin typeface="Arial Unicode MS"/>
+                <a:ea typeface="Arial Unicode MS"/>
+                <a:cs typeface="Arial Unicode MS"/>
+              </a:rPr>
+              <a:t>這樣算出來的精度，一般是</a:t>
+            </a:r>
+            <a:r>
+              <a:rPr sz="800" b="1" lang="zh-TW" dirty="0">
+                <a:solidFill>
+                  <a:srgbClr val="000000"/>
+                </a:solidFill>
+                <a:latin typeface="Arial Unicode MS"/>
+                <a:ea typeface="Arial Unicode MS"/>
+                <a:cs typeface="Arial Unicode MS"/>
+              </a:rPr>
+              <a:t>兩到十公尺</a:t>
+            </a:r>
+            <a:r>
+              <a:rPr sz="800" lang="zh-TW" dirty="0">
+                <a:solidFill>
+                  <a:srgbClr val="000000"/>
+                </a:solidFill>
+                <a:latin typeface="Arial Unicode MS"/>
+                <a:ea typeface="Arial Unicode MS"/>
+                <a:cs typeface="Arial Unicode MS"/>
+              </a:rPr>
+              <a:t>。對導航夠，開到路口它會叫你右轉。對自駕不夠。右邊那格：一個車道才三點五公尺，兩點五公尺的圈，比車道還大。你知道自己在這條路上，不知道在哪一道。
+</a:t>
+            </a:r>
+          </a:p>
+          <a:p>
+            <a:pPr algn="l">
+              <a:spcBef>
+                <a:spcPts val="0"/>
+              </a:spcBef>
+              <a:spcAft>
+                <a:spcPts val="133"/>
+              </a:spcAft>
+            </a:pPr>
+            <a:r>
+              <a:rPr sz="800" lang="zh-TW" dirty="0">
                 <a:solidFill>
                   <a:srgbClr val="000000"/>
                 </a:solidFill>
@@ -5728,11 +6971,11 @@
                 <a:spcPts val="0"/>
               </a:spcBef>
               <a:spcAft>
-                <a:spcPts val="192"/>
+                <a:spcPts val="183"/>
               </a:spcAft>
             </a:pPr>
             <a:r>
-              <a:rPr sz="1150" lang="zh-TW" dirty="0">
+              <a:rPr sz="1100" lang="zh-TW" dirty="0">
                 <a:solidFill>
                   <a:srgbClr val="000000"/>
                 </a:solidFill>
@@ -5743,7 +6986,7 @@
               <a:t>第一顆，u-blox 的 </a:t>
             </a:r>
             <a:r>
-              <a:rPr sz="1150" b="1" lang="zh-TW" dirty="0">
+              <a:rPr sz="1100" b="1" lang="zh-TW" dirty="0">
                 <a:solidFill>
                   <a:srgbClr val="000000"/>
                 </a:solidFill>
@@ -5754,7 +6997,7 @@
               <a:t>NEO-M8N</a:t>
             </a:r>
             <a:r>
-              <a:rPr sz="1150" lang="zh-TW" dirty="0">
+              <a:rPr sz="1100" lang="zh-TW" dirty="0">
                 <a:solidFill>
                   <a:srgbClr val="000000"/>
                 </a:solidFill>
@@ -5772,11 +7015,11 @@
                 <a:spcPts val="0"/>
               </a:spcBef>
               <a:spcAft>
-                <a:spcPts val="192"/>
+                <a:spcPts val="183"/>
               </a:spcAft>
             </a:pPr>
             <a:r>
-              <a:rPr sz="1150" b="1" lang="zh-TW" dirty="0">
+              <a:rPr sz="1100" b="1" lang="zh-TW" dirty="0">
                 <a:solidFill>
                   <a:srgbClr val="000000"/>
                 </a:solidFill>
@@ -5787,7 +7030,7 @@
               <a:t>Horizontal position accuracy，水平精度，2.5 公尺。</a:t>
             </a:r>
             <a:r>
-              <a:rPr sz="1150" lang="zh-TW" dirty="0">
+              <a:rPr sz="1100" lang="zh-TW" dirty="0">
                 <a:solidFill>
                   <a:srgbClr val="000000"/>
                 </a:solidFill>
@@ -5805,11 +7048,11 @@
                 <a:spcPts val="0"/>
               </a:spcBef>
               <a:spcAft>
-                <a:spcPts val="192"/>
+                <a:spcPts val="183"/>
               </a:spcAft>
             </a:pPr>
             <a:r>
-              <a:rPr sz="1150" lang="zh-TW" dirty="0">
+              <a:rPr sz="1100" lang="zh-TW" dirty="0">
                 <a:solidFill>
                   <a:srgbClr val="000000"/>
                 </a:solidFill>
@@ -5820,7 +7063,7 @@
               <a:t>現在請各位看那個數字右上角的小 3，翻到表下面的</a:t>
             </a:r>
             <a:r>
-              <a:rPr sz="1150" b="1" lang="zh-TW" dirty="0">
+              <a:rPr sz="1100" b="1" lang="zh-TW" dirty="0">
                 <a:solidFill>
                   <a:srgbClr val="000000"/>
                 </a:solidFill>
@@ -5831,7 +7074,7 @@
               <a:t>註腳 3</a:t>
             </a:r>
             <a:r>
-              <a:rPr sz="1150" lang="zh-TW" dirty="0">
+              <a:rPr sz="1100" lang="zh-TW" dirty="0">
                 <a:solidFill>
                   <a:srgbClr val="000000"/>
                 </a:solidFill>
@@ -5842,7 +7085,7 @@
               <a:t>：</a:t>
             </a:r>
             <a:r>
-              <a:rPr sz="1150" b="1" lang="zh-TW" dirty="0">
+              <a:rPr sz="1100" b="1" lang="zh-TW" dirty="0">
                 <a:solidFill>
                   <a:srgbClr val="000000"/>
                 </a:solidFill>
@@ -5853,7 +7096,7 @@
               <a:t>CEP, 50%, 24 hours static, −130 dBm, more than 6 SVs</a:t>
             </a:r>
             <a:r>
-              <a:rPr sz="1150" lang="zh-TW" dirty="0">
+              <a:rPr sz="1100" lang="zh-TW" dirty="0">
                 <a:solidFill>
                   <a:srgbClr val="000000"/>
                 </a:solidFill>
@@ -5871,11 +7114,11 @@
                 <a:spcPts val="0"/>
               </a:spcBef>
               <a:spcAft>
-                <a:spcPts val="192"/>
+                <a:spcPts val="183"/>
               </a:spcAft>
             </a:pPr>
             <a:r>
-              <a:rPr sz="1150" lang="zh-TW" dirty="0">
+              <a:rPr sz="1100" lang="zh-TW" dirty="0">
                 <a:solidFill>
                   <a:srgbClr val="000000"/>
                 </a:solidFill>
@@ -5886,7 +7129,7 @@
               <a:t>一個一個講。</a:t>
             </a:r>
             <a:r>
-              <a:rPr sz="1150" b="1" lang="zh-TW" dirty="0">
+              <a:rPr sz="1100" b="1" lang="zh-TW" dirty="0">
                 <a:solidFill>
                   <a:srgbClr val="000000"/>
                 </a:solidFill>
@@ -5897,7 +7140,7 @@
               <a:t>CEP</a:t>
             </a:r>
             <a:r>
-              <a:rPr sz="1150" lang="zh-TW" dirty="0">
+              <a:rPr sz="1100" lang="zh-TW" dirty="0">
                 <a:solidFill>
                   <a:srgbClr val="000000"/>
                 </a:solidFill>
@@ -5908,7 +7151,7 @@
               <a:t> 是圓機率誤差，</a:t>
             </a:r>
             <a:r>
-              <a:rPr sz="1150" b="1" lang="zh-TW" dirty="0">
+              <a:rPr sz="1100" b="1" lang="zh-TW" dirty="0">
                 <a:solidFill>
                   <a:srgbClr val="000000"/>
                 </a:solidFill>
@@ -5919,18 +7162,18 @@
               <a:t>50%</a:t>
             </a:r>
             <a:r>
-              <a:rPr sz="1150" lang="zh-TW" dirty="0">
-                <a:solidFill>
-                  <a:srgbClr val="000000"/>
-                </a:solidFill>
-                <a:latin typeface="Arial Unicode MS"/>
-                <a:ea typeface="Arial Unicode MS"/>
-                <a:cs typeface="Arial Unicode MS"/>
-              </a:rPr>
-              <a:t> 的意思是：量一千次，有五百次落在這個圈裡，另外五百次在外面。所以 2.5 公尺不是「最多錯 2.5 公尺」，是「一半的時候錯不到 2.5 公尺」。各位還記得上週 OS1 那行 </a:t>
-            </a:r>
-            <a:r>
-              <a:rPr sz="1150" b="1" lang="zh-TW" dirty="0">
+              <a:rPr sz="1100" lang="zh-TW" dirty="0">
+                <a:solidFill>
+                  <a:srgbClr val="000000"/>
+                </a:solidFill>
+                <a:latin typeface="Arial Unicode MS"/>
+                <a:ea typeface="Arial Unicode MS"/>
+                <a:cs typeface="Arial Unicode MS"/>
+              </a:rPr>
+              <a:t> 的意思是：量一千次，有五百次落在這個圈裡，另外五百次在外面。所以 2.5 公尺不是「最多錯 2.5 公尺」，是「一半的時候錯不到 2.5 公尺」。想成射飛鏢：朝靶心射一百支，五十支落在這個圈裡，另外五十支在圈外，圈外的有些可能偏得很遠。各位還記得上週 OS1 那行 </a:t>
+            </a:r>
+            <a:r>
+              <a:rPr sz="1100" b="1" lang="zh-TW" dirty="0">
                 <a:solidFill>
                   <a:srgbClr val="000000"/>
                 </a:solidFill>
@@ -5941,7 +7184,7 @@
               <a:t>&gt;90% detection probability</a:t>
             </a:r>
             <a:r>
-              <a:rPr sz="1150" lang="zh-TW" dirty="0">
+              <a:rPr sz="1100" lang="zh-TW" dirty="0">
                 <a:solidFill>
                   <a:srgbClr val="000000"/>
                 </a:solidFill>
@@ -5959,11 +7202,11 @@
                 <a:spcPts val="0"/>
               </a:spcBef>
               <a:spcAft>
-                <a:spcPts val="192"/>
+                <a:spcPts val="183"/>
               </a:spcAft>
             </a:pPr>
             <a:r>
-              <a:rPr sz="1150" b="1" lang="zh-TW" dirty="0">
+              <a:rPr sz="1100" b="1" lang="zh-TW" dirty="0">
                 <a:solidFill>
                   <a:srgbClr val="000000"/>
                 </a:solidFill>
@@ -5974,7 +7217,7 @@
               <a:t>24 hours static</a:t>
             </a:r>
             <a:r>
-              <a:rPr sz="1150" lang="zh-TW" dirty="0">
+              <a:rPr sz="1100" lang="zh-TW" dirty="0">
                 <a:solidFill>
                   <a:srgbClr val="000000"/>
                 </a:solidFill>
@@ -5985,7 +7228,7 @@
               <a:t>：接收機放著不動，量二十四小時。你在河內的路上以時速四十在跑，條件比這個差。</a:t>
             </a:r>
             <a:r>
-              <a:rPr sz="1150" b="1" lang="zh-TW" dirty="0">
+              <a:rPr sz="1100" b="1" lang="zh-TW" dirty="0">
                 <a:solidFill>
                   <a:srgbClr val="000000"/>
                 </a:solidFill>
@@ -5996,7 +7239,7 @@
               <a:t>more than 6 SVs</a:t>
             </a:r>
             <a:r>
-              <a:rPr sz="1150" lang="zh-TW" dirty="0">
+              <a:rPr sz="1100" lang="zh-TW" dirty="0">
                 <a:solidFill>
                   <a:srgbClr val="000000"/>
                 </a:solidFill>
@@ -6014,11 +7257,11 @@
                 <a:spcPts val="0"/>
               </a:spcBef>
               <a:spcAft>
-                <a:spcPts val="192"/>
+                <a:spcPts val="183"/>
               </a:spcAft>
             </a:pPr>
             <a:r>
-              <a:rPr sz="1150" lang="zh-TW" dirty="0">
+              <a:rPr sz="1100" lang="zh-TW" dirty="0">
                 <a:solidFill>
                   <a:srgbClr val="000000"/>
                 </a:solidFill>
@@ -6029,7 +7272,7 @@
               <a:t>往下，</a:t>
             </a:r>
             <a:r>
-              <a:rPr sz="1150" b="1" lang="zh-TW" dirty="0">
+              <a:rPr sz="1100" b="1" lang="zh-TW" dirty="0">
                 <a:solidFill>
                   <a:srgbClr val="000000"/>
                 </a:solidFill>
@@ -6040,7 +7283,7 @@
               <a:t>更新率 5 Hz</a:t>
             </a:r>
             <a:r>
-              <a:rPr sz="1150" lang="zh-TW" dirty="0">
+              <a:rPr sz="1100" lang="zh-TW" dirty="0">
                 <a:solidFill>
                   <a:srgbClr val="000000"/>
                 </a:solidFill>
@@ -6058,11 +7301,11 @@
                 <a:spcPts val="0"/>
               </a:spcBef>
               <a:spcAft>
-                <a:spcPts val="192"/>
+                <a:spcPts val="183"/>
               </a:spcAft>
             </a:pPr>
             <a:r>
-              <a:rPr sz="1150" b="1" lang="zh-TW" dirty="0">
+              <a:rPr sz="1100" b="1" lang="zh-TW" dirty="0">
                 <a:solidFill>
                   <a:srgbClr val="000000"/>
                 </a:solidFill>
@@ -6073,15 +7316,15 @@
               <a:t>Time-To-First-Fix，Cold start 26 秒。</a:t>
             </a:r>
             <a:r>
-              <a:rPr sz="1150" lang="zh-TW" dirty="0">
-                <a:solidFill>
-                  <a:srgbClr val="000000"/>
-                </a:solidFill>
-                <a:latin typeface="Arial Unicode MS"/>
-                <a:ea typeface="Arial Unicode MS"/>
-                <a:cs typeface="Arial Unicode MS"/>
-              </a:rPr>
-              <a:t>開機之後要二十六秒才有第一個位置，因為要先把衛星的軌道資料收完。手機之所以一打開就有位置，是因為它先用網路把那些資料抓好了。
+              <a:rPr sz="1100" lang="zh-TW" dirty="0">
+                <a:solidFill>
+                  <a:srgbClr val="000000"/>
+                </a:solidFill>
+                <a:latin typeface="Arial Unicode MS"/>
+                <a:ea typeface="Arial Unicode MS"/>
+                <a:cs typeface="Arial Unicode MS"/>
+              </a:rPr>
+              <a:t>開機之後要二十六秒才有第一個位置，因為要先把上一張講的星曆收完。衛星傳資料非常慢，每秒只有五十個位元，整份星曆要二、三十秒才收得完。手機之所以一打開就有位置，是因為它先用網路把那些資料抓好了。
 </a:t>
             </a:r>
           </a:p>
@@ -6091,11 +7334,11 @@
                 <a:spcPts val="0"/>
               </a:spcBef>
               <a:spcAft>
-                <a:spcPts val="192"/>
+                <a:spcPts val="183"/>
               </a:spcAft>
             </a:pPr>
             <a:r>
-              <a:rPr sz="1150" lang="zh-TW" dirty="0">
+              <a:rPr sz="1100" lang="zh-TW" dirty="0">
                 <a:solidFill>
                   <a:srgbClr val="000000"/>
                 </a:solidFill>
@@ -6212,11 +7455,11 @@
                 <a:spcPts val="0"/>
               </a:spcBef>
               <a:spcAft>
-                <a:spcPts val="192"/>
+                <a:spcPts val="142"/>
               </a:spcAft>
             </a:pPr>
             <a:r>
-              <a:rPr sz="1150" lang="zh-TW" dirty="0">
+              <a:rPr sz="850" lang="zh-TW" dirty="0">
                 <a:solidFill>
                   <a:srgbClr val="000000"/>
                 </a:solidFill>
@@ -6227,7 +7470,7 @@
               <a:t>第二顆，同一家公司的 </a:t>
             </a:r>
             <a:r>
-              <a:rPr sz="1150" b="1" lang="zh-TW" dirty="0">
+              <a:rPr sz="850" b="1" lang="zh-TW" dirty="0">
                 <a:solidFill>
                   <a:srgbClr val="000000"/>
                 </a:solidFill>
@@ -6238,7 +7481,7 @@
               <a:t>ZED-F9P</a:t>
             </a:r>
             <a:r>
-              <a:rPr sz="1150" lang="zh-TW" dirty="0">
+              <a:rPr sz="850" lang="zh-TW" dirty="0">
                 <a:solidFill>
                   <a:srgbClr val="000000"/>
                 </a:solidFill>
@@ -6256,11 +7499,11 @@
                 <a:spcPts val="0"/>
               </a:spcBef>
               <a:spcAft>
-                <a:spcPts val="192"/>
+                <a:spcPts val="142"/>
               </a:spcAft>
             </a:pPr>
             <a:r>
-              <a:rPr sz="1150" b="1" lang="zh-TW" dirty="0">
+              <a:rPr sz="850" b="1" lang="zh-TW" dirty="0">
                 <a:solidFill>
                   <a:srgbClr val="000000"/>
                 </a:solidFill>
@@ -6271,7 +7514,7 @@
               <a:t>第一列 PVT，1.5 公尺 CEP。</a:t>
             </a:r>
             <a:r>
-              <a:rPr sz="1150" lang="zh-TW" dirty="0">
+              <a:rPr sz="850" lang="zh-TW" dirty="0">
                 <a:solidFill>
                   <a:srgbClr val="000000"/>
                 </a:solidFill>
@@ -6282,7 +7525,7 @@
               <a:t>這是它自己一顆、沒有任何修正資料的精度。比剛剛那顆好一點，因為它收</a:t>
             </a:r>
             <a:r>
-              <a:rPr sz="1150" b="1" lang="zh-TW" dirty="0">
+              <a:rPr sz="850" b="1" lang="zh-TW" dirty="0">
                 <a:solidFill>
                   <a:srgbClr val="000000"/>
                 </a:solidFill>
@@ -6293,7 +7536,7 @@
               <a:t>兩個頻率</a:t>
             </a:r>
             <a:r>
-              <a:rPr sz="1150" lang="zh-TW" dirty="0">
+              <a:rPr sz="850" lang="zh-TW" dirty="0">
                 <a:solidFill>
                   <a:srgbClr val="000000"/>
                 </a:solidFill>
@@ -6311,11 +7554,11 @@
                 <a:spcPts val="0"/>
               </a:spcBef>
               <a:spcAft>
-                <a:spcPts val="192"/>
+                <a:spcPts val="142"/>
               </a:spcAft>
             </a:pPr>
             <a:r>
-              <a:rPr sz="1150" b="1" lang="zh-TW" dirty="0">
+              <a:rPr sz="850" b="1" lang="zh-TW" dirty="0">
                 <a:solidFill>
                   <a:srgbClr val="000000"/>
                 </a:solidFill>
@@ -6326,7 +7569,7 @@
               <a:t>第三列 RTK，0.01 公尺 + 1 ppm CEP。</a:t>
             </a:r>
             <a:r>
-              <a:rPr sz="1150" lang="zh-TW" dirty="0">
+              <a:rPr sz="850" lang="zh-TW" dirty="0">
                 <a:solidFill>
                   <a:srgbClr val="000000"/>
                 </a:solidFill>
@@ -6337,7 +7580,7 @@
               <a:t>一公分。怎麼從一點五公尺變成一公分？靠一座</a:t>
             </a:r>
             <a:r>
-              <a:rPr sz="1150" b="1" lang="zh-TW" dirty="0">
+              <a:rPr sz="850" b="1" lang="zh-TW" dirty="0">
                 <a:solidFill>
                   <a:srgbClr val="000000"/>
                 </a:solidFill>
@@ -6348,7 +7591,7 @@
               <a:t>基準站</a:t>
             </a:r>
             <a:r>
-              <a:rPr sz="1150" lang="zh-TW" dirty="0">
+              <a:rPr sz="850" lang="zh-TW" dirty="0">
                 <a:solidFill>
                   <a:srgbClr val="000000"/>
                 </a:solidFill>
@@ -6366,11 +7609,11 @@
                 <a:spcPts val="0"/>
               </a:spcBef>
               <a:spcAft>
-                <a:spcPts val="192"/>
+                <a:spcPts val="142"/>
               </a:spcAft>
             </a:pPr>
             <a:r>
-              <a:rPr sz="1150" lang="zh-TW" dirty="0">
+              <a:rPr sz="850" lang="zh-TW" dirty="0">
                 <a:solidFill>
                   <a:srgbClr val="000000"/>
                 </a:solidFill>
@@ -6381,7 +7624,7 @@
               <a:t>想法是這樣：附近放一台位置已經精確知道的接收機，它也在收同樣的衛星，算出來的位置跟真的差多少，它知道。大氣、衛星軌道造成的誤差，在幾十公里內幾乎一樣，所以它把「差多少」廣播出去，車子減掉這個差，誤差就消掉了。這叫 </a:t>
             </a:r>
             <a:r>
-              <a:rPr sz="1150" b="1" lang="zh-TW" dirty="0">
+              <a:rPr sz="850" b="1" lang="zh-TW" dirty="0">
                 <a:solidFill>
                   <a:srgbClr val="000000"/>
                 </a:solidFill>
@@ -6392,7 +7635,7 @@
               <a:t>RTK</a:t>
             </a:r>
             <a:r>
-              <a:rPr sz="1150" lang="zh-TW" dirty="0">
+              <a:rPr sz="850" lang="zh-TW" dirty="0">
                 <a:solidFill>
                   <a:srgbClr val="000000"/>
                 </a:solidFill>
@@ -6410,85 +7653,19 @@
                 <a:spcPts val="0"/>
               </a:spcBef>
               <a:spcAft>
-                <a:spcPts val="192"/>
+                <a:spcPts val="142"/>
               </a:spcAft>
             </a:pPr>
             <a:r>
-              <a:rPr sz="1150" lang="zh-TW" dirty="0">
-                <a:solidFill>
-                  <a:srgbClr val="000000"/>
-                </a:solidFill>
-                <a:latin typeface="Arial Unicode MS"/>
-                <a:ea typeface="Arial Unicode MS"/>
-                <a:cs typeface="Arial Unicode MS"/>
-              </a:rPr>
-              <a:t>那 </a:t>
-            </a:r>
-            <a:r>
-              <a:rPr sz="1150" b="1" lang="zh-TW" dirty="0">
-                <a:solidFill>
-                  <a:srgbClr val="000000"/>
-                </a:solidFill>
-                <a:latin typeface="Arial Unicode MS"/>
-                <a:ea typeface="Arial Unicode MS"/>
-                <a:cs typeface="Arial Unicode MS"/>
-              </a:rPr>
-              <a:t>1 ppm</a:t>
-            </a:r>
-            <a:r>
-              <a:rPr sz="1150" lang="zh-TW" dirty="0">
-                <a:solidFill>
-                  <a:srgbClr val="000000"/>
-                </a:solidFill>
-                <a:latin typeface="Arial Unicode MS"/>
-                <a:ea typeface="Arial Unicode MS"/>
-                <a:cs typeface="Arial Unicode MS"/>
-              </a:rPr>
-              <a:t> 是什麼？ppm 是百萬分之一。離基準站每一公里，再加一公釐。各位看表下面的</a:t>
-            </a:r>
-            <a:r>
-              <a:rPr sz="1150" b="1" lang="zh-TW" dirty="0">
-                <a:solidFill>
-                  <a:srgbClr val="000000"/>
-                </a:solidFill>
-                <a:latin typeface="Arial Unicode MS"/>
-                <a:ea typeface="Arial Unicode MS"/>
-                <a:cs typeface="Arial Unicode MS"/>
-              </a:rPr>
-              <a:t>註腳 8</a:t>
-            </a:r>
-            <a:r>
-              <a:rPr sz="1150" lang="zh-TW" dirty="0">
-                <a:solidFill>
-                  <a:srgbClr val="000000"/>
-                </a:solidFill>
-                <a:latin typeface="Arial Unicode MS"/>
-                <a:ea typeface="Arial Unicode MS"/>
-                <a:cs typeface="Arial Unicode MS"/>
-              </a:rPr>
-              <a:t>：量的時候基準站在一公里外，而且 </a:t>
-            </a:r>
-            <a:r>
-              <a:rPr sz="1150" b="1" lang="zh-TW" dirty="0">
-                <a:solidFill>
-                  <a:srgbClr val="000000"/>
-                </a:solidFill>
-                <a:latin typeface="Arial Unicode MS"/>
-                <a:ea typeface="Arial Unicode MS"/>
-                <a:cs typeface="Arial Unicode MS"/>
-              </a:rPr>
-              <a:t>ppm 只保證到二十公里</a:t>
-            </a:r>
-            <a:r>
-              <a:rPr sz="1150" lang="zh-TW" dirty="0">
-                <a:solidFill>
-                  <a:srgbClr val="000000"/>
-                </a:solidFill>
-                <a:latin typeface="Arial Unicode MS"/>
-                <a:ea typeface="Arial Unicode MS"/>
-                <a:cs typeface="Arial Unicode MS"/>
-              </a:rPr>
-              <a:t>。所以二十公里外，一公分加兩公分，三公分。判讀台就用二十公里算。
+              <a:rPr sz="850" lang="zh-TW" dirty="0">
+                <a:solidFill>
+                  <a:srgbClr val="000000"/>
+                </a:solidFill>
+                <a:latin typeface="Arial Unicode MS"/>
+                <a:ea typeface="Arial Unicode MS"/>
+                <a:cs typeface="Arial Unicode MS"/>
+              </a:rPr>
+              <a:t>打個比方。教室的時鐘快了五分鐘，大家看鐘都會錯五分鐘。如果有一個人拿著很準的手錶，告訴大家「這個鐘快五分鐘」，大家看鐘再減五分鐘就對了。基準站就是那個拿著準手錶的人。
 </a:t>
             </a:r>
           </a:p>
@@ -6498,85 +7675,41 @@
                 <a:spcPts val="0"/>
               </a:spcBef>
               <a:spcAft>
-                <a:spcPts val="192"/>
+                <a:spcPts val="142"/>
               </a:spcAft>
             </a:pPr>
             <a:r>
-              <a:rPr sz="1150" lang="zh-TW" dirty="0">
-                <a:solidFill>
-                  <a:srgbClr val="000000"/>
-                </a:solidFill>
-                <a:latin typeface="Arial Unicode MS"/>
-                <a:ea typeface="Arial Unicode MS"/>
-                <a:cs typeface="Arial Unicode MS"/>
-              </a:rPr>
-              <a:t>誰來當基準站？台灣有 </a:t>
-            </a:r>
-            <a:r>
-              <a:rPr sz="1150" b="1" lang="zh-TW" dirty="0">
-                <a:solidFill>
-                  <a:srgbClr val="000000"/>
-                </a:solidFill>
-                <a:latin typeface="Arial Unicode MS"/>
-                <a:ea typeface="Arial Unicode MS"/>
-                <a:cs typeface="Arial Unicode MS"/>
-              </a:rPr>
-              <a:t>e-GNSS</a:t>
-            </a:r>
-            <a:r>
-              <a:rPr sz="1150" lang="zh-TW" dirty="0">
-                <a:solidFill>
-                  <a:srgbClr val="000000"/>
-                </a:solidFill>
-                <a:latin typeface="Arial Unicode MS"/>
-                <a:ea typeface="Arial Unicode MS"/>
-                <a:cs typeface="Arial Unicode MS"/>
-              </a:rPr>
-              <a:t>，內政部架的全國網路；越南有 </a:t>
-            </a:r>
-            <a:r>
-              <a:rPr sz="1150" b="1" lang="zh-TW" dirty="0">
-                <a:solidFill>
-                  <a:srgbClr val="000000"/>
-                </a:solidFill>
-                <a:latin typeface="Arial Unicode MS"/>
-                <a:ea typeface="Arial Unicode MS"/>
-                <a:cs typeface="Arial Unicode MS"/>
-              </a:rPr>
-              <a:t>VNGEONET</a:t>
-            </a:r>
-            <a:r>
-              <a:rPr sz="1150" lang="zh-TW" dirty="0">
-                <a:solidFill>
-                  <a:srgbClr val="000000"/>
-                </a:solidFill>
-                <a:latin typeface="Arial Unicode MS"/>
-                <a:ea typeface="Arial Unicode MS"/>
-                <a:cs typeface="Arial Unicode MS"/>
-              </a:rPr>
-              <a:t>。訂閱之後用網路收修正資料。所以 RTK 不是買一顆模組就有，是</a:t>
-            </a:r>
-            <a:r>
-              <a:rPr sz="1150" b="1" lang="zh-TW" dirty="0">
-                <a:solidFill>
-                  <a:srgbClr val="000000"/>
-                </a:solidFill>
-                <a:latin typeface="Arial Unicode MS"/>
-                <a:ea typeface="Arial Unicode MS"/>
-                <a:cs typeface="Arial Unicode MS"/>
-              </a:rPr>
-              <a:t>一顆模組加一個訂閱</a:t>
-            </a:r>
-            <a:r>
-              <a:rPr sz="1150" lang="zh-TW" dirty="0">
-                <a:solidFill>
-                  <a:srgbClr val="000000"/>
-                </a:solidFill>
-                <a:latin typeface="Arial Unicode MS"/>
-                <a:ea typeface="Arial Unicode MS"/>
-                <a:cs typeface="Arial Unicode MS"/>
-              </a:rPr>
-              <a:t>。
+              <a:rPr sz="850" lang="zh-TW" dirty="0">
+                <a:solidFill>
+                  <a:srgbClr val="000000"/>
+                </a:solidFill>
+                <a:latin typeface="Arial Unicode MS"/>
+                <a:ea typeface="Arial Unicode MS"/>
+                <a:cs typeface="Arial Unicode MS"/>
+              </a:rPr>
+              <a:t>這件事 u-blox 自己做了一支短片，就是做這顆 ZED-F9P 的公司。</a:t>
+            </a:r>
+            <a:r>
+              <a:rPr sz="850" b="1" lang="zh-TW" dirty="0">
+                <a:solidFill>
+                  <a:srgbClr val="000000"/>
+                </a:solidFill>
+                <a:latin typeface="Arial Unicode MS"/>
+                <a:ea typeface="Arial Unicode MS"/>
+                <a:cs typeface="Arial Unicode MS"/>
+              </a:rPr>
+              <a:t>播到 1:07 就好</a:t>
+            </a:r>
+            <a:r>
+              <a:rPr sz="850" lang="zh-TW" dirty="0">
+                <a:solidFill>
+                  <a:srgbClr val="000000"/>
+                </a:solidFill>
+                <a:latin typeface="Arial Unicode MS"/>
+                <a:ea typeface="Arial Unicode MS"/>
+                <a:cs typeface="Arial Unicode MS"/>
+              </a:rPr>
+              <a:t>，英文，畫面是簡報式的插圖，看圖就懂。
 </a:t>
             </a:r>
           </a:p>
@@ -6586,52 +7719,74 @@
                 <a:spcPts val="0"/>
               </a:spcBef>
               <a:spcAft>
-                <a:spcPts val="192"/>
+                <a:spcPts val="142"/>
               </a:spcAft>
             </a:pPr>
             <a:r>
-              <a:rPr sz="1150" b="1" lang="zh-TW" dirty="0">
-                <a:solidFill>
-                  <a:srgbClr val="000000"/>
-                </a:solidFill>
-                <a:latin typeface="Arial Unicode MS"/>
-                <a:ea typeface="Arial Unicode MS"/>
-                <a:cs typeface="Arial Unicode MS"/>
-              </a:rPr>
-              <a:t>Convergence time，10 秒內</a:t>
-            </a:r>
-            <a:r>
-              <a:rPr sz="1150" lang="zh-TW" dirty="0">
-                <a:solidFill>
-                  <a:srgbClr val="000000"/>
-                </a:solidFill>
-                <a:latin typeface="Arial Unicode MS"/>
-                <a:ea typeface="Arial Unicode MS"/>
-                <a:cs typeface="Arial Unicode MS"/>
-              </a:rPr>
-              <a:t>：修正資料收到之後，要十秒才會「鎖住」到一公分。各位看註腳 6，</a:t>
-            </a:r>
-            <a:r>
-              <a:rPr sz="1150" b="1" lang="zh-TW" dirty="0">
-                <a:solidFill>
-                  <a:srgbClr val="000000"/>
-                </a:solidFill>
-                <a:latin typeface="Arial Unicode MS"/>
-                <a:ea typeface="Arial Unicode MS"/>
-                <a:cs typeface="Arial Unicode MS"/>
-              </a:rPr>
-              <a:t>depends on multipath conditions</a:t>
-            </a:r>
-            <a:r>
-              <a:rPr sz="1150" lang="zh-TW" dirty="0">
-                <a:solidFill>
-                  <a:srgbClr val="000000"/>
-                </a:solidFill>
-                <a:latin typeface="Arial Unicode MS"/>
-                <a:ea typeface="Arial Unicode MS"/>
-                <a:cs typeface="Arial Unicode MS"/>
-              </a:rPr>
-              <a:t>——多路徑。這三個字下一張講，它就是河內那一格變紅的原因。
+              <a:rPr sz="850" b="1" lang="zh-TW" dirty="0">
+                <a:solidFill>
+                  <a:srgbClr val="000000"/>
+                </a:solidFill>
+                <a:latin typeface="Arial Unicode MS"/>
+                <a:ea typeface="Arial Unicode MS"/>
+                <a:cs typeface="Arial Unicode MS"/>
+              </a:rPr>
+              <a:t>0:18</a:t>
+            </a:r>
+            <a:r>
+              <a:rPr sz="850" lang="zh-TW" dirty="0">
+                <a:solidFill>
+                  <a:srgbClr val="000000"/>
+                </a:solidFill>
+                <a:latin typeface="Arial Unicode MS"/>
+                <a:ea typeface="Arial Unicode MS"/>
+                <a:cs typeface="Arial Unicode MS"/>
+              </a:rPr>
+              <a:t> 一個人站在紅圈裡，圈寫二到三公尺，這是一般的 GPS。接著兩個人站得很近，各有一個一樣大的圈，</a:t>
+            </a:r>
+            <a:r>
+              <a:rPr sz="850" b="1" lang="zh-TW" dirty="0">
+                <a:solidFill>
+                  <a:srgbClr val="000000"/>
+                </a:solidFill>
+                <a:latin typeface="Arial Unicode MS"/>
+                <a:ea typeface="Arial Unicode MS"/>
+                <a:cs typeface="Arial Unicode MS"/>
+              </a:rPr>
+              <a:t>0:24</a:t>
+            </a:r>
+            <a:r>
+              <a:rPr sz="850" lang="zh-TW" dirty="0">
+                <a:solidFill>
+                  <a:srgbClr val="000000"/>
+                </a:solidFill>
+                <a:latin typeface="Arial Unicode MS"/>
+                <a:ea typeface="Arial Unicode MS"/>
+                <a:cs typeface="Arial Unicode MS"/>
+              </a:rPr>
+              <a:t> 旁白說兩個人靠得近，誤差幾乎一樣。</a:t>
+            </a:r>
+            <a:r>
+              <a:rPr sz="850" b="1" lang="zh-TW" dirty="0">
+                <a:solidFill>
+                  <a:srgbClr val="000000"/>
+                </a:solidFill>
+                <a:latin typeface="Arial Unicode MS"/>
+                <a:ea typeface="Arial Unicode MS"/>
+                <a:cs typeface="Arial Unicode MS"/>
+              </a:rPr>
+              <a:t>0:50</a:t>
+            </a:r>
+            <a:r>
+              <a:rPr sz="850" lang="zh-TW" dirty="0">
+                <a:solidFill>
+                  <a:srgbClr val="000000"/>
+                </a:solidFill>
+                <a:latin typeface="Arial Unicode MS"/>
+                <a:ea typeface="Arial Unicode MS"/>
+                <a:cs typeface="Arial Unicode MS"/>
+              </a:rPr>
+              <a:t> 其中一個人換成一座基準站，中間一條線寫 Corrections，修正資料，送給旁邊的人。這就是剛剛那個拿準手錶的人。
 </a:t>
             </a:r>
           </a:p>
@@ -6641,11 +7796,264 @@
                 <a:spcPts val="0"/>
               </a:spcBef>
               <a:spcAft>
-                <a:spcPts val="192"/>
+                <a:spcPts val="142"/>
               </a:spcAft>
             </a:pPr>
             <a:r>
-              <a:rPr sz="1150" b="1" lang="zh-TW" dirty="0">
+              <a:rPr sz="850" lang="zh-TW" dirty="0">
+                <a:solidFill>
+                  <a:srgbClr val="000000"/>
+                </a:solidFill>
+                <a:latin typeface="Arial Unicode MS"/>
+                <a:ea typeface="Arial Unicode MS"/>
+                <a:cs typeface="Arial Unicode MS"/>
+              </a:rPr>
+              <a:t>1:07 以後講載波相位，波長十九公分，那是從幾十公分壓到一公分的數學，這堂課不用。最後出現的是兩公分的小紅圈。他推銷的是 NEO-M8P，舊一代的模組，不是今天這顆。
+</a:t>
+            </a:r>
+          </a:p>
+          <a:p>
+            <a:pPr algn="l">
+              <a:spcBef>
+                <a:spcPts val="0"/>
+              </a:spcBef>
+              <a:spcAft>
+                <a:spcPts val="142"/>
+              </a:spcAft>
+            </a:pPr>
+            <a:r>
+              <a:rPr sz="850" lang="zh-TW" dirty="0">
+                <a:solidFill>
+                  <a:srgbClr val="000000"/>
+                </a:solidFill>
+                <a:latin typeface="Arial Unicode MS"/>
+                <a:ea typeface="Arial Unicode MS"/>
+                <a:cs typeface="Arial Unicode MS"/>
+              </a:rPr>
+              <a:t>那 </a:t>
+            </a:r>
+            <a:r>
+              <a:rPr sz="850" b="1" lang="zh-TW" dirty="0">
+                <a:solidFill>
+                  <a:srgbClr val="000000"/>
+                </a:solidFill>
+                <a:latin typeface="Arial Unicode MS"/>
+                <a:ea typeface="Arial Unicode MS"/>
+                <a:cs typeface="Arial Unicode MS"/>
+              </a:rPr>
+              <a:t>1 ppm</a:t>
+            </a:r>
+            <a:r>
+              <a:rPr sz="850" lang="zh-TW" dirty="0">
+                <a:solidFill>
+                  <a:srgbClr val="000000"/>
+                </a:solidFill>
+                <a:latin typeface="Arial Unicode MS"/>
+                <a:ea typeface="Arial Unicode MS"/>
+                <a:cs typeface="Arial Unicode MS"/>
+              </a:rPr>
+              <a:t> 是什麼？ppm 是百萬分之一。離基準站每一公里，再加一公釐。離得愈遠，你頭上的天空和基準站頭上的愈不一樣，就像別棟大樓的鐘，不一定也是快五分鐘。各位看表下面的</a:t>
+            </a:r>
+            <a:r>
+              <a:rPr sz="850" b="1" lang="zh-TW" dirty="0">
+                <a:solidFill>
+                  <a:srgbClr val="000000"/>
+                </a:solidFill>
+                <a:latin typeface="Arial Unicode MS"/>
+                <a:ea typeface="Arial Unicode MS"/>
+                <a:cs typeface="Arial Unicode MS"/>
+              </a:rPr>
+              <a:t>註腳 8</a:t>
+            </a:r>
+            <a:r>
+              <a:rPr sz="850" lang="zh-TW" dirty="0">
+                <a:solidFill>
+                  <a:srgbClr val="000000"/>
+                </a:solidFill>
+                <a:latin typeface="Arial Unicode MS"/>
+                <a:ea typeface="Arial Unicode MS"/>
+                <a:cs typeface="Arial Unicode MS"/>
+              </a:rPr>
+              <a:t>：量的時候基準站在一公里外，而且 </a:t>
+            </a:r>
+            <a:r>
+              <a:rPr sz="850" b="1" lang="zh-TW" dirty="0">
+                <a:solidFill>
+                  <a:srgbClr val="000000"/>
+                </a:solidFill>
+                <a:latin typeface="Arial Unicode MS"/>
+                <a:ea typeface="Arial Unicode MS"/>
+                <a:cs typeface="Arial Unicode MS"/>
+              </a:rPr>
+              <a:t>ppm 只保證到二十公里</a:t>
+            </a:r>
+            <a:r>
+              <a:rPr sz="850" lang="zh-TW" dirty="0">
+                <a:solidFill>
+                  <a:srgbClr val="000000"/>
+                </a:solidFill>
+                <a:latin typeface="Arial Unicode MS"/>
+                <a:ea typeface="Arial Unicode MS"/>
+                <a:cs typeface="Arial Unicode MS"/>
+              </a:rPr>
+              <a:t>。所以二十公里外，一公分加兩公分，三公分。判讀台就用二十公里算。
+</a:t>
+            </a:r>
+          </a:p>
+          <a:p>
+            <a:pPr algn="l">
+              <a:spcBef>
+                <a:spcPts val="0"/>
+              </a:spcBef>
+              <a:spcAft>
+                <a:spcPts val="142"/>
+              </a:spcAft>
+            </a:pPr>
+            <a:r>
+              <a:rPr sz="850" lang="zh-TW" dirty="0">
+                <a:solidFill>
+                  <a:srgbClr val="000000"/>
+                </a:solidFill>
+                <a:latin typeface="Arial Unicode MS"/>
+                <a:ea typeface="Arial Unicode MS"/>
+                <a:cs typeface="Arial Unicode MS"/>
+              </a:rPr>
+              <a:t>誰來當基準站？台灣有 </a:t>
+            </a:r>
+            <a:r>
+              <a:rPr sz="850" b="1" lang="zh-TW" dirty="0">
+                <a:solidFill>
+                  <a:srgbClr val="000000"/>
+                </a:solidFill>
+                <a:latin typeface="Arial Unicode MS"/>
+                <a:ea typeface="Arial Unicode MS"/>
+                <a:cs typeface="Arial Unicode MS"/>
+              </a:rPr>
+              <a:t>e-GNSS</a:t>
+            </a:r>
+            <a:r>
+              <a:rPr sz="850" lang="zh-TW" dirty="0">
+                <a:solidFill>
+                  <a:srgbClr val="000000"/>
+                </a:solidFill>
+                <a:latin typeface="Arial Unicode MS"/>
+                <a:ea typeface="Arial Unicode MS"/>
+                <a:cs typeface="Arial Unicode MS"/>
+              </a:rPr>
+              <a:t>，內政部架的全國網路；越南有 </a:t>
+            </a:r>
+            <a:r>
+              <a:rPr sz="850" b="1" lang="zh-TW" dirty="0">
+                <a:solidFill>
+                  <a:srgbClr val="000000"/>
+                </a:solidFill>
+                <a:latin typeface="Arial Unicode MS"/>
+                <a:ea typeface="Arial Unicode MS"/>
+                <a:cs typeface="Arial Unicode MS"/>
+              </a:rPr>
+              <a:t>VNGEONET</a:t>
+            </a:r>
+            <a:r>
+              <a:rPr sz="850" lang="zh-TW" dirty="0">
+                <a:solidFill>
+                  <a:srgbClr val="000000"/>
+                </a:solidFill>
+                <a:latin typeface="Arial Unicode MS"/>
+                <a:ea typeface="Arial Unicode MS"/>
+                <a:cs typeface="Arial Unicode MS"/>
+              </a:rPr>
+              <a:t>。訂閱之後用網路收修正資料。所以 RTK 不是買一顆模組就有，是</a:t>
+            </a:r>
+            <a:r>
+              <a:rPr sz="850" b="1" lang="zh-TW" dirty="0">
+                <a:solidFill>
+                  <a:srgbClr val="000000"/>
+                </a:solidFill>
+                <a:latin typeface="Arial Unicode MS"/>
+                <a:ea typeface="Arial Unicode MS"/>
+                <a:cs typeface="Arial Unicode MS"/>
+              </a:rPr>
+              <a:t>一顆模組加一個訂閱</a:t>
+            </a:r>
+            <a:r>
+              <a:rPr sz="850" lang="zh-TW" dirty="0">
+                <a:solidFill>
+                  <a:srgbClr val="000000"/>
+                </a:solidFill>
+                <a:latin typeface="Arial Unicode MS"/>
+                <a:ea typeface="Arial Unicode MS"/>
+                <a:cs typeface="Arial Unicode MS"/>
+              </a:rPr>
+              <a:t>。
+</a:t>
+            </a:r>
+          </a:p>
+          <a:p>
+            <a:pPr algn="l">
+              <a:spcBef>
+                <a:spcPts val="0"/>
+              </a:spcBef>
+              <a:spcAft>
+                <a:spcPts val="142"/>
+              </a:spcAft>
+            </a:pPr>
+            <a:r>
+              <a:rPr sz="850" b="1" lang="zh-TW" dirty="0">
+                <a:solidFill>
+                  <a:srgbClr val="000000"/>
+                </a:solidFill>
+                <a:latin typeface="Arial Unicode MS"/>
+                <a:ea typeface="Arial Unicode MS"/>
+                <a:cs typeface="Arial Unicode MS"/>
+              </a:rPr>
+              <a:t>Convergence time，10 秒內</a:t>
+            </a:r>
+            <a:r>
+              <a:rPr sz="850" lang="zh-TW" dirty="0">
+                <a:solidFill>
+                  <a:srgbClr val="000000"/>
+                </a:solidFill>
+                <a:latin typeface="Arial Unicode MS"/>
+                <a:ea typeface="Arial Unicode MS"/>
+                <a:cs typeface="Arial Unicode MS"/>
+              </a:rPr>
+              <a:t>：修正資料收到之後，要十秒才會「鎖住」到一公分。各位看註腳 6，</a:t>
+            </a:r>
+            <a:r>
+              <a:rPr sz="850" b="1" lang="zh-TW" dirty="0">
+                <a:solidFill>
+                  <a:srgbClr val="000000"/>
+                </a:solidFill>
+                <a:latin typeface="Arial Unicode MS"/>
+                <a:ea typeface="Arial Unicode MS"/>
+                <a:cs typeface="Arial Unicode MS"/>
+              </a:rPr>
+              <a:t>depends on multipath conditions</a:t>
+            </a:r>
+            <a:r>
+              <a:rPr sz="850" lang="zh-TW" dirty="0">
+                <a:solidFill>
+                  <a:srgbClr val="000000"/>
+                </a:solidFill>
+                <a:latin typeface="Arial Unicode MS"/>
+                <a:ea typeface="Arial Unicode MS"/>
+                <a:cs typeface="Arial Unicode MS"/>
+              </a:rPr>
+              <a:t>——多路徑。這三個字下一張講，它就是河內那一格變紅的原因。
+</a:t>
+            </a:r>
+          </a:p>
+          <a:p>
+            <a:pPr algn="l">
+              <a:spcBef>
+                <a:spcPts val="0"/>
+              </a:spcBef>
+              <a:spcAft>
+                <a:spcPts val="142"/>
+              </a:spcAft>
+            </a:pPr>
+            <a:r>
+              <a:rPr sz="850" b="1" lang="zh-TW" dirty="0">
                 <a:solidFill>
                   <a:srgbClr val="000000"/>
                 </a:solidFill>
@@ -6656,7 +8064,7 @@
               <a:t>更新率，四系統 RTK 是 8 Hz</a:t>
             </a:r>
             <a:r>
-              <a:rPr sz="1150" lang="zh-TW" dirty="0">
+              <a:rPr sz="850" lang="zh-TW" dirty="0">
                 <a:solidFill>
                   <a:srgbClr val="000000"/>
                 </a:solidFill>
@@ -6773,11 +8181,11 @@
                 <a:spcPts val="0"/>
               </a:spcBef>
               <a:spcAft>
-                <a:spcPts val="200"/>
+                <a:spcPts val="175"/>
               </a:spcAft>
             </a:pPr>
             <a:r>
-              <a:rPr sz="1200" lang="zh-TW" dirty="0">
+              <a:rPr sz="1050" lang="zh-TW" dirty="0">
                 <a:solidFill>
                   <a:srgbClr val="000000"/>
                 </a:solidFill>
@@ -6795,11 +8203,11 @@
                 <a:spcPts val="0"/>
               </a:spcBef>
               <a:spcAft>
-                <a:spcPts val="200"/>
+                <a:spcPts val="175"/>
               </a:spcAft>
             </a:pPr>
             <a:r>
-              <a:rPr sz="1200" b="1" lang="zh-TW" dirty="0">
+              <a:rPr sz="1050" b="1" lang="zh-TW" dirty="0">
                 <a:solidFill>
                   <a:srgbClr val="000000"/>
                 </a:solidFill>
@@ -6810,7 +8218,7 @@
               <a:t>第一個，高樓窄巷。</a:t>
             </a:r>
             <a:r>
-              <a:rPr sz="1200" lang="zh-TW" dirty="0">
+              <a:rPr sz="1050" lang="zh-TW" dirty="0">
                 <a:solidFill>
                   <a:srgbClr val="000000"/>
                 </a:solidFill>
@@ -6821,7 +8229,7 @@
               <a:t>左圖。衛星在左上角，直直打下來的訊號被左邊那棟大樓擋住了。可是右邊那棟大樓的玻璃牆把訊號</a:t>
             </a:r>
             <a:r>
-              <a:rPr sz="1200" b="1" lang="zh-TW" dirty="0">
+              <a:rPr sz="1050" b="1" lang="zh-TW" dirty="0">
                 <a:solidFill>
                   <a:srgbClr val="000000"/>
                 </a:solidFill>
@@ -6832,7 +8240,7 @@
               <a:t>反射</a:t>
             </a:r>
             <a:r>
-              <a:rPr sz="1200" lang="zh-TW" dirty="0">
+              <a:rPr sz="1050" lang="zh-TW" dirty="0">
                 <a:solidFill>
                   <a:srgbClr val="000000"/>
                 </a:solidFill>
@@ -6843,7 +8251,7 @@
               <a:t>過來，接收機收到了。問題是這道訊號</a:t>
             </a:r>
             <a:r>
-              <a:rPr sz="1200" b="1" lang="zh-TW" dirty="0">
+              <a:rPr sz="1050" b="1" lang="zh-TW" dirty="0">
                 <a:solidFill>
                   <a:srgbClr val="000000"/>
                 </a:solidFill>
@@ -6854,18 +8262,18 @@
               <a:t>繞了遠路</a:t>
             </a:r>
             <a:r>
-              <a:rPr sz="1200" lang="zh-TW" dirty="0">
-                <a:solidFill>
-                  <a:srgbClr val="000000"/>
-                </a:solidFill>
-                <a:latin typeface="Arial Unicode MS"/>
-                <a:ea typeface="Arial Unicode MS"/>
-                <a:cs typeface="Arial Unicode MS"/>
-              </a:rPr>
-              <a:t>，接收機不知道，它以為衛星比較遠，算出來的位置就偏了。偏幾十公尺都有可能。這叫</a:t>
-            </a:r>
-            <a:r>
-              <a:rPr sz="1200" b="1" lang="zh-TW" dirty="0">
+              <a:rPr sz="1050" lang="zh-TW" dirty="0">
+                <a:solidFill>
+                  <a:srgbClr val="000000"/>
+                </a:solidFill>
+                <a:latin typeface="Arial Unicode MS"/>
+                <a:ea typeface="Arial Unicode MS"/>
+                <a:cs typeface="Arial Unicode MS"/>
+              </a:rPr>
+              <a:t>，接收機不知道，它以為衛星比較遠，算出來的位置就偏了。就像看鏡子裡的人：你會覺得他站在鏡子後面，比他真正的位置遠。偏幾十公尺都有可能。這叫</a:t>
+            </a:r>
+            <a:r>
+              <a:rPr sz="1050" b="1" lang="zh-TW" dirty="0">
                 <a:solidFill>
                   <a:srgbClr val="000000"/>
                 </a:solidFill>
@@ -6876,7 +8284,7 @@
               <a:t>多路徑</a:t>
             </a:r>
             <a:r>
-              <a:rPr sz="1200" lang="zh-TW" dirty="0">
+              <a:rPr sz="1050" lang="zh-TW" dirty="0">
                 <a:solidFill>
                   <a:srgbClr val="000000"/>
                 </a:solidFill>
@@ -6894,63 +8302,41 @@
                 <a:spcPts val="0"/>
               </a:spcBef>
               <a:spcAft>
-                <a:spcPts val="200"/>
+                <a:spcPts val="175"/>
               </a:spcAft>
             </a:pPr>
             <a:r>
-              <a:rPr sz="1200" lang="zh-TW" dirty="0">
-                <a:solidFill>
-                  <a:srgbClr val="000000"/>
-                </a:solidFill>
-                <a:latin typeface="Arial Unicode MS"/>
-                <a:ea typeface="Arial Unicode MS"/>
-                <a:cs typeface="Arial Unicode MS"/>
-              </a:rPr>
-              <a:t>更麻煩的是</a:t>
-            </a:r>
-            <a:r>
-              <a:rPr sz="1200" b="1" lang="zh-TW" dirty="0">
-                <a:solidFill>
-                  <a:srgbClr val="000000"/>
-                </a:solidFill>
-                <a:latin typeface="Arial Unicode MS"/>
-                <a:ea typeface="Arial Unicode MS"/>
-                <a:cs typeface="Arial Unicode MS"/>
-              </a:rPr>
-              <a:t>它不知道自己錯了</a:t>
-            </a:r>
-            <a:r>
-              <a:rPr sz="1200" lang="zh-TW" dirty="0">
-                <a:solidFill>
-                  <a:srgbClr val="000000"/>
-                </a:solidFill>
-                <a:latin typeface="Arial Unicode MS"/>
-                <a:ea typeface="Arial Unicode MS"/>
-                <a:cs typeface="Arial Unicode MS"/>
-              </a:rPr>
-              <a:t>。它照樣回報一個位置，看起來很正常。河內的老城區，巷子三公尺寬、兩邊五層樓，就是多路徑最嚴重的地方。RTK 在那裡會</a:t>
-            </a:r>
-            <a:r>
-              <a:rPr sz="1200" b="1" lang="zh-TW" dirty="0">
-                <a:solidFill>
-                  <a:srgbClr val="000000"/>
-                </a:solidFill>
-                <a:latin typeface="Arial Unicode MS"/>
-                <a:ea typeface="Arial Unicode MS"/>
-                <a:cs typeface="Arial Unicode MS"/>
-              </a:rPr>
-              <a:t>失鎖</a:t>
-            </a:r>
-            <a:r>
-              <a:rPr sz="1200" lang="zh-TW" dirty="0">
-                <a:solidFill>
-                  <a:srgbClr val="000000"/>
-                </a:solidFill>
-                <a:latin typeface="Arial Unicode MS"/>
-                <a:ea typeface="Arial Unicode MS"/>
-                <a:cs typeface="Arial Unicode MS"/>
-              </a:rPr>
-              <a:t>，退回一點五公尺，而且要重新收斂十秒。本課在河內那個情境假設有十秒算不出可靠的位置，判讀台上 ZED-F9P 河內那一格是紅的，原因就是這個。
+              <a:rPr sz="1050" lang="zh-TW" dirty="0">
+                <a:solidFill>
+                  <a:srgbClr val="000000"/>
+                </a:solidFill>
+                <a:latin typeface="Arial Unicode MS"/>
+                <a:ea typeface="Arial Unicode MS"/>
+                <a:cs typeface="Arial Unicode MS"/>
+              </a:rPr>
+              <a:t>播左下那支 Garmin 的影片，中文，</a:t>
+            </a:r>
+            <a:r>
+              <a:rPr sz="1050" b="1" lang="zh-TW" dirty="0">
+                <a:solidFill>
+                  <a:srgbClr val="000000"/>
+                </a:solidFill>
+                <a:latin typeface="Arial Unicode MS"/>
+                <a:ea typeface="Arial Unicode MS"/>
+                <a:cs typeface="Arial Unicode MS"/>
+              </a:rPr>
+              <a:t>從 1:08 播到 1:28</a:t>
+            </a:r>
+            <a:r>
+              <a:rPr sz="1050" lang="zh-TW" dirty="0">
+                <a:solidFill>
+                  <a:srgbClr val="000000"/>
+                </a:solidFill>
+                <a:latin typeface="Arial Unicode MS"/>
+                <a:ea typeface="Arial Unicode MS"/>
+                <a:cs typeface="Arial Unicode MS"/>
+              </a:rPr>
+              <a:t>，二十秒。畫面上兩棟大樓，訊號在中間彈來彈去。旁白說：大樓的玻璃會反射訊號，造成訊號延遲；大樓本身也會擋住訊號；樹木茂密的地方也一樣。「延遲」就是剛剛講的繞了遠路。
 </a:t>
             </a:r>
           </a:p>
@@ -6960,52 +8346,63 @@
                 <a:spcPts val="0"/>
               </a:spcBef>
               <a:spcAft>
-                <a:spcPts val="200"/>
+                <a:spcPts val="175"/>
               </a:spcAft>
             </a:pPr>
             <a:r>
-              <a:rPr sz="1200" b="1" lang="zh-TW" dirty="0">
-                <a:solidFill>
-                  <a:srgbClr val="000000"/>
-                </a:solidFill>
-                <a:latin typeface="Arial Unicode MS"/>
-                <a:ea typeface="Arial Unicode MS"/>
-                <a:cs typeface="Arial Unicode MS"/>
-              </a:rPr>
-              <a:t>第二個，隧道。</a:t>
-            </a:r>
-            <a:r>
-              <a:rPr sz="1200" lang="zh-TW" dirty="0">
-                <a:solidFill>
-                  <a:srgbClr val="000000"/>
-                </a:solidFill>
-                <a:latin typeface="Arial Unicode MS"/>
-                <a:ea typeface="Arial Unicode MS"/>
-                <a:cs typeface="Arial Unicode MS"/>
-              </a:rPr>
-              <a:t>右圖，什麼都收不到，不是誤差大，是</a:t>
-            </a:r>
-            <a:r>
-              <a:rPr sz="1200" b="1" lang="zh-TW" dirty="0">
-                <a:solidFill>
-                  <a:srgbClr val="000000"/>
-                </a:solidFill>
-                <a:latin typeface="Arial Unicode MS"/>
-                <a:ea typeface="Arial Unicode MS"/>
-                <a:cs typeface="Arial Unicode MS"/>
-              </a:rPr>
-              <a:t>沒有</a:t>
-            </a:r>
-            <a:r>
-              <a:rPr sz="1200" lang="zh-TW" dirty="0">
-                <a:solidFill>
-                  <a:srgbClr val="000000"/>
-                </a:solidFill>
-                <a:latin typeface="Arial Unicode MS"/>
-                <a:ea typeface="Arial Unicode MS"/>
-                <a:cs typeface="Arial Unicode MS"/>
-              </a:rPr>
-              <a:t>。地下停車場也一樣。雪山隧道十二點九公里，時速八十要跑九分多鐘，這九分鐘車子完全不知道自己在哪。
+              <a:rPr sz="1050" lang="zh-TW" dirty="0">
+                <a:solidFill>
+                  <a:srgbClr val="000000"/>
+                </a:solidFill>
+                <a:latin typeface="Arial Unicode MS"/>
+                <a:ea typeface="Arial Unicode MS"/>
+                <a:cs typeface="Arial Unicode MS"/>
+              </a:rPr>
+              <a:t>更麻煩的是</a:t>
+            </a:r>
+            <a:r>
+              <a:rPr sz="1050" b="1" lang="zh-TW" dirty="0">
+                <a:solidFill>
+                  <a:srgbClr val="000000"/>
+                </a:solidFill>
+                <a:latin typeface="Arial Unicode MS"/>
+                <a:ea typeface="Arial Unicode MS"/>
+                <a:cs typeface="Arial Unicode MS"/>
+              </a:rPr>
+              <a:t>它不知道自己錯了</a:t>
+            </a:r>
+            <a:r>
+              <a:rPr sz="1050" lang="zh-TW" dirty="0">
+                <a:solidFill>
+                  <a:srgbClr val="000000"/>
+                </a:solidFill>
+                <a:latin typeface="Arial Unicode MS"/>
+                <a:ea typeface="Arial Unicode MS"/>
+                <a:cs typeface="Arial Unicode MS"/>
+              </a:rPr>
+              <a:t>。它照樣回報一個位置，看起來很正常。河內的老城區，巷子三公尺寬、兩邊五層樓，就是多路徑最嚴重的地方。RTK 在那裡會</a:t>
+            </a:r>
+            <a:r>
+              <a:rPr sz="1050" b="1" lang="zh-TW" dirty="0">
+                <a:solidFill>
+                  <a:srgbClr val="000000"/>
+                </a:solidFill>
+                <a:latin typeface="Arial Unicode MS"/>
+                <a:ea typeface="Arial Unicode MS"/>
+                <a:cs typeface="Arial Unicode MS"/>
+              </a:rPr>
+              <a:t>失鎖</a:t>
+            </a:r>
+            <a:r>
+              <a:rPr sz="1050" lang="zh-TW" dirty="0">
+                <a:solidFill>
+                  <a:srgbClr val="000000"/>
+                </a:solidFill>
+                <a:latin typeface="Arial Unicode MS"/>
+                <a:ea typeface="Arial Unicode MS"/>
+                <a:cs typeface="Arial Unicode MS"/>
+              </a:rPr>
+              <a:t>，退回一點五公尺，而且要重新收斂十秒。本課在河內那個情境假設有十秒算不出可靠的位置，判讀台上 ZED-F9P 河內那一格是紅的，原因就是這個。
 </a:t>
             </a:r>
           </a:p>
@@ -7015,11 +8412,198 @@
                 <a:spcPts val="0"/>
               </a:spcBef>
               <a:spcAft>
-                <a:spcPts val="200"/>
+                <a:spcPts val="175"/>
               </a:spcAft>
             </a:pPr>
             <a:r>
-              <a:rPr sz="1200" lang="zh-TW" dirty="0">
+              <a:rPr sz="1050" b="1" lang="zh-TW" dirty="0">
+                <a:solidFill>
+                  <a:srgbClr val="000000"/>
+                </a:solidFill>
+                <a:latin typeface="Arial Unicode MS"/>
+                <a:ea typeface="Arial Unicode MS"/>
+                <a:cs typeface="Arial Unicode MS"/>
+              </a:rPr>
+              <a:t>第二個，隧道。</a:t>
+            </a:r>
+            <a:r>
+              <a:rPr sz="1050" lang="zh-TW" dirty="0">
+                <a:solidFill>
+                  <a:srgbClr val="000000"/>
+                </a:solidFill>
+                <a:latin typeface="Arial Unicode MS"/>
+                <a:ea typeface="Arial Unicode MS"/>
+                <a:cs typeface="Arial Unicode MS"/>
+              </a:rPr>
+              <a:t>右圖，什麼都收不到，不是誤差大，是</a:t>
+            </a:r>
+            <a:r>
+              <a:rPr sz="1050" b="1" lang="zh-TW" dirty="0">
+                <a:solidFill>
+                  <a:srgbClr val="000000"/>
+                </a:solidFill>
+                <a:latin typeface="Arial Unicode MS"/>
+                <a:ea typeface="Arial Unicode MS"/>
+                <a:cs typeface="Arial Unicode MS"/>
+              </a:rPr>
+              <a:t>沒有</a:t>
+            </a:r>
+            <a:r>
+              <a:rPr sz="1050" lang="zh-TW" dirty="0">
+                <a:solidFill>
+                  <a:srgbClr val="000000"/>
+                </a:solidFill>
+                <a:latin typeface="Arial Unicode MS"/>
+                <a:ea typeface="Arial Unicode MS"/>
+                <a:cs typeface="Arial Unicode MS"/>
+              </a:rPr>
+              <a:t>。就像手機到了地下室沒有訊號。地下停車場也一樣。雪山隧道十二點九公里，時速八十要跑九分多鐘，這九分鐘車子完全不知道自己在哪。
+</a:t>
+            </a:r>
+          </a:p>
+          <a:p>
+            <a:pPr algn="l">
+              <a:spcBef>
+                <a:spcPts val="0"/>
+              </a:spcBef>
+              <a:spcAft>
+                <a:spcPts val="175"/>
+              </a:spcAft>
+            </a:pPr>
+            <a:r>
+              <a:rPr sz="1050" lang="zh-TW" dirty="0">
+                <a:solidFill>
+                  <a:srgbClr val="000000"/>
+                </a:solidFill>
+                <a:latin typeface="Arial Unicode MS"/>
+                <a:ea typeface="Arial Unicode MS"/>
+                <a:cs typeface="Arial Unicode MS"/>
+              </a:rPr>
+              <a:t>播右下那支，五十二秒，</a:t>
+            </a:r>
+            <a:r>
+              <a:rPr sz="1050" b="1" lang="zh-TW" dirty="0">
+                <a:solidFill>
+                  <a:srgbClr val="000000"/>
+                </a:solidFill>
+                <a:latin typeface="Arial Unicode MS"/>
+                <a:ea typeface="Arial Unicode MS"/>
+                <a:cs typeface="Arial Unicode MS"/>
+              </a:rPr>
+              <a:t>沒有旁白</a:t>
+            </a:r>
+            <a:r>
+              <a:rPr sz="1050" lang="zh-TW" dirty="0">
+                <a:solidFill>
+                  <a:srgbClr val="000000"/>
+                </a:solidFill>
+                <a:latin typeface="Arial Unicode MS"/>
+                <a:ea typeface="Arial Unicode MS"/>
+                <a:cs typeface="Arial Unicode MS"/>
+              </a:rPr>
+              <a:t>，只有音樂和英文字卡，是一家做車用追蹤器的公司的廣告。一台車開進地下停車場。右上角的地圖有兩條線：</a:t>
+            </a:r>
+            <a:r>
+              <a:rPr sz="1050" b="1" lang="zh-TW" dirty="0">
+                <a:solidFill>
+                  <a:srgbClr val="000000"/>
+                </a:solidFill>
+                <a:latin typeface="Arial Unicode MS"/>
+                <a:ea typeface="Arial Unicode MS"/>
+                <a:cs typeface="Arial Unicode MS"/>
+              </a:rPr>
+              <a:t>紅線</a:t>
+            </a:r>
+            <a:r>
+              <a:rPr sz="1050" lang="zh-TW" dirty="0">
+                <a:solidFill>
+                  <a:srgbClr val="000000"/>
+                </a:solidFill>
+                <a:latin typeface="Arial Unicode MS"/>
+                <a:ea typeface="Arial Unicode MS"/>
+                <a:cs typeface="Arial Unicode MS"/>
+              </a:rPr>
+              <a:t>是一般的追蹤器，標示寫 GPS signal lost，到入口就斷了；</a:t>
+            </a:r>
+            <a:r>
+              <a:rPr sz="1050" b="1" lang="zh-TW" dirty="0">
+                <a:solidFill>
+                  <a:srgbClr val="000000"/>
+                </a:solidFill>
+                <a:latin typeface="Arial Unicode MS"/>
+                <a:ea typeface="Arial Unicode MS"/>
+                <a:cs typeface="Arial Unicode MS"/>
+              </a:rPr>
+              <a:t>藍線</a:t>
+            </a:r>
+            <a:r>
+              <a:rPr sz="1050" lang="zh-TW" dirty="0">
+                <a:solidFill>
+                  <a:srgbClr val="000000"/>
+                </a:solidFill>
+                <a:latin typeface="Arial Unicode MS"/>
+                <a:ea typeface="Arial Unicode MS"/>
+                <a:cs typeface="Arial Unicode MS"/>
+              </a:rPr>
+              <a:t>是他們的產品，一直畫進停車場裡面。字卡說它用的是 </a:t>
+            </a:r>
+            <a:r>
+              <a:rPr sz="1050" b="1" lang="zh-TW" dirty="0">
+                <a:solidFill>
+                  <a:srgbClr val="000000"/>
+                </a:solidFill>
+                <a:latin typeface="Arial Unicode MS"/>
+                <a:ea typeface="Arial Unicode MS"/>
+                <a:cs typeface="Arial Unicode MS"/>
+              </a:rPr>
+              <a:t>accelerometer and gyroscope</a:t>
+            </a:r>
+            <a:r>
+              <a:rPr sz="1050" lang="zh-TW" dirty="0">
+                <a:solidFill>
+                  <a:srgbClr val="000000"/>
+                </a:solidFill>
+                <a:latin typeface="Arial Unicode MS"/>
+                <a:ea typeface="Arial Unicode MS"/>
+                <a:cs typeface="Arial Unicode MS"/>
+              </a:rPr>
+              <a:t>，加速度計和陀螺儀，從最後一個已知的位置往下推。
+</a:t>
+            </a:r>
+          </a:p>
+          <a:p>
+            <a:pPr algn="l">
+              <a:spcBef>
+                <a:spcPts val="0"/>
+              </a:spcBef>
+              <a:spcAft>
+                <a:spcPts val="175"/>
+              </a:spcAft>
+            </a:pPr>
+            <a:r>
+              <a:rPr sz="1050" lang="zh-TW" dirty="0">
+                <a:solidFill>
+                  <a:srgbClr val="000000"/>
+                </a:solidFill>
+                <a:latin typeface="Arial Unicode MS"/>
+                <a:ea typeface="Arial Unicode MS"/>
+                <a:cs typeface="Arial Unicode MS"/>
+              </a:rPr>
+              <a:t>播完問一句：「藍線能一直畫下去嗎？能撐多久？」先不要回答，這就是第三段要算的。
+</a:t>
+            </a:r>
+          </a:p>
+          <a:p>
+            <a:pPr algn="l">
+              <a:spcBef>
+                <a:spcPts val="0"/>
+              </a:spcBef>
+              <a:spcAft>
+                <a:spcPts val="175"/>
+              </a:spcAft>
+            </a:pPr>
+            <a:r>
+              <a:rPr sz="1050" lang="zh-TW" dirty="0">
                 <a:solidFill>
                   <a:srgbClr val="000000"/>
                 </a:solidFill>
@@ -7030,7 +8614,7 @@
               <a:t>所以自駕車不能只靠衛星。它是「</a:t>
             </a:r>
             <a:r>
-              <a:rPr sz="1200" b="1" lang="zh-TW" dirty="0">
+              <a:rPr sz="1050" b="1" lang="zh-TW" dirty="0">
                 <a:solidFill>
                   <a:srgbClr val="000000"/>
                 </a:solidFill>
@@ -7041,7 +8625,7 @@
               <a:t>偶爾給你一個絕對位置</a:t>
             </a:r>
             <a:r>
-              <a:rPr sz="1200" lang="zh-TW" dirty="0">
+              <a:rPr sz="1050" lang="zh-TW" dirty="0">
                 <a:solidFill>
                   <a:srgbClr val="000000"/>
                 </a:solidFill>
@@ -7577,7 +9161,7 @@
                 <a:ea typeface="微軟正黑體" pitchFamily="34" charset="-122"/>
                 <a:cs typeface="微軟正黑體" pitchFamily="34" charset="-120"/>
               </a:rPr>
-              <a:t>三種不是用來看的感測器：超音波、衛星定位、慣性</a:t>
+              <a:t>三種不是用來看的感測器：超音波、衛星定位、IMU</a:t>
             </a:r>
             <a:endParaRPr lang="en-US" sz="2290" dirty="0"/>
           </a:p>
@@ -7659,7 +9243,7 @@
                 <a:ea typeface="微軟正黑體" pitchFamily="34" charset="-122"/>
                 <a:cs typeface="微軟正黑體" pitchFamily="34" charset="-120"/>
               </a:rPr>
-              <a:t>超音波只看兩公尺・衛星告訴你在哪・慣性告訴你轉了多少</a:t>
+              <a:t>超音波只看兩公尺・衛星告訴你在哪・IMU 告訴你轉了多少</a:t>
             </a:r>
             <a:endParaRPr lang="en-US" sz="1250" dirty="0"/>
           </a:p>
@@ -7985,7 +9569,7 @@
                 <a:ea typeface="微軟正黑體" pitchFamily="34" charset="-122"/>
                 <a:cs typeface="微軟正黑體" pitchFamily="34" charset="-120"/>
               </a:rPr>
-              <a:t>慣性 IMU：不靠外界，所以會飄</a:t>
+              <a:t>IMU：不靠外界，所以會飄</a:t>
             </a:r>
             <a:endParaRPr lang="en-US" sz="2900" dirty="0"/>
           </a:p>
@@ -8287,7 +9871,166 @@
       </p:sp>
       <p:sp>
         <p:nvSpPr>
-          <p:cNvPr id="6" name="Text 3"/>
+          <p:cNvPr id="6" name="Shape 3"/>
+          <p:cNvSpPr/>
+          <p:nvPr/>
+        </p:nvSpPr>
+        <p:spPr>
+          <a:xfrm>
+            <a:off x="539496" y="3595624"/>
+            <a:ext cx="219456" cy="219456"/>
+          </a:xfrm>
+          <a:prstGeom prst="ellipse">
+            <a:avLst/>
+          </a:prstGeom>
+          <a:solidFill>
+            <a:srgbClr val="D9463E"/>
+          </a:solidFill>
+          <a:ln/>
+        </p:spPr>
+      </p:sp>
+      <p:sp>
+        <p:nvSpPr>
+          <p:cNvPr id="7" name="Text 4"/>
+          <p:cNvSpPr txBox="1"/>
+          <p:nvPr/>
+        </p:nvSpPr>
+        <p:spPr>
+          <a:xfrm>
+            <a:off x="539496" y="3623056"/>
+            <a:ext cx="219456" cy="164592"/>
+          </a:xfrm>
+          <a:prstGeom prst="rect">
+            <a:avLst/>
+          </a:prstGeom>
+          <a:noFill/>
+          <a:ln/>
+        </p:spPr>
+        <p:txBody>
+          <a:bodyPr wrap="square" lIns="0" tIns="0" rIns="0" bIns="0" rtlCol="0" anchor="ctr"/>
+          <a:lstStyle/>
+          <a:p>
+            <a:pPr algn="ctr" indent="0" marL="0">
+              <a:buNone/>
+            </a:pPr>
+            <a:r>
+              <a:rPr lang="en-US" sz="750" b="1" dirty="0">
+                <a:solidFill>
+                  <a:srgbClr val="FFFFFF"/>
+                </a:solidFill>
+                <a:latin typeface="Arial" pitchFamily="34" charset="0"/>
+                <a:ea typeface="Arial" pitchFamily="34" charset="-122"/>
+                <a:cs typeface="Arial" pitchFamily="34" charset="-120"/>
+              </a:rPr>
+              <a:t>▶</a:t>
+            </a:r>
+            <a:endParaRPr lang="en-US" sz="750" dirty="0"/>
+          </a:p>
+        </p:txBody>
+      </p:sp>
+      <p:sp>
+        <p:nvSpPr>
+          <p:cNvPr id="8" name="Text 5"/>
+          <p:cNvSpPr txBox="1"/>
+          <p:nvPr/>
+        </p:nvSpPr>
+        <p:spPr>
+          <a:xfrm>
+            <a:off x="832104" y="3549904"/>
+            <a:ext cx="2779776" cy="310896"/>
+          </a:xfrm>
+          <a:prstGeom prst="rect">
+            <a:avLst/>
+          </a:prstGeom>
+          <a:noFill/>
+          <a:ln/>
+        </p:spPr>
+        <p:txBody>
+          <a:bodyPr wrap="square" lIns="0" tIns="0" rIns="0" bIns="0" rtlCol="0" anchor="ctr"/>
+          <a:lstStyle/>
+          <a:p>
+            <a:pPr indent="0" marL="0">
+              <a:lnSpc>
+                <a:spcPct val="100000"/>
+              </a:lnSpc>
+              <a:buNone/>
+            </a:pPr>
+            <a:r>
+              <a:rPr lang="en-US" sz="850" b="1" u="sng" dirty="0">
+                <a:solidFill>
+                  <a:srgbClr val="0B1F3A"/>
+                </a:solidFill>
+                <a:latin typeface="Arial" pitchFamily="34" charset="0"/>
+                <a:ea typeface="Arial" pitchFamily="34" charset="-122"/>
+                <a:cs typeface="Arial" pitchFamily="34" charset="-120"/>
+                <a:hlinkClick r:id="rId2" invalidUrl="" action="" tgtFrame="" tooltip="" history="1" highlightClick="0" endSnd="0">
+                  <a:extLst>
+                    <a:ext uri="{A12FA001-AC4F-418D-AE19-62706E023703}">
+                      <ahyp:hlinkClr xmlns:ahyp="http://schemas.microsoft.com/office/drawing/2018/hyperlinkcolor" val="tx"/>
+                    </a:ext>
+                  </a:extLst>
+                </a:hlinkClick>
+              </a:rPr>
+              <a:t>Video: bên trong con quay MEMS (Bosch)　1:30</a:t>
+            </a:r>
+            <a:endParaRPr lang="en-US" sz="850" dirty="0"/>
+          </a:p>
+          <a:p>
+            <a:pPr indent="0" marL="0">
+              <a:lnSpc>
+                <a:spcPct val="100000"/>
+              </a:lnSpc>
+              <a:buNone/>
+            </a:pPr>
+            <a:r>
+              <a:rPr lang="en-US" sz="850" b="1" u="sng" dirty="0">
+                <a:solidFill>
+                  <a:srgbClr val="0B1F3A"/>
+                </a:solidFill>
+                <a:latin typeface="微軟正黑體" pitchFamily="34" charset="0"/>
+                <a:ea typeface="微軟正黑體" pitchFamily="34" charset="-122"/>
+                <a:cs typeface="微軟正黑體" pitchFamily="34" charset="-120"/>
+                <a:hlinkClick r:id="rId2" invalidUrl="" action="" tgtFrame="" tooltip="" history="1" highlightClick="0" endSnd="0">
+                  <a:extLst>
+                    <a:ext uri="{A12FA001-AC4F-418D-AE19-62706E023703}">
+                      <ahyp:hlinkClr xmlns:ahyp="http://schemas.microsoft.com/office/drawing/2018/hyperlinkcolor" val="tx"/>
+                    </a:ext>
+                  </a:extLst>
+                </a:hlinkClick>
+              </a:rPr>
+              <a:t>影片：Bosch 車用陀螺儀裡面　</a:t>
+            </a:r>
+            <a:pPr indent="0" marL="0">
+              <a:lnSpc>
+                <a:spcPct val="100000"/>
+              </a:lnSpc>
+              <a:buNone/>
+            </a:pPr>
+            <a:r>
+              <a:rPr lang="en-US" sz="850" u="sng" dirty="0">
+                <a:solidFill>
+                  <a:srgbClr val="1F6FBF"/>
+                </a:solidFill>
+                <a:latin typeface="Arial" pitchFamily="34" charset="0"/>
+                <a:ea typeface="Arial" pitchFamily="34" charset="-122"/>
+                <a:cs typeface="Arial" pitchFamily="34" charset="-120"/>
+                <a:hlinkClick r:id="rId2" invalidUrl="" action="" tgtFrame="" tooltip="" history="1" highlightClick="0" endSnd="0">
+                  <a:extLst>
+                    <a:ext uri="{A12FA001-AC4F-418D-AE19-62706E023703}">
+                      <ahyp:hlinkClr xmlns:ahyp="http://schemas.microsoft.com/office/drawing/2018/hyperlinkcolor" val="tx"/>
+                    </a:ext>
+                  </a:extLst>
+                </a:hlinkClick>
+              </a:rPr>
+              <a:t>youtu.be/XsjvaYAFN1M</a:t>
+            </a:r>
+            <a:endParaRPr lang="en-US" sz="850" dirty="0"/>
+          </a:p>
+        </p:txBody>
+      </p:sp>
+      <p:sp>
+        <p:nvSpPr>
+          <p:cNvPr id="9" name="Text 6"/>
           <p:cNvSpPr txBox="1"/>
           <p:nvPr/>
         </p:nvSpPr>
@@ -8349,7 +10092,7 @@
       </p:sp>
       <p:sp>
         <p:nvSpPr>
-          <p:cNvPr id="7" name="Shape 4"/>
+          <p:cNvPr id="10" name="Shape 7"/>
           <p:cNvSpPr/>
           <p:nvPr/>
         </p:nvSpPr>
@@ -8371,7 +10114,7 @@
       </p:sp>
       <p:sp>
         <p:nvSpPr>
-          <p:cNvPr id="8" name="Text 5"/>
+          <p:cNvPr id="11" name="Text 8"/>
           <p:cNvSpPr txBox="1"/>
           <p:nvPr/>
         </p:nvSpPr>
@@ -8433,7 +10176,7 @@
       </p:sp>
       <p:sp>
         <p:nvSpPr>
-          <p:cNvPr id="9" name="Text 6"/>
+          <p:cNvPr id="12" name="Text 9"/>
           <p:cNvSpPr txBox="1"/>
           <p:nvPr/>
         </p:nvSpPr>
@@ -8495,7 +10238,7 @@
       </p:sp>
       <p:sp>
         <p:nvSpPr>
-          <p:cNvPr id="10" name="Shape 7"/>
+          <p:cNvPr id="13" name="Shape 10"/>
           <p:cNvSpPr/>
           <p:nvPr/>
         </p:nvSpPr>
@@ -8517,7 +10260,7 @@
       </p:sp>
       <p:sp>
         <p:nvSpPr>
-          <p:cNvPr id="11" name="Text 8"/>
+          <p:cNvPr id="14" name="Text 11"/>
           <p:cNvSpPr txBox="1"/>
           <p:nvPr/>
         </p:nvSpPr>
@@ -8579,7 +10322,7 @@
       </p:sp>
       <p:sp>
         <p:nvSpPr>
-          <p:cNvPr id="12" name="Text 9"/>
+          <p:cNvPr id="15" name="Text 12"/>
           <p:cNvSpPr txBox="1"/>
           <p:nvPr/>
         </p:nvSpPr>
@@ -8641,7 +10384,7 @@
       </p:sp>
       <p:sp>
         <p:nvSpPr>
-          <p:cNvPr id="13" name="Shape 10"/>
+          <p:cNvPr id="16" name="Shape 13"/>
           <p:cNvSpPr/>
           <p:nvPr/>
         </p:nvSpPr>
@@ -8663,7 +10406,7 @@
       </p:sp>
       <p:sp>
         <p:nvSpPr>
-          <p:cNvPr id="14" name="Text 11"/>
+          <p:cNvPr id="17" name="Text 14"/>
           <p:cNvSpPr txBox="1"/>
           <p:nvPr/>
         </p:nvSpPr>
@@ -8725,7 +10468,7 @@
       </p:sp>
       <p:sp>
         <p:nvSpPr>
-          <p:cNvPr id="15" name="Text 12"/>
+          <p:cNvPr id="18" name="Text 15"/>
           <p:cNvSpPr txBox="1"/>
           <p:nvPr/>
         </p:nvSpPr>
@@ -8787,7 +10530,7 @@
       </p:sp>
       <p:sp>
         <p:nvSpPr>
-          <p:cNvPr id="16" name="Shape 13"/>
+          <p:cNvPr id="19" name="Shape 16"/>
           <p:cNvSpPr/>
           <p:nvPr/>
         </p:nvSpPr>
@@ -8814,7 +10557,7 @@
       </p:sp>
       <p:sp>
         <p:nvSpPr>
-          <p:cNvPr id="17" name="Text 14"/>
+          <p:cNvPr id="20" name="Text 17"/>
           <p:cNvSpPr txBox="1"/>
           <p:nvPr/>
         </p:nvSpPr>
@@ -8874,16 +10617,139 @@
           </a:p>
         </p:txBody>
       </p:sp>
+      <p:sp>
+        <p:nvSpPr>
+          <p:cNvPr id="21" name="Shape 18"/>
+          <p:cNvSpPr/>
+          <p:nvPr/>
+        </p:nvSpPr>
+        <p:spPr>
+          <a:xfrm>
+            <a:off x="5912860" y="365760"/>
+            <a:ext cx="2728220" cy="310896"/>
+          </a:xfrm>
+          <a:prstGeom prst="roundRect">
+            <a:avLst>
+              <a:gd name="adj" fmla="val 20588"/>
+            </a:avLst>
+          </a:prstGeom>
+          <a:solidFill>
+            <a:srgbClr val="EAF6F4"/>
+          </a:solidFill>
+          <a:ln w="9525">
+            <a:solidFill>
+              <a:srgbClr val="9FD6CE"/>
+            </a:solidFill>
+            <a:prstDash val="solid"/>
+          </a:ln>
+        </p:spPr>
+      </p:sp>
+      <p:sp>
+        <p:nvSpPr>
+          <p:cNvPr id="22" name="Text 19"/>
+          <p:cNvSpPr txBox="1"/>
+          <p:nvPr/>
+        </p:nvSpPr>
+        <p:spPr>
+          <a:xfrm>
+            <a:off x="6040876" y="384048"/>
+            <a:ext cx="2545340" cy="274320"/>
+          </a:xfrm>
+          <a:prstGeom prst="rect">
+            <a:avLst/>
+          </a:prstGeom>
+          <a:noFill/>
+          <a:ln/>
+        </p:spPr>
+        <p:txBody>
+          <a:bodyPr wrap="square" lIns="0" tIns="0" rIns="0" bIns="0" rtlCol="0" anchor="ctr"/>
+          <a:lstStyle/>
+          <a:p>
+            <a:pPr indent="0" marL="0">
+              <a:lnSpc>
+                <a:spcPct val="100000"/>
+              </a:lnSpc>
+              <a:buNone/>
+            </a:pPr>
+            <a:r>
+              <a:rPr lang="en-US" sz="950" b="1" dirty="0">
+                <a:solidFill>
+                  <a:srgbClr val="007F72"/>
+                </a:solidFill>
+                <a:latin typeface="Arial" pitchFamily="34" charset="0"/>
+                <a:ea typeface="Arial" pitchFamily="34" charset="-122"/>
+                <a:cs typeface="Arial" pitchFamily="34" charset="-120"/>
+              </a:rPr>
+              <a:t>Ví dụ · </a:t>
+            </a:r>
+            <a:pPr indent="0" marL="0">
+              <a:lnSpc>
+                <a:spcPct val="100000"/>
+              </a:lnSpc>
+              <a:buNone/>
+            </a:pPr>
+            <a:r>
+              <a:rPr lang="en-US" sz="950" dirty="0">
+                <a:solidFill>
+                  <a:srgbClr val="1A2733"/>
+                </a:solidFill>
+                <a:latin typeface="Arial" pitchFamily="34" charset="0"/>
+                <a:ea typeface="Arial" pitchFamily="34" charset="-122"/>
+                <a:cs typeface="Arial" pitchFamily="34" charset="-120"/>
+              </a:rPr>
+              <a:t>không ai đứng lên, cân vẫn chỉ 2 kg</a:t>
+            </a:r>
+            <a:endParaRPr lang="en-US" sz="950" dirty="0"/>
+          </a:p>
+          <a:p>
+            <a:pPr indent="0" marL="0">
+              <a:lnSpc>
+                <a:spcPct val="100000"/>
+              </a:lnSpc>
+              <a:buNone/>
+            </a:pPr>
+            <a:r>
+              <a:rPr lang="en-US" sz="900" b="1" dirty="0">
+                <a:solidFill>
+                  <a:srgbClr val="007F72"/>
+                </a:solidFill>
+                <a:latin typeface="微軟正黑體" pitchFamily="34" charset="0"/>
+                <a:ea typeface="微軟正黑體" pitchFamily="34" charset="-122"/>
+                <a:cs typeface="微軟正黑體" pitchFamily="34" charset="-120"/>
+              </a:rPr>
+              <a:t>例子・</a:t>
+            </a:r>
+            <a:pPr indent="0" marL="0">
+              <a:lnSpc>
+                <a:spcPct val="100000"/>
+              </a:lnSpc>
+              <a:buNone/>
+            </a:pPr>
+            <a:r>
+              <a:rPr lang="en-US" sz="900" dirty="0">
+                <a:solidFill>
+                  <a:srgbClr val="5F7183"/>
+                </a:solidFill>
+                <a:latin typeface="微軟正黑體" pitchFamily="34" charset="0"/>
+                <a:ea typeface="微軟正黑體" pitchFamily="34" charset="-122"/>
+                <a:cs typeface="微軟正黑體" pitchFamily="34" charset="-120"/>
+              </a:rPr>
+              <a:t>沒人站上去，體重計也顯示 2 公斤</a:t>
+            </a:r>
+            <a:endParaRPr lang="en-US" sz="950" dirty="0"/>
+          </a:p>
+        </p:txBody>
+      </p:sp>
       <p:pic>
         <p:nvPicPr>
-          <p:cNvPr id="19" name="Image 1" descr="/Users/tsengchenghsun/Class/carClass/Claude outputs/第六週(10-15)/src/logo.png">    </p:cNvPr>
+          <p:cNvPr id="24" name="Image 1" descr="/Users/tsengchenghsun/Class/carClass/Claude outputs/第六週(10-15)/src/logo.png">    </p:cNvPr>
           <p:cNvPicPr>
             <a:picLocks noChangeAspect="1"/>
           </p:cNvPicPr>
           <p:nvPr/>
         </p:nvPicPr>
         <p:blipFill>
-          <a:blip r:embed="rId2"/>
+          <a:blip r:embed="rId3"/>
           <a:stretch>
             <a:fillRect/>
           </a:stretch>
@@ -8900,7 +10766,7 @@
       </p:pic>
       <p:sp>
         <p:nvSpPr>
-          <p:cNvPr id="20" name="Text 15"/>
+          <p:cNvPr id="25" name="Text 20"/>
           <p:cNvSpPr txBox="1"/>
           <p:nvPr/>
         </p:nvSpPr>
@@ -8939,7 +10805,7 @@
       </p:sp>
       <p:sp>
         <p:nvSpPr>
-          <p:cNvPr id="21" name="Text 16"/>
+          <p:cNvPr id="26" name="Text 21"/>
           <p:cNvSpPr txBox="1"/>
           <p:nvPr/>
         </p:nvSpPr>
@@ -9782,9 +11648,132 @@
           </a:p>
         </p:txBody>
       </p:sp>
+      <p:sp>
+        <p:nvSpPr>
+          <p:cNvPr id="20" name="Shape 16"/>
+          <p:cNvSpPr/>
+          <p:nvPr/>
+        </p:nvSpPr>
+        <p:spPr>
+          <a:xfrm>
+            <a:off x="4771511" y="365760"/>
+            <a:ext cx="3869569" cy="310896"/>
+          </a:xfrm>
+          <a:prstGeom prst="roundRect">
+            <a:avLst>
+              <a:gd name="adj" fmla="val 20588"/>
+            </a:avLst>
+          </a:prstGeom>
+          <a:solidFill>
+            <a:srgbClr val="EAF6F4"/>
+          </a:solidFill>
+          <a:ln w="9525">
+            <a:solidFill>
+              <a:srgbClr val="9FD6CE"/>
+            </a:solidFill>
+            <a:prstDash val="solid"/>
+          </a:ln>
+        </p:spPr>
+      </p:sp>
+      <p:sp>
+        <p:nvSpPr>
+          <p:cNvPr id="21" name="Text 17"/>
+          <p:cNvSpPr txBox="1"/>
+          <p:nvPr/>
+        </p:nvSpPr>
+        <p:spPr>
+          <a:xfrm>
+            <a:off x="4899527" y="384048"/>
+            <a:ext cx="3686689" cy="274320"/>
+          </a:xfrm>
+          <a:prstGeom prst="rect">
+            <a:avLst/>
+          </a:prstGeom>
+          <a:noFill/>
+          <a:ln/>
+        </p:spPr>
+        <p:txBody>
+          <a:bodyPr wrap="square" lIns="0" tIns="0" rIns="0" bIns="0" rtlCol="0" anchor="ctr"/>
+          <a:lstStyle/>
+          <a:p>
+            <a:pPr indent="0" marL="0">
+              <a:lnSpc>
+                <a:spcPct val="100000"/>
+              </a:lnSpc>
+              <a:buNone/>
+            </a:pPr>
+            <a:r>
+              <a:rPr lang="en-US" sz="950" b="1" dirty="0">
+                <a:solidFill>
+                  <a:srgbClr val="007F72"/>
+                </a:solidFill>
+                <a:latin typeface="Arial" pitchFamily="34" charset="0"/>
+                <a:ea typeface="Arial" pitchFamily="34" charset="-122"/>
+                <a:cs typeface="Arial" pitchFamily="34" charset="-120"/>
+              </a:rPr>
+              <a:t>Ví dụ · </a:t>
+            </a:r>
+            <a:pPr indent="0" marL="0">
+              <a:lnSpc>
+                <a:spcPct val="100000"/>
+              </a:lnSpc>
+              <a:buNone/>
+            </a:pPr>
+            <a:r>
+              <a:rPr lang="en-US" sz="950" dirty="0">
+                <a:solidFill>
+                  <a:srgbClr val="1A2733"/>
+                </a:solidFill>
+                <a:latin typeface="Arial" pitchFamily="34" charset="0"/>
+                <a:ea typeface="Arial" pitchFamily="34" charset="-122"/>
+                <a:cs typeface="Arial" pitchFamily="34" charset="-120"/>
+              </a:rPr>
+              <a:t>đồng hồ rẻ lệch 1 phút/ngày, đồng hồ tốt vài giây/tháng</a:t>
+            </a:r>
+            <a:endParaRPr lang="en-US" sz="950" dirty="0"/>
+          </a:p>
+          <a:p>
+            <a:pPr indent="0" marL="0">
+              <a:lnSpc>
+                <a:spcPct val="100000"/>
+              </a:lnSpc>
+              <a:buNone/>
+            </a:pPr>
+            <a:r>
+              <a:rPr lang="en-US" sz="900" b="1" dirty="0">
+                <a:solidFill>
+                  <a:srgbClr val="007F72"/>
+                </a:solidFill>
+                <a:latin typeface="微軟正黑體" pitchFamily="34" charset="0"/>
+                <a:ea typeface="微軟正黑體" pitchFamily="34" charset="-122"/>
+                <a:cs typeface="微軟正黑體" pitchFamily="34" charset="-120"/>
+              </a:rPr>
+              <a:t>例子・</a:t>
+            </a:r>
+            <a:pPr indent="0" marL="0">
+              <a:lnSpc>
+                <a:spcPct val="100000"/>
+              </a:lnSpc>
+              <a:buNone/>
+            </a:pPr>
+            <a:r>
+              <a:rPr lang="en-US" sz="900" dirty="0">
+                <a:solidFill>
+                  <a:srgbClr val="5F7183"/>
+                </a:solidFill>
+                <a:latin typeface="微軟正黑體" pitchFamily="34" charset="0"/>
+                <a:ea typeface="微軟正黑體" pitchFamily="34" charset="-122"/>
+                <a:cs typeface="微軟正黑體" pitchFamily="34" charset="-120"/>
+              </a:rPr>
+              <a:t>便宜的錶一天差一分鐘，好錶一個月才差幾秒</a:t>
+            </a:r>
+            <a:endParaRPr lang="en-US" sz="950" dirty="0"/>
+          </a:p>
+        </p:txBody>
+      </p:sp>
       <p:pic>
         <p:nvPicPr>
-          <p:cNvPr id="21" name="Image 2" descr="/Users/tsengchenghsun/Class/carClass/Claude outputs/第六週(10-15)/src/logo.png">    </p:cNvPr>
+          <p:cNvPr id="23" name="Image 2" descr="/Users/tsengchenghsun/Class/carClass/Claude outputs/第六週(10-15)/src/logo.png">    </p:cNvPr>
           <p:cNvPicPr>
             <a:picLocks noChangeAspect="1"/>
           </p:cNvPicPr>
@@ -9808,7 +11797,7 @@
       </p:pic>
       <p:sp>
         <p:nvSpPr>
-          <p:cNvPr id="22" name="Text 16"/>
+          <p:cNvPr id="24" name="Text 18"/>
           <p:cNvSpPr txBox="1"/>
           <p:nvPr/>
         </p:nvSpPr>
@@ -9847,7 +11836,7 @@
       </p:sp>
       <p:sp>
         <p:nvSpPr>
-          <p:cNvPr id="23" name="Text 17"/>
+          <p:cNvPr id="25" name="Text 19"/>
           <p:cNvSpPr txBox="1"/>
           <p:nvPr/>
         </p:nvSpPr>
@@ -11579,9 +13568,132 @@
           </a:p>
         </p:txBody>
       </p:sp>
+      <p:sp>
+        <p:nvSpPr>
+          <p:cNvPr id="5" name="Shape 2"/>
+          <p:cNvSpPr/>
+          <p:nvPr/>
+        </p:nvSpPr>
+        <p:spPr>
+          <a:xfrm>
+            <a:off x="502920" y="4076024"/>
+            <a:ext cx="4554379" cy="310896"/>
+          </a:xfrm>
+          <a:prstGeom prst="roundRect">
+            <a:avLst>
+              <a:gd name="adj" fmla="val 20588"/>
+            </a:avLst>
+          </a:prstGeom>
+          <a:solidFill>
+            <a:srgbClr val="EAF6F4"/>
+          </a:solidFill>
+          <a:ln w="9525">
+            <a:solidFill>
+              <a:srgbClr val="9FD6CE"/>
+            </a:solidFill>
+            <a:prstDash val="solid"/>
+          </a:ln>
+        </p:spPr>
+      </p:sp>
+      <p:sp>
+        <p:nvSpPr>
+          <p:cNvPr id="6" name="Text 3"/>
+          <p:cNvSpPr txBox="1"/>
+          <p:nvPr/>
+        </p:nvSpPr>
+        <p:spPr>
+          <a:xfrm>
+            <a:off x="630936" y="4094312"/>
+            <a:ext cx="4371499" cy="274320"/>
+          </a:xfrm>
+          <a:prstGeom prst="rect">
+            <a:avLst/>
+          </a:prstGeom>
+          <a:noFill/>
+          <a:ln/>
+        </p:spPr>
+        <p:txBody>
+          <a:bodyPr wrap="square" lIns="0" tIns="0" rIns="0" bIns="0" rtlCol="0" anchor="ctr"/>
+          <a:lstStyle/>
+          <a:p>
+            <a:pPr indent="0" marL="0">
+              <a:lnSpc>
+                <a:spcPct val="100000"/>
+              </a:lnSpc>
+              <a:buNone/>
+            </a:pPr>
+            <a:r>
+              <a:rPr lang="en-US" sz="950" b="1" dirty="0">
+                <a:solidFill>
+                  <a:srgbClr val="007F72"/>
+                </a:solidFill>
+                <a:latin typeface="Arial" pitchFamily="34" charset="0"/>
+                <a:ea typeface="Arial" pitchFamily="34" charset="-122"/>
+                <a:cs typeface="Arial" pitchFamily="34" charset="-120"/>
+              </a:rPr>
+              <a:t>Ví dụ · </a:t>
+            </a:r>
+            <a:pPr indent="0" marL="0">
+              <a:lnSpc>
+                <a:spcPct val="100000"/>
+              </a:lnSpc>
+              <a:buNone/>
+            </a:pPr>
+            <a:r>
+              <a:rPr lang="en-US" sz="950" dirty="0">
+                <a:solidFill>
+                  <a:srgbClr val="1A2733"/>
+                </a:solidFill>
+                <a:latin typeface="Arial" pitchFamily="34" charset="0"/>
+                <a:ea typeface="Arial" pitchFamily="34" charset="-122"/>
+                <a:cs typeface="Arial" pitchFamily="34" charset="-120"/>
+              </a:rPr>
+              <a:t>hai chiếc đồng hồ đều có mặt 12 giờ; khác ở chỗ chạy đúng hay không</a:t>
+            </a:r>
+            <a:endParaRPr lang="en-US" sz="950" dirty="0"/>
+          </a:p>
+          <a:p>
+            <a:pPr indent="0" marL="0">
+              <a:lnSpc>
+                <a:spcPct val="100000"/>
+              </a:lnSpc>
+              <a:buNone/>
+            </a:pPr>
+            <a:r>
+              <a:rPr lang="en-US" sz="900" b="1" dirty="0">
+                <a:solidFill>
+                  <a:srgbClr val="007F72"/>
+                </a:solidFill>
+                <a:latin typeface="微軟正黑體" pitchFamily="34" charset="0"/>
+                <a:ea typeface="微軟正黑體" pitchFamily="34" charset="-122"/>
+                <a:cs typeface="微軟正黑體" pitchFamily="34" charset="-120"/>
+              </a:rPr>
+              <a:t>例子・</a:t>
+            </a:r>
+            <a:pPr indent="0" marL="0">
+              <a:lnSpc>
+                <a:spcPct val="100000"/>
+              </a:lnSpc>
+              <a:buNone/>
+            </a:pPr>
+            <a:r>
+              <a:rPr lang="en-US" sz="900" dirty="0">
+                <a:solidFill>
+                  <a:srgbClr val="5F7183"/>
+                </a:solidFill>
+                <a:latin typeface="微軟正黑體" pitchFamily="34" charset="0"/>
+                <a:ea typeface="微軟正黑體" pitchFamily="34" charset="-122"/>
+                <a:cs typeface="微軟正黑體" pitchFamily="34" charset="-120"/>
+              </a:rPr>
+              <a:t>兩支錶的錶面都是 12 小時，差在走得準不準</a:t>
+            </a:r>
+            <a:endParaRPr lang="en-US" sz="950" dirty="0"/>
+          </a:p>
+        </p:txBody>
+      </p:sp>
       <p:pic>
         <p:nvPicPr>
-          <p:cNvPr id="6" name="Image 0" descr="/Users/tsengchenghsun/Class/carClass/Claude outputs/第六週(10-15)/src/logo.png">    </p:cNvPr>
+          <p:cNvPr id="8" name="Image 0" descr="/Users/tsengchenghsun/Class/carClass/Claude outputs/第六週(10-15)/src/logo.png">    </p:cNvPr>
           <p:cNvPicPr>
             <a:picLocks noChangeAspect="1"/>
           </p:cNvPicPr>
@@ -11605,7 +13717,7 @@
       </p:pic>
       <p:sp>
         <p:nvSpPr>
-          <p:cNvPr id="7" name="Text 2"/>
+          <p:cNvPr id="9" name="Text 4"/>
           <p:cNvSpPr txBox="1"/>
           <p:nvPr/>
         </p:nvSpPr>
@@ -11644,7 +13756,7 @@
       </p:sp>
       <p:sp>
         <p:nvSpPr>
-          <p:cNvPr id="8" name="Text 3"/>
+          <p:cNvPr id="10" name="Text 5"/>
           <p:cNvSpPr txBox="1"/>
           <p:nvPr/>
         </p:nvSpPr>
@@ -12029,9 +14141,132 @@
           </a:p>
         </p:txBody>
       </p:sp>
+      <p:sp>
+        <p:nvSpPr>
+          <p:cNvPr id="9" name="Shape 6"/>
+          <p:cNvSpPr/>
+          <p:nvPr/>
+        </p:nvSpPr>
+        <p:spPr>
+          <a:xfrm>
+            <a:off x="4486173" y="365760"/>
+            <a:ext cx="4154907" cy="310896"/>
+          </a:xfrm>
+          <a:prstGeom prst="roundRect">
+            <a:avLst>
+              <a:gd name="adj" fmla="val 20588"/>
+            </a:avLst>
+          </a:prstGeom>
+          <a:solidFill>
+            <a:srgbClr val="EAF6F4"/>
+          </a:solidFill>
+          <a:ln w="9525">
+            <a:solidFill>
+              <a:srgbClr val="9FD6CE"/>
+            </a:solidFill>
+            <a:prstDash val="solid"/>
+          </a:ln>
+        </p:spPr>
+      </p:sp>
+      <p:sp>
+        <p:nvSpPr>
+          <p:cNvPr id="10" name="Text 7"/>
+          <p:cNvSpPr txBox="1"/>
+          <p:nvPr/>
+        </p:nvSpPr>
+        <p:spPr>
+          <a:xfrm>
+            <a:off x="4614189" y="384048"/>
+            <a:ext cx="3972027" cy="274320"/>
+          </a:xfrm>
+          <a:prstGeom prst="rect">
+            <a:avLst/>
+          </a:prstGeom>
+          <a:noFill/>
+          <a:ln/>
+        </p:spPr>
+        <p:txBody>
+          <a:bodyPr wrap="square" lIns="0" tIns="0" rIns="0" bIns="0" rtlCol="0" anchor="ctr"/>
+          <a:lstStyle/>
+          <a:p>
+            <a:pPr indent="0" marL="0">
+              <a:lnSpc>
+                <a:spcPct val="100000"/>
+              </a:lnSpc>
+              <a:buNone/>
+            </a:pPr>
+            <a:r>
+              <a:rPr lang="en-US" sz="950" b="1" dirty="0">
+                <a:solidFill>
+                  <a:srgbClr val="007F72"/>
+                </a:solidFill>
+                <a:latin typeface="Arial" pitchFamily="34" charset="0"/>
+                <a:ea typeface="Arial" pitchFamily="34" charset="-122"/>
+                <a:cs typeface="Arial" pitchFamily="34" charset="-120"/>
+              </a:rPr>
+              <a:t>Ví dụ · </a:t>
+            </a:r>
+            <a:pPr indent="0" marL="0">
+              <a:lnSpc>
+                <a:spcPct val="100000"/>
+              </a:lnSpc>
+              <a:buNone/>
+            </a:pPr>
+            <a:r>
+              <a:rPr lang="en-US" sz="950" dirty="0">
+                <a:solidFill>
+                  <a:srgbClr val="1A2733"/>
+                </a:solidFill>
+                <a:latin typeface="Arial" pitchFamily="34" charset="0"/>
+                <a:ea typeface="Arial" pitchFamily="34" charset="-122"/>
+                <a:cs typeface="Arial" pitchFamily="34" charset="-120"/>
+              </a:rPr>
+              <a:t>nhắm mắt đi thẳng: vài bước đầu không sao, càng đi càng lệch</a:t>
+            </a:r>
+            <a:endParaRPr lang="en-US" sz="950" dirty="0"/>
+          </a:p>
+          <a:p>
+            <a:pPr indent="0" marL="0">
+              <a:lnSpc>
+                <a:spcPct val="100000"/>
+              </a:lnSpc>
+              <a:buNone/>
+            </a:pPr>
+            <a:r>
+              <a:rPr lang="en-US" sz="900" b="1" dirty="0">
+                <a:solidFill>
+                  <a:srgbClr val="007F72"/>
+                </a:solidFill>
+                <a:latin typeface="微軟正黑體" pitchFamily="34" charset="0"/>
+                <a:ea typeface="微軟正黑體" pitchFamily="34" charset="-122"/>
+                <a:cs typeface="微軟正黑體" pitchFamily="34" charset="-120"/>
+              </a:rPr>
+              <a:t>例子・</a:t>
+            </a:r>
+            <a:pPr indent="0" marL="0">
+              <a:lnSpc>
+                <a:spcPct val="100000"/>
+              </a:lnSpc>
+              <a:buNone/>
+            </a:pPr>
+            <a:r>
+              <a:rPr lang="en-US" sz="900" dirty="0">
+                <a:solidFill>
+                  <a:srgbClr val="5F7183"/>
+                </a:solidFill>
+                <a:latin typeface="微軟正黑體" pitchFamily="34" charset="0"/>
+                <a:ea typeface="微軟正黑體" pitchFamily="34" charset="-122"/>
+                <a:cs typeface="微軟正黑體" pitchFamily="34" charset="-120"/>
+              </a:rPr>
+              <a:t>閉著眼睛走直線：前幾步沒事，越走越偏</a:t>
+            </a:r>
+            <a:endParaRPr lang="en-US" sz="950" dirty="0"/>
+          </a:p>
+        </p:txBody>
+      </p:sp>
       <p:pic>
         <p:nvPicPr>
-          <p:cNvPr id="10" name="Image 1" descr="/Users/tsengchenghsun/Class/carClass/Claude outputs/第六週(10-15)/src/logo.png">    </p:cNvPr>
+          <p:cNvPr id="12" name="Image 1" descr="/Users/tsengchenghsun/Class/carClass/Claude outputs/第六週(10-15)/src/logo.png">    </p:cNvPr>
           <p:cNvPicPr>
             <a:picLocks noChangeAspect="1"/>
           </p:cNvPicPr>
@@ -12055,7 +14290,7 @@
       </p:pic>
       <p:sp>
         <p:nvSpPr>
-          <p:cNvPr id="11" name="Text 6"/>
+          <p:cNvPr id="13" name="Text 8"/>
           <p:cNvSpPr txBox="1"/>
           <p:nvPr/>
         </p:nvSpPr>
@@ -12094,7 +14329,7 @@
       </p:sp>
       <p:sp>
         <p:nvSpPr>
-          <p:cNvPr id="12" name="Text 7"/>
+          <p:cNvPr id="14" name="Text 9"/>
           <p:cNvSpPr txBox="1"/>
           <p:nvPr/>
         </p:nvSpPr>
@@ -12479,9 +14714,132 @@
           </a:p>
         </p:txBody>
       </p:sp>
+      <p:sp>
+        <p:nvSpPr>
+          <p:cNvPr id="9" name="Shape 6"/>
+          <p:cNvSpPr/>
+          <p:nvPr/>
+        </p:nvSpPr>
+        <p:spPr>
+          <a:xfrm>
+            <a:off x="5285118" y="365760"/>
+            <a:ext cx="3355962" cy="310896"/>
+          </a:xfrm>
+          <a:prstGeom prst="roundRect">
+            <a:avLst>
+              <a:gd name="adj" fmla="val 20588"/>
+            </a:avLst>
+          </a:prstGeom>
+          <a:solidFill>
+            <a:srgbClr val="EAF6F4"/>
+          </a:solidFill>
+          <a:ln w="9525">
+            <a:solidFill>
+              <a:srgbClr val="9FD6CE"/>
+            </a:solidFill>
+            <a:prstDash val="solid"/>
+          </a:ln>
+        </p:spPr>
+      </p:sp>
+      <p:sp>
+        <p:nvSpPr>
+          <p:cNvPr id="10" name="Text 7"/>
+          <p:cNvSpPr txBox="1"/>
+          <p:nvPr/>
+        </p:nvSpPr>
+        <p:spPr>
+          <a:xfrm>
+            <a:off x="5413134" y="384048"/>
+            <a:ext cx="3173082" cy="274320"/>
+          </a:xfrm>
+          <a:prstGeom prst="rect">
+            <a:avLst/>
+          </a:prstGeom>
+          <a:noFill/>
+          <a:ln/>
+        </p:spPr>
+        <p:txBody>
+          <a:bodyPr wrap="square" lIns="0" tIns="0" rIns="0" bIns="0" rtlCol="0" anchor="ctr"/>
+          <a:lstStyle/>
+          <a:p>
+            <a:pPr indent="0" marL="0">
+              <a:lnSpc>
+                <a:spcPct val="100000"/>
+              </a:lnSpc>
+              <a:buNone/>
+            </a:pPr>
+            <a:r>
+              <a:rPr lang="en-US" sz="950" b="1" dirty="0">
+                <a:solidFill>
+                  <a:srgbClr val="007F72"/>
+                </a:solidFill>
+                <a:latin typeface="Arial" pitchFamily="34" charset="0"/>
+                <a:ea typeface="Arial" pitchFamily="34" charset="-122"/>
+                <a:cs typeface="Arial" pitchFamily="34" charset="-120"/>
+              </a:rPr>
+              <a:t>Ví dụ · </a:t>
+            </a:r>
+            <a:pPr indent="0" marL="0">
+              <a:lnSpc>
+                <a:spcPct val="100000"/>
+              </a:lnSpc>
+              <a:buNone/>
+            </a:pPr>
+            <a:r>
+              <a:rPr lang="en-US" sz="950" dirty="0">
+                <a:solidFill>
+                  <a:srgbClr val="1A2733"/>
+                </a:solidFill>
+                <a:latin typeface="Arial" pitchFamily="34" charset="0"/>
+                <a:ea typeface="Arial" pitchFamily="34" charset="-122"/>
+                <a:cs typeface="Arial" pitchFamily="34" charset="-120"/>
+              </a:rPr>
+              <a:t>vừa đi vừa chụp ảnh toàn cảnh, ảnh ghép bị méo</a:t>
+            </a:r>
+            <a:endParaRPr lang="en-US" sz="950" dirty="0"/>
+          </a:p>
+          <a:p>
+            <a:pPr indent="0" marL="0">
+              <a:lnSpc>
+                <a:spcPct val="100000"/>
+              </a:lnSpc>
+              <a:buNone/>
+            </a:pPr>
+            <a:r>
+              <a:rPr lang="en-US" sz="900" b="1" dirty="0">
+                <a:solidFill>
+                  <a:srgbClr val="007F72"/>
+                </a:solidFill>
+                <a:latin typeface="微軟正黑體" pitchFamily="34" charset="0"/>
+                <a:ea typeface="微軟正黑體" pitchFamily="34" charset="-122"/>
+                <a:cs typeface="微軟正黑體" pitchFamily="34" charset="-120"/>
+              </a:rPr>
+              <a:t>例子・</a:t>
+            </a:r>
+            <a:pPr indent="0" marL="0">
+              <a:lnSpc>
+                <a:spcPct val="100000"/>
+              </a:lnSpc>
+              <a:buNone/>
+            </a:pPr>
+            <a:r>
+              <a:rPr lang="en-US" sz="900" dirty="0">
+                <a:solidFill>
+                  <a:srgbClr val="5F7183"/>
+                </a:solidFill>
+                <a:latin typeface="微軟正黑體" pitchFamily="34" charset="0"/>
+                <a:ea typeface="微軟正黑體" pitchFamily="34" charset="-122"/>
+                <a:cs typeface="微軟正黑體" pitchFamily="34" charset="-120"/>
+              </a:rPr>
+              <a:t>邊走邊拍全景照，接起來的照片會歪</a:t>
+            </a:r>
+            <a:endParaRPr lang="en-US" sz="950" dirty="0"/>
+          </a:p>
+        </p:txBody>
+      </p:sp>
       <p:pic>
         <p:nvPicPr>
-          <p:cNvPr id="10" name="Image 1" descr="/Users/tsengchenghsun/Class/carClass/Claude outputs/第六週(10-15)/src/logo.png">    </p:cNvPr>
+          <p:cNvPr id="12" name="Image 1" descr="/Users/tsengchenghsun/Class/carClass/Claude outputs/第六週(10-15)/src/logo.png">    </p:cNvPr>
           <p:cNvPicPr>
             <a:picLocks noChangeAspect="1"/>
           </p:cNvPicPr>
@@ -12505,7 +14863,7 @@
       </p:pic>
       <p:sp>
         <p:nvSpPr>
-          <p:cNvPr id="11" name="Text 6"/>
+          <p:cNvPr id="13" name="Text 8"/>
           <p:cNvSpPr txBox="1"/>
           <p:nvPr/>
         </p:nvSpPr>
@@ -12544,7 +14902,7 @@
       </p:sp>
       <p:sp>
         <p:nvSpPr>
-          <p:cNvPr id="12" name="Text 7"/>
+          <p:cNvPr id="14" name="Text 9"/>
           <p:cNvSpPr txBox="1"/>
           <p:nvPr/>
         </p:nvSpPr>
@@ -16113,12 +18471,12 @@
         </p:nvSpPr>
         <p:spPr>
           <a:xfrm>
-            <a:off x="1393282" y="1580904"/>
-            <a:ext cx="3131489" cy="2241288"/>
+            <a:off x="2118771" y="1580904"/>
+            <a:ext cx="2383177" cy="1893816"/>
           </a:xfrm>
           <a:prstGeom prst="roundRect">
             <a:avLst>
-              <a:gd name="adj" fmla="val 4080"/>
+              <a:gd name="adj" fmla="val 4828"/>
             </a:avLst>
           </a:prstGeom>
           <a:solidFill>
@@ -16140,8 +18498,8 @@
         </p:nvSpPr>
         <p:spPr>
           <a:xfrm>
-            <a:off x="1484722" y="1672344"/>
-            <a:ext cx="2948609" cy="347413"/>
+            <a:off x="2210211" y="1672344"/>
+            <a:ext cx="2200297" cy="347413"/>
           </a:xfrm>
           <a:prstGeom prst="roundRect">
             <a:avLst>
@@ -16162,8 +18520,8 @@
         </p:nvSpPr>
         <p:spPr>
           <a:xfrm>
-            <a:off x="1557874" y="1699776"/>
-            <a:ext cx="2802305" cy="310837"/>
+            <a:off x="2283363" y="1699776"/>
+            <a:ext cx="2053993" cy="310837"/>
           </a:xfrm>
           <a:prstGeom prst="rect">
             <a:avLst/>
@@ -16232,8 +18590,8 @@
         </p:blipFill>
         <p:spPr>
           <a:xfrm>
-            <a:off x="1484722" y="2074621"/>
-            <a:ext cx="2948609" cy="1369160"/>
+            <a:off x="2210211" y="2074621"/>
+            <a:ext cx="2200297" cy="1021688"/>
           </a:xfrm>
           <a:prstGeom prst="rect">
             <a:avLst/>
@@ -16248,8 +18606,8 @@
         </p:nvSpPr>
         <p:spPr>
           <a:xfrm>
-            <a:off x="1484722" y="3462069"/>
-            <a:ext cx="2948609" cy="250395"/>
+            <a:off x="2210211" y="3114597"/>
+            <a:ext cx="2200297" cy="250395"/>
           </a:xfrm>
           <a:prstGeom prst="rect">
             <a:avLst/>
@@ -16287,12 +18645,12 @@
         </p:nvSpPr>
         <p:spPr>
           <a:xfrm>
-            <a:off x="4799091" y="1580904"/>
-            <a:ext cx="2951626" cy="2241288"/>
+            <a:off x="4776268" y="1580904"/>
+            <a:ext cx="2248961" cy="1893816"/>
           </a:xfrm>
           <a:prstGeom prst="roundRect">
             <a:avLst>
-              <a:gd name="adj" fmla="val 4080"/>
+              <a:gd name="adj" fmla="val 4828"/>
             </a:avLst>
           </a:prstGeom>
           <a:solidFill>
@@ -16314,8 +18672,8 @@
         </p:nvSpPr>
         <p:spPr>
           <a:xfrm>
-            <a:off x="4890531" y="1672344"/>
-            <a:ext cx="2768746" cy="347413"/>
+            <a:off x="4867708" y="1672344"/>
+            <a:ext cx="2066081" cy="347413"/>
           </a:xfrm>
           <a:prstGeom prst="roundRect">
             <a:avLst>
@@ -16336,8 +18694,8 @@
         </p:nvSpPr>
         <p:spPr>
           <a:xfrm>
-            <a:off x="4963683" y="1699776"/>
-            <a:ext cx="2622442" cy="310837"/>
+            <a:off x="4940860" y="1699776"/>
+            <a:ext cx="1919777" cy="310837"/>
           </a:xfrm>
           <a:prstGeom prst="rect">
             <a:avLst/>
@@ -16406,8 +18764,8 @@
         </p:blipFill>
         <p:spPr>
           <a:xfrm>
-            <a:off x="4890531" y="2074621"/>
-            <a:ext cx="2768746" cy="1369160"/>
+            <a:off x="4867708" y="2074621"/>
+            <a:ext cx="2066081" cy="1021688"/>
           </a:xfrm>
           <a:prstGeom prst="rect">
             <a:avLst/>
@@ -16422,8 +18780,8 @@
         </p:nvSpPr>
         <p:spPr>
           <a:xfrm>
-            <a:off x="4890531" y="3462069"/>
-            <a:ext cx="2768746" cy="250395"/>
+            <a:off x="4867708" y="3114597"/>
+            <a:ext cx="2066081" cy="250395"/>
           </a:xfrm>
           <a:prstGeom prst="rect">
             <a:avLst/>
@@ -16456,6 +18814,162 @@
       <p:sp>
         <p:nvSpPr>
           <p:cNvPr id="14" name="Shape 10"/>
+          <p:cNvSpPr/>
+          <p:nvPr/>
+        </p:nvSpPr>
+        <p:spPr>
+          <a:xfrm>
+            <a:off x="539496" y="3575304"/>
+            <a:ext cx="219456" cy="219456"/>
+          </a:xfrm>
+          <a:prstGeom prst="ellipse">
+            <a:avLst/>
+          </a:prstGeom>
+          <a:solidFill>
+            <a:srgbClr val="D9463E"/>
+          </a:solidFill>
+          <a:ln/>
+        </p:spPr>
+      </p:sp>
+      <p:sp>
+        <p:nvSpPr>
+          <p:cNvPr id="15" name="Text 11"/>
+          <p:cNvSpPr txBox="1"/>
+          <p:nvPr/>
+        </p:nvSpPr>
+        <p:spPr>
+          <a:xfrm>
+            <a:off x="539496" y="3602736"/>
+            <a:ext cx="219456" cy="164592"/>
+          </a:xfrm>
+          <a:prstGeom prst="rect">
+            <a:avLst/>
+          </a:prstGeom>
+          <a:noFill/>
+          <a:ln/>
+        </p:spPr>
+        <p:txBody>
+          <a:bodyPr wrap="square" lIns="0" tIns="0" rIns="0" bIns="0" rtlCol="0" anchor="ctr"/>
+          <a:lstStyle/>
+          <a:p>
+            <a:pPr algn="ctr" indent="0" marL="0">
+              <a:buNone/>
+            </a:pPr>
+            <a:r>
+              <a:rPr lang="en-US" sz="750" b="1" dirty="0">
+                <a:solidFill>
+                  <a:srgbClr val="FFFFFF"/>
+                </a:solidFill>
+                <a:latin typeface="Arial" pitchFamily="34" charset="0"/>
+                <a:ea typeface="Arial" pitchFamily="34" charset="-122"/>
+                <a:cs typeface="Arial" pitchFamily="34" charset="-120"/>
+              </a:rPr>
+              <a:t>▶</a:t>
+            </a:r>
+            <a:endParaRPr lang="en-US" sz="750" dirty="0"/>
+          </a:p>
+        </p:txBody>
+      </p:sp>
+      <p:sp>
+        <p:nvSpPr>
+          <p:cNvPr id="16" name="Text 12"/>
+          <p:cNvSpPr txBox="1"/>
+          <p:nvPr/>
+        </p:nvSpPr>
+        <p:spPr>
+          <a:xfrm>
+            <a:off x="832104" y="3547872"/>
+            <a:ext cx="7808976" cy="274320"/>
+          </a:xfrm>
+          <a:prstGeom prst="rect">
+            <a:avLst/>
+          </a:prstGeom>
+          <a:noFill/>
+          <a:ln/>
+        </p:spPr>
+        <p:txBody>
+          <a:bodyPr wrap="square" lIns="0" tIns="0" rIns="0" bIns="0" rtlCol="0" anchor="ctr"/>
+          <a:lstStyle/>
+          <a:p>
+            <a:pPr indent="0" marL="0">
+              <a:lnSpc>
+                <a:spcPct val="100000"/>
+              </a:lnSpc>
+              <a:buNone/>
+            </a:pPr>
+            <a:r>
+              <a:rPr lang="en-US" sz="900" b="1" u="sng" dirty="0">
+                <a:solidFill>
+                  <a:srgbClr val="0B1F3A"/>
+                </a:solidFill>
+                <a:latin typeface="Arial" pitchFamily="34" charset="0"/>
+                <a:ea typeface="Arial" pitchFamily="34" charset="-122"/>
+                <a:cs typeface="Arial" pitchFamily="34" charset="-120"/>
+                <a:hlinkClick r:id="rId3" invalidUrl="" action="" tgtFrame="" tooltip="" history="1" highlightClick="0" endSnd="0">
+                  <a:extLst>
+                    <a:ext uri="{A12FA001-AC4F-418D-AE19-62706E023703}">
+                      <ahyp:hlinkClr xmlns:ahyp="http://schemas.microsoft.com/office/drawing/2018/hyperlinkcolor" val="tx"/>
+                    </a:ext>
+                  </a:extLst>
+                </a:hlinkClick>
+              </a:rPr>
+              <a:t>Video: HC-SR04 đo khoảng cách thế nào · </a:t>
+            </a:r>
+            <a:pPr indent="0" marL="0">
+              <a:lnSpc>
+                <a:spcPct val="100000"/>
+              </a:lnSpc>
+              <a:buNone/>
+            </a:pPr>
+            <a:r>
+              <a:rPr lang="en-US" sz="900" b="1" u="sng" dirty="0">
+                <a:solidFill>
+                  <a:srgbClr val="0B1F3A"/>
+                </a:solidFill>
+                <a:latin typeface="微軟正黑體" pitchFamily="34" charset="0"/>
+                <a:ea typeface="微軟正黑體" pitchFamily="34" charset="-122"/>
+                <a:cs typeface="微軟正黑體" pitchFamily="34" charset="-120"/>
+                <a:hlinkClick r:id="rId3" invalidUrl="" action="" tgtFrame="" tooltip="" history="1" highlightClick="0" endSnd="0">
+                  <a:extLst>
+                    <a:ext uri="{A12FA001-AC4F-418D-AE19-62706E023703}">
+                      <ahyp:hlinkClr xmlns:ahyp="http://schemas.microsoft.com/office/drawing/2018/hyperlinkcolor" val="tx"/>
+                    </a:ext>
+                  </a:extLst>
+                </a:hlinkClick>
+              </a:rPr>
+              <a:t>影片：HC-SR04 怎麼量距離　2:02　</a:t>
+            </a:r>
+            <a:pPr indent="0" marL="0">
+              <a:lnSpc>
+                <a:spcPct val="100000"/>
+              </a:lnSpc>
+              <a:buNone/>
+            </a:pPr>
+            <a:r>
+              <a:rPr lang="en-US" sz="900" u="sng" dirty="0">
+                <a:solidFill>
+                  <a:srgbClr val="1F6FBF"/>
+                </a:solidFill>
+                <a:latin typeface="Arial" pitchFamily="34" charset="0"/>
+                <a:ea typeface="Arial" pitchFamily="34" charset="-122"/>
+                <a:cs typeface="Arial" pitchFamily="34" charset="-120"/>
+                <a:hlinkClick r:id="rId3" invalidUrl="" action="" tgtFrame="" tooltip="" history="1" highlightClick="0" endSnd="0">
+                  <a:extLst>
+                    <a:ext uri="{A12FA001-AC4F-418D-AE19-62706E023703}">
+                      <ahyp:hlinkClr xmlns:ahyp="http://schemas.microsoft.com/office/drawing/2018/hyperlinkcolor" val="tx"/>
+                    </a:ext>
+                  </a:extLst>
+                </a:hlinkClick>
+              </a:rPr>
+              <a:t>youtu.be/vf2lW4LkmMQ</a:t>
+            </a:r>
+            <a:endParaRPr lang="en-US" sz="900" dirty="0"/>
+          </a:p>
+        </p:txBody>
+      </p:sp>
+      <p:sp>
+        <p:nvSpPr>
+          <p:cNvPr id="17" name="Shape 13"/>
           <p:cNvSpPr/>
           <p:nvPr/>
         </p:nvSpPr>
@@ -16482,7 +18996,7 @@
       </p:sp>
       <p:sp>
         <p:nvSpPr>
-          <p:cNvPr id="15" name="Text 11"/>
+          <p:cNvPr id="18" name="Text 14"/>
           <p:cNvSpPr txBox="1"/>
           <p:nvPr/>
         </p:nvSpPr>
@@ -16542,16 +19056,139 @@
           </a:p>
         </p:txBody>
       </p:sp>
+      <p:sp>
+        <p:nvSpPr>
+          <p:cNvPr id="19" name="Shape 15"/>
+          <p:cNvSpPr/>
+          <p:nvPr/>
+        </p:nvSpPr>
+        <p:spPr>
+          <a:xfrm>
+            <a:off x="3630162" y="365760"/>
+            <a:ext cx="5010918" cy="310896"/>
+          </a:xfrm>
+          <a:prstGeom prst="roundRect">
+            <a:avLst>
+              <a:gd name="adj" fmla="val 20588"/>
+            </a:avLst>
+          </a:prstGeom>
+          <a:solidFill>
+            <a:srgbClr val="EAF6F4"/>
+          </a:solidFill>
+          <a:ln w="9525">
+            <a:solidFill>
+              <a:srgbClr val="9FD6CE"/>
+            </a:solidFill>
+            <a:prstDash val="solid"/>
+          </a:ln>
+        </p:spPr>
+      </p:sp>
+      <p:sp>
+        <p:nvSpPr>
+          <p:cNvPr id="20" name="Text 16"/>
+          <p:cNvSpPr txBox="1"/>
+          <p:nvPr/>
+        </p:nvSpPr>
+        <p:spPr>
+          <a:xfrm>
+            <a:off x="3758178" y="384048"/>
+            <a:ext cx="4828038" cy="274320"/>
+          </a:xfrm>
+          <a:prstGeom prst="rect">
+            <a:avLst/>
+          </a:prstGeom>
+          <a:noFill/>
+          <a:ln/>
+        </p:spPr>
+        <p:txBody>
+          <a:bodyPr wrap="square" lIns="0" tIns="0" rIns="0" bIns="0" rtlCol="0" anchor="ctr"/>
+          <a:lstStyle/>
+          <a:p>
+            <a:pPr indent="0" marL="0">
+              <a:lnSpc>
+                <a:spcPct val="100000"/>
+              </a:lnSpc>
+              <a:buNone/>
+            </a:pPr>
+            <a:r>
+              <a:rPr lang="en-US" sz="950" b="1" dirty="0">
+                <a:solidFill>
+                  <a:srgbClr val="007F72"/>
+                </a:solidFill>
+                <a:latin typeface="Arial" pitchFamily="34" charset="0"/>
+                <a:ea typeface="Arial" pitchFamily="34" charset="-122"/>
+                <a:cs typeface="Arial" pitchFamily="34" charset="-120"/>
+              </a:rPr>
+              <a:t>Ví dụ · </a:t>
+            </a:r>
+            <a:pPr indent="0" marL="0">
+              <a:lnSpc>
+                <a:spcPct val="100000"/>
+              </a:lnSpc>
+              <a:buNone/>
+            </a:pPr>
+            <a:r>
+              <a:rPr lang="en-US" sz="950" dirty="0">
+                <a:solidFill>
+                  <a:srgbClr val="1A2733"/>
+                </a:solidFill>
+                <a:latin typeface="Arial" pitchFamily="34" charset="0"/>
+                <a:ea typeface="Arial" pitchFamily="34" charset="-122"/>
+                <a:cs typeface="Arial" pitchFamily="34" charset="-120"/>
+              </a:rPr>
+              <a:t>sáu người cùng gọi trong thung lũng: ai gọi tên mình mới nhận ra tiếng vọng</a:t>
+            </a:r>
+            <a:endParaRPr lang="en-US" sz="950" dirty="0"/>
+          </a:p>
+          <a:p>
+            <a:pPr indent="0" marL="0">
+              <a:lnSpc>
+                <a:spcPct val="100000"/>
+              </a:lnSpc>
+              <a:buNone/>
+            </a:pPr>
+            <a:r>
+              <a:rPr lang="en-US" sz="900" b="1" dirty="0">
+                <a:solidFill>
+                  <a:srgbClr val="007F72"/>
+                </a:solidFill>
+                <a:latin typeface="微軟正黑體" pitchFamily="34" charset="0"/>
+                <a:ea typeface="微軟正黑體" pitchFamily="34" charset="-122"/>
+                <a:cs typeface="微軟正黑體" pitchFamily="34" charset="-120"/>
+              </a:rPr>
+              <a:t>例子・</a:t>
+            </a:r>
+            <a:pPr indent="0" marL="0">
+              <a:lnSpc>
+                <a:spcPct val="100000"/>
+              </a:lnSpc>
+              <a:buNone/>
+            </a:pPr>
+            <a:r>
+              <a:rPr lang="en-US" sz="900" dirty="0">
+                <a:solidFill>
+                  <a:srgbClr val="5F7183"/>
+                </a:solidFill>
+                <a:latin typeface="微軟正黑體" pitchFamily="34" charset="0"/>
+                <a:ea typeface="微軟正黑體" pitchFamily="34" charset="-122"/>
+                <a:cs typeface="微軟正黑體" pitchFamily="34" charset="-120"/>
+              </a:rPr>
+              <a:t>六個人在山谷同時喊，各喊自己的名字才認得出回音</a:t>
+            </a:r>
+            <a:endParaRPr lang="en-US" sz="950" dirty="0"/>
+          </a:p>
+        </p:txBody>
+      </p:sp>
       <p:pic>
         <p:nvPicPr>
-          <p:cNvPr id="17" name="Image 2" descr="/Users/tsengchenghsun/Class/carClass/Claude outputs/第六週(10-15)/src/logo.png">    </p:cNvPr>
+          <p:cNvPr id="22" name="Image 2" descr="/Users/tsengchenghsun/Class/carClass/Claude outputs/第六週(10-15)/src/logo.png">    </p:cNvPr>
           <p:cNvPicPr>
             <a:picLocks noChangeAspect="1"/>
           </p:cNvPicPr>
           <p:nvPr/>
         </p:nvPicPr>
         <p:blipFill>
-          <a:blip r:embed="rId3"/>
+          <a:blip r:embed="rId4"/>
           <a:stretch>
             <a:fillRect/>
           </a:stretch>
@@ -16568,7 +19205,7 @@
       </p:pic>
       <p:sp>
         <p:nvSpPr>
-          <p:cNvPr id="18" name="Text 12"/>
+          <p:cNvPr id="23" name="Text 17"/>
           <p:cNvSpPr txBox="1"/>
           <p:nvPr/>
         </p:nvSpPr>
@@ -16607,7 +19244,7 @@
       </p:sp>
       <p:sp>
         <p:nvSpPr>
-          <p:cNvPr id="19" name="Text 13"/>
+          <p:cNvPr id="24" name="Text 18"/>
           <p:cNvSpPr txBox="1"/>
           <p:nvPr/>
         </p:nvSpPr>
@@ -16716,7 +19353,7 @@
         </p:nvSpPr>
         <p:spPr>
           <a:xfrm>
-            <a:off x="502920" y="1101852"/>
+            <a:off x="502920" y="937260"/>
             <a:ext cx="2468880" cy="2514600"/>
           </a:xfrm>
           <a:prstGeom prst="roundRect">
@@ -16743,7 +19380,7 @@
         </p:nvSpPr>
         <p:spPr>
           <a:xfrm>
-            <a:off x="1113739" y="2132381"/>
+            <a:off x="1113739" y="1967789"/>
             <a:ext cx="226771" cy="481889"/>
           </a:xfrm>
           <a:prstGeom prst="roundRect">
@@ -16765,7 +19402,7 @@
         </p:nvSpPr>
         <p:spPr>
           <a:xfrm>
-            <a:off x="1397203" y="2047342"/>
+            <a:off x="1397203" y="1882750"/>
             <a:ext cx="311810" cy="651967"/>
           </a:xfrm>
           <a:prstGeom prst="chevron">
@@ -16787,7 +19424,7 @@
         </p:nvSpPr>
         <p:spPr>
           <a:xfrm>
-            <a:off x="1680667" y="1933956"/>
+            <a:off x="1680667" y="1769364"/>
             <a:ext cx="340157" cy="878738"/>
           </a:xfrm>
           <a:prstGeom prst="chevron">
@@ -16812,7 +19449,7 @@
         <p:spPr>
           <a:xfrm>
             <a:off x="3429000" y="914400"/>
-            <a:ext cx="5212080" cy="2889504"/>
+            <a:ext cx="5212080" cy="2560320"/>
           </a:xfrm>
           <a:prstGeom prst="rect">
             <a:avLst/>
@@ -16911,6 +19548,162 @@
       <p:sp>
         <p:nvSpPr>
           <p:cNvPr id="8" name="Shape 6"/>
+          <p:cNvSpPr/>
+          <p:nvPr/>
+        </p:nvSpPr>
+        <p:spPr>
+          <a:xfrm>
+            <a:off x="539496" y="3557016"/>
+            <a:ext cx="219456" cy="219456"/>
+          </a:xfrm>
+          <a:prstGeom prst="ellipse">
+            <a:avLst/>
+          </a:prstGeom>
+          <a:solidFill>
+            <a:srgbClr val="D9463E"/>
+          </a:solidFill>
+          <a:ln/>
+        </p:spPr>
+      </p:sp>
+      <p:sp>
+        <p:nvSpPr>
+          <p:cNvPr id="9" name="Text 7"/>
+          <p:cNvSpPr txBox="1"/>
+          <p:nvPr/>
+        </p:nvSpPr>
+        <p:spPr>
+          <a:xfrm>
+            <a:off x="539496" y="3584448"/>
+            <a:ext cx="219456" cy="164592"/>
+          </a:xfrm>
+          <a:prstGeom prst="rect">
+            <a:avLst/>
+          </a:prstGeom>
+          <a:noFill/>
+          <a:ln/>
+        </p:spPr>
+        <p:txBody>
+          <a:bodyPr wrap="square" lIns="0" tIns="0" rIns="0" bIns="0" rtlCol="0" anchor="ctr"/>
+          <a:lstStyle/>
+          <a:p>
+            <a:pPr algn="ctr" indent="0" marL="0">
+              <a:buNone/>
+            </a:pPr>
+            <a:r>
+              <a:rPr lang="en-US" sz="750" b="1" dirty="0">
+                <a:solidFill>
+                  <a:srgbClr val="FFFFFF"/>
+                </a:solidFill>
+                <a:latin typeface="Arial" pitchFamily="34" charset="0"/>
+                <a:ea typeface="Arial" pitchFamily="34" charset="-122"/>
+                <a:cs typeface="Arial" pitchFamily="34" charset="-120"/>
+              </a:rPr>
+              <a:t>▶</a:t>
+            </a:r>
+            <a:endParaRPr lang="en-US" sz="750" dirty="0"/>
+          </a:p>
+        </p:txBody>
+      </p:sp>
+      <p:sp>
+        <p:nvSpPr>
+          <p:cNvPr id="10" name="Text 8"/>
+          <p:cNvSpPr txBox="1"/>
+          <p:nvPr/>
+        </p:nvSpPr>
+        <p:spPr>
+          <a:xfrm>
+            <a:off x="832104" y="3529584"/>
+            <a:ext cx="7808976" cy="274320"/>
+          </a:xfrm>
+          <a:prstGeom prst="rect">
+            <a:avLst/>
+          </a:prstGeom>
+          <a:noFill/>
+          <a:ln/>
+        </p:spPr>
+        <p:txBody>
+          <a:bodyPr wrap="square" lIns="0" tIns="0" rIns="0" bIns="0" rtlCol="0" anchor="ctr"/>
+          <a:lstStyle/>
+          <a:p>
+            <a:pPr indent="0" marL="0">
+              <a:lnSpc>
+                <a:spcPct val="100000"/>
+              </a:lnSpc>
+              <a:buNone/>
+            </a:pPr>
+            <a:r>
+              <a:rPr lang="en-US" sz="900" b="1" u="sng" dirty="0">
+                <a:solidFill>
+                  <a:srgbClr val="0B1F3A"/>
+                </a:solidFill>
+                <a:latin typeface="Arial" pitchFamily="34" charset="0"/>
+                <a:ea typeface="Arial" pitchFamily="34" charset="-122"/>
+                <a:cs typeface="Arial" pitchFamily="34" charset="-120"/>
+                <a:hlinkClick r:id="rId1" invalidUrl="" action="" tgtFrame="" tooltip="" history="1" highlightClick="0" endSnd="0">
+                  <a:extLst>
+                    <a:ext uri="{A12FA001-AC4F-418D-AE19-62706E023703}">
+                      <ahyp:hlinkClr xmlns:ahyp="http://schemas.microsoft.com/office/drawing/2018/hyperlinkcolor" val="tx"/>
+                    </a:ext>
+                  </a:extLst>
+                </a:hlinkClick>
+              </a:rPr>
+              <a:t>Video: cảm biến lùi xe qua ba đời (tiếng Trung) · </a:t>
+            </a:r>
+            <a:pPr indent="0" marL="0">
+              <a:lnSpc>
+                <a:spcPct val="100000"/>
+              </a:lnSpc>
+              <a:buNone/>
+            </a:pPr>
+            <a:r>
+              <a:rPr lang="en-US" sz="900" b="1" u="sng" dirty="0">
+                <a:solidFill>
+                  <a:srgbClr val="0B1F3A"/>
+                </a:solidFill>
+                <a:latin typeface="微軟正黑體" pitchFamily="34" charset="0"/>
+                <a:ea typeface="微軟正黑體" pitchFamily="34" charset="-122"/>
+                <a:cs typeface="微軟正黑體" pitchFamily="34" charset="-120"/>
+                <a:hlinkClick r:id="rId1" invalidUrl="" action="" tgtFrame="" tooltip="" history="1" highlightClick="0" endSnd="0">
+                  <a:extLst>
+                    <a:ext uri="{A12FA001-AC4F-418D-AE19-62706E023703}">
+                      <ahyp:hlinkClr xmlns:ahyp="http://schemas.microsoft.com/office/drawing/2018/hyperlinkcolor" val="tx"/>
+                    </a:ext>
+                  </a:extLst>
+                </a:hlinkClick>
+              </a:rPr>
+              <a:t>影片：倒車雷達的進化史　3:18　</a:t>
+            </a:r>
+            <a:pPr indent="0" marL="0">
+              <a:lnSpc>
+                <a:spcPct val="100000"/>
+              </a:lnSpc>
+              <a:buNone/>
+            </a:pPr>
+            <a:r>
+              <a:rPr lang="en-US" sz="900" u="sng" dirty="0">
+                <a:solidFill>
+                  <a:srgbClr val="1F6FBF"/>
+                </a:solidFill>
+                <a:latin typeface="Arial" pitchFamily="34" charset="0"/>
+                <a:ea typeface="Arial" pitchFamily="34" charset="-122"/>
+                <a:cs typeface="Arial" pitchFamily="34" charset="-120"/>
+                <a:hlinkClick r:id="rId1" invalidUrl="" action="" tgtFrame="" tooltip="" history="1" highlightClick="0" endSnd="0">
+                  <a:extLst>
+                    <a:ext uri="{A12FA001-AC4F-418D-AE19-62706E023703}">
+                      <ahyp:hlinkClr xmlns:ahyp="http://schemas.microsoft.com/office/drawing/2018/hyperlinkcolor" val="tx"/>
+                    </a:ext>
+                  </a:extLst>
+                </a:hlinkClick>
+              </a:rPr>
+              <a:t>youtu.be/lV-MiiOEGIA</a:t>
+            </a:r>
+            <a:endParaRPr lang="en-US" sz="900" dirty="0"/>
+          </a:p>
+        </p:txBody>
+      </p:sp>
+      <p:sp>
+        <p:nvSpPr>
+          <p:cNvPr id="11" name="Shape 9"/>
           <p:cNvSpPr/>
           <p:nvPr/>
         </p:nvSpPr>
@@ -16937,7 +19730,7 @@
       </p:sp>
       <p:sp>
         <p:nvSpPr>
-          <p:cNvPr id="9" name="Text 7"/>
+          <p:cNvPr id="12" name="Text 10"/>
           <p:cNvSpPr txBox="1"/>
           <p:nvPr/>
         </p:nvSpPr>
@@ -16997,16 +19790,139 @@
           </a:p>
         </p:txBody>
       </p:sp>
+      <p:sp>
+        <p:nvSpPr>
+          <p:cNvPr id="13" name="Shape 11"/>
+          <p:cNvSpPr/>
+          <p:nvPr/>
+        </p:nvSpPr>
+        <p:spPr>
+          <a:xfrm>
+            <a:off x="5513387" y="365760"/>
+            <a:ext cx="3127693" cy="310896"/>
+          </a:xfrm>
+          <a:prstGeom prst="roundRect">
+            <a:avLst>
+              <a:gd name="adj" fmla="val 20588"/>
+            </a:avLst>
+          </a:prstGeom>
+          <a:solidFill>
+            <a:srgbClr val="EAF6F4"/>
+          </a:solidFill>
+          <a:ln w="9525">
+            <a:solidFill>
+              <a:srgbClr val="9FD6CE"/>
+            </a:solidFill>
+            <a:prstDash val="solid"/>
+          </a:ln>
+        </p:spPr>
+      </p:sp>
+      <p:sp>
+        <p:nvSpPr>
+          <p:cNvPr id="14" name="Text 12"/>
+          <p:cNvSpPr txBox="1"/>
+          <p:nvPr/>
+        </p:nvSpPr>
+        <p:spPr>
+          <a:xfrm>
+            <a:off x="5641403" y="384048"/>
+            <a:ext cx="2944813" cy="274320"/>
+          </a:xfrm>
+          <a:prstGeom prst="rect">
+            <a:avLst/>
+          </a:prstGeom>
+          <a:noFill/>
+          <a:ln/>
+        </p:spPr>
+        <p:txBody>
+          <a:bodyPr wrap="square" lIns="0" tIns="0" rIns="0" bIns="0" rtlCol="0" anchor="ctr"/>
+          <a:lstStyle/>
+          <a:p>
+            <a:pPr indent="0" marL="0">
+              <a:lnSpc>
+                <a:spcPct val="100000"/>
+              </a:lnSpc>
+              <a:buNone/>
+            </a:pPr>
+            <a:r>
+              <a:rPr lang="en-US" sz="950" b="1" dirty="0">
+                <a:solidFill>
+                  <a:srgbClr val="007F72"/>
+                </a:solidFill>
+                <a:latin typeface="Arial" pitchFamily="34" charset="0"/>
+                <a:ea typeface="Arial" pitchFamily="34" charset="-122"/>
+                <a:cs typeface="Arial" pitchFamily="34" charset="-120"/>
+              </a:rPr>
+              <a:t>Ví dụ · </a:t>
+            </a:r>
+            <a:pPr indent="0" marL="0">
+              <a:lnSpc>
+                <a:spcPct val="100000"/>
+              </a:lnSpc>
+              <a:buNone/>
+            </a:pPr>
+            <a:r>
+              <a:rPr lang="en-US" sz="950" dirty="0">
+                <a:solidFill>
+                  <a:srgbClr val="1A2733"/>
+                </a:solidFill>
+                <a:latin typeface="Arial" pitchFamily="34" charset="0"/>
+                <a:ea typeface="Arial" pitchFamily="34" charset="-122"/>
+                <a:cs typeface="Arial" pitchFamily="34" charset="-120"/>
+              </a:rPr>
+              <a:t>thấy chớp trước, vài giây sau mới nghe sấm</a:t>
+            </a:r>
+            <a:endParaRPr lang="en-US" sz="950" dirty="0"/>
+          </a:p>
+          <a:p>
+            <a:pPr indent="0" marL="0">
+              <a:lnSpc>
+                <a:spcPct val="100000"/>
+              </a:lnSpc>
+              <a:buNone/>
+            </a:pPr>
+            <a:r>
+              <a:rPr lang="en-US" sz="900" b="1" dirty="0">
+                <a:solidFill>
+                  <a:srgbClr val="007F72"/>
+                </a:solidFill>
+                <a:latin typeface="微軟正黑體" pitchFamily="34" charset="0"/>
+                <a:ea typeface="微軟正黑體" pitchFamily="34" charset="-122"/>
+                <a:cs typeface="微軟正黑體" pitchFamily="34" charset="-120"/>
+              </a:rPr>
+              <a:t>例子・</a:t>
+            </a:r>
+            <a:pPr indent="0" marL="0">
+              <a:lnSpc>
+                <a:spcPct val="100000"/>
+              </a:lnSpc>
+              <a:buNone/>
+            </a:pPr>
+            <a:r>
+              <a:rPr lang="en-US" sz="900" dirty="0">
+                <a:solidFill>
+                  <a:srgbClr val="5F7183"/>
+                </a:solidFill>
+                <a:latin typeface="微軟正黑體" pitchFamily="34" charset="0"/>
+                <a:ea typeface="微軟正黑體" pitchFamily="34" charset="-122"/>
+                <a:cs typeface="微軟正黑體" pitchFamily="34" charset="-120"/>
+              </a:rPr>
+              <a:t>先看到閃電，幾秒後才聽到雷聲</a:t>
+            </a:r>
+            <a:endParaRPr lang="en-US" sz="950" dirty="0"/>
+          </a:p>
+        </p:txBody>
+      </p:sp>
       <p:pic>
         <p:nvPicPr>
-          <p:cNvPr id="11" name="Image 0" descr="/Users/tsengchenghsun/Class/carClass/Claude outputs/第六週(10-15)/src/logo.png">    </p:cNvPr>
+          <p:cNvPr id="16" name="Image 0" descr="/Users/tsengchenghsun/Class/carClass/Claude outputs/第六週(10-15)/src/logo.png">    </p:cNvPr>
           <p:cNvPicPr>
             <a:picLocks noChangeAspect="1"/>
           </p:cNvPicPr>
           <p:nvPr/>
         </p:nvPicPr>
         <p:blipFill>
-          <a:blip r:embed="rId1"/>
+          <a:blip r:embed="rId2"/>
           <a:stretch>
             <a:fillRect/>
           </a:stretch>
@@ -17023,7 +19939,7 @@
       </p:pic>
       <p:sp>
         <p:nvSpPr>
-          <p:cNvPr id="12" name="Text 8"/>
+          <p:cNvPr id="17" name="Text 13"/>
           <p:cNvSpPr txBox="1"/>
           <p:nvPr/>
         </p:nvSpPr>
@@ -17062,7 +19978,7 @@
       </p:sp>
       <p:sp>
         <p:nvSpPr>
-          <p:cNvPr id="13" name="Text 9"/>
+          <p:cNvPr id="18" name="Text 14"/>
           <p:cNvSpPr txBox="1"/>
           <p:nvPr/>
         </p:nvSpPr>
@@ -17491,7 +20407,7 @@
         </p:nvSpPr>
         <p:spPr>
           <a:xfrm>
-            <a:off x="502920" y="1101852"/>
+            <a:off x="502920" y="918972"/>
             <a:ext cx="3305556" cy="2514600"/>
           </a:xfrm>
           <a:prstGeom prst="roundRect">
@@ -17526,7 +20442,7 @@
         </p:blipFill>
         <p:spPr>
           <a:xfrm>
-            <a:off x="576072" y="1214628"/>
+            <a:off x="576072" y="1031748"/>
             <a:ext cx="3159252" cy="2106168"/>
           </a:xfrm>
           <a:prstGeom prst="rect">
@@ -17542,7 +20458,7 @@
         </p:nvSpPr>
         <p:spPr>
           <a:xfrm>
-            <a:off x="576072" y="3396996"/>
+            <a:off x="576072" y="3214116"/>
             <a:ext cx="3159252" cy="182880"/>
           </a:xfrm>
           <a:prstGeom prst="rect">
@@ -17681,6 +20597,165 @@
       <p:sp>
         <p:nvSpPr>
           <p:cNvPr id="7" name="Shape 4"/>
+          <p:cNvSpPr/>
+          <p:nvPr/>
+        </p:nvSpPr>
+        <p:spPr>
+          <a:xfrm>
+            <a:off x="539496" y="3534156"/>
+            <a:ext cx="219456" cy="219456"/>
+          </a:xfrm>
+          <a:prstGeom prst="ellipse">
+            <a:avLst/>
+          </a:prstGeom>
+          <a:solidFill>
+            <a:srgbClr val="D9463E"/>
+          </a:solidFill>
+          <a:ln/>
+        </p:spPr>
+      </p:sp>
+      <p:sp>
+        <p:nvSpPr>
+          <p:cNvPr id="8" name="Text 5"/>
+          <p:cNvSpPr txBox="1"/>
+          <p:nvPr/>
+        </p:nvSpPr>
+        <p:spPr>
+          <a:xfrm>
+            <a:off x="539496" y="3561588"/>
+            <a:ext cx="219456" cy="164592"/>
+          </a:xfrm>
+          <a:prstGeom prst="rect">
+            <a:avLst/>
+          </a:prstGeom>
+          <a:noFill/>
+          <a:ln/>
+        </p:spPr>
+        <p:txBody>
+          <a:bodyPr wrap="square" lIns="0" tIns="0" rIns="0" bIns="0" rtlCol="0" anchor="ctr"/>
+          <a:lstStyle/>
+          <a:p>
+            <a:pPr algn="ctr" indent="0" marL="0">
+              <a:buNone/>
+            </a:pPr>
+            <a:r>
+              <a:rPr lang="en-US" sz="750" b="1" dirty="0">
+                <a:solidFill>
+                  <a:srgbClr val="FFFFFF"/>
+                </a:solidFill>
+                <a:latin typeface="Arial" pitchFamily="34" charset="0"/>
+                <a:ea typeface="Arial" pitchFamily="34" charset="-122"/>
+                <a:cs typeface="Arial" pitchFamily="34" charset="-120"/>
+              </a:rPr>
+              <a:t>▶</a:t>
+            </a:r>
+            <a:endParaRPr lang="en-US" sz="750" dirty="0"/>
+          </a:p>
+        </p:txBody>
+      </p:sp>
+      <p:sp>
+        <p:nvSpPr>
+          <p:cNvPr id="9" name="Text 6"/>
+          <p:cNvSpPr txBox="1"/>
+          <p:nvPr/>
+        </p:nvSpPr>
+        <p:spPr>
+          <a:xfrm>
+            <a:off x="832104" y="3488436"/>
+            <a:ext cx="2976372" cy="310896"/>
+          </a:xfrm>
+          <a:prstGeom prst="rect">
+            <a:avLst/>
+          </a:prstGeom>
+          <a:noFill/>
+          <a:ln/>
+        </p:spPr>
+        <p:txBody>
+          <a:bodyPr wrap="square" lIns="0" tIns="0" rIns="0" bIns="0" rtlCol="0" anchor="ctr"/>
+          <a:lstStyle/>
+          <a:p>
+            <a:pPr indent="0" marL="0">
+              <a:lnSpc>
+                <a:spcPct val="100000"/>
+              </a:lnSpc>
+              <a:buNone/>
+            </a:pPr>
+            <a:r>
+              <a:rPr lang="en-US" sz="850" b="1" u="sng" dirty="0">
+                <a:solidFill>
+                  <a:srgbClr val="0B1F3A"/>
+                </a:solidFill>
+                <a:latin typeface="Arial" pitchFamily="34" charset="0"/>
+                <a:ea typeface="Arial" pitchFamily="34" charset="-122"/>
+                <a:cs typeface="Arial" pitchFamily="34" charset="-120"/>
+                <a:hlinkClick r:id="rId2" invalidUrl="" action="" tgtFrame="" tooltip="" history="1" highlightClick="0" endSnd="0">
+                  <a:extLst>
+                    <a:ext uri="{A12FA001-AC4F-418D-AE19-62706E023703}">
+                      <ahyp:hlinkClr xmlns:ahyp="http://schemas.microsoft.com/office/drawing/2018/hyperlinkcolor" val="tx"/>
+                    </a:ext>
+                  </a:extLst>
+                </a:hlinkClick>
+              </a:rPr>
+              <a:t>Video: nguyên lý GPS (tiếng Trung)　1:55</a:t>
+            </a:r>
+            <a:endParaRPr lang="en-US" sz="850" dirty="0"/>
+          </a:p>
+          <a:p>
+            <a:pPr indent="0" marL="0">
+              <a:lnSpc>
+                <a:spcPct val="100000"/>
+              </a:lnSpc>
+              <a:buNone/>
+            </a:pPr>
+            <a:r>
+              <a:rPr lang="en-US" sz="850" b="1" u="sng" dirty="0">
+                <a:solidFill>
+                  <a:srgbClr val="0B1F3A"/>
+                </a:solidFill>
+                <a:latin typeface="微軟正黑體" pitchFamily="34" charset="0"/>
+                <a:ea typeface="微軟正黑體" pitchFamily="34" charset="-122"/>
+                <a:cs typeface="微軟正黑體" pitchFamily="34" charset="-120"/>
+                <a:hlinkClick r:id="rId2" invalidUrl="" action="" tgtFrame="" tooltip="" history="1" highlightClick="0" endSnd="0">
+                  <a:extLst>
+                    <a:ext uri="{A12FA001-AC4F-418D-AE19-62706E023703}">
+                      <ahyp:hlinkClr xmlns:ahyp="http://schemas.microsoft.com/office/drawing/2018/hyperlinkcolor" val="tx"/>
+                    </a:ext>
+                  </a:extLst>
+                </a:hlinkClick>
+              </a:rPr>
+              <a:t>影片：TVBS 衛星定位原理　</a:t>
+            </a:r>
+            <a:pPr indent="0" marL="0">
+              <a:lnSpc>
+                <a:spcPct val="100000"/>
+              </a:lnSpc>
+              <a:buNone/>
+            </a:pPr>
+            <a:r>
+              <a:rPr lang="en-US" sz="850" u="sng" dirty="0">
+                <a:solidFill>
+                  <a:srgbClr val="1F6FBF"/>
+                </a:solidFill>
+                <a:latin typeface="Arial" pitchFamily="34" charset="0"/>
+                <a:ea typeface="Arial" pitchFamily="34" charset="-122"/>
+                <a:cs typeface="Arial" pitchFamily="34" charset="-120"/>
+                <a:hlinkClick r:id="rId2" invalidUrl="" action="" tgtFrame="" tooltip="" history="1" highlightClick="0" endSnd="0">
+                  <a:extLst>
+                    <a:ext uri="{A12FA001-AC4F-418D-AE19-62706E023703}">
+                      <ahyp:hlinkClr xmlns:ahyp="http://schemas.microsoft.com/office/drawing/2018/hyperlinkcolor" val="tx"/>
+                    </a:ext>
+                  </a:extLst>
+                </a:hlinkClick>
+              </a:rPr>
+              <a:t>youtu.be/EZR54_PEDU4</a:t>
+            </a:r>
+            <a:endParaRPr lang="en-US" sz="850" dirty="0"/>
+          </a:p>
+        </p:txBody>
+      </p:sp>
+      <p:sp>
+        <p:nvSpPr>
+          <p:cNvPr id="10" name="Shape 7"/>
           <p:cNvSpPr/>
           <p:nvPr/>
         </p:nvSpPr>
@@ -17707,7 +20782,7 @@
       </p:sp>
       <p:sp>
         <p:nvSpPr>
-          <p:cNvPr id="8" name="Text 5"/>
+          <p:cNvPr id="11" name="Text 8"/>
           <p:cNvSpPr txBox="1"/>
           <p:nvPr/>
         </p:nvSpPr>
@@ -17767,16 +20842,139 @@
           </a:p>
         </p:txBody>
       </p:sp>
+      <p:sp>
+        <p:nvSpPr>
+          <p:cNvPr id="12" name="Shape 9"/>
+          <p:cNvSpPr/>
+          <p:nvPr/>
+        </p:nvSpPr>
+        <p:spPr>
+          <a:xfrm>
+            <a:off x="4714443" y="365760"/>
+            <a:ext cx="3926637" cy="310896"/>
+          </a:xfrm>
+          <a:prstGeom prst="roundRect">
+            <a:avLst>
+              <a:gd name="adj" fmla="val 20588"/>
+            </a:avLst>
+          </a:prstGeom>
+          <a:solidFill>
+            <a:srgbClr val="EAF6F4"/>
+          </a:solidFill>
+          <a:ln w="9525">
+            <a:solidFill>
+              <a:srgbClr val="9FD6CE"/>
+            </a:solidFill>
+            <a:prstDash val="solid"/>
+          </a:ln>
+        </p:spPr>
+      </p:sp>
+      <p:sp>
+        <p:nvSpPr>
+          <p:cNvPr id="13" name="Text 10"/>
+          <p:cNvSpPr txBox="1"/>
+          <p:nvPr/>
+        </p:nvSpPr>
+        <p:spPr>
+          <a:xfrm>
+            <a:off x="4842459" y="384048"/>
+            <a:ext cx="3743757" cy="274320"/>
+          </a:xfrm>
+          <a:prstGeom prst="rect">
+            <a:avLst/>
+          </a:prstGeom>
+          <a:noFill/>
+          <a:ln/>
+        </p:spPr>
+        <p:txBody>
+          <a:bodyPr wrap="square" lIns="0" tIns="0" rIns="0" bIns="0" rtlCol="0" anchor="ctr"/>
+          <a:lstStyle/>
+          <a:p>
+            <a:pPr indent="0" marL="0">
+              <a:lnSpc>
+                <a:spcPct val="100000"/>
+              </a:lnSpc>
+              <a:buNone/>
+            </a:pPr>
+            <a:r>
+              <a:rPr lang="en-US" sz="950" b="1" dirty="0">
+                <a:solidFill>
+                  <a:srgbClr val="007F72"/>
+                </a:solidFill>
+                <a:latin typeface="Arial" pitchFamily="34" charset="0"/>
+                <a:ea typeface="Arial" pitchFamily="34" charset="-122"/>
+                <a:cs typeface="Arial" pitchFamily="34" charset="-120"/>
+              </a:rPr>
+              <a:t>Ví dụ · </a:t>
+            </a:r>
+            <a:pPr indent="0" marL="0">
+              <a:lnSpc>
+                <a:spcPct val="100000"/>
+              </a:lnSpc>
+              <a:buNone/>
+            </a:pPr>
+            <a:r>
+              <a:rPr lang="en-US" sz="950" dirty="0">
+                <a:solidFill>
+                  <a:srgbClr val="1A2733"/>
+                </a:solidFill>
+                <a:latin typeface="Arial" pitchFamily="34" charset="0"/>
+                <a:ea typeface="Arial" pitchFamily="34" charset="-122"/>
+                <a:cs typeface="Arial" pitchFamily="34" charset="-120"/>
+              </a:rPr>
+              <a:t>ba mốc cho biết «bạn cách tôi bao xa» — giao điểm là bạn</a:t>
+            </a:r>
+            <a:endParaRPr lang="en-US" sz="950" dirty="0"/>
+          </a:p>
+          <a:p>
+            <a:pPr indent="0" marL="0">
+              <a:lnSpc>
+                <a:spcPct val="100000"/>
+              </a:lnSpc>
+              <a:buNone/>
+            </a:pPr>
+            <a:r>
+              <a:rPr lang="en-US" sz="900" b="1" dirty="0">
+                <a:solidFill>
+                  <a:srgbClr val="007F72"/>
+                </a:solidFill>
+                <a:latin typeface="微軟正黑體" pitchFamily="34" charset="0"/>
+                <a:ea typeface="微軟正黑體" pitchFamily="34" charset="-122"/>
+                <a:cs typeface="微軟正黑體" pitchFamily="34" charset="-120"/>
+              </a:rPr>
+              <a:t>例子・</a:t>
+            </a:r>
+            <a:pPr indent="0" marL="0">
+              <a:lnSpc>
+                <a:spcPct val="100000"/>
+              </a:lnSpc>
+              <a:buNone/>
+            </a:pPr>
+            <a:r>
+              <a:rPr lang="en-US" sz="900" dirty="0">
+                <a:solidFill>
+                  <a:srgbClr val="5F7183"/>
+                </a:solidFill>
+                <a:latin typeface="微軟正黑體" pitchFamily="34" charset="0"/>
+                <a:ea typeface="微軟正黑體" pitchFamily="34" charset="-122"/>
+                <a:cs typeface="微軟正黑體" pitchFamily="34" charset="-120"/>
+              </a:rPr>
+              <a:t>三個地標各說「你離我多遠」，圈的交點就是你</a:t>
+            </a:r>
+            <a:endParaRPr lang="en-US" sz="950" dirty="0"/>
+          </a:p>
+        </p:txBody>
+      </p:sp>
       <p:pic>
         <p:nvPicPr>
-          <p:cNvPr id="10" name="Image 1" descr="/Users/tsengchenghsun/Class/carClass/Claude outputs/第六週(10-15)/src/logo.png">    </p:cNvPr>
+          <p:cNvPr id="15" name="Image 1" descr="/Users/tsengchenghsun/Class/carClass/Claude outputs/第六週(10-15)/src/logo.png">    </p:cNvPr>
           <p:cNvPicPr>
             <a:picLocks noChangeAspect="1"/>
           </p:cNvPicPr>
           <p:nvPr/>
         </p:nvPicPr>
         <p:blipFill>
-          <a:blip r:embed="rId2"/>
+          <a:blip r:embed="rId3"/>
           <a:stretch>
             <a:fillRect/>
           </a:stretch>
@@ -17793,7 +20991,7 @@
       </p:pic>
       <p:sp>
         <p:nvSpPr>
-          <p:cNvPr id="11" name="Text 6"/>
+          <p:cNvPr id="16" name="Text 11"/>
           <p:cNvSpPr txBox="1"/>
           <p:nvPr/>
         </p:nvSpPr>
@@ -17832,7 +21030,7 @@
       </p:sp>
       <p:sp>
         <p:nvSpPr>
-          <p:cNvPr id="12" name="Text 7"/>
+          <p:cNvPr id="17" name="Text 12"/>
           <p:cNvSpPr txBox="1"/>
           <p:nvPr/>
         </p:nvSpPr>
@@ -18675,9 +21873,132 @@
           </a:p>
         </p:txBody>
       </p:sp>
+      <p:sp>
+        <p:nvSpPr>
+          <p:cNvPr id="20" name="Shape 16"/>
+          <p:cNvSpPr/>
+          <p:nvPr/>
+        </p:nvSpPr>
+        <p:spPr>
+          <a:xfrm>
+            <a:off x="5627522" y="365760"/>
+            <a:ext cx="3013558" cy="310896"/>
+          </a:xfrm>
+          <a:prstGeom prst="roundRect">
+            <a:avLst>
+              <a:gd name="adj" fmla="val 20588"/>
+            </a:avLst>
+          </a:prstGeom>
+          <a:solidFill>
+            <a:srgbClr val="EAF6F4"/>
+          </a:solidFill>
+          <a:ln w="9525">
+            <a:solidFill>
+              <a:srgbClr val="9FD6CE"/>
+            </a:solidFill>
+            <a:prstDash val="solid"/>
+          </a:ln>
+        </p:spPr>
+      </p:sp>
+      <p:sp>
+        <p:nvSpPr>
+          <p:cNvPr id="21" name="Text 17"/>
+          <p:cNvSpPr txBox="1"/>
+          <p:nvPr/>
+        </p:nvSpPr>
+        <p:spPr>
+          <a:xfrm>
+            <a:off x="5755538" y="384048"/>
+            <a:ext cx="2830678" cy="274320"/>
+          </a:xfrm>
+          <a:prstGeom prst="rect">
+            <a:avLst/>
+          </a:prstGeom>
+          <a:noFill/>
+          <a:ln/>
+        </p:spPr>
+        <p:txBody>
+          <a:bodyPr wrap="square" lIns="0" tIns="0" rIns="0" bIns="0" rtlCol="0" anchor="ctr"/>
+          <a:lstStyle/>
+          <a:p>
+            <a:pPr indent="0" marL="0">
+              <a:lnSpc>
+                <a:spcPct val="100000"/>
+              </a:lnSpc>
+              <a:buNone/>
+            </a:pPr>
+            <a:r>
+              <a:rPr lang="en-US" sz="950" b="1" dirty="0">
+                <a:solidFill>
+                  <a:srgbClr val="007F72"/>
+                </a:solidFill>
+                <a:latin typeface="Arial" pitchFamily="34" charset="0"/>
+                <a:ea typeface="Arial" pitchFamily="34" charset="-122"/>
+                <a:cs typeface="Arial" pitchFamily="34" charset="-120"/>
+              </a:rPr>
+              <a:t>Ví dụ · </a:t>
+            </a:r>
+            <a:pPr indent="0" marL="0">
+              <a:lnSpc>
+                <a:spcPct val="100000"/>
+              </a:lnSpc>
+              <a:buNone/>
+            </a:pPr>
+            <a:r>
+              <a:rPr lang="en-US" sz="950" dirty="0">
+                <a:solidFill>
+                  <a:srgbClr val="1A2733"/>
+                </a:solidFill>
+                <a:latin typeface="Arial" pitchFamily="34" charset="0"/>
+                <a:ea typeface="Arial" pitchFamily="34" charset="-122"/>
+                <a:cs typeface="Arial" pitchFamily="34" charset="-120"/>
+              </a:rPr>
+              <a:t>ném 100 phi tiêu, một nửa rơi trong vòng</a:t>
+            </a:r>
+            <a:endParaRPr lang="en-US" sz="950" dirty="0"/>
+          </a:p>
+          <a:p>
+            <a:pPr indent="0" marL="0">
+              <a:lnSpc>
+                <a:spcPct val="100000"/>
+              </a:lnSpc>
+              <a:buNone/>
+            </a:pPr>
+            <a:r>
+              <a:rPr lang="en-US" sz="900" b="1" dirty="0">
+                <a:solidFill>
+                  <a:srgbClr val="007F72"/>
+                </a:solidFill>
+                <a:latin typeface="微軟正黑體" pitchFamily="34" charset="0"/>
+                <a:ea typeface="微軟正黑體" pitchFamily="34" charset="-122"/>
+                <a:cs typeface="微軟正黑體" pitchFamily="34" charset="-120"/>
+              </a:rPr>
+              <a:t>例子・</a:t>
+            </a:r>
+            <a:pPr indent="0" marL="0">
+              <a:lnSpc>
+                <a:spcPct val="100000"/>
+              </a:lnSpc>
+              <a:buNone/>
+            </a:pPr>
+            <a:r>
+              <a:rPr lang="en-US" sz="900" dirty="0">
+                <a:solidFill>
+                  <a:srgbClr val="5F7183"/>
+                </a:solidFill>
+                <a:latin typeface="微軟正黑體" pitchFamily="34" charset="0"/>
+                <a:ea typeface="微軟正黑體" pitchFamily="34" charset="-122"/>
+                <a:cs typeface="微軟正黑體" pitchFamily="34" charset="-120"/>
+              </a:rPr>
+              <a:t>射一百支飛鏢，一半落在圈裡</a:t>
+            </a:r>
+            <a:endParaRPr lang="en-US" sz="950" dirty="0"/>
+          </a:p>
+        </p:txBody>
+      </p:sp>
       <p:pic>
         <p:nvPicPr>
-          <p:cNvPr id="21" name="Image 2" descr="/Users/tsengchenghsun/Class/carClass/Claude outputs/第六週(10-15)/src/logo.png">    </p:cNvPr>
+          <p:cNvPr id="23" name="Image 2" descr="/Users/tsengchenghsun/Class/carClass/Claude outputs/第六週(10-15)/src/logo.png">    </p:cNvPr>
           <p:cNvPicPr>
             <a:picLocks noChangeAspect="1"/>
           </p:cNvPicPr>
@@ -18701,7 +22022,7 @@
       </p:pic>
       <p:sp>
         <p:nvSpPr>
-          <p:cNvPr id="22" name="Text 16"/>
+          <p:cNvPr id="24" name="Text 18"/>
           <p:cNvSpPr txBox="1"/>
           <p:nvPr/>
         </p:nvSpPr>
@@ -18740,7 +22061,7 @@
       </p:sp>
       <p:sp>
         <p:nvSpPr>
-          <p:cNvPr id="23" name="Text 17"/>
+          <p:cNvPr id="25" name="Text 19"/>
           <p:cNvSpPr txBox="1"/>
           <p:nvPr/>
         </p:nvSpPr>
@@ -18933,7 +22254,166 @@
       </p:sp>
       <p:sp>
         <p:nvSpPr>
-          <p:cNvPr id="6" name="Text 3"/>
+          <p:cNvPr id="6" name="Shape 3"/>
+          <p:cNvSpPr/>
+          <p:nvPr/>
+        </p:nvSpPr>
+        <p:spPr>
+          <a:xfrm>
+            <a:off x="539496" y="2167260"/>
+            <a:ext cx="219456" cy="219456"/>
+          </a:xfrm>
+          <a:prstGeom prst="ellipse">
+            <a:avLst/>
+          </a:prstGeom>
+          <a:solidFill>
+            <a:srgbClr val="D9463E"/>
+          </a:solidFill>
+          <a:ln/>
+        </p:spPr>
+      </p:sp>
+      <p:sp>
+        <p:nvSpPr>
+          <p:cNvPr id="7" name="Text 4"/>
+          <p:cNvSpPr txBox="1"/>
+          <p:nvPr/>
+        </p:nvSpPr>
+        <p:spPr>
+          <a:xfrm>
+            <a:off x="539496" y="2194692"/>
+            <a:ext cx="219456" cy="164592"/>
+          </a:xfrm>
+          <a:prstGeom prst="rect">
+            <a:avLst/>
+          </a:prstGeom>
+          <a:noFill/>
+          <a:ln/>
+        </p:spPr>
+        <p:txBody>
+          <a:bodyPr wrap="square" lIns="0" tIns="0" rIns="0" bIns="0" rtlCol="0" anchor="ctr"/>
+          <a:lstStyle/>
+          <a:p>
+            <a:pPr algn="ctr" indent="0" marL="0">
+              <a:buNone/>
+            </a:pPr>
+            <a:r>
+              <a:rPr lang="en-US" sz="750" b="1" dirty="0">
+                <a:solidFill>
+                  <a:srgbClr val="FFFFFF"/>
+                </a:solidFill>
+                <a:latin typeface="Arial" pitchFamily="34" charset="0"/>
+                <a:ea typeface="Arial" pitchFamily="34" charset="-122"/>
+                <a:cs typeface="Arial" pitchFamily="34" charset="-120"/>
+              </a:rPr>
+              <a:t>▶</a:t>
+            </a:r>
+            <a:endParaRPr lang="en-US" sz="750" dirty="0"/>
+          </a:p>
+        </p:txBody>
+      </p:sp>
+      <p:sp>
+        <p:nvSpPr>
+          <p:cNvPr id="8" name="Text 5"/>
+          <p:cNvSpPr txBox="1"/>
+          <p:nvPr/>
+        </p:nvSpPr>
+        <p:spPr>
+          <a:xfrm>
+            <a:off x="832104" y="2121540"/>
+            <a:ext cx="2962656" cy="310896"/>
+          </a:xfrm>
+          <a:prstGeom prst="rect">
+            <a:avLst/>
+          </a:prstGeom>
+          <a:noFill/>
+          <a:ln/>
+        </p:spPr>
+        <p:txBody>
+          <a:bodyPr wrap="square" lIns="0" tIns="0" rIns="0" bIns="0" rtlCol="0" anchor="ctr"/>
+          <a:lstStyle/>
+          <a:p>
+            <a:pPr indent="0" marL="0">
+              <a:lnSpc>
+                <a:spcPct val="100000"/>
+              </a:lnSpc>
+              <a:buNone/>
+            </a:pPr>
+            <a:r>
+              <a:rPr lang="en-US" sz="850" b="1" u="sng" dirty="0">
+                <a:solidFill>
+                  <a:srgbClr val="0B1F3A"/>
+                </a:solidFill>
+                <a:latin typeface="Arial" pitchFamily="34" charset="0"/>
+                <a:ea typeface="Arial" pitchFamily="34" charset="-122"/>
+                <a:cs typeface="Arial" pitchFamily="34" charset="-120"/>
+                <a:hlinkClick r:id="rId2" invalidUrl="" action="" tgtFrame="" tooltip="" history="1" highlightClick="0" endSnd="0">
+                  <a:extLst>
+                    <a:ext uri="{A12FA001-AC4F-418D-AE19-62706E023703}">
+                      <ahyp:hlinkClr xmlns:ahyp="http://schemas.microsoft.com/office/drawing/2018/hyperlinkcolor" val="tx"/>
+                    </a:ext>
+                  </a:extLst>
+                </a:hlinkClick>
+              </a:rPr>
+              <a:t>Video: u-blox giải thích RTK　2:34</a:t>
+            </a:r>
+            <a:endParaRPr lang="en-US" sz="850" dirty="0"/>
+          </a:p>
+          <a:p>
+            <a:pPr indent="0" marL="0">
+              <a:lnSpc>
+                <a:spcPct val="100000"/>
+              </a:lnSpc>
+              <a:buNone/>
+            </a:pPr>
+            <a:r>
+              <a:rPr lang="en-US" sz="850" b="1" u="sng" dirty="0">
+                <a:solidFill>
+                  <a:srgbClr val="0B1F3A"/>
+                </a:solidFill>
+                <a:latin typeface="微軟正黑體" pitchFamily="34" charset="0"/>
+                <a:ea typeface="微軟正黑體" pitchFamily="34" charset="-122"/>
+                <a:cs typeface="微軟正黑體" pitchFamily="34" charset="-120"/>
+                <a:hlinkClick r:id="rId2" invalidUrl="" action="" tgtFrame="" tooltip="" history="1" highlightClick="0" endSnd="0">
+                  <a:extLst>
+                    <a:ext uri="{A12FA001-AC4F-418D-AE19-62706E023703}">
+                      <ahyp:hlinkClr xmlns:ahyp="http://schemas.microsoft.com/office/drawing/2018/hyperlinkcolor" val="tx"/>
+                    </a:ext>
+                  </a:extLst>
+                </a:hlinkClick>
+              </a:rPr>
+              <a:t>影片：u-blox 講 RTK　</a:t>
+            </a:r>
+            <a:pPr indent="0" marL="0">
+              <a:lnSpc>
+                <a:spcPct val="100000"/>
+              </a:lnSpc>
+              <a:buNone/>
+            </a:pPr>
+            <a:r>
+              <a:rPr lang="en-US" sz="850" u="sng" dirty="0">
+                <a:solidFill>
+                  <a:srgbClr val="1F6FBF"/>
+                </a:solidFill>
+                <a:latin typeface="Arial" pitchFamily="34" charset="0"/>
+                <a:ea typeface="Arial" pitchFamily="34" charset="-122"/>
+                <a:cs typeface="Arial" pitchFamily="34" charset="-120"/>
+                <a:hlinkClick r:id="rId2" invalidUrl="" action="" tgtFrame="" tooltip="" history="1" highlightClick="0" endSnd="0">
+                  <a:extLst>
+                    <a:ext uri="{A12FA001-AC4F-418D-AE19-62706E023703}">
+                      <ahyp:hlinkClr xmlns:ahyp="http://schemas.microsoft.com/office/drawing/2018/hyperlinkcolor" val="tx"/>
+                    </a:ext>
+                  </a:extLst>
+                </a:hlinkClick>
+              </a:rPr>
+              <a:t>youtu.be/28_YpdN8Thw</a:t>
+            </a:r>
+            <a:endParaRPr lang="en-US" sz="850" dirty="0"/>
+          </a:p>
+        </p:txBody>
+      </p:sp>
+      <p:sp>
+        <p:nvSpPr>
+          <p:cNvPr id="9" name="Text 6"/>
           <p:cNvSpPr txBox="1"/>
           <p:nvPr/>
         </p:nvSpPr>
@@ -18995,7 +22475,7 @@
       </p:sp>
       <p:sp>
         <p:nvSpPr>
-          <p:cNvPr id="7" name="Shape 4"/>
+          <p:cNvPr id="10" name="Shape 7"/>
           <p:cNvSpPr/>
           <p:nvPr/>
         </p:nvSpPr>
@@ -19017,7 +22497,7 @@
       </p:sp>
       <p:sp>
         <p:nvSpPr>
-          <p:cNvPr id="8" name="Text 5"/>
+          <p:cNvPr id="11" name="Text 8"/>
           <p:cNvSpPr txBox="1"/>
           <p:nvPr/>
         </p:nvSpPr>
@@ -19079,7 +22559,7 @@
       </p:sp>
       <p:sp>
         <p:nvSpPr>
-          <p:cNvPr id="9" name="Text 6"/>
+          <p:cNvPr id="12" name="Text 9"/>
           <p:cNvSpPr txBox="1"/>
           <p:nvPr/>
         </p:nvSpPr>
@@ -19141,7 +22621,7 @@
       </p:sp>
       <p:sp>
         <p:nvSpPr>
-          <p:cNvPr id="10" name="Shape 7"/>
+          <p:cNvPr id="13" name="Shape 10"/>
           <p:cNvSpPr/>
           <p:nvPr/>
         </p:nvSpPr>
@@ -19163,7 +22643,7 @@
       </p:sp>
       <p:sp>
         <p:nvSpPr>
-          <p:cNvPr id="11" name="Text 8"/>
+          <p:cNvPr id="14" name="Text 11"/>
           <p:cNvSpPr txBox="1"/>
           <p:nvPr/>
         </p:nvSpPr>
@@ -19225,7 +22705,7 @@
       </p:sp>
       <p:sp>
         <p:nvSpPr>
-          <p:cNvPr id="12" name="Text 9"/>
+          <p:cNvPr id="15" name="Text 12"/>
           <p:cNvSpPr txBox="1"/>
           <p:nvPr/>
         </p:nvSpPr>
@@ -19287,7 +22767,7 @@
       </p:sp>
       <p:sp>
         <p:nvSpPr>
-          <p:cNvPr id="13" name="Shape 10"/>
+          <p:cNvPr id="16" name="Shape 13"/>
           <p:cNvSpPr/>
           <p:nvPr/>
         </p:nvSpPr>
@@ -19309,7 +22789,7 @@
       </p:sp>
       <p:sp>
         <p:nvSpPr>
-          <p:cNvPr id="14" name="Text 11"/>
+          <p:cNvPr id="17" name="Text 14"/>
           <p:cNvSpPr txBox="1"/>
           <p:nvPr/>
         </p:nvSpPr>
@@ -19371,7 +22851,7 @@
       </p:sp>
       <p:sp>
         <p:nvSpPr>
-          <p:cNvPr id="15" name="Text 12"/>
+          <p:cNvPr id="18" name="Text 15"/>
           <p:cNvSpPr txBox="1"/>
           <p:nvPr/>
         </p:nvSpPr>
@@ -19433,21 +22913,21 @@
       </p:sp>
       <p:pic>
         <p:nvPicPr>
-          <p:cNvPr id="16" name="Image 1" descr="/Users/tsengchenghsun/Class/carClass/Claude outputs/第六週(10-15)/src/img/w6_pic_zedf9p.png">    </p:cNvPr>
+          <p:cNvPr id="19" name="Image 1" descr="/Users/tsengchenghsun/Class/carClass/Claude outputs/第六週(10-15)/src/img/w6_pic_zedf9p.png">    </p:cNvPr>
           <p:cNvPicPr>
             <a:picLocks noChangeAspect="1"/>
           </p:cNvPicPr>
           <p:nvPr/>
         </p:nvPicPr>
         <p:blipFill>
-          <a:blip r:embed="rId2"/>
+          <a:blip r:embed="rId3"/>
           <a:stretch>
             <a:fillRect/>
           </a:stretch>
         </p:blipFill>
         <p:spPr>
           <a:xfrm>
-            <a:off x="1460045" y="2084964"/>
+            <a:off x="1460045" y="2487300"/>
             <a:ext cx="1377590" cy="1143000"/>
           </a:xfrm>
           <a:prstGeom prst="rect">
@@ -19457,13 +22937,13 @@
       </p:pic>
       <p:sp>
         <p:nvSpPr>
-          <p:cNvPr id="17" name="Text 13"/>
+          <p:cNvPr id="20" name="Text 16"/>
           <p:cNvSpPr txBox="1"/>
           <p:nvPr/>
         </p:nvSpPr>
         <p:spPr>
           <a:xfrm>
-            <a:off x="502920" y="3264540"/>
+            <a:off x="502920" y="3666876"/>
             <a:ext cx="3291840" cy="164592"/>
           </a:xfrm>
           <a:prstGeom prst="rect">
@@ -19496,7 +22976,7 @@
       </p:sp>
       <p:sp>
         <p:nvSpPr>
-          <p:cNvPr id="18" name="Shape 14"/>
+          <p:cNvPr id="21" name="Shape 17"/>
           <p:cNvSpPr/>
           <p:nvPr/>
         </p:nvSpPr>
@@ -19523,7 +23003,7 @@
       </p:sp>
       <p:sp>
         <p:nvSpPr>
-          <p:cNvPr id="19" name="Text 15"/>
+          <p:cNvPr id="22" name="Text 18"/>
           <p:cNvSpPr txBox="1"/>
           <p:nvPr/>
         </p:nvSpPr>
@@ -19583,16 +23063,139 @@
           </a:p>
         </p:txBody>
       </p:sp>
+      <p:sp>
+        <p:nvSpPr>
+          <p:cNvPr id="23" name="Shape 19"/>
+          <p:cNvSpPr/>
+          <p:nvPr/>
+        </p:nvSpPr>
+        <p:spPr>
+          <a:xfrm>
+            <a:off x="4143769" y="365760"/>
+            <a:ext cx="4497311" cy="310896"/>
+          </a:xfrm>
+          <a:prstGeom prst="roundRect">
+            <a:avLst>
+              <a:gd name="adj" fmla="val 20588"/>
+            </a:avLst>
+          </a:prstGeom>
+          <a:solidFill>
+            <a:srgbClr val="EAF6F4"/>
+          </a:solidFill>
+          <a:ln w="9525">
+            <a:solidFill>
+              <a:srgbClr val="9FD6CE"/>
+            </a:solidFill>
+            <a:prstDash val="solid"/>
+          </a:ln>
+        </p:spPr>
+      </p:sp>
+      <p:sp>
+        <p:nvSpPr>
+          <p:cNvPr id="24" name="Text 20"/>
+          <p:cNvSpPr txBox="1"/>
+          <p:nvPr/>
+        </p:nvSpPr>
+        <p:spPr>
+          <a:xfrm>
+            <a:off x="4271785" y="384048"/>
+            <a:ext cx="4314431" cy="274320"/>
+          </a:xfrm>
+          <a:prstGeom prst="rect">
+            <a:avLst/>
+          </a:prstGeom>
+          <a:noFill/>
+          <a:ln/>
+        </p:spPr>
+        <p:txBody>
+          <a:bodyPr wrap="square" lIns="0" tIns="0" rIns="0" bIns="0" rtlCol="0" anchor="ctr"/>
+          <a:lstStyle/>
+          <a:p>
+            <a:pPr indent="0" marL="0">
+              <a:lnSpc>
+                <a:spcPct val="100000"/>
+              </a:lnSpc>
+              <a:buNone/>
+            </a:pPr>
+            <a:r>
+              <a:rPr lang="en-US" sz="950" b="1" dirty="0">
+                <a:solidFill>
+                  <a:srgbClr val="007F72"/>
+                </a:solidFill>
+                <a:latin typeface="Arial" pitchFamily="34" charset="0"/>
+                <a:ea typeface="Arial" pitchFamily="34" charset="-122"/>
+                <a:cs typeface="Arial" pitchFamily="34" charset="-120"/>
+              </a:rPr>
+              <a:t>Ví dụ · </a:t>
+            </a:r>
+            <a:pPr indent="0" marL="0">
+              <a:lnSpc>
+                <a:spcPct val="100000"/>
+              </a:lnSpc>
+              <a:buNone/>
+            </a:pPr>
+            <a:r>
+              <a:rPr lang="en-US" sz="950" dirty="0">
+                <a:solidFill>
+                  <a:srgbClr val="1A2733"/>
+                </a:solidFill>
+                <a:latin typeface="Arial" pitchFamily="34" charset="0"/>
+                <a:ea typeface="Arial" pitchFamily="34" charset="-122"/>
+                <a:cs typeface="Arial" pitchFamily="34" charset="-120"/>
+              </a:rPr>
+              <a:t>đồng hồ lớp nhanh 5 phút, có người cầm đồng hồ đúng báo cho cả lớp</a:t>
+            </a:r>
+            <a:endParaRPr lang="en-US" sz="950" dirty="0"/>
+          </a:p>
+          <a:p>
+            <a:pPr indent="0" marL="0">
+              <a:lnSpc>
+                <a:spcPct val="100000"/>
+              </a:lnSpc>
+              <a:buNone/>
+            </a:pPr>
+            <a:r>
+              <a:rPr lang="en-US" sz="900" b="1" dirty="0">
+                <a:solidFill>
+                  <a:srgbClr val="007F72"/>
+                </a:solidFill>
+                <a:latin typeface="微軟正黑體" pitchFamily="34" charset="0"/>
+                <a:ea typeface="微軟正黑體" pitchFamily="34" charset="-122"/>
+                <a:cs typeface="微軟正黑體" pitchFamily="34" charset="-120"/>
+              </a:rPr>
+              <a:t>例子・</a:t>
+            </a:r>
+            <a:pPr indent="0" marL="0">
+              <a:lnSpc>
+                <a:spcPct val="100000"/>
+              </a:lnSpc>
+              <a:buNone/>
+            </a:pPr>
+            <a:r>
+              <a:rPr lang="en-US" sz="900" dirty="0">
+                <a:solidFill>
+                  <a:srgbClr val="5F7183"/>
+                </a:solidFill>
+                <a:latin typeface="微軟正黑體" pitchFamily="34" charset="0"/>
+                <a:ea typeface="微軟正黑體" pitchFamily="34" charset="-122"/>
+                <a:cs typeface="微軟正黑體" pitchFamily="34" charset="-120"/>
+              </a:rPr>
+              <a:t>教室的鐘快 5 分鐘，有人拿準的錶告訴大家</a:t>
+            </a:r>
+            <a:endParaRPr lang="en-US" sz="950" dirty="0"/>
+          </a:p>
+        </p:txBody>
+      </p:sp>
       <p:pic>
         <p:nvPicPr>
-          <p:cNvPr id="21" name="Image 2" descr="/Users/tsengchenghsun/Class/carClass/Claude outputs/第六週(10-15)/src/logo.png">    </p:cNvPr>
+          <p:cNvPr id="26" name="Image 2" descr="/Users/tsengchenghsun/Class/carClass/Claude outputs/第六週(10-15)/src/logo.png">    </p:cNvPr>
           <p:cNvPicPr>
             <a:picLocks noChangeAspect="1"/>
           </p:cNvPicPr>
           <p:nvPr/>
         </p:nvPicPr>
         <p:blipFill>
-          <a:blip r:embed="rId3"/>
+          <a:blip r:embed="rId4"/>
           <a:stretch>
             <a:fillRect/>
           </a:stretch>
@@ -19609,7 +23212,7 @@
       </p:pic>
       <p:sp>
         <p:nvSpPr>
-          <p:cNvPr id="22" name="Text 16"/>
+          <p:cNvPr id="27" name="Text 21"/>
           <p:cNvSpPr txBox="1"/>
           <p:nvPr/>
         </p:nvSpPr>
@@ -19648,7 +23251,7 @@
       </p:sp>
       <p:sp>
         <p:nvSpPr>
-          <p:cNvPr id="23" name="Text 17"/>
+          <p:cNvPr id="28" name="Text 22"/>
           <p:cNvSpPr txBox="1"/>
           <p:nvPr/>
         </p:nvSpPr>
@@ -19757,12 +23360,12 @@
         </p:nvSpPr>
         <p:spPr>
           <a:xfrm>
-            <a:off x="502920" y="1101852"/>
-            <a:ext cx="3305556" cy="2514600"/>
+            <a:off x="502920" y="914400"/>
+            <a:ext cx="2770632" cy="2157984"/>
           </a:xfrm>
           <a:prstGeom prst="roundRect">
             <a:avLst>
-              <a:gd name="adj" fmla="val 4364"/>
+              <a:gd name="adj" fmla="val 5085"/>
             </a:avLst>
           </a:prstGeom>
           <a:solidFill>
@@ -19792,8 +23395,8 @@
         </p:blipFill>
         <p:spPr>
           <a:xfrm>
-            <a:off x="576072" y="1214628"/>
-            <a:ext cx="3159252" cy="2106168"/>
+            <a:off x="576072" y="1027176"/>
+            <a:ext cx="2624328" cy="1749552"/>
           </a:xfrm>
           <a:prstGeom prst="rect">
             <a:avLst/>
@@ -19808,8 +23411,8 @@
         </p:nvSpPr>
         <p:spPr>
           <a:xfrm>
-            <a:off x="576072" y="3396996"/>
-            <a:ext cx="3159252" cy="182880"/>
+            <a:off x="576072" y="2852928"/>
+            <a:ext cx="2624328" cy="182880"/>
           </a:xfrm>
           <a:prstGeom prst="rect">
             <a:avLst/>
@@ -19847,8 +23450,8 @@
         </p:nvSpPr>
         <p:spPr>
           <a:xfrm>
-            <a:off x="4119372" y="914400"/>
-            <a:ext cx="4521708" cy="2889504"/>
+            <a:off x="3584448" y="914400"/>
+            <a:ext cx="5056632" cy="2889504"/>
           </a:xfrm>
           <a:prstGeom prst="rect">
             <a:avLst/>
@@ -19947,6 +23550,324 @@
       <p:sp>
         <p:nvSpPr>
           <p:cNvPr id="7" name="Shape 4"/>
+          <p:cNvSpPr/>
+          <p:nvPr/>
+        </p:nvSpPr>
+        <p:spPr>
+          <a:xfrm>
+            <a:off x="539496" y="3172968"/>
+            <a:ext cx="219456" cy="219456"/>
+          </a:xfrm>
+          <a:prstGeom prst="ellipse">
+            <a:avLst/>
+          </a:prstGeom>
+          <a:solidFill>
+            <a:srgbClr val="D9463E"/>
+          </a:solidFill>
+          <a:ln/>
+        </p:spPr>
+      </p:sp>
+      <p:sp>
+        <p:nvSpPr>
+          <p:cNvPr id="8" name="Text 5"/>
+          <p:cNvSpPr txBox="1"/>
+          <p:nvPr/>
+        </p:nvSpPr>
+        <p:spPr>
+          <a:xfrm>
+            <a:off x="539496" y="3200400"/>
+            <a:ext cx="219456" cy="164592"/>
+          </a:xfrm>
+          <a:prstGeom prst="rect">
+            <a:avLst/>
+          </a:prstGeom>
+          <a:noFill/>
+          <a:ln/>
+        </p:spPr>
+        <p:txBody>
+          <a:bodyPr wrap="square" lIns="0" tIns="0" rIns="0" bIns="0" rtlCol="0" anchor="ctr"/>
+          <a:lstStyle/>
+          <a:p>
+            <a:pPr algn="ctr" indent="0" marL="0">
+              <a:buNone/>
+            </a:pPr>
+            <a:r>
+              <a:rPr lang="en-US" sz="750" b="1" dirty="0">
+                <a:solidFill>
+                  <a:srgbClr val="FFFFFF"/>
+                </a:solidFill>
+                <a:latin typeface="Arial" pitchFamily="34" charset="0"/>
+                <a:ea typeface="Arial" pitchFamily="34" charset="-122"/>
+                <a:cs typeface="Arial" pitchFamily="34" charset="-120"/>
+              </a:rPr>
+              <a:t>▶</a:t>
+            </a:r>
+            <a:endParaRPr lang="en-US" sz="750" dirty="0"/>
+          </a:p>
+        </p:txBody>
+      </p:sp>
+      <p:sp>
+        <p:nvSpPr>
+          <p:cNvPr id="9" name="Text 6"/>
+          <p:cNvSpPr txBox="1"/>
+          <p:nvPr/>
+        </p:nvSpPr>
+        <p:spPr>
+          <a:xfrm>
+            <a:off x="832104" y="3127248"/>
+            <a:ext cx="2441448" cy="310896"/>
+          </a:xfrm>
+          <a:prstGeom prst="rect">
+            <a:avLst/>
+          </a:prstGeom>
+          <a:noFill/>
+          <a:ln/>
+        </p:spPr>
+        <p:txBody>
+          <a:bodyPr wrap="square" lIns="0" tIns="0" rIns="0" bIns="0" rtlCol="0" anchor="ctr"/>
+          <a:lstStyle/>
+          <a:p>
+            <a:pPr indent="0" marL="0">
+              <a:lnSpc>
+                <a:spcPct val="100000"/>
+              </a:lnSpc>
+              <a:buNone/>
+            </a:pPr>
+            <a:r>
+              <a:rPr lang="en-US" sz="850" b="1" u="sng" dirty="0">
+                <a:solidFill>
+                  <a:srgbClr val="0B1F3A"/>
+                </a:solidFill>
+                <a:latin typeface="Arial" pitchFamily="34" charset="0"/>
+                <a:ea typeface="Arial" pitchFamily="34" charset="-122"/>
+                <a:cs typeface="Arial" pitchFamily="34" charset="-120"/>
+                <a:hlinkClick r:id="rId2" invalidUrl="" action="" tgtFrame="" tooltip="" history="1" highlightClick="0" endSnd="0">
+                  <a:extLst>
+                    <a:ext uri="{A12FA001-AC4F-418D-AE19-62706E023703}">
+                      <ahyp:hlinkClr xmlns:ahyp="http://schemas.microsoft.com/office/drawing/2018/hyperlinkcolor" val="tx"/>
+                    </a:ext>
+                  </a:extLst>
+                </a:hlinkClick>
+              </a:rPr>
+              <a:t>Video: GPS là gì (tiếng Trung)　1:45</a:t>
+            </a:r>
+            <a:endParaRPr lang="en-US" sz="850" dirty="0"/>
+          </a:p>
+          <a:p>
+            <a:pPr indent="0" marL="0">
+              <a:lnSpc>
+                <a:spcPct val="100000"/>
+              </a:lnSpc>
+              <a:buNone/>
+            </a:pPr>
+            <a:r>
+              <a:rPr lang="en-US" sz="850" b="1" u="sng" dirty="0">
+                <a:solidFill>
+                  <a:srgbClr val="0B1F3A"/>
+                </a:solidFill>
+                <a:latin typeface="微軟正黑體" pitchFamily="34" charset="0"/>
+                <a:ea typeface="微軟正黑體" pitchFamily="34" charset="-122"/>
+                <a:cs typeface="微軟正黑體" pitchFamily="34" charset="-120"/>
+                <a:hlinkClick r:id="rId2" invalidUrl="" action="" tgtFrame="" tooltip="" history="1" highlightClick="0" endSnd="0">
+                  <a:extLst>
+                    <a:ext uri="{A12FA001-AC4F-418D-AE19-62706E023703}">
+                      <ahyp:hlinkClr xmlns:ahyp="http://schemas.microsoft.com/office/drawing/2018/hyperlinkcolor" val="tx"/>
+                    </a:ext>
+                  </a:extLst>
+                </a:hlinkClick>
+              </a:rPr>
+              <a:t>影片：什麼是 GPS　</a:t>
+            </a:r>
+            <a:pPr indent="0" marL="0">
+              <a:lnSpc>
+                <a:spcPct val="100000"/>
+              </a:lnSpc>
+              <a:buNone/>
+            </a:pPr>
+            <a:r>
+              <a:rPr lang="en-US" sz="850" u="sng" dirty="0">
+                <a:solidFill>
+                  <a:srgbClr val="1F6FBF"/>
+                </a:solidFill>
+                <a:latin typeface="Arial" pitchFamily="34" charset="0"/>
+                <a:ea typeface="Arial" pitchFamily="34" charset="-122"/>
+                <a:cs typeface="Arial" pitchFamily="34" charset="-120"/>
+                <a:hlinkClick r:id="rId2" invalidUrl="" action="" tgtFrame="" tooltip="" history="1" highlightClick="0" endSnd="0">
+                  <a:extLst>
+                    <a:ext uri="{A12FA001-AC4F-418D-AE19-62706E023703}">
+                      <ahyp:hlinkClr xmlns:ahyp="http://schemas.microsoft.com/office/drawing/2018/hyperlinkcolor" val="tx"/>
+                    </a:ext>
+                  </a:extLst>
+                </a:hlinkClick>
+              </a:rPr>
+              <a:t>youtu.be/u54tYw5_NsY</a:t>
+            </a:r>
+            <a:endParaRPr lang="en-US" sz="850" dirty="0"/>
+          </a:p>
+        </p:txBody>
+      </p:sp>
+      <p:sp>
+        <p:nvSpPr>
+          <p:cNvPr id="10" name="Shape 7"/>
+          <p:cNvSpPr/>
+          <p:nvPr/>
+        </p:nvSpPr>
+        <p:spPr>
+          <a:xfrm>
+            <a:off x="539496" y="3538728"/>
+            <a:ext cx="219456" cy="219456"/>
+          </a:xfrm>
+          <a:prstGeom prst="ellipse">
+            <a:avLst/>
+          </a:prstGeom>
+          <a:solidFill>
+            <a:srgbClr val="D9463E"/>
+          </a:solidFill>
+          <a:ln/>
+        </p:spPr>
+      </p:sp>
+      <p:sp>
+        <p:nvSpPr>
+          <p:cNvPr id="11" name="Text 8"/>
+          <p:cNvSpPr txBox="1"/>
+          <p:nvPr/>
+        </p:nvSpPr>
+        <p:spPr>
+          <a:xfrm>
+            <a:off x="539496" y="3566160"/>
+            <a:ext cx="219456" cy="164592"/>
+          </a:xfrm>
+          <a:prstGeom prst="rect">
+            <a:avLst/>
+          </a:prstGeom>
+          <a:noFill/>
+          <a:ln/>
+        </p:spPr>
+        <p:txBody>
+          <a:bodyPr wrap="square" lIns="0" tIns="0" rIns="0" bIns="0" rtlCol="0" anchor="ctr"/>
+          <a:lstStyle/>
+          <a:p>
+            <a:pPr algn="ctr" indent="0" marL="0">
+              <a:buNone/>
+            </a:pPr>
+            <a:r>
+              <a:rPr lang="en-US" sz="750" b="1" dirty="0">
+                <a:solidFill>
+                  <a:srgbClr val="FFFFFF"/>
+                </a:solidFill>
+                <a:latin typeface="Arial" pitchFamily="34" charset="0"/>
+                <a:ea typeface="Arial" pitchFamily="34" charset="-122"/>
+                <a:cs typeface="Arial" pitchFamily="34" charset="-120"/>
+              </a:rPr>
+              <a:t>▶</a:t>
+            </a:r>
+            <a:endParaRPr lang="en-US" sz="750" dirty="0"/>
+          </a:p>
+        </p:txBody>
+      </p:sp>
+      <p:sp>
+        <p:nvSpPr>
+          <p:cNvPr id="12" name="Text 9"/>
+          <p:cNvSpPr txBox="1"/>
+          <p:nvPr/>
+        </p:nvSpPr>
+        <p:spPr>
+          <a:xfrm>
+            <a:off x="832104" y="3493008"/>
+            <a:ext cx="2441448" cy="310896"/>
+          </a:xfrm>
+          <a:prstGeom prst="rect">
+            <a:avLst/>
+          </a:prstGeom>
+          <a:noFill/>
+          <a:ln/>
+        </p:spPr>
+        <p:txBody>
+          <a:bodyPr wrap="square" lIns="0" tIns="0" rIns="0" bIns="0" rtlCol="0" anchor="ctr"/>
+          <a:lstStyle/>
+          <a:p>
+            <a:pPr indent="0" marL="0">
+              <a:lnSpc>
+                <a:spcPct val="100000"/>
+              </a:lnSpc>
+              <a:buNone/>
+            </a:pPr>
+            <a:r>
+              <a:rPr lang="en-US" sz="850" b="1" u="sng" dirty="0">
+                <a:solidFill>
+                  <a:srgbClr val="0B1F3A"/>
+                </a:solidFill>
+                <a:latin typeface="Arial" pitchFamily="34" charset="0"/>
+                <a:ea typeface="Arial" pitchFamily="34" charset="-122"/>
+                <a:cs typeface="Arial" pitchFamily="34" charset="-120"/>
+                <a:hlinkClick r:id="rId3" invalidUrl="" action="" tgtFrame="" tooltip="" history="1" highlightClick="0" endSnd="0">
+                  <a:extLst>
+                    <a:ext uri="{A12FA001-AC4F-418D-AE19-62706E023703}">
+                      <ahyp:hlinkClr xmlns:ahyp="http://schemas.microsoft.com/office/drawing/2018/hyperlinkcolor" val="tx"/>
+                    </a:ext>
+                  </a:extLst>
+                </a:hlinkClick>
+              </a:rPr>
+              <a:t>Video: vào hầm là mất GPS　0:52</a:t>
+            </a:r>
+            <a:endParaRPr lang="en-US" sz="850" dirty="0"/>
+          </a:p>
+          <a:p>
+            <a:pPr indent="0" marL="0">
+              <a:lnSpc>
+                <a:spcPct val="100000"/>
+              </a:lnSpc>
+              <a:buNone/>
+            </a:pPr>
+            <a:r>
+              <a:rPr lang="en-US" sz="850" b="1" u="sng" dirty="0">
+                <a:solidFill>
+                  <a:srgbClr val="0B1F3A"/>
+                </a:solidFill>
+                <a:latin typeface="微軟正黑體" pitchFamily="34" charset="0"/>
+                <a:ea typeface="微軟正黑體" pitchFamily="34" charset="-122"/>
+                <a:cs typeface="微軟正黑體" pitchFamily="34" charset="-120"/>
+                <a:hlinkClick r:id="rId3" invalidUrl="" action="" tgtFrame="" tooltip="" history="1" highlightClick="0" endSnd="0">
+                  <a:extLst>
+                    <a:ext uri="{A12FA001-AC4F-418D-AE19-62706E023703}">
+                      <ahyp:hlinkClr xmlns:ahyp="http://schemas.microsoft.com/office/drawing/2018/hyperlinkcolor" val="tx"/>
+                    </a:ext>
+                  </a:extLst>
+                </a:hlinkClick>
+              </a:rPr>
+              <a:t>影片：進隧道就沒 GPS　</a:t>
+            </a:r>
+            <a:pPr indent="0" marL="0">
+              <a:lnSpc>
+                <a:spcPct val="100000"/>
+              </a:lnSpc>
+              <a:buNone/>
+            </a:pPr>
+            <a:r>
+              <a:rPr lang="en-US" sz="850" u="sng" dirty="0">
+                <a:solidFill>
+                  <a:srgbClr val="1F6FBF"/>
+                </a:solidFill>
+                <a:latin typeface="Arial" pitchFamily="34" charset="0"/>
+                <a:ea typeface="Arial" pitchFamily="34" charset="-122"/>
+                <a:cs typeface="Arial" pitchFamily="34" charset="-120"/>
+                <a:hlinkClick r:id="rId3" invalidUrl="" action="" tgtFrame="" tooltip="" history="1" highlightClick="0" endSnd="0">
+                  <a:extLst>
+                    <a:ext uri="{A12FA001-AC4F-418D-AE19-62706E023703}">
+                      <ahyp:hlinkClr xmlns:ahyp="http://schemas.microsoft.com/office/drawing/2018/hyperlinkcolor" val="tx"/>
+                    </a:ext>
+                  </a:extLst>
+                </a:hlinkClick>
+              </a:rPr>
+              <a:t>youtu.be/U6rOEcyo6xU</a:t>
+            </a:r>
+            <a:endParaRPr lang="en-US" sz="850" dirty="0"/>
+          </a:p>
+        </p:txBody>
+      </p:sp>
+      <p:sp>
+        <p:nvSpPr>
+          <p:cNvPr id="13" name="Shape 10"/>
           <p:cNvSpPr/>
           <p:nvPr/>
         </p:nvSpPr>
@@ -19973,7 +23894,7 @@
       </p:sp>
       <p:sp>
         <p:nvSpPr>
-          <p:cNvPr id="8" name="Text 5"/>
+          <p:cNvPr id="14" name="Text 11"/>
           <p:cNvSpPr txBox="1"/>
           <p:nvPr/>
         </p:nvSpPr>
@@ -20033,16 +23954,139 @@
           </a:p>
         </p:txBody>
       </p:sp>
+      <p:sp>
+        <p:nvSpPr>
+          <p:cNvPr id="15" name="Shape 12"/>
+          <p:cNvSpPr/>
+          <p:nvPr/>
+        </p:nvSpPr>
+        <p:spPr>
+          <a:xfrm>
+            <a:off x="5228050" y="365760"/>
+            <a:ext cx="3413030" cy="310896"/>
+          </a:xfrm>
+          <a:prstGeom prst="roundRect">
+            <a:avLst>
+              <a:gd name="adj" fmla="val 20588"/>
+            </a:avLst>
+          </a:prstGeom>
+          <a:solidFill>
+            <a:srgbClr val="EAF6F4"/>
+          </a:solidFill>
+          <a:ln w="9525">
+            <a:solidFill>
+              <a:srgbClr val="9FD6CE"/>
+            </a:solidFill>
+            <a:prstDash val="solid"/>
+          </a:ln>
+        </p:spPr>
+      </p:sp>
+      <p:sp>
+        <p:nvSpPr>
+          <p:cNvPr id="16" name="Text 13"/>
+          <p:cNvSpPr txBox="1"/>
+          <p:nvPr/>
+        </p:nvSpPr>
+        <p:spPr>
+          <a:xfrm>
+            <a:off x="5356066" y="384048"/>
+            <a:ext cx="3230150" cy="274320"/>
+          </a:xfrm>
+          <a:prstGeom prst="rect">
+            <a:avLst/>
+          </a:prstGeom>
+          <a:noFill/>
+          <a:ln/>
+        </p:spPr>
+        <p:txBody>
+          <a:bodyPr wrap="square" lIns="0" tIns="0" rIns="0" bIns="0" rtlCol="0" anchor="ctr"/>
+          <a:lstStyle/>
+          <a:p>
+            <a:pPr indent="0" marL="0">
+              <a:lnSpc>
+                <a:spcPct val="100000"/>
+              </a:lnSpc>
+              <a:buNone/>
+            </a:pPr>
+            <a:r>
+              <a:rPr lang="en-US" sz="950" b="1" dirty="0">
+                <a:solidFill>
+                  <a:srgbClr val="007F72"/>
+                </a:solidFill>
+                <a:latin typeface="Arial" pitchFamily="34" charset="0"/>
+                <a:ea typeface="Arial" pitchFamily="34" charset="-122"/>
+                <a:cs typeface="Arial" pitchFamily="34" charset="-120"/>
+              </a:rPr>
+              <a:t>Ví dụ · </a:t>
+            </a:r>
+            <a:pPr indent="0" marL="0">
+              <a:lnSpc>
+                <a:spcPct val="100000"/>
+              </a:lnSpc>
+              <a:buNone/>
+            </a:pPr>
+            <a:r>
+              <a:rPr lang="en-US" sz="950" dirty="0">
+                <a:solidFill>
+                  <a:srgbClr val="1A2733"/>
+                </a:solidFill>
+                <a:latin typeface="Arial" pitchFamily="34" charset="0"/>
+                <a:ea typeface="Arial" pitchFamily="34" charset="-122"/>
+                <a:cs typeface="Arial" pitchFamily="34" charset="-120"/>
+              </a:rPr>
+              <a:t>nhìn người trong gương, tưởng họ đứng sau gương</a:t>
+            </a:r>
+            <a:endParaRPr lang="en-US" sz="950" dirty="0"/>
+          </a:p>
+          <a:p>
+            <a:pPr indent="0" marL="0">
+              <a:lnSpc>
+                <a:spcPct val="100000"/>
+              </a:lnSpc>
+              <a:buNone/>
+            </a:pPr>
+            <a:r>
+              <a:rPr lang="en-US" sz="900" b="1" dirty="0">
+                <a:solidFill>
+                  <a:srgbClr val="007F72"/>
+                </a:solidFill>
+                <a:latin typeface="微軟正黑體" pitchFamily="34" charset="0"/>
+                <a:ea typeface="微軟正黑體" pitchFamily="34" charset="-122"/>
+                <a:cs typeface="微軟正黑體" pitchFamily="34" charset="-120"/>
+              </a:rPr>
+              <a:t>例子・</a:t>
+            </a:r>
+            <a:pPr indent="0" marL="0">
+              <a:lnSpc>
+                <a:spcPct val="100000"/>
+              </a:lnSpc>
+              <a:buNone/>
+            </a:pPr>
+            <a:r>
+              <a:rPr lang="en-US" sz="900" dirty="0">
+                <a:solidFill>
+                  <a:srgbClr val="5F7183"/>
+                </a:solidFill>
+                <a:latin typeface="微軟正黑體" pitchFamily="34" charset="0"/>
+                <a:ea typeface="微軟正黑體" pitchFamily="34" charset="-122"/>
+                <a:cs typeface="微軟正黑體" pitchFamily="34" charset="-120"/>
+              </a:rPr>
+              <a:t>看鏡子裡的人，會以為他在鏡子後面</a:t>
+            </a:r>
+            <a:endParaRPr lang="en-US" sz="950" dirty="0"/>
+          </a:p>
+        </p:txBody>
+      </p:sp>
       <p:pic>
         <p:nvPicPr>
-          <p:cNvPr id="10" name="Image 1" descr="/Users/tsengchenghsun/Class/carClass/Claude outputs/第六週(10-15)/src/logo.png">    </p:cNvPr>
+          <p:cNvPr id="18" name="Image 1" descr="/Users/tsengchenghsun/Class/carClass/Claude outputs/第六週(10-15)/src/logo.png">    </p:cNvPr>
           <p:cNvPicPr>
             <a:picLocks noChangeAspect="1"/>
           </p:cNvPicPr>
           <p:nvPr/>
         </p:nvPicPr>
         <p:blipFill>
-          <a:blip r:embed="rId2"/>
+          <a:blip r:embed="rId4"/>
           <a:stretch>
             <a:fillRect/>
           </a:stretch>
@@ -20059,7 +24103,7 @@
       </p:pic>
       <p:sp>
         <p:nvSpPr>
-          <p:cNvPr id="11" name="Text 6"/>
+          <p:cNvPr id="19" name="Text 14"/>
           <p:cNvSpPr txBox="1"/>
           <p:nvPr/>
         </p:nvSpPr>
@@ -20098,7 +24142,7 @@
       </p:sp>
       <p:sp>
         <p:nvSpPr>
-          <p:cNvPr id="12" name="Text 7"/>
+          <p:cNvPr id="20" name="Text 15"/>
           <p:cNvSpPr txBox="1"/>
           <p:nvPr/>
         </p:nvSpPr>

--- a/第六週(10-15)/第六週_第2節_簡報.pptx
+++ b/第六週(10-15)/第六週_第2節_簡報.pptx
@@ -6554,7 +6554,7 @@
                 <a:ea typeface="Arial Unicode MS"/>
                 <a:cs typeface="Arial Unicode MS"/>
               </a:rPr>
-              <a:t>看一支一分鐘的影片，TVBS 的科學單元，中文。</a:t>
+              <a:t>看一支兩分鐘的中文動畫，「GPS 定位原理」，有中文字幕。</a:t>
             </a:r>
             <a:r>
               <a:rPr sz="800" b="1" lang="zh-TW" dirty="0">
@@ -6565,7 +6565,7 @@
                 <a:ea typeface="Arial Unicode MS"/>
                 <a:cs typeface="Arial Unicode MS"/>
               </a:rPr>
-              <a:t>從 0:49 播到結束。</a:t>
+              <a:t>從 0:58 播到 2:52。</a:t>
             </a:r>
             <a:r>
               <a:rPr sz="800" lang="zh-TW" dirty="0">
@@ -6576,7 +6576,7 @@
                 <a:ea typeface="Arial Unicode MS"/>
                 <a:cs typeface="Arial Unicode MS"/>
               </a:rPr>
-              <a:t>動畫先畫一顆衛星：你在一個球面上。第二顆：兩個球交成一個圈。第三顆：剩下兩個點，因為人在地球上，排掉另一點。</a:t>
+              <a:t>　</a:t>
             </a:r>
             <a:r>
               <a:rPr sz="800" b="1" lang="zh-TW" dirty="0">
@@ -6587,7 +6587,7 @@
                 <a:ea typeface="Arial Unicode MS"/>
                 <a:cs typeface="Arial Unicode MS"/>
               </a:rPr>
-              <a:t>1:22</a:t>
+              <a:t>0:58</a:t>
             </a:r>
             <a:r>
               <a:rPr sz="800" lang="zh-TW" dirty="0">
@@ -6598,7 +6598,117 @@
                 <a:ea typeface="Arial Unicode MS"/>
                 <a:cs typeface="Arial Unicode MS"/>
               </a:rPr>
-              <a:t> 國家太空中心的工程師講的，就是下一段：你不知道自己的時間，所以要第四顆。
+              <a:t> 算時間差：訊號走了多久，乘以光速就是距離。</a:t>
+            </a:r>
+            <a:r>
+              <a:rPr sz="800" b="1" lang="zh-TW" dirty="0">
+                <a:solidFill>
+                  <a:srgbClr val="000000"/>
+                </a:solidFill>
+                <a:latin typeface="Arial Unicode MS"/>
+                <a:ea typeface="Arial Unicode MS"/>
+                <a:cs typeface="Arial Unicode MS"/>
+              </a:rPr>
+              <a:t>1:14</a:t>
+            </a:r>
+            <a:r>
+              <a:rPr sz="800" lang="zh-TW" dirty="0">
+                <a:solidFill>
+                  <a:srgbClr val="000000"/>
+                </a:solidFill>
+                <a:latin typeface="Arial Unicode MS"/>
+                <a:ea typeface="Arial Unicode MS"/>
+                <a:cs typeface="Arial Unicode MS"/>
+              </a:rPr>
+              <a:t> 只有一顆衛星，你只知道自己在一個圓上，可能在台北、東京，也可能在海底。</a:t>
+            </a:r>
+            <a:r>
+              <a:rPr sz="800" b="1" lang="zh-TW" dirty="0">
+                <a:solidFill>
+                  <a:srgbClr val="000000"/>
+                </a:solidFill>
+                <a:latin typeface="Arial Unicode MS"/>
+                <a:ea typeface="Arial Unicode MS"/>
+                <a:cs typeface="Arial Unicode MS"/>
+              </a:rPr>
+              <a:t>1:27</a:t>
+            </a:r>
+            <a:r>
+              <a:rPr sz="800" lang="zh-TW" dirty="0">
+                <a:solidFill>
+                  <a:srgbClr val="000000"/>
+                </a:solidFill>
+                <a:latin typeface="Arial Unicode MS"/>
+                <a:ea typeface="Arial Unicode MS"/>
+                <a:cs typeface="Arial Unicode MS"/>
+              </a:rPr>
+              <a:t> 第二顆，兩個圓交出兩個點；</a:t>
+            </a:r>
+            <a:r>
+              <a:rPr sz="800" b="1" lang="zh-TW" dirty="0">
+                <a:solidFill>
+                  <a:srgbClr val="000000"/>
+                </a:solidFill>
+                <a:latin typeface="Arial Unicode MS"/>
+                <a:ea typeface="Arial Unicode MS"/>
+                <a:cs typeface="Arial Unicode MS"/>
+              </a:rPr>
+              <a:t>1:37</a:t>
+            </a:r>
+            <a:r>
+              <a:rPr sz="800" lang="zh-TW" dirty="0">
+                <a:solidFill>
+                  <a:srgbClr val="000000"/>
+                </a:solidFill>
+                <a:latin typeface="Arial Unicode MS"/>
+                <a:ea typeface="Arial Unicode MS"/>
+                <a:cs typeface="Arial Unicode MS"/>
+              </a:rPr>
+              <a:t> 第三顆，只剩一個點。</a:t>
+            </a:r>
+            <a:r>
+              <a:rPr sz="800" b="1" lang="zh-TW" dirty="0">
+                <a:solidFill>
+                  <a:srgbClr val="000000"/>
+                </a:solidFill>
+                <a:latin typeface="Arial Unicode MS"/>
+                <a:ea typeface="Arial Unicode MS"/>
+                <a:cs typeface="Arial Unicode MS"/>
+              </a:rPr>
+              <a:t>1:44</a:t>
+            </a:r>
+            <a:r>
+              <a:rPr sz="800" lang="zh-TW" dirty="0">
+                <a:solidFill>
+                  <a:srgbClr val="000000"/>
+                </a:solidFill>
+                <a:latin typeface="Arial Unicode MS"/>
+                <a:ea typeface="Arial Unicode MS"/>
+                <a:cs typeface="Arial Unicode MS"/>
+              </a:rPr>
+              <a:t> 旁白說這叫</a:t>
+            </a:r>
+            <a:r>
+              <a:rPr sz="800" b="1" lang="zh-TW" dirty="0">
+                <a:solidFill>
+                  <a:srgbClr val="000000"/>
+                </a:solidFill>
+                <a:latin typeface="Arial Unicode MS"/>
+                <a:ea typeface="Arial Unicode MS"/>
+                <a:cs typeface="Arial Unicode MS"/>
+              </a:rPr>
+              <a:t>三邊定位</a:t>
+            </a:r>
+            <a:r>
+              <a:rPr sz="800" lang="zh-TW" dirty="0">
+                <a:solidFill>
+                  <a:srgbClr val="000000"/>
+                </a:solidFill>
+                <a:latin typeface="Arial Unicode MS"/>
+                <a:ea typeface="Arial Unicode MS"/>
+                <a:cs typeface="Arial Unicode MS"/>
+              </a:rPr>
+              <a:t>：量距離是三邊，量角度是三角。
 </a:t>
             </a:r>
           </a:p>
@@ -6612,6 +6722,17 @@
               </a:spcAft>
             </a:pPr>
             <a:r>
+              <a:rPr sz="800" b="1" lang="zh-TW" dirty="0">
+                <a:solidFill>
+                  <a:srgbClr val="000000"/>
+                </a:solidFill>
+                <a:latin typeface="Arial Unicode MS"/>
+                <a:ea typeface="Arial Unicode MS"/>
+                <a:cs typeface="Arial Unicode MS"/>
+              </a:rPr>
+              <a:t>2:10</a:t>
+            </a:r>
+            <a:r>
               <a:rPr sz="800" lang="zh-TW" dirty="0">
                 <a:solidFill>
                   <a:srgbClr val="000000"/>
@@ -6620,7 +6741,7 @@
                 <a:ea typeface="Arial Unicode MS"/>
                 <a:cs typeface="Arial Unicode MS"/>
               </a:rPr>
-              <a:t>有一件事要更正：影片的標題和旁白都說「</a:t>
+              <a:t> 影片自己說「按暫停，想想看」：三顆就能定位了，為什麼還要第四顆？</a:t>
             </a:r>
             <a:r>
               <a:rPr sz="800" b="1" lang="zh-TW" dirty="0">
@@ -6631,7 +6752,7 @@
                 <a:ea typeface="Arial Unicode MS"/>
                 <a:cs typeface="Arial Unicode MS"/>
               </a:rPr>
-              <a:t>三角測量</a:t>
+              <a:t>真的按暫停</a:t>
             </a:r>
             <a:r>
               <a:rPr sz="800" lang="zh-TW" dirty="0">
@@ -6642,7 +6763,7 @@
                 <a:ea typeface="Arial Unicode MS"/>
                 <a:cs typeface="Arial Unicode MS"/>
               </a:rPr>
-              <a:t>」。三角測量量的是角度；衛星量的是</a:t>
+              <a:t>，問學生，等兩三個人回答再播。</a:t>
             </a:r>
             <a:r>
               <a:rPr sz="800" b="1" lang="zh-TW" dirty="0">
@@ -6653,7 +6774,7 @@
                 <a:ea typeface="Arial Unicode MS"/>
                 <a:cs typeface="Arial Unicode MS"/>
               </a:rPr>
-              <a:t>距離</a:t>
+              <a:t>2:15</a:t>
             </a:r>
             <a:r>
               <a:rPr sz="800" lang="zh-TW" dirty="0">
@@ -6664,7 +6785,7 @@
                 <a:ea typeface="Arial Unicode MS"/>
                 <a:cs typeface="Arial Unicode MS"/>
               </a:rPr>
-              <a:t>，正確的說法是</a:t>
+              <a:t> 到 </a:t>
             </a:r>
             <a:r>
               <a:rPr sz="800" b="1" lang="zh-TW" dirty="0">
@@ -6675,7 +6796,7 @@
                 <a:ea typeface="Arial Unicode MS"/>
                 <a:cs typeface="Arial Unicode MS"/>
               </a:rPr>
-              <a:t>三邊測量</a:t>
+              <a:t>2:52</a:t>
             </a:r>
             <a:r>
               <a:rPr sz="800" lang="zh-TW" dirty="0">
@@ -6686,7 +6807,29 @@
                 <a:ea typeface="Arial Unicode MS"/>
                 <a:cs typeface="Arial Unicode MS"/>
               </a:rPr>
-              <a:t>。請學生記住：量距離是三邊，量角度是三角。
+              <a:t>：手機沒有原子鐘，差一百萬分之一秒就差三百公尺；所以要四個方程式，解四個未知數，三個是位置，第四個是時鐘誤差。</a:t>
+            </a:r>
+            <a:r>
+              <a:rPr sz="800" b="1" lang="zh-TW" dirty="0">
+                <a:solidFill>
+                  <a:srgbClr val="000000"/>
+                </a:solidFill>
+                <a:latin typeface="Arial Unicode MS"/>
+                <a:ea typeface="Arial Unicode MS"/>
+                <a:cs typeface="Arial Unicode MS"/>
+              </a:rPr>
+              <a:t>播到 2:52 停</a:t>
+            </a:r>
+            <a:r>
+              <a:rPr sz="800" lang="zh-TW" dirty="0">
+                <a:solidFill>
+                  <a:srgbClr val="000000"/>
+                </a:solidFill>
+                <a:latin typeface="Arial Unicode MS"/>
+                <a:ea typeface="Arial Unicode MS"/>
+                <a:cs typeface="Arial Unicode MS"/>
+              </a:rPr>
+              <a:t>，後面講大樓反射，第九張再講。
 </a:t>
             </a:r>
           </a:p>
@@ -6708,29 +6851,7 @@
                 <a:ea typeface="Arial Unicode MS"/>
                 <a:cs typeface="Arial Unicode MS"/>
               </a:rPr>
-              <a:t>三顆衛星，三個圈，交在一個點，就是你。那為什麼要</a:t>
-            </a:r>
-            <a:r>
-              <a:rPr sz="800" b="1" lang="zh-TW" dirty="0">
-                <a:solidFill>
-                  <a:srgbClr val="000000"/>
-                </a:solidFill>
-                <a:latin typeface="Arial Unicode MS"/>
-                <a:ea typeface="Arial Unicode MS"/>
-                <a:cs typeface="Arial Unicode MS"/>
-              </a:rPr>
-              <a:t>四顆</a:t>
-            </a:r>
-            <a:r>
-              <a:rPr sz="800" lang="zh-TW" dirty="0">
-                <a:solidFill>
-                  <a:srgbClr val="000000"/>
-                </a:solidFill>
-                <a:latin typeface="Arial Unicode MS"/>
-                <a:ea typeface="Arial Unicode MS"/>
-                <a:cs typeface="Arial Unicode MS"/>
-              </a:rPr>
-              <a:t>？學生可能會問：接收機的時間不是也要跟衛星一樣準嗎？對，問題就在這裡。接收機的時鐘不是原子鐘，它是幾塊美元的石英，差一微秒就差三百公尺。
+              <a:t>影片說第四顆是為了時鐘。用左圖再講清楚一點。學生可能會問：接收機的時間不是也要跟衛星一樣準嗎？對，問題就在這裡。接收機的時鐘不是原子鐘，它是幾塊美元的石英，差一微秒就差三百公尺。
 </a:t>
             </a:r>
           </a:p>
@@ -6840,29 +6961,7 @@
                 <a:ea typeface="Arial Unicode MS"/>
                 <a:cs typeface="Arial Unicode MS"/>
               </a:rPr>
-              <a:t>。對導航夠，開到路口它會叫你右轉。對自駕不夠。右邊那格：一個車道才三點五公尺，兩點五公尺的圈，比車道還大。你知道自己在這條路上，不知道在哪一道。
-</a:t>
-            </a:r>
-          </a:p>
-          <a:p>
-            <a:pPr algn="l">
-              <a:spcBef>
-                <a:spcPts val="0"/>
-              </a:spcBef>
-              <a:spcAft>
-                <a:spcPts val="133"/>
-              </a:spcAft>
-            </a:pPr>
-            <a:r>
-              <a:rPr sz="800" lang="zh-TW" dirty="0">
-                <a:solidFill>
-                  <a:srgbClr val="000000"/>
-                </a:solidFill>
-                <a:latin typeface="Arial Unicode MS"/>
-                <a:ea typeface="Arial Unicode MS"/>
-                <a:cs typeface="Arial Unicode MS"/>
-              </a:rPr>
-              <a:t>誤差從哪來、怎麼壓到一公分，看規格表。</a:t>
+              <a:t>。對導航夠，開到路口它會叫你右轉。對自駕不夠。右邊那格：一個車道才三點五公尺，兩點五公尺的圈，比車道還大。你知道自己在這條路上，不知道在哪一道。誤差從哪來、怎麼壓到一公分，看規格表。</a:t>
             </a:r>
           </a:p>
         </p:txBody>
@@ -20696,7 +20795,7 @@
                   </a:extLst>
                 </a:hlinkClick>
               </a:rPr>
-              <a:t>Video: nguyên lý GPS (tiếng Trung)　1:55</a:t>
+              <a:t>Video: GPS định vị thế nào (tiếng Trung)　4:41</a:t>
             </a:r>
             <a:endParaRPr lang="en-US" sz="850" dirty="0"/>
           </a:p>
@@ -20723,7 +20822,7 @@
                   </a:extLst>
                 </a:hlinkClick>
               </a:rPr>
-              <a:t>影片：TVBS 衛星定位原理　</a:t>
+              <a:t>影片：GPS 定位原理（中文動畫）　</a:t>
             </a:r>
             <a:pPr indent="0" marL="0">
               <a:lnSpc>
@@ -20747,7 +20846,7 @@
                   </a:extLst>
                 </a:hlinkClick>
               </a:rPr>
-              <a:t>youtu.be/EZR54_PEDU4</a:t>
+              <a:t>youtu.be/R_mY4GLhauk</a:t>
             </a:r>
             <a:endParaRPr lang="en-US" sz="850" dirty="0"/>
           </a:p>

--- a/第六週(10-15)/第六週_第2節_簡報.pptx
+++ b/第六週(10-15)/第六週_第2節_簡報.pptx
@@ -7070,11 +7070,11 @@
                 <a:spcPts val="0"/>
               </a:spcBef>
               <a:spcAft>
-                <a:spcPts val="183"/>
+                <a:spcPts val="150"/>
               </a:spcAft>
             </a:pPr>
             <a:r>
-              <a:rPr sz="1100" lang="zh-TW" dirty="0">
+              <a:rPr sz="900" lang="zh-TW" dirty="0">
                 <a:solidFill>
                   <a:srgbClr val="000000"/>
                 </a:solidFill>
@@ -7085,7 +7085,7 @@
               <a:t>第一顆，u-blox 的 </a:t>
             </a:r>
             <a:r>
-              <a:rPr sz="1100" b="1" lang="zh-TW" dirty="0">
+              <a:rPr sz="900" b="1" lang="zh-TW" dirty="0">
                 <a:solidFill>
                   <a:srgbClr val="000000"/>
                 </a:solidFill>
@@ -7096,7 +7096,7 @@
               <a:t>NEO-M8N</a:t>
             </a:r>
             <a:r>
-              <a:rPr sz="1100" lang="zh-TW" dirty="0">
+              <a:rPr sz="900" lang="zh-TW" dirty="0">
                 <a:solidFill>
                   <a:srgbClr val="000000"/>
                 </a:solidFill>
@@ -7114,11 +7114,11 @@
                 <a:spcPts val="0"/>
               </a:spcBef>
               <a:spcAft>
-                <a:spcPts val="183"/>
+                <a:spcPts val="150"/>
               </a:spcAft>
             </a:pPr>
             <a:r>
-              <a:rPr sz="1100" b="1" lang="zh-TW" dirty="0">
+              <a:rPr sz="900" b="1" lang="zh-TW" dirty="0">
                 <a:solidFill>
                   <a:srgbClr val="000000"/>
                 </a:solidFill>
@@ -7129,7 +7129,7 @@
               <a:t>Horizontal position accuracy，水平精度，2.5 公尺。</a:t>
             </a:r>
             <a:r>
-              <a:rPr sz="1100" lang="zh-TW" dirty="0">
+              <a:rPr sz="900" lang="zh-TW" dirty="0">
                 <a:solidFill>
                   <a:srgbClr val="000000"/>
                 </a:solidFill>
@@ -7147,11 +7147,11 @@
                 <a:spcPts val="0"/>
               </a:spcBef>
               <a:spcAft>
-                <a:spcPts val="183"/>
+                <a:spcPts val="150"/>
               </a:spcAft>
             </a:pPr>
             <a:r>
-              <a:rPr sz="1100" lang="zh-TW" dirty="0">
+              <a:rPr sz="900" lang="zh-TW" dirty="0">
                 <a:solidFill>
                   <a:srgbClr val="000000"/>
                 </a:solidFill>
@@ -7162,7 +7162,7 @@
               <a:t>現在請各位看那個數字右上角的小 3，翻到表下面的</a:t>
             </a:r>
             <a:r>
-              <a:rPr sz="1100" b="1" lang="zh-TW" dirty="0">
+              <a:rPr sz="900" b="1" lang="zh-TW" dirty="0">
                 <a:solidFill>
                   <a:srgbClr val="000000"/>
                 </a:solidFill>
@@ -7173,7 +7173,7 @@
               <a:t>註腳 3</a:t>
             </a:r>
             <a:r>
-              <a:rPr sz="1100" lang="zh-TW" dirty="0">
+              <a:rPr sz="900" lang="zh-TW" dirty="0">
                 <a:solidFill>
                   <a:srgbClr val="000000"/>
                 </a:solidFill>
@@ -7184,7 +7184,7 @@
               <a:t>：</a:t>
             </a:r>
             <a:r>
-              <a:rPr sz="1100" b="1" lang="zh-TW" dirty="0">
+              <a:rPr sz="900" b="1" lang="zh-TW" dirty="0">
                 <a:solidFill>
                   <a:srgbClr val="000000"/>
                 </a:solidFill>
@@ -7195,7 +7195,7 @@
               <a:t>CEP, 50%, 24 hours static, −130 dBm, more than 6 SVs</a:t>
             </a:r>
             <a:r>
-              <a:rPr sz="1100" lang="zh-TW" dirty="0">
+              <a:rPr sz="900" lang="zh-TW" dirty="0">
                 <a:solidFill>
                   <a:srgbClr val="000000"/>
                 </a:solidFill>
@@ -7213,11 +7213,11 @@
                 <a:spcPts val="0"/>
               </a:spcBef>
               <a:spcAft>
-                <a:spcPts val="183"/>
+                <a:spcPts val="150"/>
               </a:spcAft>
             </a:pPr>
             <a:r>
-              <a:rPr sz="1100" lang="zh-TW" dirty="0">
+              <a:rPr sz="900" lang="zh-TW" dirty="0">
                 <a:solidFill>
                   <a:srgbClr val="000000"/>
                 </a:solidFill>
@@ -7228,7 +7228,7 @@
               <a:t>一個一個講。</a:t>
             </a:r>
             <a:r>
-              <a:rPr sz="1100" b="1" lang="zh-TW" dirty="0">
+              <a:rPr sz="900" b="1" lang="zh-TW" dirty="0">
                 <a:solidFill>
                   <a:srgbClr val="000000"/>
                 </a:solidFill>
@@ -7239,7 +7239,7 @@
               <a:t>CEP</a:t>
             </a:r>
             <a:r>
-              <a:rPr sz="1100" lang="zh-TW" dirty="0">
+              <a:rPr sz="900" lang="zh-TW" dirty="0">
                 <a:solidFill>
                   <a:srgbClr val="000000"/>
                 </a:solidFill>
@@ -7250,7 +7250,7 @@
               <a:t> 是圓機率誤差，</a:t>
             </a:r>
             <a:r>
-              <a:rPr sz="1100" b="1" lang="zh-TW" dirty="0">
+              <a:rPr sz="900" b="1" lang="zh-TW" dirty="0">
                 <a:solidFill>
                   <a:srgbClr val="000000"/>
                 </a:solidFill>
@@ -7261,37 +7261,15 @@
               <a:t>50%</a:t>
             </a:r>
             <a:r>
-              <a:rPr sz="1100" lang="zh-TW" dirty="0">
-                <a:solidFill>
-                  <a:srgbClr val="000000"/>
-                </a:solidFill>
-                <a:latin typeface="Arial Unicode MS"/>
-                <a:ea typeface="Arial Unicode MS"/>
-                <a:cs typeface="Arial Unicode MS"/>
-              </a:rPr>
-              <a:t> 的意思是：量一千次，有五百次落在這個圈裡，另外五百次在外面。所以 2.5 公尺不是「最多錯 2.5 公尺」，是「一半的時候錯不到 2.5 公尺」。想成射飛鏢：朝靶心射一百支，五十支落在這個圈裡，另外五十支在圈外，圈外的有些可能偏得很遠。各位還記得上週 OS1 那行 </a:t>
-            </a:r>
-            <a:r>
-              <a:rPr sz="1100" b="1" lang="zh-TW" dirty="0">
-                <a:solidFill>
-                  <a:srgbClr val="000000"/>
-                </a:solidFill>
-                <a:latin typeface="Arial Unicode MS"/>
-                <a:ea typeface="Arial Unicode MS"/>
-                <a:cs typeface="Arial Unicode MS"/>
-              </a:rPr>
-              <a:t>&gt;90% detection probability</a:t>
-            </a:r>
-            <a:r>
-              <a:rPr sz="1100" lang="zh-TW" dirty="0">
-                <a:solidFill>
-                  <a:srgbClr val="000000"/>
-                </a:solidFill>
-                <a:latin typeface="Arial Unicode MS"/>
-                <a:ea typeface="Arial Unicode MS"/>
-                <a:cs typeface="Arial Unicode MS"/>
-              </a:rPr>
-              <a:t> 嗎？同一種東西，都是機率。這一週的第三題會考。
+              <a:rPr sz="900" lang="zh-TW" dirty="0">
+                <a:solidFill>
+                  <a:srgbClr val="000000"/>
+                </a:solidFill>
+                <a:latin typeface="Arial Unicode MS"/>
+                <a:ea typeface="Arial Unicode MS"/>
+                <a:cs typeface="Arial Unicode MS"/>
+              </a:rPr>
+              <a:t> 的意思是：量一千次，有五百次落在 2.5 公尺的圈裡，另外五百次在圈外。所以 2.5 公尺不是「最多錯 2.5 公尺」，是「一半的時候錯不到 2.5 公尺」。
 </a:t>
             </a:r>
           </a:p>
@@ -7301,52 +7279,41 @@
                 <a:spcPts val="0"/>
               </a:spcBef>
               <a:spcAft>
-                <a:spcPts val="183"/>
+                <a:spcPts val="150"/>
               </a:spcAft>
             </a:pPr>
             <a:r>
-              <a:rPr sz="1100" b="1" lang="zh-TW" dirty="0">
-                <a:solidFill>
-                  <a:srgbClr val="000000"/>
-                </a:solidFill>
-                <a:latin typeface="Arial Unicode MS"/>
-                <a:ea typeface="Arial Unicode MS"/>
-                <a:cs typeface="Arial Unicode MS"/>
-              </a:rPr>
-              <a:t>24 hours static</a:t>
-            </a:r>
-            <a:r>
-              <a:rPr sz="1100" lang="zh-TW" dirty="0">
-                <a:solidFill>
-                  <a:srgbClr val="000000"/>
-                </a:solidFill>
-                <a:latin typeface="Arial Unicode MS"/>
-                <a:ea typeface="Arial Unicode MS"/>
-                <a:cs typeface="Arial Unicode MS"/>
-              </a:rPr>
-              <a:t>：接收機放著不動，量二十四小時。你在河內的路上以時速四十在跑，條件比這個差。</a:t>
-            </a:r>
-            <a:r>
-              <a:rPr sz="1100" b="1" lang="zh-TW" dirty="0">
-                <a:solidFill>
-                  <a:srgbClr val="000000"/>
-                </a:solidFill>
-                <a:latin typeface="Arial Unicode MS"/>
-                <a:ea typeface="Arial Unicode MS"/>
-                <a:cs typeface="Arial Unicode MS"/>
-              </a:rPr>
-              <a:t>more than 6 SVs</a:t>
-            </a:r>
-            <a:r>
-              <a:rPr sz="1100" lang="zh-TW" dirty="0">
-                <a:solidFill>
-                  <a:srgbClr val="000000"/>
-                </a:solidFill>
-                <a:latin typeface="Arial Unicode MS"/>
-                <a:ea typeface="Arial Unicode MS"/>
-                <a:cs typeface="Arial Unicode MS"/>
-              </a:rPr>
-              <a:t>：至少看得到六顆衛星，窄巷裡看不到六顆。
+              <a:rPr sz="900" lang="zh-TW" dirty="0">
+                <a:solidFill>
+                  <a:srgbClr val="000000"/>
+                </a:solidFill>
+                <a:latin typeface="Arial Unicode MS"/>
+                <a:ea typeface="Arial Unicode MS"/>
+                <a:cs typeface="Arial Unicode MS"/>
+              </a:rPr>
+              <a:t>聽起來好像一半都不準？不是。圈外那一半，大多只是稍微出界。想成射飛鏢：朝靶心射一百支，五十支落在 2.5 公尺的圈裡；把圈畫大一倍，五公尺，大約九十五支都在裡面。偏得很遠的只有少數幾支，通常是大樓反射那種，第九張講。所以看到 CEP 有一個簡單的換算：</a:t>
+            </a:r>
+            <a:r>
+              <a:rPr sz="900" b="1" lang="zh-TW" dirty="0">
+                <a:solidFill>
+                  <a:srgbClr val="000000"/>
+                </a:solidFill>
+                <a:latin typeface="Arial Unicode MS"/>
+                <a:ea typeface="Arial Unicode MS"/>
+                <a:cs typeface="Arial Unicode MS"/>
+              </a:rPr>
+              <a:t>乘以二，大約就是九成五的範圍</a:t>
+            </a:r>
+            <a:r>
+              <a:rPr sz="900" lang="zh-TW" dirty="0">
+                <a:solidFill>
+                  <a:srgbClr val="000000"/>
+                </a:solidFill>
+                <a:latin typeface="Arial Unicode MS"/>
+                <a:ea typeface="Arial Unicode MS"/>
+                <a:cs typeface="Arial Unicode MS"/>
+              </a:rPr>
+              <a:t>。2.5 公尺的 CEP，九成五的時候錯不到五公尺。
 </a:t>
             </a:r>
           </a:p>
@@ -7356,41 +7323,19 @@
                 <a:spcPts val="0"/>
               </a:spcBef>
               <a:spcAft>
-                <a:spcPts val="183"/>
+                <a:spcPts val="150"/>
               </a:spcAft>
             </a:pPr>
             <a:r>
-              <a:rPr sz="1100" lang="zh-TW" dirty="0">
-                <a:solidFill>
-                  <a:srgbClr val="000000"/>
-                </a:solidFill>
-                <a:latin typeface="Arial Unicode MS"/>
-                <a:ea typeface="Arial Unicode MS"/>
-                <a:cs typeface="Arial Unicode MS"/>
-              </a:rPr>
-              <a:t>往下，</a:t>
-            </a:r>
-            <a:r>
-              <a:rPr sz="1100" b="1" lang="zh-TW" dirty="0">
-                <a:solidFill>
-                  <a:srgbClr val="000000"/>
-                </a:solidFill>
-                <a:latin typeface="Arial Unicode MS"/>
-                <a:ea typeface="Arial Unicode MS"/>
-                <a:cs typeface="Arial Unicode MS"/>
-              </a:rPr>
-              <a:t>更新率 5 Hz</a:t>
-            </a:r>
-            <a:r>
-              <a:rPr sz="1100" lang="zh-TW" dirty="0">
-                <a:solidFill>
-                  <a:srgbClr val="000000"/>
-                </a:solidFill>
-                <a:latin typeface="Arial Unicode MS"/>
-                <a:ea typeface="Arial Unicode MS"/>
-                <a:cs typeface="Arial Unicode MS"/>
-              </a:rPr>
-              <a:t>：每兩百毫秒一個位置。時速四十的話，兩個位置之間車子走了二點二公尺。
+              <a:rPr sz="900" lang="zh-TW" dirty="0">
+                <a:solidFill>
+                  <a:srgbClr val="000000"/>
+                </a:solidFill>
+                <a:latin typeface="Arial Unicode MS"/>
+                <a:ea typeface="Arial Unicode MS"/>
+                <a:cs typeface="Arial Unicode MS"/>
+              </a:rPr>
+              <a:t>那廠商為什麼寫一半，不寫九成五？因為這是這一行的習慣，數字也比較小、比較好看。各位以後看到 CEP，自己乘以二。
 </a:t>
             </a:r>
           </a:p>
@@ -7400,30 +7345,41 @@
                 <a:spcPts val="0"/>
               </a:spcBef>
               <a:spcAft>
-                <a:spcPts val="183"/>
+                <a:spcPts val="150"/>
               </a:spcAft>
             </a:pPr>
             <a:r>
-              <a:rPr sz="1100" b="1" lang="zh-TW" dirty="0">
-                <a:solidFill>
-                  <a:srgbClr val="000000"/>
-                </a:solidFill>
-                <a:latin typeface="Arial Unicode MS"/>
-                <a:ea typeface="Arial Unicode MS"/>
-                <a:cs typeface="Arial Unicode MS"/>
-              </a:rPr>
-              <a:t>Time-To-First-Fix，Cold start 26 秒。</a:t>
-            </a:r>
-            <a:r>
-              <a:rPr sz="1100" lang="zh-TW" dirty="0">
-                <a:solidFill>
-                  <a:srgbClr val="000000"/>
-                </a:solidFill>
-                <a:latin typeface="Arial Unicode MS"/>
-                <a:ea typeface="Arial Unicode MS"/>
-                <a:cs typeface="Arial Unicode MS"/>
-              </a:rPr>
-              <a:t>開機之後要二十六秒才有第一個位置，因為要先把上一張講的星曆收完。衛星傳資料非常慢，每秒只有五十個位元，整份星曆要二、三十秒才收得完。手機之所以一打開就有位置，是因為它先用網路把那些資料抓好了。
+              <a:rPr sz="900" lang="zh-TW" dirty="0">
+                <a:solidFill>
+                  <a:srgbClr val="000000"/>
+                </a:solidFill>
+                <a:latin typeface="Arial Unicode MS"/>
+                <a:ea typeface="Arial Unicode MS"/>
+                <a:cs typeface="Arial Unicode MS"/>
+              </a:rPr>
+              <a:t>各位還記得上週 OS1 那行 </a:t>
+            </a:r>
+            <a:r>
+              <a:rPr sz="900" b="1" lang="zh-TW" dirty="0">
+                <a:solidFill>
+                  <a:srgbClr val="000000"/>
+                </a:solidFill>
+                <a:latin typeface="Arial Unicode MS"/>
+                <a:ea typeface="Arial Unicode MS"/>
+                <a:cs typeface="Arial Unicode MS"/>
+              </a:rPr>
+              <a:t>&gt;90% detection probability</a:t>
+            </a:r>
+            <a:r>
+              <a:rPr sz="900" lang="zh-TW" dirty="0">
+                <a:solidFill>
+                  <a:srgbClr val="000000"/>
+                </a:solidFill>
+                <a:latin typeface="Arial Unicode MS"/>
+                <a:ea typeface="Arial Unicode MS"/>
+                <a:cs typeface="Arial Unicode MS"/>
+              </a:rPr>
+              <a:t> 嗎？同一種東西，都是機率。這一週的第三題會考。
 </a:t>
             </a:r>
           </a:p>
@@ -7433,11 +7389,143 @@
                 <a:spcPts val="0"/>
               </a:spcBef>
               <a:spcAft>
-                <a:spcPts val="183"/>
+                <a:spcPts val="150"/>
               </a:spcAft>
             </a:pPr>
             <a:r>
-              <a:rPr sz="1100" lang="zh-TW" dirty="0">
+              <a:rPr sz="900" b="1" lang="zh-TW" dirty="0">
+                <a:solidFill>
+                  <a:srgbClr val="000000"/>
+                </a:solidFill>
+                <a:latin typeface="Arial Unicode MS"/>
+                <a:ea typeface="Arial Unicode MS"/>
+                <a:cs typeface="Arial Unicode MS"/>
+              </a:rPr>
+              <a:t>24 hours static</a:t>
+            </a:r>
+            <a:r>
+              <a:rPr sz="900" lang="zh-TW" dirty="0">
+                <a:solidFill>
+                  <a:srgbClr val="000000"/>
+                </a:solidFill>
+                <a:latin typeface="Arial Unicode MS"/>
+                <a:ea typeface="Arial Unicode MS"/>
+                <a:cs typeface="Arial Unicode MS"/>
+              </a:rPr>
+              <a:t>：接收機放著不動，量二十四小時。你在河內的路上以時速四十在跑，條件比這個差。</a:t>
+            </a:r>
+            <a:r>
+              <a:rPr sz="900" b="1" lang="zh-TW" dirty="0">
+                <a:solidFill>
+                  <a:srgbClr val="000000"/>
+                </a:solidFill>
+                <a:latin typeface="Arial Unicode MS"/>
+                <a:ea typeface="Arial Unicode MS"/>
+                <a:cs typeface="Arial Unicode MS"/>
+              </a:rPr>
+              <a:t>more than 6 SVs</a:t>
+            </a:r>
+            <a:r>
+              <a:rPr sz="900" lang="zh-TW" dirty="0">
+                <a:solidFill>
+                  <a:srgbClr val="000000"/>
+                </a:solidFill>
+                <a:latin typeface="Arial Unicode MS"/>
+                <a:ea typeface="Arial Unicode MS"/>
+                <a:cs typeface="Arial Unicode MS"/>
+              </a:rPr>
+              <a:t>：至少看得到六顆衛星，窄巷裡看不到六顆。
+</a:t>
+            </a:r>
+          </a:p>
+          <a:p>
+            <a:pPr algn="l">
+              <a:spcBef>
+                <a:spcPts val="0"/>
+              </a:spcBef>
+              <a:spcAft>
+                <a:spcPts val="150"/>
+              </a:spcAft>
+            </a:pPr>
+            <a:r>
+              <a:rPr sz="900" lang="zh-TW" dirty="0">
+                <a:solidFill>
+                  <a:srgbClr val="000000"/>
+                </a:solidFill>
+                <a:latin typeface="Arial Unicode MS"/>
+                <a:ea typeface="Arial Unicode MS"/>
+                <a:cs typeface="Arial Unicode MS"/>
+              </a:rPr>
+              <a:t>往下，</a:t>
+            </a:r>
+            <a:r>
+              <a:rPr sz="900" b="1" lang="zh-TW" dirty="0">
+                <a:solidFill>
+                  <a:srgbClr val="000000"/>
+                </a:solidFill>
+                <a:latin typeface="Arial Unicode MS"/>
+                <a:ea typeface="Arial Unicode MS"/>
+                <a:cs typeface="Arial Unicode MS"/>
+              </a:rPr>
+              <a:t>更新率 5 Hz</a:t>
+            </a:r>
+            <a:r>
+              <a:rPr sz="900" lang="zh-TW" dirty="0">
+                <a:solidFill>
+                  <a:srgbClr val="000000"/>
+                </a:solidFill>
+                <a:latin typeface="Arial Unicode MS"/>
+                <a:ea typeface="Arial Unicode MS"/>
+                <a:cs typeface="Arial Unicode MS"/>
+              </a:rPr>
+              <a:t>：每兩百毫秒一個位置。時速四十的話，兩個位置之間車子走了二點二公尺。
+</a:t>
+            </a:r>
+          </a:p>
+          <a:p>
+            <a:pPr algn="l">
+              <a:spcBef>
+                <a:spcPts val="0"/>
+              </a:spcBef>
+              <a:spcAft>
+                <a:spcPts val="150"/>
+              </a:spcAft>
+            </a:pPr>
+            <a:r>
+              <a:rPr sz="900" b="1" lang="zh-TW" dirty="0">
+                <a:solidFill>
+                  <a:srgbClr val="000000"/>
+                </a:solidFill>
+                <a:latin typeface="Arial Unicode MS"/>
+                <a:ea typeface="Arial Unicode MS"/>
+                <a:cs typeface="Arial Unicode MS"/>
+              </a:rPr>
+              <a:t>Time-To-First-Fix，Cold start 26 秒。</a:t>
+            </a:r>
+            <a:r>
+              <a:rPr sz="900" lang="zh-TW" dirty="0">
+                <a:solidFill>
+                  <a:srgbClr val="000000"/>
+                </a:solidFill>
+                <a:latin typeface="Arial Unicode MS"/>
+                <a:ea typeface="Arial Unicode MS"/>
+                <a:cs typeface="Arial Unicode MS"/>
+              </a:rPr>
+              <a:t>開機之後要二十六秒才有第一個位置，因為要先把上一張講的星曆收完。衛星傳資料非常慢，每秒只有五十個位元，整份星曆要二、三十秒才收得完。手機之所以一打開就有位置，是因為它先用網路把那些資料抓好了。
+</a:t>
+            </a:r>
+          </a:p>
+          <a:p>
+            <a:pPr algn="l">
+              <a:spcBef>
+                <a:spcPts val="0"/>
+              </a:spcBef>
+              <a:spcAft>
+                <a:spcPts val="150"/>
+              </a:spcAft>
+            </a:pPr>
+            <a:r>
+              <a:rPr sz="900" lang="zh-TW" dirty="0">
                 <a:solidFill>
                   <a:srgbClr val="000000"/>
                 </a:solidFill>

--- a/第六週(10-15)/第六週_第2節_簡報.pptx
+++ b/第六週(10-15)/第六週_第2節_簡報.pptx
@@ -7642,11 +7642,11 @@
                 <a:spcPts val="0"/>
               </a:spcBef>
               <a:spcAft>
-                <a:spcPts val="142"/>
+                <a:spcPts val="133"/>
               </a:spcAft>
             </a:pPr>
             <a:r>
-              <a:rPr sz="850" lang="zh-TW" dirty="0">
+              <a:rPr sz="800" lang="zh-TW" dirty="0">
                 <a:solidFill>
                   <a:srgbClr val="000000"/>
                 </a:solidFill>
@@ -7657,7 +7657,7 @@
               <a:t>第二顆，同一家公司的 </a:t>
             </a:r>
             <a:r>
-              <a:rPr sz="850" b="1" lang="zh-TW" dirty="0">
+              <a:rPr sz="800" b="1" lang="zh-TW" dirty="0">
                 <a:solidFill>
                   <a:srgbClr val="000000"/>
                 </a:solidFill>
@@ -7668,15 +7668,15 @@
               <a:t>ZED-F9P</a:t>
             </a:r>
             <a:r>
-              <a:rPr sz="850" lang="zh-TW" dirty="0">
-                <a:solidFill>
-                  <a:srgbClr val="000000"/>
-                </a:solidFill>
-                <a:latin typeface="Arial Unicode MS"/>
-                <a:ea typeface="Arial Unicode MS"/>
-                <a:cs typeface="Arial Unicode MS"/>
-              </a:rPr>
-              <a:t>。做測量、無人機、農業機械、自駕研究車，很多都用它。左邊是它規格書第五頁的表，三列。
+              <a:rPr sz="800" lang="zh-TW" dirty="0">
+                <a:solidFill>
+                  <a:srgbClr val="000000"/>
+                </a:solidFill>
+                <a:latin typeface="Arial Unicode MS"/>
+                <a:ea typeface="Arial Unicode MS"/>
+                <a:cs typeface="Arial Unicode MS"/>
+              </a:rPr>
+              <a:t>。做測量、無人機、農業機械、自駕研究車，很多都用它。左邊是它規格書第五頁的表。表頭那一排 GPS+GLO+GAL+BDS……是同時收哪幾個系統，每一欄的數字都一樣，看第一欄就好。上面三列，由上往下。
 </a:t>
             </a:r>
           </a:p>
@@ -7686,11 +7686,11 @@
                 <a:spcPts val="0"/>
               </a:spcBef>
               <a:spcAft>
-                <a:spcPts val="142"/>
+                <a:spcPts val="133"/>
               </a:spcAft>
             </a:pPr>
             <a:r>
-              <a:rPr sz="850" b="1" lang="zh-TW" dirty="0">
+              <a:rPr sz="800" b="1" lang="zh-TW" dirty="0">
                 <a:solidFill>
                   <a:srgbClr val="000000"/>
                 </a:solidFill>
@@ -7701,18 +7701,18 @@
               <a:t>第一列 PVT，1.5 公尺 CEP。</a:t>
             </a:r>
             <a:r>
-              <a:rPr sz="850" lang="zh-TW" dirty="0">
-                <a:solidFill>
-                  <a:srgbClr val="000000"/>
-                </a:solidFill>
-                <a:latin typeface="Arial Unicode MS"/>
-                <a:ea typeface="Arial Unicode MS"/>
-                <a:cs typeface="Arial Unicode MS"/>
-              </a:rPr>
-              <a:t>這是它自己一顆、沒有任何修正資料的精度。比剛剛那顆好一點，因為它收</a:t>
-            </a:r>
-            <a:r>
-              <a:rPr sz="850" b="1" lang="zh-TW" dirty="0">
+              <a:rPr sz="800" lang="zh-TW" dirty="0">
+                <a:solidFill>
+                  <a:srgbClr val="000000"/>
+                </a:solidFill>
+                <a:latin typeface="Arial Unicode MS"/>
+                <a:ea typeface="Arial Unicode MS"/>
+                <a:cs typeface="Arial Unicode MS"/>
+              </a:rPr>
+              <a:t>PVT 是位置、速度、時間，意思是它自己一顆算、沒有任何修正資料的精度。比上一張那顆的 2.5 公尺好，主要因為它收</a:t>
+            </a:r>
+            <a:r>
+              <a:rPr sz="800" b="1" lang="zh-TW" dirty="0">
                 <a:solidFill>
                   <a:srgbClr val="000000"/>
                 </a:solidFill>
@@ -7723,15 +7723,15 @@
               <a:t>兩個頻率</a:t>
             </a:r>
             <a:r>
-              <a:rPr sz="850" lang="zh-TW" dirty="0">
-                <a:solidFill>
-                  <a:srgbClr val="000000"/>
-                </a:solidFill>
-                <a:latin typeface="Arial Unicode MS"/>
-                <a:ea typeface="Arial Unicode MS"/>
-                <a:cs typeface="Arial Unicode MS"/>
-              </a:rPr>
-              <a:t>，可以把大氣造成的誤差消掉大半。
+              <a:rPr sz="800" lang="zh-TW" dirty="0">
+                <a:solidFill>
+                  <a:srgbClr val="000000"/>
+                </a:solidFill>
+                <a:latin typeface="Arial Unicode MS"/>
+                <a:ea typeface="Arial Unicode MS"/>
+                <a:cs typeface="Arial Unicode MS"/>
+              </a:rPr>
+              <a:t>。
 </a:t>
             </a:r>
           </a:p>
@@ -7741,52 +7741,63 @@
                 <a:spcPts val="0"/>
               </a:spcBef>
               <a:spcAft>
-                <a:spcPts val="142"/>
+                <a:spcPts val="133"/>
               </a:spcAft>
             </a:pPr>
             <a:r>
-              <a:rPr sz="850" b="1" lang="zh-TW" dirty="0">
-                <a:solidFill>
-                  <a:srgbClr val="000000"/>
-                </a:solidFill>
-                <a:latin typeface="Arial Unicode MS"/>
-                <a:ea typeface="Arial Unicode MS"/>
-                <a:cs typeface="Arial Unicode MS"/>
-              </a:rPr>
-              <a:t>第三列 RTK，0.01 公尺 + 1 ppm CEP。</a:t>
-            </a:r>
-            <a:r>
-              <a:rPr sz="850" lang="zh-TW" dirty="0">
-                <a:solidFill>
-                  <a:srgbClr val="000000"/>
-                </a:solidFill>
-                <a:latin typeface="Arial Unicode MS"/>
-                <a:ea typeface="Arial Unicode MS"/>
-                <a:cs typeface="Arial Unicode MS"/>
-              </a:rPr>
-              <a:t>一公分。怎麼從一點五公尺變成一公分？靠一座</a:t>
-            </a:r>
-            <a:r>
-              <a:rPr sz="850" b="1" lang="zh-TW" dirty="0">
-                <a:solidFill>
-                  <a:srgbClr val="000000"/>
-                </a:solidFill>
-                <a:latin typeface="Arial Unicode MS"/>
-                <a:ea typeface="Arial Unicode MS"/>
-                <a:cs typeface="Arial Unicode MS"/>
-              </a:rPr>
-              <a:t>基準站</a:t>
-            </a:r>
-            <a:r>
-              <a:rPr sz="850" lang="zh-TW" dirty="0">
-                <a:solidFill>
-                  <a:srgbClr val="000000"/>
-                </a:solidFill>
-                <a:latin typeface="Arial Unicode MS"/>
-                <a:ea typeface="Arial Unicode MS"/>
-                <a:cs typeface="Arial Unicode MS"/>
-              </a:rPr>
-              <a:t>。
+              <a:rPr sz="800" lang="zh-TW" dirty="0">
+                <a:solidFill>
+                  <a:srgbClr val="000000"/>
+                </a:solidFill>
+                <a:latin typeface="Arial Unicode MS"/>
+                <a:ea typeface="Arial Unicode MS"/>
+                <a:cs typeface="Arial Unicode MS"/>
+              </a:rPr>
+              <a:t>兩個頻率是什麼？每顆衛星同時用兩個頻率各發一份訊號，一份在 1575 MHz，一份在 1227 MHz 左右。訊號下來要穿過</a:t>
+            </a:r>
+            <a:r>
+              <a:rPr sz="800" b="1" lang="zh-TW" dirty="0">
+                <a:solidFill>
+                  <a:srgbClr val="000000"/>
+                </a:solidFill>
+                <a:latin typeface="Arial Unicode MS"/>
+                <a:ea typeface="Arial Unicode MS"/>
+                <a:cs typeface="Arial Unicode MS"/>
+              </a:rPr>
+              <a:t>電離層</a:t>
+            </a:r>
+            <a:r>
+              <a:rPr sz="800" lang="zh-TW" dirty="0">
+                <a:solidFill>
+                  <a:srgbClr val="000000"/>
+                </a:solidFill>
+                <a:latin typeface="Arial Unicode MS"/>
+                <a:ea typeface="Arial Unicode MS"/>
+                <a:cs typeface="Arial Unicode MS"/>
+              </a:rPr>
+              <a:t>，就是大氣最上面那一層帶電的氣體。電離層會把訊號拖慢，而且</a:t>
+            </a:r>
+            <a:r>
+              <a:rPr sz="800" b="1" lang="zh-TW" dirty="0">
+                <a:solidFill>
+                  <a:srgbClr val="000000"/>
+                </a:solidFill>
+                <a:latin typeface="Arial Unicode MS"/>
+                <a:ea typeface="Arial Unicode MS"/>
+                <a:cs typeface="Arial Unicode MS"/>
+              </a:rPr>
+              <a:t>頻率愈低，拖得愈多</a:t>
+            </a:r>
+            <a:r>
+              <a:rPr sz="800" lang="zh-TW" dirty="0">
+                <a:solidFill>
+                  <a:srgbClr val="000000"/>
+                </a:solidFill>
+                <a:latin typeface="Arial Unicode MS"/>
+                <a:ea typeface="Arial Unicode MS"/>
+                <a:cs typeface="Arial Unicode MS"/>
+              </a:rPr>
+              <a:t>。NEO-M8N 只收一個頻率，被拖慢多少它不知道，只能用一個估計值，猜錯的部分就變成誤差。ZED-F9P 兩份都收：同一刻發出的兩份訊號，看它們差多久到，就算得出電離層拖慢了多少，直接扣掉。
 </a:t>
             </a:r>
           </a:p>
@@ -7796,41 +7807,19 @@
                 <a:spcPts val="0"/>
               </a:spcBef>
               <a:spcAft>
-                <a:spcPts val="142"/>
+                <a:spcPts val="133"/>
               </a:spcAft>
             </a:pPr>
             <a:r>
-              <a:rPr sz="850" lang="zh-TW" dirty="0">
-                <a:solidFill>
-                  <a:srgbClr val="000000"/>
-                </a:solidFill>
-                <a:latin typeface="Arial Unicode MS"/>
-                <a:ea typeface="Arial Unicode MS"/>
-                <a:cs typeface="Arial Unicode MS"/>
-              </a:rPr>
-              <a:t>想法是這樣：附近放一台位置已經精確知道的接收機，它也在收同樣的衛星，算出來的位置跟真的差多少，它知道。大氣、衛星軌道造成的誤差，在幾十公里內幾乎一樣，所以它把「差多少」廣播出去，車子減掉這個差，誤差就消掉了。這叫 </a:t>
-            </a:r>
-            <a:r>
-              <a:rPr sz="850" b="1" lang="zh-TW" dirty="0">
-                <a:solidFill>
-                  <a:srgbClr val="000000"/>
-                </a:solidFill>
-                <a:latin typeface="Arial Unicode MS"/>
-                <a:ea typeface="Arial Unicode MS"/>
-                <a:cs typeface="Arial Unicode MS"/>
-              </a:rPr>
-              <a:t>RTK</a:t>
-            </a:r>
-            <a:r>
-              <a:rPr sz="850" lang="zh-TW" dirty="0">
-                <a:solidFill>
-                  <a:srgbClr val="000000"/>
-                </a:solidFill>
-                <a:latin typeface="Arial Unicode MS"/>
-                <a:ea typeface="Arial Unicode MS"/>
-                <a:cs typeface="Arial Unicode MS"/>
-              </a:rPr>
-              <a:t>，即時動態定位。
+              <a:rPr sz="800" lang="zh-TW" dirty="0">
+                <a:solidFill>
+                  <a:srgbClr val="000000"/>
+                </a:solidFill>
+                <a:latin typeface="Arial Unicode MS"/>
+                <a:ea typeface="Arial Unicode MS"/>
+                <a:cs typeface="Arial Unicode MS"/>
+              </a:rPr>
+              <a:t>打個比方：兩個人同時從學校走到車站，路上有泥巴，一個穿球鞋，一個穿拖鞋，穿拖鞋的被拖慢得多。看兩個人差幾分鐘到，就知道泥巴有多深，也就推得回沒有泥巴要走多久。電離層是單機誤差裡最大的一塊，所以扣掉它就準很多。低層大氣、衛星軌道這些，兩個頻率消不掉，要靠下面的修正。
 </a:t>
             </a:r>
           </a:p>
@@ -7840,19 +7829,30 @@
                 <a:spcPts val="0"/>
               </a:spcBef>
               <a:spcAft>
-                <a:spcPts val="142"/>
+                <a:spcPts val="133"/>
               </a:spcAft>
             </a:pPr>
             <a:r>
-              <a:rPr sz="850" lang="zh-TW" dirty="0">
-                <a:solidFill>
-                  <a:srgbClr val="000000"/>
-                </a:solidFill>
-                <a:latin typeface="Arial Unicode MS"/>
-                <a:ea typeface="Arial Unicode MS"/>
-                <a:cs typeface="Arial Unicode MS"/>
-              </a:rPr>
-              <a:t>打個比方。教室的時鐘快了五分鐘，大家看鐘都會錯五分鐘。如果有一個人拿著很準的手錶，告訴大家「這個鐘快五分鐘」，大家看鐘再減五分鐘就對了。基準站就是那個拿著準手錶的人。
+              <a:rPr sz="800" b="1" lang="zh-TW" dirty="0">
+                <a:solidFill>
+                  <a:srgbClr val="000000"/>
+                </a:solidFill>
+                <a:latin typeface="Arial Unicode MS"/>
+                <a:ea typeface="Arial Unicode MS"/>
+                <a:cs typeface="Arial Unicode MS"/>
+              </a:rPr>
+              <a:t>第二列 SBAS，1.0 公尺</a:t>
+            </a:r>
+            <a:r>
+              <a:rPr sz="800" lang="zh-TW" dirty="0">
+                <a:solidFill>
+                  <a:srgbClr val="000000"/>
+                </a:solidFill>
+                <a:latin typeface="Arial Unicode MS"/>
+                <a:ea typeface="Arial Unicode MS"/>
+                <a:cs typeface="Arial Unicode MS"/>
+              </a:rPr>
+              <a:t>：上一張講過，另一套衛星送來的修正，收得到就再好一點。
 </a:t>
             </a:r>
           </a:p>
@@ -7862,41 +7862,52 @@
                 <a:spcPts val="0"/>
               </a:spcBef>
               <a:spcAft>
-                <a:spcPts val="142"/>
+                <a:spcPts val="133"/>
               </a:spcAft>
             </a:pPr>
             <a:r>
-              <a:rPr sz="850" lang="zh-TW" dirty="0">
-                <a:solidFill>
-                  <a:srgbClr val="000000"/>
-                </a:solidFill>
-                <a:latin typeface="Arial Unicode MS"/>
-                <a:ea typeface="Arial Unicode MS"/>
-                <a:cs typeface="Arial Unicode MS"/>
-              </a:rPr>
-              <a:t>這件事 u-blox 自己做了一支短片，就是做這顆 ZED-F9P 的公司。</a:t>
-            </a:r>
-            <a:r>
-              <a:rPr sz="850" b="1" lang="zh-TW" dirty="0">
-                <a:solidFill>
-                  <a:srgbClr val="000000"/>
-                </a:solidFill>
-                <a:latin typeface="Arial Unicode MS"/>
-                <a:ea typeface="Arial Unicode MS"/>
-                <a:cs typeface="Arial Unicode MS"/>
-              </a:rPr>
-              <a:t>播到 1:07 就好</a:t>
-            </a:r>
-            <a:r>
-              <a:rPr sz="850" lang="zh-TW" dirty="0">
-                <a:solidFill>
-                  <a:srgbClr val="000000"/>
-                </a:solidFill>
-                <a:latin typeface="Arial Unicode MS"/>
-                <a:ea typeface="Arial Unicode MS"/>
-                <a:cs typeface="Arial Unicode MS"/>
-              </a:rPr>
-              <a:t>，英文，畫面是簡報式的插圖，看圖就懂。
+              <a:rPr sz="800" b="1" lang="zh-TW" dirty="0">
+                <a:solidFill>
+                  <a:srgbClr val="000000"/>
+                </a:solidFill>
+                <a:latin typeface="Arial Unicode MS"/>
+                <a:ea typeface="Arial Unicode MS"/>
+                <a:cs typeface="Arial Unicode MS"/>
+              </a:rPr>
+              <a:t>第三列 RTK，0.01 公尺 + 1 ppm CEP。</a:t>
+            </a:r>
+            <a:r>
+              <a:rPr sz="800" lang="zh-TW" dirty="0">
+                <a:solidFill>
+                  <a:srgbClr val="000000"/>
+                </a:solidFill>
+                <a:latin typeface="Arial Unicode MS"/>
+                <a:ea typeface="Arial Unicode MS"/>
+                <a:cs typeface="Arial Unicode MS"/>
+              </a:rPr>
+              <a:t>一公分。怎麼從一點五公尺變成一公分？靠一座</a:t>
+            </a:r>
+            <a:r>
+              <a:rPr sz="800" b="1" lang="zh-TW" dirty="0">
+                <a:solidFill>
+                  <a:srgbClr val="000000"/>
+                </a:solidFill>
+                <a:latin typeface="Arial Unicode MS"/>
+                <a:ea typeface="Arial Unicode MS"/>
+                <a:cs typeface="Arial Unicode MS"/>
+              </a:rPr>
+              <a:t>基準站</a:t>
+            </a:r>
+            <a:r>
+              <a:rPr sz="800" lang="zh-TW" dirty="0">
+                <a:solidFill>
+                  <a:srgbClr val="000000"/>
+                </a:solidFill>
+                <a:latin typeface="Arial Unicode MS"/>
+                <a:ea typeface="Arial Unicode MS"/>
+                <a:cs typeface="Arial Unicode MS"/>
+              </a:rPr>
+              <a:t>。
 </a:t>
             </a:r>
           </a:p>
@@ -7906,74 +7917,41 @@
                 <a:spcPts val="0"/>
               </a:spcBef>
               <a:spcAft>
-                <a:spcPts val="142"/>
+                <a:spcPts val="133"/>
               </a:spcAft>
             </a:pPr>
             <a:r>
-              <a:rPr sz="850" b="1" lang="zh-TW" dirty="0">
-                <a:solidFill>
-                  <a:srgbClr val="000000"/>
-                </a:solidFill>
-                <a:latin typeface="Arial Unicode MS"/>
-                <a:ea typeface="Arial Unicode MS"/>
-                <a:cs typeface="Arial Unicode MS"/>
-              </a:rPr>
-              <a:t>0:18</a:t>
-            </a:r>
-            <a:r>
-              <a:rPr sz="850" lang="zh-TW" dirty="0">
-                <a:solidFill>
-                  <a:srgbClr val="000000"/>
-                </a:solidFill>
-                <a:latin typeface="Arial Unicode MS"/>
-                <a:ea typeface="Arial Unicode MS"/>
-                <a:cs typeface="Arial Unicode MS"/>
-              </a:rPr>
-              <a:t> 一個人站在紅圈裡，圈寫二到三公尺，這是一般的 GPS。接著兩個人站得很近，各有一個一樣大的圈，</a:t>
-            </a:r>
-            <a:r>
-              <a:rPr sz="850" b="1" lang="zh-TW" dirty="0">
-                <a:solidFill>
-                  <a:srgbClr val="000000"/>
-                </a:solidFill>
-                <a:latin typeface="Arial Unicode MS"/>
-                <a:ea typeface="Arial Unicode MS"/>
-                <a:cs typeface="Arial Unicode MS"/>
-              </a:rPr>
-              <a:t>0:24</a:t>
-            </a:r>
-            <a:r>
-              <a:rPr sz="850" lang="zh-TW" dirty="0">
-                <a:solidFill>
-                  <a:srgbClr val="000000"/>
-                </a:solidFill>
-                <a:latin typeface="Arial Unicode MS"/>
-                <a:ea typeface="Arial Unicode MS"/>
-                <a:cs typeface="Arial Unicode MS"/>
-              </a:rPr>
-              <a:t> 旁白說兩個人靠得近，誤差幾乎一樣。</a:t>
-            </a:r>
-            <a:r>
-              <a:rPr sz="850" b="1" lang="zh-TW" dirty="0">
-                <a:solidFill>
-                  <a:srgbClr val="000000"/>
-                </a:solidFill>
-                <a:latin typeface="Arial Unicode MS"/>
-                <a:ea typeface="Arial Unicode MS"/>
-                <a:cs typeface="Arial Unicode MS"/>
-              </a:rPr>
-              <a:t>0:50</a:t>
-            </a:r>
-            <a:r>
-              <a:rPr sz="850" lang="zh-TW" dirty="0">
-                <a:solidFill>
-                  <a:srgbClr val="000000"/>
-                </a:solidFill>
-                <a:latin typeface="Arial Unicode MS"/>
-                <a:ea typeface="Arial Unicode MS"/>
-                <a:cs typeface="Arial Unicode MS"/>
-              </a:rPr>
-              <a:t> 其中一個人換成一座基準站，中間一條線寫 Corrections，修正資料，送給旁邊的人。這就是剛剛那個拿準手錶的人。
+              <a:rPr sz="800" lang="zh-TW" dirty="0">
+                <a:solidFill>
+                  <a:srgbClr val="000000"/>
+                </a:solidFill>
+                <a:latin typeface="Arial Unicode MS"/>
+                <a:ea typeface="Arial Unicode MS"/>
+                <a:cs typeface="Arial Unicode MS"/>
+              </a:rPr>
+              <a:t>想法是這樣：附近放一台位置已經精確知道的接收機，它也在收同樣的衛星，算出來的位置跟真的差多少，它知道。大氣、衛星軌道造成的誤差，在幾十公里內幾乎一樣，所以它把「差多少」廣播出去，車子減掉這個差，誤差就消掉了。這叫 </a:t>
+            </a:r>
+            <a:r>
+              <a:rPr sz="800" b="1" lang="zh-TW" dirty="0">
+                <a:solidFill>
+                  <a:srgbClr val="000000"/>
+                </a:solidFill>
+                <a:latin typeface="Arial Unicode MS"/>
+                <a:ea typeface="Arial Unicode MS"/>
+                <a:cs typeface="Arial Unicode MS"/>
+              </a:rPr>
+              <a:t>RTK</a:t>
+            </a:r>
+            <a:r>
+              <a:rPr sz="800" lang="zh-TW" dirty="0">
+                <a:solidFill>
+                  <a:srgbClr val="000000"/>
+                </a:solidFill>
+                <a:latin typeface="Arial Unicode MS"/>
+                <a:ea typeface="Arial Unicode MS"/>
+                <a:cs typeface="Arial Unicode MS"/>
+              </a:rPr>
+              <a:t>，即時動態定位。
 </a:t>
             </a:r>
           </a:p>
@@ -7983,19 +7961,19 @@
                 <a:spcPts val="0"/>
               </a:spcBef>
               <a:spcAft>
-                <a:spcPts val="142"/>
+                <a:spcPts val="133"/>
               </a:spcAft>
             </a:pPr>
             <a:r>
-              <a:rPr sz="850" lang="zh-TW" dirty="0">
-                <a:solidFill>
-                  <a:srgbClr val="000000"/>
-                </a:solidFill>
-                <a:latin typeface="Arial Unicode MS"/>
-                <a:ea typeface="Arial Unicode MS"/>
-                <a:cs typeface="Arial Unicode MS"/>
-              </a:rPr>
-              <a:t>1:07 以後講載波相位，波長十九公分，那是從幾十公分壓到一公分的數學，這堂課不用。最後出現的是兩公分的小紅圈。他推銷的是 NEO-M8P，舊一代的模組，不是今天這顆。
+              <a:rPr sz="800" lang="zh-TW" dirty="0">
+                <a:solidFill>
+                  <a:srgbClr val="000000"/>
+                </a:solidFill>
+                <a:latin typeface="Arial Unicode MS"/>
+                <a:ea typeface="Arial Unicode MS"/>
+                <a:cs typeface="Arial Unicode MS"/>
+              </a:rPr>
+              <a:t>打個比方。教室的時鐘快了五分鐘，大家看鐘都會錯五分鐘。如果有一個人拿著很準的手錶，告訴大家「這個鐘快五分鐘」，大家看鐘再減五分鐘就對了。基準站就是那個拿著準手錶的人。
 </a:t>
             </a:r>
           </a:p>
@@ -8005,85 +7983,41 @@
                 <a:spcPts val="0"/>
               </a:spcBef>
               <a:spcAft>
-                <a:spcPts val="142"/>
+                <a:spcPts val="133"/>
               </a:spcAft>
             </a:pPr>
             <a:r>
-              <a:rPr sz="850" lang="zh-TW" dirty="0">
-                <a:solidFill>
-                  <a:srgbClr val="000000"/>
-                </a:solidFill>
-                <a:latin typeface="Arial Unicode MS"/>
-                <a:ea typeface="Arial Unicode MS"/>
-                <a:cs typeface="Arial Unicode MS"/>
-              </a:rPr>
-              <a:t>那 </a:t>
-            </a:r>
-            <a:r>
-              <a:rPr sz="850" b="1" lang="zh-TW" dirty="0">
-                <a:solidFill>
-                  <a:srgbClr val="000000"/>
-                </a:solidFill>
-                <a:latin typeface="Arial Unicode MS"/>
-                <a:ea typeface="Arial Unicode MS"/>
-                <a:cs typeface="Arial Unicode MS"/>
-              </a:rPr>
-              <a:t>1 ppm</a:t>
-            </a:r>
-            <a:r>
-              <a:rPr sz="850" lang="zh-TW" dirty="0">
-                <a:solidFill>
-                  <a:srgbClr val="000000"/>
-                </a:solidFill>
-                <a:latin typeface="Arial Unicode MS"/>
-                <a:ea typeface="Arial Unicode MS"/>
-                <a:cs typeface="Arial Unicode MS"/>
-              </a:rPr>
-              <a:t> 是什麼？ppm 是百萬分之一。離基準站每一公里，再加一公釐。離得愈遠，你頭上的天空和基準站頭上的愈不一樣，就像別棟大樓的鐘，不一定也是快五分鐘。各位看表下面的</a:t>
-            </a:r>
-            <a:r>
-              <a:rPr sz="850" b="1" lang="zh-TW" dirty="0">
-                <a:solidFill>
-                  <a:srgbClr val="000000"/>
-                </a:solidFill>
-                <a:latin typeface="Arial Unicode MS"/>
-                <a:ea typeface="Arial Unicode MS"/>
-                <a:cs typeface="Arial Unicode MS"/>
-              </a:rPr>
-              <a:t>註腳 8</a:t>
-            </a:r>
-            <a:r>
-              <a:rPr sz="850" lang="zh-TW" dirty="0">
-                <a:solidFill>
-                  <a:srgbClr val="000000"/>
-                </a:solidFill>
-                <a:latin typeface="Arial Unicode MS"/>
-                <a:ea typeface="Arial Unicode MS"/>
-                <a:cs typeface="Arial Unicode MS"/>
-              </a:rPr>
-              <a:t>：量的時候基準站在一公里外，而且 </a:t>
-            </a:r>
-            <a:r>
-              <a:rPr sz="850" b="1" lang="zh-TW" dirty="0">
-                <a:solidFill>
-                  <a:srgbClr val="000000"/>
-                </a:solidFill>
-                <a:latin typeface="Arial Unicode MS"/>
-                <a:ea typeface="Arial Unicode MS"/>
-                <a:cs typeface="Arial Unicode MS"/>
-              </a:rPr>
-              <a:t>ppm 只保證到二十公里</a:t>
-            </a:r>
-            <a:r>
-              <a:rPr sz="850" lang="zh-TW" dirty="0">
-                <a:solidFill>
-                  <a:srgbClr val="000000"/>
-                </a:solidFill>
-                <a:latin typeface="Arial Unicode MS"/>
-                <a:ea typeface="Arial Unicode MS"/>
-                <a:cs typeface="Arial Unicode MS"/>
-              </a:rPr>
-              <a:t>。所以二十公里外，一公分加兩公分，三公分。判讀台就用二十公里算。
+              <a:rPr sz="800" lang="zh-TW" dirty="0">
+                <a:solidFill>
+                  <a:srgbClr val="000000"/>
+                </a:solidFill>
+                <a:latin typeface="Arial Unicode MS"/>
+                <a:ea typeface="Arial Unicode MS"/>
+                <a:cs typeface="Arial Unicode MS"/>
+              </a:rPr>
+              <a:t>這件事 u-blox 自己做了一支短片，就是做這顆 ZED-F9P 的公司。</a:t>
+            </a:r>
+            <a:r>
+              <a:rPr sz="800" b="1" lang="zh-TW" dirty="0">
+                <a:solidFill>
+                  <a:srgbClr val="000000"/>
+                </a:solidFill>
+                <a:latin typeface="Arial Unicode MS"/>
+                <a:ea typeface="Arial Unicode MS"/>
+                <a:cs typeface="Arial Unicode MS"/>
+              </a:rPr>
+              <a:t>播到 1:07 就好</a:t>
+            </a:r>
+            <a:r>
+              <a:rPr sz="800" lang="zh-TW" dirty="0">
+                <a:solidFill>
+                  <a:srgbClr val="000000"/>
+                </a:solidFill>
+                <a:latin typeface="Arial Unicode MS"/>
+                <a:ea typeface="Arial Unicode MS"/>
+                <a:cs typeface="Arial Unicode MS"/>
+              </a:rPr>
+              <a:t>，英文，畫面是簡報式的插圖，看圖就懂。
 </a:t>
             </a:r>
           </a:p>
@@ -8093,85 +8027,74 @@
                 <a:spcPts val="0"/>
               </a:spcBef>
               <a:spcAft>
-                <a:spcPts val="142"/>
+                <a:spcPts val="133"/>
               </a:spcAft>
             </a:pPr>
             <a:r>
-              <a:rPr sz="850" lang="zh-TW" dirty="0">
-                <a:solidFill>
-                  <a:srgbClr val="000000"/>
-                </a:solidFill>
-                <a:latin typeface="Arial Unicode MS"/>
-                <a:ea typeface="Arial Unicode MS"/>
-                <a:cs typeface="Arial Unicode MS"/>
-              </a:rPr>
-              <a:t>誰來當基準站？台灣有 </a:t>
-            </a:r>
-            <a:r>
-              <a:rPr sz="850" b="1" lang="zh-TW" dirty="0">
-                <a:solidFill>
-                  <a:srgbClr val="000000"/>
-                </a:solidFill>
-                <a:latin typeface="Arial Unicode MS"/>
-                <a:ea typeface="Arial Unicode MS"/>
-                <a:cs typeface="Arial Unicode MS"/>
-              </a:rPr>
-              <a:t>e-GNSS</a:t>
-            </a:r>
-            <a:r>
-              <a:rPr sz="850" lang="zh-TW" dirty="0">
-                <a:solidFill>
-                  <a:srgbClr val="000000"/>
-                </a:solidFill>
-                <a:latin typeface="Arial Unicode MS"/>
-                <a:ea typeface="Arial Unicode MS"/>
-                <a:cs typeface="Arial Unicode MS"/>
-              </a:rPr>
-              <a:t>，內政部架的全國網路；越南有 </a:t>
-            </a:r>
-            <a:r>
-              <a:rPr sz="850" b="1" lang="zh-TW" dirty="0">
-                <a:solidFill>
-                  <a:srgbClr val="000000"/>
-                </a:solidFill>
-                <a:latin typeface="Arial Unicode MS"/>
-                <a:ea typeface="Arial Unicode MS"/>
-                <a:cs typeface="Arial Unicode MS"/>
-              </a:rPr>
-              <a:t>VNGEONET</a:t>
-            </a:r>
-            <a:r>
-              <a:rPr sz="850" lang="zh-TW" dirty="0">
-                <a:solidFill>
-                  <a:srgbClr val="000000"/>
-                </a:solidFill>
-                <a:latin typeface="Arial Unicode MS"/>
-                <a:ea typeface="Arial Unicode MS"/>
-                <a:cs typeface="Arial Unicode MS"/>
-              </a:rPr>
-              <a:t>。訂閱之後用網路收修正資料。所以 RTK 不是買一顆模組就有，是</a:t>
-            </a:r>
-            <a:r>
-              <a:rPr sz="850" b="1" lang="zh-TW" dirty="0">
-                <a:solidFill>
-                  <a:srgbClr val="000000"/>
-                </a:solidFill>
-                <a:latin typeface="Arial Unicode MS"/>
-                <a:ea typeface="Arial Unicode MS"/>
-                <a:cs typeface="Arial Unicode MS"/>
-              </a:rPr>
-              <a:t>一顆模組加一個訂閱</a:t>
-            </a:r>
-            <a:r>
-              <a:rPr sz="850" lang="zh-TW" dirty="0">
-                <a:solidFill>
-                  <a:srgbClr val="000000"/>
-                </a:solidFill>
-                <a:latin typeface="Arial Unicode MS"/>
-                <a:ea typeface="Arial Unicode MS"/>
-                <a:cs typeface="Arial Unicode MS"/>
-              </a:rPr>
-              <a:t>。
+              <a:rPr sz="800" b="1" lang="zh-TW" dirty="0">
+                <a:solidFill>
+                  <a:srgbClr val="000000"/>
+                </a:solidFill>
+                <a:latin typeface="Arial Unicode MS"/>
+                <a:ea typeface="Arial Unicode MS"/>
+                <a:cs typeface="Arial Unicode MS"/>
+              </a:rPr>
+              <a:t>0:18</a:t>
+            </a:r>
+            <a:r>
+              <a:rPr sz="800" lang="zh-TW" dirty="0">
+                <a:solidFill>
+                  <a:srgbClr val="000000"/>
+                </a:solidFill>
+                <a:latin typeface="Arial Unicode MS"/>
+                <a:ea typeface="Arial Unicode MS"/>
+                <a:cs typeface="Arial Unicode MS"/>
+              </a:rPr>
+              <a:t> 一個人站在紅圈裡，圈寫二到三公尺，這是一般的 GPS。接著兩個人站得很近，各有一個一樣大的圈，</a:t>
+            </a:r>
+            <a:r>
+              <a:rPr sz="800" b="1" lang="zh-TW" dirty="0">
+                <a:solidFill>
+                  <a:srgbClr val="000000"/>
+                </a:solidFill>
+                <a:latin typeface="Arial Unicode MS"/>
+                <a:ea typeface="Arial Unicode MS"/>
+                <a:cs typeface="Arial Unicode MS"/>
+              </a:rPr>
+              <a:t>0:24</a:t>
+            </a:r>
+            <a:r>
+              <a:rPr sz="800" lang="zh-TW" dirty="0">
+                <a:solidFill>
+                  <a:srgbClr val="000000"/>
+                </a:solidFill>
+                <a:latin typeface="Arial Unicode MS"/>
+                <a:ea typeface="Arial Unicode MS"/>
+                <a:cs typeface="Arial Unicode MS"/>
+              </a:rPr>
+              <a:t> 旁白說兩個人靠得近，誤差幾乎一樣。</a:t>
+            </a:r>
+            <a:r>
+              <a:rPr sz="800" b="1" lang="zh-TW" dirty="0">
+                <a:solidFill>
+                  <a:srgbClr val="000000"/>
+                </a:solidFill>
+                <a:latin typeface="Arial Unicode MS"/>
+                <a:ea typeface="Arial Unicode MS"/>
+                <a:cs typeface="Arial Unicode MS"/>
+              </a:rPr>
+              <a:t>0:50</a:t>
+            </a:r>
+            <a:r>
+              <a:rPr sz="800" lang="zh-TW" dirty="0">
+                <a:solidFill>
+                  <a:srgbClr val="000000"/>
+                </a:solidFill>
+                <a:latin typeface="Arial Unicode MS"/>
+                <a:ea typeface="Arial Unicode MS"/>
+                <a:cs typeface="Arial Unicode MS"/>
+              </a:rPr>
+              <a:t> 其中一個人換成一座基準站，中間一條線寫 Corrections，修正資料，送給旁邊的人。這就是剛剛那個拿準手錶的人。
 </a:t>
             </a:r>
           </a:p>
@@ -8181,52 +8104,19 @@
                 <a:spcPts val="0"/>
               </a:spcBef>
               <a:spcAft>
-                <a:spcPts val="142"/>
+                <a:spcPts val="133"/>
               </a:spcAft>
             </a:pPr>
             <a:r>
-              <a:rPr sz="850" b="1" lang="zh-TW" dirty="0">
-                <a:solidFill>
-                  <a:srgbClr val="000000"/>
-                </a:solidFill>
-                <a:latin typeface="Arial Unicode MS"/>
-                <a:ea typeface="Arial Unicode MS"/>
-                <a:cs typeface="Arial Unicode MS"/>
-              </a:rPr>
-              <a:t>Convergence time，10 秒內</a:t>
-            </a:r>
-            <a:r>
-              <a:rPr sz="850" lang="zh-TW" dirty="0">
-                <a:solidFill>
-                  <a:srgbClr val="000000"/>
-                </a:solidFill>
-                <a:latin typeface="Arial Unicode MS"/>
-                <a:ea typeface="Arial Unicode MS"/>
-                <a:cs typeface="Arial Unicode MS"/>
-              </a:rPr>
-              <a:t>：修正資料收到之後，要十秒才會「鎖住」到一公分。各位看註腳 6，</a:t>
-            </a:r>
-            <a:r>
-              <a:rPr sz="850" b="1" lang="zh-TW" dirty="0">
-                <a:solidFill>
-                  <a:srgbClr val="000000"/>
-                </a:solidFill>
-                <a:latin typeface="Arial Unicode MS"/>
-                <a:ea typeface="Arial Unicode MS"/>
-                <a:cs typeface="Arial Unicode MS"/>
-              </a:rPr>
-              <a:t>depends on multipath conditions</a:t>
-            </a:r>
-            <a:r>
-              <a:rPr sz="850" lang="zh-TW" dirty="0">
-                <a:solidFill>
-                  <a:srgbClr val="000000"/>
-                </a:solidFill>
-                <a:latin typeface="Arial Unicode MS"/>
-                <a:ea typeface="Arial Unicode MS"/>
-                <a:cs typeface="Arial Unicode MS"/>
-              </a:rPr>
-              <a:t>——多路徑。這三個字下一張講，它就是河內那一格變紅的原因。
+              <a:rPr sz="800" lang="zh-TW" dirty="0">
+                <a:solidFill>
+                  <a:srgbClr val="000000"/>
+                </a:solidFill>
+                <a:latin typeface="Arial Unicode MS"/>
+                <a:ea typeface="Arial Unicode MS"/>
+                <a:cs typeface="Arial Unicode MS"/>
+              </a:rPr>
+              <a:t>1:07 以後講載波相位，波長十九公分，那是從幾十公分壓到一公分的數學，這堂課不用。最後出現的是兩公分的小紅圈。他推銷的是 NEO-M8P，舊一代的模組，不是今天這顆。
 </a:t>
             </a:r>
           </a:p>
@@ -8236,11 +8126,242 @@
                 <a:spcPts val="0"/>
               </a:spcBef>
               <a:spcAft>
-                <a:spcPts val="142"/>
+                <a:spcPts val="133"/>
               </a:spcAft>
             </a:pPr>
             <a:r>
-              <a:rPr sz="850" b="1" lang="zh-TW" dirty="0">
+              <a:rPr sz="800" lang="zh-TW" dirty="0">
+                <a:solidFill>
+                  <a:srgbClr val="000000"/>
+                </a:solidFill>
+                <a:latin typeface="Arial Unicode MS"/>
+                <a:ea typeface="Arial Unicode MS"/>
+                <a:cs typeface="Arial Unicode MS"/>
+              </a:rPr>
+              <a:t>那 </a:t>
+            </a:r>
+            <a:r>
+              <a:rPr sz="800" b="1" lang="zh-TW" dirty="0">
+                <a:solidFill>
+                  <a:srgbClr val="000000"/>
+                </a:solidFill>
+                <a:latin typeface="Arial Unicode MS"/>
+                <a:ea typeface="Arial Unicode MS"/>
+                <a:cs typeface="Arial Unicode MS"/>
+              </a:rPr>
+              <a:t>1 ppm</a:t>
+            </a:r>
+            <a:r>
+              <a:rPr sz="800" lang="zh-TW" dirty="0">
+                <a:solidFill>
+                  <a:srgbClr val="000000"/>
+                </a:solidFill>
+                <a:latin typeface="Arial Unicode MS"/>
+                <a:ea typeface="Arial Unicode MS"/>
+                <a:cs typeface="Arial Unicode MS"/>
+              </a:rPr>
+              <a:t> 是什麼？ppm 是百萬分之一。離基準站每一公里，再加一公釐。離得愈遠，你頭上的天空和基準站頭上的愈不一樣，就像別棟大樓的鐘，不一定也是快五分鐘。各位看表下面的</a:t>
+            </a:r>
+            <a:r>
+              <a:rPr sz="800" b="1" lang="zh-TW" dirty="0">
+                <a:solidFill>
+                  <a:srgbClr val="000000"/>
+                </a:solidFill>
+                <a:latin typeface="Arial Unicode MS"/>
+                <a:ea typeface="Arial Unicode MS"/>
+                <a:cs typeface="Arial Unicode MS"/>
+              </a:rPr>
+              <a:t>註腳 8</a:t>
+            </a:r>
+            <a:r>
+              <a:rPr sz="800" lang="zh-TW" dirty="0">
+                <a:solidFill>
+                  <a:srgbClr val="000000"/>
+                </a:solidFill>
+                <a:latin typeface="Arial Unicode MS"/>
+                <a:ea typeface="Arial Unicode MS"/>
+                <a:cs typeface="Arial Unicode MS"/>
+              </a:rPr>
+              <a:t>：量的時候基準站在一公里外，而且 </a:t>
+            </a:r>
+            <a:r>
+              <a:rPr sz="800" b="1" lang="zh-TW" dirty="0">
+                <a:solidFill>
+                  <a:srgbClr val="000000"/>
+                </a:solidFill>
+                <a:latin typeface="Arial Unicode MS"/>
+                <a:ea typeface="Arial Unicode MS"/>
+                <a:cs typeface="Arial Unicode MS"/>
+              </a:rPr>
+              <a:t>ppm 只保證到二十公里</a:t>
+            </a:r>
+            <a:r>
+              <a:rPr sz="800" lang="zh-TW" dirty="0">
+                <a:solidFill>
+                  <a:srgbClr val="000000"/>
+                </a:solidFill>
+                <a:latin typeface="Arial Unicode MS"/>
+                <a:ea typeface="Arial Unicode MS"/>
+                <a:cs typeface="Arial Unicode MS"/>
+              </a:rPr>
+              <a:t>。所以二十公里外，一公分加兩公分，三公分。判讀台就用二十公里算。表最下面還有一列 Vertical，是高度方向，也是一公分加 1 ppm；R50 跟 CEP 一樣，是一半的意思。
+</a:t>
+            </a:r>
+          </a:p>
+          <a:p>
+            <a:pPr algn="l">
+              <a:spcBef>
+                <a:spcPts val="0"/>
+              </a:spcBef>
+              <a:spcAft>
+                <a:spcPts val="133"/>
+              </a:spcAft>
+            </a:pPr>
+            <a:r>
+              <a:rPr sz="800" lang="zh-TW" dirty="0">
+                <a:solidFill>
+                  <a:srgbClr val="000000"/>
+                </a:solidFill>
+                <a:latin typeface="Arial Unicode MS"/>
+                <a:ea typeface="Arial Unicode MS"/>
+                <a:cs typeface="Arial Unicode MS"/>
+              </a:rPr>
+              <a:t>誰來當基準站？台灣有 </a:t>
+            </a:r>
+            <a:r>
+              <a:rPr sz="800" b="1" lang="zh-TW" dirty="0">
+                <a:solidFill>
+                  <a:srgbClr val="000000"/>
+                </a:solidFill>
+                <a:latin typeface="Arial Unicode MS"/>
+                <a:ea typeface="Arial Unicode MS"/>
+                <a:cs typeface="Arial Unicode MS"/>
+              </a:rPr>
+              <a:t>e-GNSS</a:t>
+            </a:r>
+            <a:r>
+              <a:rPr sz="800" lang="zh-TW" dirty="0">
+                <a:solidFill>
+                  <a:srgbClr val="000000"/>
+                </a:solidFill>
+                <a:latin typeface="Arial Unicode MS"/>
+                <a:ea typeface="Arial Unicode MS"/>
+                <a:cs typeface="Arial Unicode MS"/>
+              </a:rPr>
+              <a:t>，內政部架的全國網路；越南有 </a:t>
+            </a:r>
+            <a:r>
+              <a:rPr sz="800" b="1" lang="zh-TW" dirty="0">
+                <a:solidFill>
+                  <a:srgbClr val="000000"/>
+                </a:solidFill>
+                <a:latin typeface="Arial Unicode MS"/>
+                <a:ea typeface="Arial Unicode MS"/>
+                <a:cs typeface="Arial Unicode MS"/>
+              </a:rPr>
+              <a:t>VNGEONET</a:t>
+            </a:r>
+            <a:r>
+              <a:rPr sz="800" lang="zh-TW" dirty="0">
+                <a:solidFill>
+                  <a:srgbClr val="000000"/>
+                </a:solidFill>
+                <a:latin typeface="Arial Unicode MS"/>
+                <a:ea typeface="Arial Unicode MS"/>
+                <a:cs typeface="Arial Unicode MS"/>
+              </a:rPr>
+              <a:t>。訂閱之後用網路收修正資料。所以 RTK 不是買一顆模組就有，是</a:t>
+            </a:r>
+            <a:r>
+              <a:rPr sz="800" b="1" lang="zh-TW" dirty="0">
+                <a:solidFill>
+                  <a:srgbClr val="000000"/>
+                </a:solidFill>
+                <a:latin typeface="Arial Unicode MS"/>
+                <a:ea typeface="Arial Unicode MS"/>
+                <a:cs typeface="Arial Unicode MS"/>
+              </a:rPr>
+              <a:t>一顆模組加一個訂閱</a:t>
+            </a:r>
+            <a:r>
+              <a:rPr sz="800" lang="zh-TW" dirty="0">
+                <a:solidFill>
+                  <a:srgbClr val="000000"/>
+                </a:solidFill>
+                <a:latin typeface="Arial Unicode MS"/>
+                <a:ea typeface="Arial Unicode MS"/>
+                <a:cs typeface="Arial Unicode MS"/>
+              </a:rPr>
+              <a:t>。
+</a:t>
+            </a:r>
+          </a:p>
+          <a:p>
+            <a:pPr algn="l">
+              <a:spcBef>
+                <a:spcPts val="0"/>
+              </a:spcBef>
+              <a:spcAft>
+                <a:spcPts val="133"/>
+              </a:spcAft>
+            </a:pPr>
+            <a:r>
+              <a:rPr sz="800" b="1" lang="zh-TW" dirty="0">
+                <a:solidFill>
+                  <a:srgbClr val="000000"/>
+                </a:solidFill>
+                <a:latin typeface="Arial Unicode MS"/>
+                <a:ea typeface="Arial Unicode MS"/>
+                <a:cs typeface="Arial Unicode MS"/>
+              </a:rPr>
+              <a:t>Convergence time，10 秒內</a:t>
+            </a:r>
+            <a:r>
+              <a:rPr sz="800" lang="zh-TW" dirty="0">
+                <a:solidFill>
+                  <a:srgbClr val="000000"/>
+                </a:solidFill>
+                <a:latin typeface="Arial Unicode MS"/>
+                <a:ea typeface="Arial Unicode MS"/>
+                <a:cs typeface="Arial Unicode MS"/>
+              </a:rPr>
+              <a:t>：修正資料收到之後，要十秒才會「鎖住」到一公分。各位看註腳 6，</a:t>
+            </a:r>
+            <a:r>
+              <a:rPr sz="800" b="1" lang="zh-TW" dirty="0">
+                <a:solidFill>
+                  <a:srgbClr val="000000"/>
+                </a:solidFill>
+                <a:latin typeface="Arial Unicode MS"/>
+                <a:ea typeface="Arial Unicode MS"/>
+                <a:cs typeface="Arial Unicode MS"/>
+              </a:rPr>
+              <a:t>depends on multipath conditions</a:t>
+            </a:r>
+            <a:r>
+              <a:rPr sz="800" lang="zh-TW" dirty="0">
+                <a:solidFill>
+                  <a:srgbClr val="000000"/>
+                </a:solidFill>
+                <a:latin typeface="Arial Unicode MS"/>
+                <a:ea typeface="Arial Unicode MS"/>
+                <a:cs typeface="Arial Unicode MS"/>
+              </a:rPr>
+              <a:t>——多路徑。這三個字下一張講，它就是河內那一格變紅的原因。
+</a:t>
+            </a:r>
+          </a:p>
+          <a:p>
+            <a:pPr algn="l">
+              <a:spcBef>
+                <a:spcPts val="0"/>
+              </a:spcBef>
+              <a:spcAft>
+                <a:spcPts val="133"/>
+              </a:spcAft>
+            </a:pPr>
+            <a:r>
+              <a:rPr sz="800" b="1" lang="zh-TW" dirty="0">
                 <a:solidFill>
                   <a:srgbClr val="000000"/>
                 </a:solidFill>
@@ -8251,7 +8372,7 @@
               <a:t>更新率，四系統 RTK 是 8 Hz</a:t>
             </a:r>
             <a:r>
-              <a:rPr sz="850" lang="zh-TW" dirty="0">
+              <a:rPr sz="800" lang="zh-TW" dirty="0">
                 <a:solidFill>
                   <a:srgbClr val="000000"/>
                 </a:solidFill>

--- a/第六週(10-15)/第六週_第2節_簡報.pptx
+++ b/第六週(10-15)/第六週_第2節_簡報.pptx
@@ -856,7 +856,29 @@
                 <a:ea typeface="Arial Unicode MS"/>
                 <a:cs typeface="Arial Unicode MS"/>
               </a:rPr>
-              <a:t>，以下都叫它 IMU。
+              <a:t>，是 </a:t>
+            </a:r>
+            <a:r>
+              <a:rPr sz="1200" b="1" lang="zh-TW" dirty="0">
+                <a:solidFill>
+                  <a:srgbClr val="000000"/>
+                </a:solidFill>
+                <a:latin typeface="Arial Unicode MS"/>
+                <a:ea typeface="Arial Unicode MS"/>
+                <a:cs typeface="Arial Unicode MS"/>
+              </a:rPr>
+              <a:t>Inertial Measurement Unit</a:t>
+            </a:r>
+            <a:r>
+              <a:rPr sz="1200" lang="zh-TW" dirty="0">
+                <a:solidFill>
+                  <a:srgbClr val="000000"/>
+                </a:solidFill>
+                <a:latin typeface="Arial Unicode MS"/>
+                <a:ea typeface="Arial Unicode MS"/>
+                <a:cs typeface="Arial Unicode MS"/>
+              </a:rPr>
+              <a:t> 三個字的第一個字母：Inertial 慣性、Measurement 量測、Unit 單元。以下都叫它 IMU。
 </a:t>
             </a:r>
           </a:p>

--- a/第六週(10-15)/第六週_第2節_簡報.pptx
+++ b/第六週(10-15)/第六週_第2節_簡報.pptx
@@ -1472,7 +1472,29 @@
                 <a:ea typeface="Arial Unicode MS"/>
                 <a:cs typeface="Arial Unicode MS"/>
               </a:rPr>
-              <a:t>一秒轉五圈半。這個數字等一下工業級那顆也一樣，所以量程不是等級的差別。
+              <a:t>意思是它最快量得到一秒轉兩千度。表上只寫度，換成圈數要自己算：一圈三百六十度，兩千除以三百六十，大約</a:t>
+            </a:r>
+            <a:r>
+              <a:rPr sz="850" b="1" lang="zh-TW" dirty="0">
+                <a:solidFill>
+                  <a:srgbClr val="000000"/>
+                </a:solidFill>
+                <a:latin typeface="Arial Unicode MS"/>
+                <a:ea typeface="Arial Unicode MS"/>
+                <a:cs typeface="Arial Unicode MS"/>
+              </a:rPr>
+              <a:t>五圈半</a:t>
+            </a:r>
+            <a:r>
+              <a:rPr sz="850" lang="zh-TW" dirty="0">
+                <a:solidFill>
+                  <a:srgbClr val="000000"/>
+                </a:solidFill>
+                <a:latin typeface="Arial Unicode MS"/>
+                <a:ea typeface="Arial Unicode MS"/>
+                <a:cs typeface="Arial Unicode MS"/>
+              </a:rPr>
+              <a:t>。車子用不到這麼快：路口迴轉，大概五秒轉半圈，一秒三、四十度而已。這個數字等一下工業級那顆也一樣，所以量程不是等級的差別。
 </a:t>
             </a:r>
           </a:p>

--- a/第六週(10-15)/第六週_第2節_簡報.pptx
+++ b/第六週(10-15)/第六週_第2節_簡報.pptx
@@ -1856,11 +1856,11 @@
                 <a:spcPts val="0"/>
               </a:spcBef>
               <a:spcAft>
-                <a:spcPts val="200"/>
+                <a:spcPts val="192"/>
               </a:spcAft>
             </a:pPr>
             <a:r>
-              <a:rPr sz="1200" lang="zh-TW" dirty="0">
+              <a:rPr sz="1150" lang="zh-TW" dirty="0">
                 <a:solidFill>
                   <a:srgbClr val="000000"/>
                 </a:solidFill>
@@ -1871,7 +1871,7 @@
               <a:t>第二顆，Analog Devices 的 </a:t>
             </a:r>
             <a:r>
-              <a:rPr sz="1200" b="1" lang="zh-TW" dirty="0">
+              <a:rPr sz="1150" b="1" lang="zh-TW" dirty="0">
                 <a:solidFill>
                   <a:srgbClr val="000000"/>
                 </a:solidFill>
@@ -1882,7 +1882,7 @@
               <a:t>ADIS16470</a:t>
             </a:r>
             <a:r>
-              <a:rPr sz="1200" lang="zh-TW" dirty="0">
+              <a:rPr sz="1150" lang="zh-TW" dirty="0">
                 <a:solidFill>
                   <a:srgbClr val="000000"/>
                 </a:solidFill>
@@ -1900,11 +1900,11 @@
                 <a:spcPts val="0"/>
               </a:spcBef>
               <a:spcAft>
-                <a:spcPts val="200"/>
+                <a:spcPts val="192"/>
               </a:spcAft>
             </a:pPr>
             <a:r>
-              <a:rPr sz="1200" lang="zh-TW" dirty="0">
+              <a:rPr sz="1150" lang="zh-TW" dirty="0">
                 <a:solidFill>
                   <a:srgbClr val="000000"/>
                 </a:solidFill>
@@ -1915,26 +1915,92 @@
               <a:t>從上往下。</a:t>
             </a:r>
             <a:r>
-              <a:rPr sz="1200" b="1" lang="zh-TW" dirty="0">
-                <a:solidFill>
-                  <a:srgbClr val="000000"/>
-                </a:solidFill>
-                <a:latin typeface="Arial Unicode MS"/>
-                <a:ea typeface="Arial Unicode MS"/>
-                <a:cs typeface="Arial Unicode MS"/>
-              </a:rPr>
-              <a:t>Dynamic Range，±2000 °/sec</a:t>
-            </a:r>
-            <a:r>
-              <a:rPr sz="1200" lang="zh-TW" dirty="0">
-                <a:solidFill>
-                  <a:srgbClr val="000000"/>
-                </a:solidFill>
-                <a:latin typeface="Arial Unicode MS"/>
-                <a:ea typeface="Arial Unicode MS"/>
-                <a:cs typeface="Arial Unicode MS"/>
-              </a:rPr>
-              <a:t>——和剛剛那顆手機級一模一樣。所以等級不是差在量程。
+              <a:rPr sz="1150" b="1" lang="zh-TW" dirty="0">
+                <a:solidFill>
+                  <a:srgbClr val="000000"/>
+                </a:solidFill>
+                <a:latin typeface="Arial Unicode MS"/>
+                <a:ea typeface="Arial Unicode MS"/>
+                <a:cs typeface="Arial Unicode MS"/>
+              </a:rPr>
+              <a:t>Dynamic Range，±2000 °/sec。</a:t>
+            </a:r>
+            <a:r>
+              <a:rPr sz="1150" lang="zh-TW" dirty="0">
+                <a:solidFill>
+                  <a:srgbClr val="000000"/>
+                </a:solidFill>
+                <a:latin typeface="Arial Unicode MS"/>
+                <a:ea typeface="Arial Unicode MS"/>
+                <a:cs typeface="Arial Unicode MS"/>
+              </a:rPr>
+              <a:t>各位可能會想：上週相機也有動態範圍，那是同一件事嗎？</a:t>
+            </a:r>
+            <a:r>
+              <a:rPr sz="1150" b="1" lang="zh-TW" dirty="0">
+                <a:solidFill>
+                  <a:srgbClr val="000000"/>
+                </a:solidFill>
+                <a:latin typeface="Arial Unicode MS"/>
+                <a:ea typeface="Arial Unicode MS"/>
+                <a:cs typeface="Arial Unicode MS"/>
+              </a:rPr>
+              <a:t>不是。</a:t>
+            </a:r>
+            <a:r>
+              <a:rPr sz="1150" lang="zh-TW" dirty="0">
+                <a:solidFill>
+                  <a:srgbClr val="000000"/>
+                </a:solidFill>
+                <a:latin typeface="Arial Unicode MS"/>
+                <a:ea typeface="Arial Unicode MS"/>
+                <a:cs typeface="Arial Unicode MS"/>
+              </a:rPr>
+              <a:t>上週相機的動態範圍，講的是最亮和最暗差多少倍，單位是 dB，逆光、隧道口就看它。這裡的 Dynamic Range，看單位是 °/sec，講的是最快量得到轉多快，就是剛剛 TDK 那張表叫 </a:t>
+            </a:r>
+            <a:r>
+              <a:rPr sz="1150" b="1" lang="zh-TW" dirty="0">
+                <a:solidFill>
+                  <a:srgbClr val="000000"/>
+                </a:solidFill>
+                <a:latin typeface="Arial Unicode MS"/>
+                <a:ea typeface="Arial Unicode MS"/>
+                <a:cs typeface="Arial Unicode MS"/>
+              </a:rPr>
+              <a:t>Full-Scale Range</a:t>
+            </a:r>
+            <a:r>
+              <a:rPr sz="1150" lang="zh-TW" dirty="0">
+                <a:solidFill>
+                  <a:srgbClr val="000000"/>
+                </a:solidFill>
+                <a:latin typeface="Arial Unicode MS"/>
+                <a:ea typeface="Arial Unicode MS"/>
+                <a:cs typeface="Arial Unicode MS"/>
+              </a:rPr>
+              <a:t> 的那一行，量程。兩家公司用不同的名字講同一件事；同一個英文詞，放在不同感測器上，意思也可能不一樣。所以讀規格表，</a:t>
+            </a:r>
+            <a:r>
+              <a:rPr sz="1150" b="1" lang="zh-TW" dirty="0">
+                <a:solidFill>
+                  <a:srgbClr val="000000"/>
+                </a:solidFill>
+                <a:latin typeface="Arial Unicode MS"/>
+                <a:ea typeface="Arial Unicode MS"/>
+                <a:cs typeface="Arial Unicode MS"/>
+              </a:rPr>
+              <a:t>先看單位</a:t>
+            </a:r>
+            <a:r>
+              <a:rPr sz="1150" lang="zh-TW" dirty="0">
+                <a:solidFill>
+                  <a:srgbClr val="000000"/>
+                </a:solidFill>
+                <a:latin typeface="Arial Unicode MS"/>
+                <a:ea typeface="Arial Unicode MS"/>
+                <a:cs typeface="Arial Unicode MS"/>
+              </a:rPr>
+              <a:t>，不要只看名字。
 </a:t>
             </a:r>
           </a:p>
@@ -1944,85 +2010,19 @@
                 <a:spcPts val="0"/>
               </a:spcBef>
               <a:spcAft>
-                <a:spcPts val="200"/>
+                <a:spcPts val="192"/>
               </a:spcAft>
             </a:pPr>
             <a:r>
-              <a:rPr sz="1200" lang="zh-TW" dirty="0">
-                <a:solidFill>
-                  <a:srgbClr val="000000"/>
-                </a:solidFill>
-                <a:latin typeface="Arial Unicode MS"/>
-                <a:ea typeface="Arial Unicode MS"/>
-                <a:cs typeface="Arial Unicode MS"/>
-              </a:rPr>
-              <a:t>往下看 </a:t>
-            </a:r>
-            <a:r>
-              <a:rPr sz="1200" b="1" lang="zh-TW" dirty="0">
-                <a:solidFill>
-                  <a:srgbClr val="000000"/>
-                </a:solidFill>
-                <a:latin typeface="Arial Unicode MS"/>
-                <a:ea typeface="Arial Unicode MS"/>
-                <a:cs typeface="Arial Unicode MS"/>
-              </a:rPr>
-              <a:t>Bias</a:t>
-            </a:r>
-            <a:r>
-              <a:rPr sz="1200" lang="zh-TW" dirty="0">
-                <a:solidFill>
-                  <a:srgbClr val="000000"/>
-                </a:solidFill>
-                <a:latin typeface="Arial Unicode MS"/>
-                <a:ea typeface="Arial Unicode MS"/>
-                <a:cs typeface="Arial Unicode MS"/>
-              </a:rPr>
-              <a:t> 那一塊，前兩列就是剛剛手機級找不到的。</a:t>
-            </a:r>
-            <a:r>
-              <a:rPr sz="1200" b="1" lang="zh-TW" dirty="0">
-                <a:solidFill>
-                  <a:srgbClr val="000000"/>
-                </a:solidFill>
-                <a:latin typeface="Arial Unicode MS"/>
-                <a:ea typeface="Arial Unicode MS"/>
-                <a:cs typeface="Arial Unicode MS"/>
-              </a:rPr>
-              <a:t>In Run Stability，8 °/hr</a:t>
-            </a:r>
-            <a:r>
-              <a:rPr sz="1200" lang="zh-TW" dirty="0">
-                <a:solidFill>
-                  <a:srgbClr val="000000"/>
-                </a:solidFill>
-                <a:latin typeface="Arial Unicode MS"/>
-                <a:ea typeface="Arial Unicode MS"/>
-                <a:cs typeface="Arial Unicode MS"/>
-              </a:rPr>
-              <a:t>，後面寫 1 σ。意思是這顆靜止放著，一個小時偏差只飄八度，一分鐘零點一三度。用手錶來想：便宜的錶一天可能差一分鐘，好的錶一個月才差幾秒。偏差穩定度講的就是這種「走久了會差多少」。</a:t>
-            </a:r>
-            <a:r>
-              <a:rPr sz="1200" b="1" lang="zh-TW" dirty="0">
-                <a:solidFill>
-                  <a:srgbClr val="000000"/>
-                </a:solidFill>
-                <a:latin typeface="Arial Unicode MS"/>
-                <a:ea typeface="Arial Unicode MS"/>
-                <a:cs typeface="Arial Unicode MS"/>
-              </a:rPr>
-              <a:t>Angular Random Walk，0.34 °/√hr</a:t>
-            </a:r>
-            <a:r>
-              <a:rPr sz="1200" lang="zh-TW" dirty="0">
-                <a:solidFill>
-                  <a:srgbClr val="000000"/>
-                </a:solidFill>
-                <a:latin typeface="Arial Unicode MS"/>
-                <a:ea typeface="Arial Unicode MS"/>
-                <a:cs typeface="Arial Unicode MS"/>
-              </a:rPr>
-              <a:t>，雜訊累積出來的角度誤差，隨時間開根號長。
+              <a:rPr sz="1150" lang="zh-TW" dirty="0">
+                <a:solidFill>
+                  <a:srgbClr val="000000"/>
+                </a:solidFill>
+                <a:latin typeface="Arial Unicode MS"/>
+                <a:ea typeface="Arial Unicode MS"/>
+                <a:cs typeface="Arial Unicode MS"/>
+              </a:rPr>
+              <a:t>數字是正負兩千度每秒，和剛剛那顆手機級一模一樣。所以等級不是差在量程。
 </a:t>
             </a:r>
           </a:p>
@@ -2032,41 +2032,85 @@
                 <a:spcPts val="0"/>
               </a:spcBef>
               <a:spcAft>
-                <a:spcPts val="200"/>
+                <a:spcPts val="192"/>
               </a:spcAft>
             </a:pPr>
             <a:r>
-              <a:rPr sz="1200" lang="zh-TW" dirty="0">
-                <a:solidFill>
-                  <a:srgbClr val="000000"/>
-                </a:solidFill>
-                <a:latin typeface="Arial Unicode MS"/>
-                <a:ea typeface="Arial Unicode MS"/>
-                <a:cs typeface="Arial Unicode MS"/>
-              </a:rPr>
-              <a:t>再看 </a:t>
-            </a:r>
-            <a:r>
-              <a:rPr sz="1200" b="1" lang="zh-TW" dirty="0">
-                <a:solidFill>
-                  <a:srgbClr val="000000"/>
-                </a:solidFill>
-                <a:latin typeface="Arial Unicode MS"/>
-                <a:ea typeface="Arial Unicode MS"/>
-                <a:cs typeface="Arial Unicode MS"/>
-              </a:rPr>
-              <a:t>Rate Noise Density，0.008</a:t>
-            </a:r>
-            <a:r>
-              <a:rPr sz="1200" lang="zh-TW" dirty="0">
-                <a:solidFill>
-                  <a:srgbClr val="000000"/>
-                </a:solidFill>
-                <a:latin typeface="Arial Unicode MS"/>
-                <a:ea typeface="Arial Unicode MS"/>
-                <a:cs typeface="Arial Unicode MS"/>
-              </a:rPr>
-              <a:t>。手機級那顆是 0.015，差一倍。這一行兩邊的表都有，可以直接比；Bias 那兩行只有這邊有。
+              <a:rPr sz="1150" lang="zh-TW" dirty="0">
+                <a:solidFill>
+                  <a:srgbClr val="000000"/>
+                </a:solidFill>
+                <a:latin typeface="Arial Unicode MS"/>
+                <a:ea typeface="Arial Unicode MS"/>
+                <a:cs typeface="Arial Unicode MS"/>
+              </a:rPr>
+              <a:t>往下看 </a:t>
+            </a:r>
+            <a:r>
+              <a:rPr sz="1150" b="1" lang="zh-TW" dirty="0">
+                <a:solidFill>
+                  <a:srgbClr val="000000"/>
+                </a:solidFill>
+                <a:latin typeface="Arial Unicode MS"/>
+                <a:ea typeface="Arial Unicode MS"/>
+                <a:cs typeface="Arial Unicode MS"/>
+              </a:rPr>
+              <a:t>Bias</a:t>
+            </a:r>
+            <a:r>
+              <a:rPr sz="1150" lang="zh-TW" dirty="0">
+                <a:solidFill>
+                  <a:srgbClr val="000000"/>
+                </a:solidFill>
+                <a:latin typeface="Arial Unicode MS"/>
+                <a:ea typeface="Arial Unicode MS"/>
+                <a:cs typeface="Arial Unicode MS"/>
+              </a:rPr>
+              <a:t> 那一塊，前兩列就是剛剛手機級找不到的。</a:t>
+            </a:r>
+            <a:r>
+              <a:rPr sz="1150" b="1" lang="zh-TW" dirty="0">
+                <a:solidFill>
+                  <a:srgbClr val="000000"/>
+                </a:solidFill>
+                <a:latin typeface="Arial Unicode MS"/>
+                <a:ea typeface="Arial Unicode MS"/>
+                <a:cs typeface="Arial Unicode MS"/>
+              </a:rPr>
+              <a:t>In Run Stability，8 °/hr</a:t>
+            </a:r>
+            <a:r>
+              <a:rPr sz="1150" lang="zh-TW" dirty="0">
+                <a:solidFill>
+                  <a:srgbClr val="000000"/>
+                </a:solidFill>
+                <a:latin typeface="Arial Unicode MS"/>
+                <a:ea typeface="Arial Unicode MS"/>
+                <a:cs typeface="Arial Unicode MS"/>
+              </a:rPr>
+              <a:t>，後面寫 1 σ。意思是這顆靜止放著，一個小時偏差只飄八度，一分鐘零點一三度。用手錶來想：便宜的錶一天可能差一分鐘，好的錶一個月才差幾秒。偏差穩定度講的就是這種「走久了會差多少」。</a:t>
+            </a:r>
+            <a:r>
+              <a:rPr sz="1150" b="1" lang="zh-TW" dirty="0">
+                <a:solidFill>
+                  <a:srgbClr val="000000"/>
+                </a:solidFill>
+                <a:latin typeface="Arial Unicode MS"/>
+                <a:ea typeface="Arial Unicode MS"/>
+                <a:cs typeface="Arial Unicode MS"/>
+              </a:rPr>
+              <a:t>Angular Random Walk，0.34 °/√hr</a:t>
+            </a:r>
+            <a:r>
+              <a:rPr sz="1150" lang="zh-TW" dirty="0">
+                <a:solidFill>
+                  <a:srgbClr val="000000"/>
+                </a:solidFill>
+                <a:latin typeface="Arial Unicode MS"/>
+                <a:ea typeface="Arial Unicode MS"/>
+                <a:cs typeface="Arial Unicode MS"/>
+              </a:rPr>
+              <a:t>，雜訊累積出來的角度誤差，隨時間開根號長。
 </a:t>
             </a:r>
           </a:p>
@@ -2076,41 +2120,41 @@
                 <a:spcPts val="0"/>
               </a:spcBef>
               <a:spcAft>
-                <a:spcPts val="200"/>
+                <a:spcPts val="192"/>
               </a:spcAft>
             </a:pPr>
             <a:r>
-              <a:rPr sz="1200" lang="zh-TW" dirty="0">
-                <a:solidFill>
-                  <a:srgbClr val="000000"/>
-                </a:solidFill>
-                <a:latin typeface="Arial Unicode MS"/>
-                <a:ea typeface="Arial Unicode MS"/>
-                <a:cs typeface="Arial Unicode MS"/>
-              </a:rPr>
-              <a:t>翻回規格書第一頁，Applications 那一欄寫的是 Navigation、</a:t>
-            </a:r>
-            <a:r>
-              <a:rPr sz="1200" b="1" lang="zh-TW" dirty="0">
-                <a:solidFill>
-                  <a:srgbClr val="000000"/>
-                </a:solidFill>
-                <a:latin typeface="Arial Unicode MS"/>
-                <a:ea typeface="Arial Unicode MS"/>
-                <a:cs typeface="Arial Unicode MS"/>
-              </a:rPr>
-              <a:t>Unmanned and autonomous vehicles</a:t>
-            </a:r>
-            <a:r>
-              <a:rPr sz="1200" lang="zh-TW" dirty="0">
-                <a:solidFill>
-                  <a:srgbClr val="000000"/>
-                </a:solidFill>
-                <a:latin typeface="Arial Unicode MS"/>
-                <a:ea typeface="Arial Unicode MS"/>
-                <a:cs typeface="Arial Unicode MS"/>
-              </a:rPr>
-              <a:t>、robotics。手機級那顆寫的是 Smartphones。規格書自己告訴你它是給誰用的。
+              <a:rPr sz="1150" lang="zh-TW" dirty="0">
+                <a:solidFill>
+                  <a:srgbClr val="000000"/>
+                </a:solidFill>
+                <a:latin typeface="Arial Unicode MS"/>
+                <a:ea typeface="Arial Unicode MS"/>
+                <a:cs typeface="Arial Unicode MS"/>
+              </a:rPr>
+              <a:t>再看 </a:t>
+            </a:r>
+            <a:r>
+              <a:rPr sz="1150" b="1" lang="zh-TW" dirty="0">
+                <a:solidFill>
+                  <a:srgbClr val="000000"/>
+                </a:solidFill>
+                <a:latin typeface="Arial Unicode MS"/>
+                <a:ea typeface="Arial Unicode MS"/>
+                <a:cs typeface="Arial Unicode MS"/>
+              </a:rPr>
+              <a:t>Rate Noise Density，0.008</a:t>
+            </a:r>
+            <a:r>
+              <a:rPr sz="1150" lang="zh-TW" dirty="0">
+                <a:solidFill>
+                  <a:srgbClr val="000000"/>
+                </a:solidFill>
+                <a:latin typeface="Arial Unicode MS"/>
+                <a:ea typeface="Arial Unicode MS"/>
+                <a:cs typeface="Arial Unicode MS"/>
+              </a:rPr>
+              <a:t>。手機級那顆是 0.015，差一倍。這一行兩邊的表都有，可以直接比；Bias 那兩行只有這邊有。
 </a:t>
             </a:r>
           </a:p>
@@ -2120,11 +2164,55 @@
                 <a:spcPts val="0"/>
               </a:spcBef>
               <a:spcAft>
-                <a:spcPts val="200"/>
+                <a:spcPts val="192"/>
               </a:spcAft>
             </a:pPr>
             <a:r>
-              <a:rPr sz="1200" lang="zh-TW" dirty="0">
+              <a:rPr sz="1150" lang="zh-TW" dirty="0">
+                <a:solidFill>
+                  <a:srgbClr val="000000"/>
+                </a:solidFill>
+                <a:latin typeface="Arial Unicode MS"/>
+                <a:ea typeface="Arial Unicode MS"/>
+                <a:cs typeface="Arial Unicode MS"/>
+              </a:rPr>
+              <a:t>翻回規格書第一頁，Applications 那一欄寫的是 Navigation、</a:t>
+            </a:r>
+            <a:r>
+              <a:rPr sz="1150" b="1" lang="zh-TW" dirty="0">
+                <a:solidFill>
+                  <a:srgbClr val="000000"/>
+                </a:solidFill>
+                <a:latin typeface="Arial Unicode MS"/>
+                <a:ea typeface="Arial Unicode MS"/>
+                <a:cs typeface="Arial Unicode MS"/>
+              </a:rPr>
+              <a:t>Unmanned and autonomous vehicles</a:t>
+            </a:r>
+            <a:r>
+              <a:rPr sz="1150" lang="zh-TW" dirty="0">
+                <a:solidFill>
+                  <a:srgbClr val="000000"/>
+                </a:solidFill>
+                <a:latin typeface="Arial Unicode MS"/>
+                <a:ea typeface="Arial Unicode MS"/>
+                <a:cs typeface="Arial Unicode MS"/>
+              </a:rPr>
+              <a:t>、robotics。手機級那顆寫的是 Smartphones。規格書自己告訴你它是給誰用的。
+</a:t>
+            </a:r>
+          </a:p>
+          <a:p>
+            <a:pPr algn="l">
+              <a:spcBef>
+                <a:spcPts val="0"/>
+              </a:spcBef>
+              <a:spcAft>
+                <a:spcPts val="192"/>
+              </a:spcAft>
+            </a:pPr>
+            <a:r>
+              <a:rPr sz="1150" lang="zh-TW" dirty="0">
                 <a:solidFill>
                   <a:srgbClr val="000000"/>
                 </a:solidFill>

--- a/第六週(10-15)/第六週_第2節_簡報.pptx
+++ b/第六週(10-15)/第六週_第2節_簡報.pptx
@@ -1472,7 +1472,7 @@
                 <a:ea typeface="Arial Unicode MS"/>
                 <a:cs typeface="Arial Unicode MS"/>
               </a:rPr>
-              <a:t>意思是它最快量得到一秒轉兩千度。表上只寫度，換成圈數要自己算：一圈三百六十度，兩千除以三百六十，大約</a:t>
+              <a:t>意思是它最快量得到一秒轉兩千度。正負是兩個方向，往左轉記正的、往右轉記負的。轉得比這還快，它就一直讀兩千，像速度表的指針頂到底。表上只寫度，換成圈數要自己算：一圈三百六十度，兩千除以三百六十，大約</a:t>
             </a:r>
             <a:r>
               <a:rPr sz="850" b="1" lang="zh-TW" dirty="0">

--- a/第六週(10-15)/第六週_第2節_簡報.pptx
+++ b/第六週(10-15)/第六週_第2節_簡報.pptx
@@ -1197,7 +1197,7 @@
                 <a:ea typeface="Arial Unicode MS"/>
                 <a:cs typeface="Arial Unicode MS"/>
               </a:rPr>
-              <a:t>這顆是車上 ESP 用的，量車子有沒有繞著自己轉，也就是有沒有</a:t>
+              <a:t>先說清楚：影片裡那顆</a:t>
             </a:r>
             <a:r>
               <a:rPr sz="850" b="1" lang="zh-TW" dirty="0">
@@ -1208,7 +1208,7 @@
                 <a:ea typeface="Arial Unicode MS"/>
                 <a:cs typeface="Arial Unicode MS"/>
               </a:rPr>
-              <a:t>打滑</a:t>
+              <a:t>不是</a:t>
             </a:r>
             <a:r>
               <a:rPr sz="850" lang="zh-TW" dirty="0">
@@ -1219,7 +1219,7 @@
                 <a:ea typeface="Arial Unicode MS"/>
                 <a:cs typeface="Arial Unicode MS"/>
               </a:rPr>
-              <a:t>。</a:t>
+              <a:t>今天表上的 ICM-20948，是 Bosch 做給車子用的陀螺儀。它裝在車上的 </a:t>
             </a:r>
             <a:r>
               <a:rPr sz="850" b="1" lang="zh-TW" dirty="0">
@@ -1230,6 +1230,28 @@
                 <a:ea typeface="Arial Unicode MS"/>
                 <a:cs typeface="Arial Unicode MS"/>
               </a:rPr>
+              <a:t>ESP</a:t>
+            </a:r>
+            <a:r>
+              <a:rPr sz="850" lang="zh-TW" dirty="0">
+                <a:solidFill>
+                  <a:srgbClr val="000000"/>
+                </a:solidFill>
+                <a:latin typeface="Arial Unicode MS"/>
+                <a:ea typeface="Arial Unicode MS"/>
+                <a:cs typeface="Arial Unicode MS"/>
+              </a:rPr>
+              <a:t>，也就是車身電子穩定系統：車子快要打滑、開始繞著自己轉的時候，ESP 會自動對某一個輪子煞車，把車身拉回來。陀螺儀的工作，就是量車子有沒有繞著自己轉。</a:t>
+            </a:r>
+            <a:r>
+              <a:rPr sz="850" b="1" lang="zh-TW" dirty="0">
+                <a:solidFill>
+                  <a:srgbClr val="000000"/>
+                </a:solidFill>
+                <a:latin typeface="Arial Unicode MS"/>
+                <a:ea typeface="Arial Unicode MS"/>
+                <a:cs typeface="Arial Unicode MS"/>
+              </a:rPr>
               <a:t>0:17</a:t>
             </a:r>
             <a:r>
@@ -1241,7 +1263,7 @@
                 <a:ea typeface="Arial Unicode MS"/>
                 <a:cs typeface="Arial Unicode MS"/>
               </a:rPr>
-              <a:t> 旁白說它裝在車子重心附近，例如安全氣囊的控制器裡。
+              <a:t> 旁白說它裝在車子重心附近，例如安全氣囊的控制器裡。放這支影片，是因為手機級和車用級的陀螺儀，裡面的原理是一樣的。
 </a:t>
             </a:r>
           </a:p>

--- a/第六週(10-15)/第六週_第2節_簡報.pptx
+++ b/第六週(10-15)/第六週_第2節_簡報.pptx
@@ -2484,7 +2484,7 @@
                 <a:ea typeface="Arial Unicode MS"/>
                 <a:cs typeface="Arial Unicode MS"/>
               </a:rPr>
-              <a:t>所以兩顆差的不是量程。就像兩支錶的錶面都是十二小時，差的是走得準不準。買 IMU 的人最常犯的錯就是比量程。
+              <a:t>量程就是量得到的範圍，像體重計最多量到一百五十公斤。這裡指最快量得到轉多快，就是第十一張的 Full-Scale Range、第十二張的 Dynamic Range，兩家叫法不同，講的是同一行。兩顆一樣，所以差的不是量程。就像兩支錶的錶面都是十二小時，差的是走得準不準。買 IMU 的人最常犯的錯就是比量程。
 </a:t>
             </a:r>
           </a:p>

--- a/第六週(10-15)/第六週_第2節_簡報.pptx
+++ b/第六週(10-15)/第六週_第2節_簡報.pptx
@@ -2692,11 +2692,11 @@
                 <a:spcPts val="0"/>
               </a:spcBef>
               <a:spcAft>
-                <a:spcPts val="200"/>
+                <a:spcPts val="175"/>
               </a:spcAft>
             </a:pPr>
             <a:r>
-              <a:rPr sz="1200" lang="zh-TW" dirty="0">
+              <a:rPr sz="1050" lang="zh-TW" dirty="0">
                 <a:solidFill>
                   <a:srgbClr val="000000"/>
                 </a:solidFill>
@@ -2714,11 +2714,11 @@
                 <a:spcPts val="0"/>
               </a:spcBef>
               <a:spcAft>
-                <a:spcPts val="200"/>
+                <a:spcPts val="175"/>
               </a:spcAft>
             </a:pPr>
             <a:r>
-              <a:rPr sz="1200" lang="zh-TW" dirty="0">
+              <a:rPr sz="1050" lang="zh-TW" dirty="0">
                 <a:solidFill>
                   <a:srgbClr val="000000"/>
                 </a:solidFill>
@@ -2729,7 +2729,7 @@
               <a:t>陀螺儀有一個偏差，假設是每小時八度。它不轉的時候，陀螺儀還是告訴你「你在轉」，一小時累積八度。所以</a:t>
             </a:r>
             <a:r>
-              <a:rPr sz="1200" b="1" lang="zh-TW" dirty="0">
+              <a:rPr sz="1050" b="1" lang="zh-TW" dirty="0">
                 <a:solidFill>
                   <a:srgbClr val="000000"/>
                 </a:solidFill>
@@ -2740,7 +2740,7 @@
               <a:t>航向的誤差＝偏差乘時間</a:t>
             </a:r>
             <a:r>
-              <a:rPr sz="1200" lang="zh-TW" dirty="0">
+              <a:rPr sz="1050" lang="zh-TW" dirty="0">
                 <a:solidFill>
                   <a:srgbClr val="000000"/>
                 </a:solidFill>
@@ -2758,11 +2758,11 @@
                 <a:spcPts val="0"/>
               </a:spcBef>
               <a:spcAft>
-                <a:spcPts val="200"/>
+                <a:spcPts val="175"/>
               </a:spcAft>
             </a:pPr>
             <a:r>
-              <a:rPr sz="1200" lang="zh-TW" dirty="0">
+              <a:rPr sz="1050" lang="zh-TW" dirty="0">
                 <a:solidFill>
                   <a:srgbClr val="000000"/>
                 </a:solidFill>
@@ -2773,7 +2773,7 @@
               <a:t>航向歪了，車子以為自己直直開，其實在斜著走。</a:t>
             </a:r>
             <a:r>
-              <a:rPr sz="1200" b="1" lang="zh-TW" dirty="0">
+              <a:rPr sz="1050" b="1" lang="zh-TW" dirty="0">
                 <a:solidFill>
                   <a:srgbClr val="000000"/>
                 </a:solidFill>
@@ -2784,7 +2784,7 @@
               <a:t>橫向偏掉的距離，大約是車速乘偏差乘時間的平方除以二。</a:t>
             </a:r>
             <a:r>
-              <a:rPr sz="1200" lang="zh-TW" dirty="0">
+              <a:rPr sz="1050" lang="zh-TW" dirty="0">
                 <a:solidFill>
                   <a:srgbClr val="000000"/>
                 </a:solidFill>
@@ -2802,19 +2802,129 @@
                 <a:spcPts val="0"/>
               </a:spcBef>
               <a:spcAft>
-                <a:spcPts val="200"/>
+                <a:spcPts val="175"/>
               </a:spcAft>
             </a:pPr>
             <a:r>
-              <a:rPr sz="1200" lang="zh-TW" dirty="0">
-                <a:solidFill>
-                  <a:srgbClr val="000000"/>
-                </a:solidFill>
-                <a:latin typeface="Arial Unicode MS"/>
-                <a:ea typeface="Arial Unicode MS"/>
-                <a:cs typeface="Arial Unicode MS"/>
-              </a:rPr>
-              <a:t>左圖畫的就是這條曲線。時速八十，容許橫向偏零點五公尺——車道三點五、車寬一點八，左右各只剩零點八五，零點五是保守一點的門檻。
+              <a:rPr sz="1050" lang="zh-TW" dirty="0">
+                <a:solidFill>
+                  <a:srgbClr val="000000"/>
+                </a:solidFill>
+                <a:latin typeface="Arial Unicode MS"/>
+                <a:ea typeface="Arial Unicode MS"/>
+                <a:cs typeface="Arial Unicode MS"/>
+              </a:rPr>
+              <a:t>左圖畫的就是這條算式。先教各位怎麼看：條件是</a:t>
+            </a:r>
+            <a:r>
+              <a:rPr sz="1050" b="1" lang="zh-TW" dirty="0">
+                <a:solidFill>
+                  <a:srgbClr val="000000"/>
+                </a:solidFill>
+                <a:latin typeface="Arial Unicode MS"/>
+                <a:ea typeface="Arial Unicode MS"/>
+                <a:cs typeface="Arial Unicode MS"/>
+              </a:rPr>
+              <a:t>時速八十，衛星突然斷掉</a:t>
+            </a:r>
+            <a:r>
+              <a:rPr sz="1050" lang="zh-TW" dirty="0">
+                <a:solidFill>
+                  <a:srgbClr val="000000"/>
+                </a:solidFill>
+                <a:latin typeface="Arial Unicode MS"/>
+                <a:ea typeface="Arial Unicode MS"/>
+                <a:cs typeface="Arial Unicode MS"/>
+              </a:rPr>
+              <a:t>。</a:t>
+            </a:r>
+            <a:r>
+              <a:rPr sz="1050" b="1" lang="zh-TW" dirty="0">
+                <a:solidFill>
+                  <a:srgbClr val="000000"/>
+                </a:solidFill>
+                <a:latin typeface="Arial Unicode MS"/>
+                <a:ea typeface="Arial Unicode MS"/>
+                <a:cs typeface="Arial Unicode MS"/>
+              </a:rPr>
+              <a:t>橫軸</a:t>
+            </a:r>
+            <a:r>
+              <a:rPr sz="1050" lang="zh-TW" dirty="0">
+                <a:solidFill>
+                  <a:srgbClr val="000000"/>
+                </a:solidFill>
+                <a:latin typeface="Arial Unicode MS"/>
+                <a:ea typeface="Arial Unicode MS"/>
+                <a:cs typeface="Arial Unicode MS"/>
+              </a:rPr>
+              <a:t>是斷掉以後過了幾秒，</a:t>
+            </a:r>
+            <a:r>
+              <a:rPr sz="1050" b="1" lang="zh-TW" dirty="0">
+                <a:solidFill>
+                  <a:srgbClr val="000000"/>
+                </a:solidFill>
+                <a:latin typeface="Arial Unicode MS"/>
+                <a:ea typeface="Arial Unicode MS"/>
+                <a:cs typeface="Arial Unicode MS"/>
+              </a:rPr>
+              <a:t>縱軸</a:t>
+            </a:r>
+            <a:r>
+              <a:rPr sz="1050" lang="zh-TW" dirty="0">
+                <a:solidFill>
+                  <a:srgbClr val="000000"/>
+                </a:solidFill>
+                <a:latin typeface="Arial Unicode MS"/>
+                <a:ea typeface="Arial Unicode MS"/>
+                <a:cs typeface="Arial Unicode MS"/>
+              </a:rPr>
+              <a:t>是車子以為自己在車道中間、其實已經橫向偏了幾公尺。中間那條紅線是</a:t>
+            </a:r>
+            <a:r>
+              <a:rPr sz="1050" b="1" lang="zh-TW" dirty="0">
+                <a:solidFill>
+                  <a:srgbClr val="000000"/>
+                </a:solidFill>
+                <a:latin typeface="Arial Unicode MS"/>
+                <a:ea typeface="Arial Unicode MS"/>
+                <a:cs typeface="Arial Unicode MS"/>
+              </a:rPr>
+              <a:t>零點五公尺</a:t>
+            </a:r>
+            <a:r>
+              <a:rPr sz="1050" lang="zh-TW" dirty="0">
+                <a:solidFill>
+                  <a:srgbClr val="000000"/>
+                </a:solidFill>
+                <a:latin typeface="Arial Unicode MS"/>
+                <a:ea typeface="Arial Unicode MS"/>
+                <a:cs typeface="Arial Unicode MS"/>
+              </a:rPr>
+              <a:t>：紅線以下淡綠色，還在車道內；紅線以上淡紅色，偏出車道。</a:t>
+            </a:r>
+            <a:r>
+              <a:rPr sz="1050" b="1" lang="zh-TW" dirty="0">
+                <a:solidFill>
+                  <a:srgbClr val="000000"/>
+                </a:solidFill>
+                <a:latin typeface="Arial Unicode MS"/>
+                <a:ea typeface="Arial Unicode MS"/>
+                <a:cs typeface="Arial Unicode MS"/>
+              </a:rPr>
+              <a:t>曲線碰到紅線的那一點，就是它撐得住的秒數。</a:t>
+            </a:r>
+            <a:r>
+              <a:rPr sz="1050" lang="zh-TW" dirty="0">
+                <a:solidFill>
+                  <a:srgbClr val="000000"/>
+                </a:solidFill>
+                <a:latin typeface="Arial Unicode MS"/>
+                <a:ea typeface="Arial Unicode MS"/>
+                <a:cs typeface="Arial Unicode MS"/>
+              </a:rPr>
+              <a:t>
 </a:t>
             </a:r>
           </a:p>
@@ -2824,52 +2934,41 @@
                 <a:spcPts val="0"/>
               </a:spcBef>
               <a:spcAft>
-                <a:spcPts val="200"/>
+                <a:spcPts val="175"/>
               </a:spcAft>
             </a:pPr>
             <a:r>
-              <a:rPr sz="1200" b="1" lang="zh-TW" dirty="0">
-                <a:solidFill>
-                  <a:srgbClr val="000000"/>
-                </a:solidFill>
-                <a:latin typeface="Arial Unicode MS"/>
-                <a:ea typeface="Arial Unicode MS"/>
-                <a:cs typeface="Arial Unicode MS"/>
-              </a:rPr>
-              <a:t>綠線是工業級，8 °/h：三十四秒碰到紅線。</a:t>
-            </a:r>
-            <a:r>
-              <a:rPr sz="1200" lang="zh-TW" dirty="0">
-                <a:solidFill>
-                  <a:srgbClr val="000000"/>
-                </a:solidFill>
-                <a:latin typeface="Arial Unicode MS"/>
-                <a:ea typeface="Arial Unicode MS"/>
-                <a:cs typeface="Arial Unicode MS"/>
-              </a:rPr>
-              <a:t>三十四秒，時速八十可以跑七百五十公尺。</a:t>
-            </a:r>
-            <a:r>
-              <a:rPr sz="1200" b="1" lang="zh-TW" dirty="0">
-                <a:solidFill>
-                  <a:srgbClr val="000000"/>
-                </a:solidFill>
-                <a:latin typeface="Arial Unicode MS"/>
-                <a:ea typeface="Arial Unicode MS"/>
-                <a:cs typeface="Arial Unicode MS"/>
-              </a:rPr>
-              <a:t>黃線是手機級，1800 °/h：兩秒。</a:t>
-            </a:r>
-            <a:r>
-              <a:rPr sz="1200" lang="zh-TW" dirty="0">
-                <a:solidFill>
-                  <a:srgbClr val="000000"/>
-                </a:solidFill>
-                <a:latin typeface="Arial Unicode MS"/>
-                <a:ea typeface="Arial Unicode MS"/>
-                <a:cs typeface="Arial Unicode MS"/>
-              </a:rPr>
-              <a:t>兩秒就偏半公尺，所以手機的導航在隧道裡會亂飄。
+              <a:rPr sz="1050" lang="zh-TW" dirty="0">
+                <a:solidFill>
+                  <a:srgbClr val="000000"/>
+                </a:solidFill>
+                <a:latin typeface="Arial Unicode MS"/>
+                <a:ea typeface="Arial Unicode MS"/>
+                <a:cs typeface="Arial Unicode MS"/>
+              </a:rPr>
+              <a:t>為什麼紅線畫在零點五？看右上角那個小框：車道三點五公尺、車寬一點八，左右各只剩</a:t>
+            </a:r>
+            <a:r>
+              <a:rPr sz="1050" b="1" lang="zh-TW" dirty="0">
+                <a:solidFill>
+                  <a:srgbClr val="000000"/>
+                </a:solidFill>
+                <a:latin typeface="Arial Unicode MS"/>
+                <a:ea typeface="Arial Unicode MS"/>
+                <a:cs typeface="Arial Unicode MS"/>
+              </a:rPr>
+              <a:t>零點八五</a:t>
+            </a:r>
+            <a:r>
+              <a:rPr sz="1050" lang="zh-TW" dirty="0">
+                <a:solidFill>
+                  <a:srgbClr val="000000"/>
+                </a:solidFill>
+                <a:latin typeface="Arial Unicode MS"/>
+                <a:ea typeface="Arial Unicode MS"/>
+                <a:cs typeface="Arial Unicode MS"/>
+              </a:rPr>
+              <a:t>；再留一點給方向盤的晃動，零點五是保守一點的門檻。
 </a:t>
             </a:r>
           </a:p>
@@ -2879,41 +2978,52 @@
                 <a:spcPts val="0"/>
               </a:spcBef>
               <a:spcAft>
-                <a:spcPts val="200"/>
+                <a:spcPts val="175"/>
               </a:spcAft>
             </a:pPr>
             <a:r>
-              <a:rPr sz="1200" lang="zh-TW" dirty="0">
-                <a:solidFill>
-                  <a:srgbClr val="000000"/>
-                </a:solidFill>
-                <a:latin typeface="Arial Unicode MS"/>
-                <a:ea typeface="Arial Unicode MS"/>
-                <a:cs typeface="Arial Unicode MS"/>
-              </a:rPr>
-              <a:t>現在想隧道。雪山隧道十二點九公里，時速八十，</a:t>
-            </a:r>
-            <a:r>
-              <a:rPr sz="1200" b="1" lang="zh-TW" dirty="0">
-                <a:solidFill>
-                  <a:srgbClr val="000000"/>
-                </a:solidFill>
-                <a:latin typeface="Arial Unicode MS"/>
-                <a:ea typeface="Arial Unicode MS"/>
-                <a:cs typeface="Arial Unicode MS"/>
-              </a:rPr>
-              <a:t>五百八十秒</a:t>
-            </a:r>
-            <a:r>
-              <a:rPr sz="1200" lang="zh-TW" dirty="0">
-                <a:solidFill>
-                  <a:srgbClr val="000000"/>
-                </a:solidFill>
-                <a:latin typeface="Arial Unicode MS"/>
-                <a:ea typeface="Arial Unicode MS"/>
-                <a:cs typeface="Arial Unicode MS"/>
-              </a:rPr>
-              <a:t>。綠線三十四秒就出局了。沒有一顆 IMU 撐得住，光纖陀螺也撐不住。
+              <a:rPr sz="1050" b="1" lang="zh-TW" dirty="0">
+                <a:solidFill>
+                  <a:srgbClr val="000000"/>
+                </a:solidFill>
+                <a:latin typeface="Arial Unicode MS"/>
+                <a:ea typeface="Arial Unicode MS"/>
+                <a:cs typeface="Arial Unicode MS"/>
+              </a:rPr>
+              <a:t>綠線是工業級，8 °/h：三十四秒碰到紅線。</a:t>
+            </a:r>
+            <a:r>
+              <a:rPr sz="1050" lang="zh-TW" dirty="0">
+                <a:solidFill>
+                  <a:srgbClr val="000000"/>
+                </a:solidFill>
+                <a:latin typeface="Arial Unicode MS"/>
+                <a:ea typeface="Arial Unicode MS"/>
+                <a:cs typeface="Arial Unicode MS"/>
+              </a:rPr>
+              <a:t>三十四秒，時速八十可以跑七百五十公尺。</a:t>
+            </a:r>
+            <a:r>
+              <a:rPr sz="1050" b="1" lang="zh-TW" dirty="0">
+                <a:solidFill>
+                  <a:srgbClr val="000000"/>
+                </a:solidFill>
+                <a:latin typeface="Arial Unicode MS"/>
+                <a:ea typeface="Arial Unicode MS"/>
+                <a:cs typeface="Arial Unicode MS"/>
+              </a:rPr>
+              <a:t>黃線是手機級，1800 °/h：兩秒。</a:t>
+            </a:r>
+            <a:r>
+              <a:rPr sz="1050" lang="zh-TW" dirty="0">
+                <a:solidFill>
+                  <a:srgbClr val="000000"/>
+                </a:solidFill>
+                <a:latin typeface="Arial Unicode MS"/>
+                <a:ea typeface="Arial Unicode MS"/>
+                <a:cs typeface="Arial Unicode MS"/>
+              </a:rPr>
+              <a:t>兩秒就偏半公尺，所以手機的導航在隧道裡會亂飄。
 </a:t>
             </a:r>
           </a:p>
@@ -2923,41 +3033,41 @@
                 <a:spcPts val="0"/>
               </a:spcBef>
               <a:spcAft>
-                <a:spcPts val="200"/>
+                <a:spcPts val="175"/>
               </a:spcAft>
             </a:pPr>
             <a:r>
-              <a:rPr sz="1200" lang="zh-TW" dirty="0">
-                <a:solidFill>
-                  <a:srgbClr val="000000"/>
-                </a:solidFill>
-                <a:latin typeface="Arial Unicode MS"/>
-                <a:ea typeface="Arial Unicode MS"/>
-                <a:cs typeface="Arial Unicode MS"/>
-              </a:rPr>
-              <a:t>所以 IMU 的用法不是「過隧道」，是</a:t>
-            </a:r>
-            <a:r>
-              <a:rPr sz="1200" b="1" lang="zh-TW" dirty="0">
-                <a:solidFill>
-                  <a:srgbClr val="000000"/>
-                </a:solidFill>
-                <a:latin typeface="Arial Unicode MS"/>
-                <a:ea typeface="Arial Unicode MS"/>
-                <a:cs typeface="Arial Unicode MS"/>
-              </a:rPr>
-              <a:t>補洞</a:t>
-            </a:r>
-            <a:r>
-              <a:rPr sz="1200" lang="zh-TW" dirty="0">
-                <a:solidFill>
-                  <a:srgbClr val="000000"/>
-                </a:solidFill>
-                <a:latin typeface="Arial Unicode MS"/>
-                <a:ea typeface="Arial Unicode MS"/>
-                <a:cs typeface="Arial Unicode MS"/>
-              </a:rPr>
-              <a:t>：衛星斷一秒、兩秒、十秒的時候，它把這幾秒接起來。真的要過隧道，得靠別的——輪速、相機看車道線、高精地圖。這是第五章的事。
+              <a:rPr sz="1050" lang="zh-TW" dirty="0">
+                <a:solidFill>
+                  <a:srgbClr val="000000"/>
+                </a:solidFill>
+                <a:latin typeface="Arial Unicode MS"/>
+                <a:ea typeface="Arial Unicode MS"/>
+                <a:cs typeface="Arial Unicode MS"/>
+              </a:rPr>
+              <a:t>現在想隧道。雪山隧道十二點九公里，時速八十，</a:t>
+            </a:r>
+            <a:r>
+              <a:rPr sz="1050" b="1" lang="zh-TW" dirty="0">
+                <a:solidFill>
+                  <a:srgbClr val="000000"/>
+                </a:solidFill>
+                <a:latin typeface="Arial Unicode MS"/>
+                <a:ea typeface="Arial Unicode MS"/>
+                <a:cs typeface="Arial Unicode MS"/>
+              </a:rPr>
+              <a:t>五百八十秒</a:t>
+            </a:r>
+            <a:r>
+              <a:rPr sz="1050" lang="zh-TW" dirty="0">
+                <a:solidFill>
+                  <a:srgbClr val="000000"/>
+                </a:solidFill>
+                <a:latin typeface="Arial Unicode MS"/>
+                <a:ea typeface="Arial Unicode MS"/>
+                <a:cs typeface="Arial Unicode MS"/>
+              </a:rPr>
+              <a:t>。綠線三十四秒就出局了。沒有一顆 IMU 撐得住，光纖陀螺也撐不住。
 </a:t>
             </a:r>
           </a:p>
@@ -2967,11 +3077,55 @@
                 <a:spcPts val="0"/>
               </a:spcBef>
               <a:spcAft>
-                <a:spcPts val="200"/>
+                <a:spcPts val="175"/>
               </a:spcAft>
             </a:pPr>
             <a:r>
-              <a:rPr sz="1200" lang="zh-TW" dirty="0">
+              <a:rPr sz="1050" lang="zh-TW" dirty="0">
+                <a:solidFill>
+                  <a:srgbClr val="000000"/>
+                </a:solidFill>
+                <a:latin typeface="Arial Unicode MS"/>
+                <a:ea typeface="Arial Unicode MS"/>
+                <a:cs typeface="Arial Unicode MS"/>
+              </a:rPr>
+              <a:t>所以 IMU 的用法不是「過隧道」，是</a:t>
+            </a:r>
+            <a:r>
+              <a:rPr sz="1050" b="1" lang="zh-TW" dirty="0">
+                <a:solidFill>
+                  <a:srgbClr val="000000"/>
+                </a:solidFill>
+                <a:latin typeface="Arial Unicode MS"/>
+                <a:ea typeface="Arial Unicode MS"/>
+                <a:cs typeface="Arial Unicode MS"/>
+              </a:rPr>
+              <a:t>補洞</a:t>
+            </a:r>
+            <a:r>
+              <a:rPr sz="1050" lang="zh-TW" dirty="0">
+                <a:solidFill>
+                  <a:srgbClr val="000000"/>
+                </a:solidFill>
+                <a:latin typeface="Arial Unicode MS"/>
+                <a:ea typeface="Arial Unicode MS"/>
+                <a:cs typeface="Arial Unicode MS"/>
+              </a:rPr>
+              <a:t>：衛星斷一秒、兩秒、十秒的時候，它把這幾秒接起來。真的要過隧道，得靠別的——輪速、相機看車道線、高精地圖。這是第五章的事。
+</a:t>
+            </a:r>
+          </a:p>
+          <a:p>
+            <a:pPr algn="l">
+              <a:spcBef>
+                <a:spcPts val="0"/>
+              </a:spcBef>
+              <a:spcAft>
+                <a:spcPts val="175"/>
+              </a:spcAft>
+            </a:pPr>
+            <a:r>
+              <a:rPr sz="1050" lang="zh-TW" dirty="0">
                 <a:solidFill>
                   <a:srgbClr val="000000"/>
                 </a:solidFill>

--- a/第六週(10-15)/第六週_第2節_簡報.pptx
+++ b/第六週(10-15)/第六週_第2節_簡報.pptx
@@ -2692,11 +2692,11 @@
                 <a:spcPts val="0"/>
               </a:spcBef>
               <a:spcAft>
-                <a:spcPts val="175"/>
+                <a:spcPts val="158"/>
               </a:spcAft>
             </a:pPr>
             <a:r>
-              <a:rPr sz="1050" lang="zh-TW" dirty="0">
+              <a:rPr sz="950" lang="zh-TW" dirty="0">
                 <a:solidFill>
                   <a:srgbClr val="000000"/>
                 </a:solidFill>
@@ -2714,11 +2714,11 @@
                 <a:spcPts val="0"/>
               </a:spcBef>
               <a:spcAft>
-                <a:spcPts val="175"/>
+                <a:spcPts val="158"/>
               </a:spcAft>
             </a:pPr>
             <a:r>
-              <a:rPr sz="1050" lang="zh-TW" dirty="0">
+              <a:rPr sz="950" lang="zh-TW" dirty="0">
                 <a:solidFill>
                   <a:srgbClr val="000000"/>
                 </a:solidFill>
@@ -2729,7 +2729,7 @@
               <a:t>陀螺儀有一個偏差，假設是每小時八度。它不轉的時候，陀螺儀還是告訴你「你在轉」，一小時累積八度。所以</a:t>
             </a:r>
             <a:r>
-              <a:rPr sz="1050" b="1" lang="zh-TW" dirty="0">
+              <a:rPr sz="950" b="1" lang="zh-TW" dirty="0">
                 <a:solidFill>
                   <a:srgbClr val="000000"/>
                 </a:solidFill>
@@ -2740,7 +2740,7 @@
               <a:t>航向的誤差＝偏差乘時間</a:t>
             </a:r>
             <a:r>
-              <a:rPr sz="1050" lang="zh-TW" dirty="0">
+              <a:rPr sz="950" lang="zh-TW" dirty="0">
                 <a:solidFill>
                   <a:srgbClr val="000000"/>
                 </a:solidFill>
@@ -2758,11 +2758,11 @@
                 <a:spcPts val="0"/>
               </a:spcBef>
               <a:spcAft>
-                <a:spcPts val="175"/>
+                <a:spcPts val="158"/>
               </a:spcAft>
             </a:pPr>
             <a:r>
-              <a:rPr sz="1050" lang="zh-TW" dirty="0">
+              <a:rPr sz="950" lang="zh-TW" dirty="0">
                 <a:solidFill>
                   <a:srgbClr val="000000"/>
                 </a:solidFill>
@@ -2773,7 +2773,7 @@
               <a:t>航向歪了，車子以為自己直直開，其實在斜著走。</a:t>
             </a:r>
             <a:r>
-              <a:rPr sz="1050" b="1" lang="zh-TW" dirty="0">
+              <a:rPr sz="950" b="1" lang="zh-TW" dirty="0">
                 <a:solidFill>
                   <a:srgbClr val="000000"/>
                 </a:solidFill>
@@ -2784,7 +2784,7 @@
               <a:t>橫向偏掉的距離，大約是車速乘偏差乘時間的平方除以二。</a:t>
             </a:r>
             <a:r>
-              <a:rPr sz="1050" lang="zh-TW" dirty="0">
+              <a:rPr sz="950" lang="zh-TW" dirty="0">
                 <a:solidFill>
                   <a:srgbClr val="000000"/>
                 </a:solidFill>
@@ -2802,11 +2802,11 @@
                 <a:spcPts val="0"/>
               </a:spcBef>
               <a:spcAft>
-                <a:spcPts val="175"/>
+                <a:spcPts val="158"/>
               </a:spcAft>
             </a:pPr>
             <a:r>
-              <a:rPr sz="1050" lang="zh-TW" dirty="0">
+              <a:rPr sz="950" lang="zh-TW" dirty="0">
                 <a:solidFill>
                   <a:srgbClr val="000000"/>
                 </a:solidFill>
@@ -2817,7 +2817,7 @@
               <a:t>左圖畫的就是這條算式。先教各位怎麼看：條件是</a:t>
             </a:r>
             <a:r>
-              <a:rPr sz="1050" b="1" lang="zh-TW" dirty="0">
+              <a:rPr sz="950" b="1" lang="zh-TW" dirty="0">
                 <a:solidFill>
                   <a:srgbClr val="000000"/>
                 </a:solidFill>
@@ -2828,7 +2828,7 @@
               <a:t>時速八十，衛星突然斷掉</a:t>
             </a:r>
             <a:r>
-              <a:rPr sz="1050" lang="zh-TW" dirty="0">
+              <a:rPr sz="950" lang="zh-TW" dirty="0">
                 <a:solidFill>
                   <a:srgbClr val="000000"/>
                 </a:solidFill>
@@ -2839,7 +2839,7 @@
               <a:t>。</a:t>
             </a:r>
             <a:r>
-              <a:rPr sz="1050" b="1" lang="zh-TW" dirty="0">
+              <a:rPr sz="950" b="1" lang="zh-TW" dirty="0">
                 <a:solidFill>
                   <a:srgbClr val="000000"/>
                 </a:solidFill>
@@ -2850,7 +2850,7 @@
               <a:t>橫軸</a:t>
             </a:r>
             <a:r>
-              <a:rPr sz="1050" lang="zh-TW" dirty="0">
+              <a:rPr sz="950" lang="zh-TW" dirty="0">
                 <a:solidFill>
                   <a:srgbClr val="000000"/>
                 </a:solidFill>
@@ -2861,7 +2861,7 @@
               <a:t>是斷掉以後過了幾秒，</a:t>
             </a:r>
             <a:r>
-              <a:rPr sz="1050" b="1" lang="zh-TW" dirty="0">
+              <a:rPr sz="950" b="1" lang="zh-TW" dirty="0">
                 <a:solidFill>
                   <a:srgbClr val="000000"/>
                 </a:solidFill>
@@ -2872,7 +2872,7 @@
               <a:t>縱軸</a:t>
             </a:r>
             <a:r>
-              <a:rPr sz="1050" lang="zh-TW" dirty="0">
+              <a:rPr sz="950" lang="zh-TW" dirty="0">
                 <a:solidFill>
                   <a:srgbClr val="000000"/>
                 </a:solidFill>
@@ -2883,7 +2883,7 @@
               <a:t>是車子以為自己在車道中間、其實已經橫向偏了幾公尺。中間那條紅線是</a:t>
             </a:r>
             <a:r>
-              <a:rPr sz="1050" b="1" lang="zh-TW" dirty="0">
+              <a:rPr sz="950" b="1" lang="zh-TW" dirty="0">
                 <a:solidFill>
                   <a:srgbClr val="000000"/>
                 </a:solidFill>
@@ -2894,7 +2894,7 @@
               <a:t>零點五公尺</a:t>
             </a:r>
             <a:r>
-              <a:rPr sz="1050" lang="zh-TW" dirty="0">
+              <a:rPr sz="950" lang="zh-TW" dirty="0">
                 <a:solidFill>
                   <a:srgbClr val="000000"/>
                 </a:solidFill>
@@ -2905,7 +2905,7 @@
               <a:t>：紅線以下淡綠色，還在車道內；紅線以上淡紅色，偏出車道。</a:t>
             </a:r>
             <a:r>
-              <a:rPr sz="1050" b="1" lang="zh-TW" dirty="0">
+              <a:rPr sz="950" b="1" lang="zh-TW" dirty="0">
                 <a:solidFill>
                   <a:srgbClr val="000000"/>
                 </a:solidFill>
@@ -2916,7 +2916,7 @@
               <a:t>曲線碰到紅線的那一點，就是它撐得住的秒數。</a:t>
             </a:r>
             <a:r>
-              <a:rPr sz="1050" lang="zh-TW" dirty="0">
+              <a:rPr sz="950" lang="zh-TW" dirty="0">
                 <a:solidFill>
                   <a:srgbClr val="000000"/>
                 </a:solidFill>
@@ -2934,11 +2934,11 @@
                 <a:spcPts val="0"/>
               </a:spcBef>
               <a:spcAft>
-                <a:spcPts val="175"/>
+                <a:spcPts val="158"/>
               </a:spcAft>
             </a:pPr>
             <a:r>
-              <a:rPr sz="1050" lang="zh-TW" dirty="0">
+              <a:rPr sz="950" lang="zh-TW" dirty="0">
                 <a:solidFill>
                   <a:srgbClr val="000000"/>
                 </a:solidFill>
@@ -2949,7 +2949,7 @@
               <a:t>為什麼紅線畫在零點五？看右上角那個小框：車道三點五公尺、車寬一點八，左右各只剩</a:t>
             </a:r>
             <a:r>
-              <a:rPr sz="1050" b="1" lang="zh-TW" dirty="0">
+              <a:rPr sz="950" b="1" lang="zh-TW" dirty="0">
                 <a:solidFill>
                   <a:srgbClr val="000000"/>
                 </a:solidFill>
@@ -2960,7 +2960,7 @@
               <a:t>零點八五</a:t>
             </a:r>
             <a:r>
-              <a:rPr sz="1050" lang="zh-TW" dirty="0">
+              <a:rPr sz="950" lang="zh-TW" dirty="0">
                 <a:solidFill>
                   <a:srgbClr val="000000"/>
                 </a:solidFill>
@@ -2978,11 +2978,11 @@
                 <a:spcPts val="0"/>
               </a:spcBef>
               <a:spcAft>
-                <a:spcPts val="175"/>
+                <a:spcPts val="158"/>
               </a:spcAft>
             </a:pPr>
             <a:r>
-              <a:rPr sz="1050" b="1" lang="zh-TW" dirty="0">
+              <a:rPr sz="950" b="1" lang="zh-TW" dirty="0">
                 <a:solidFill>
                   <a:srgbClr val="000000"/>
                 </a:solidFill>
@@ -2993,7 +2993,7 @@
               <a:t>綠線是工業級，8 °/h：三十四秒碰到紅線。</a:t>
             </a:r>
             <a:r>
-              <a:rPr sz="1050" lang="zh-TW" dirty="0">
+              <a:rPr sz="950" lang="zh-TW" dirty="0">
                 <a:solidFill>
                   <a:srgbClr val="000000"/>
                 </a:solidFill>
@@ -3004,7 +3004,7 @@
               <a:t>三十四秒，時速八十可以跑七百五十公尺。</a:t>
             </a:r>
             <a:r>
-              <a:rPr sz="1050" b="1" lang="zh-TW" dirty="0">
+              <a:rPr sz="950" b="1" lang="zh-TW" dirty="0">
                 <a:solidFill>
                   <a:srgbClr val="000000"/>
                 </a:solidFill>
@@ -3015,7 +3015,7 @@
               <a:t>黃線是手機級，1800 °/h：兩秒。</a:t>
             </a:r>
             <a:r>
-              <a:rPr sz="1050" lang="zh-TW" dirty="0">
+              <a:rPr sz="950" lang="zh-TW" dirty="0">
                 <a:solidFill>
                   <a:srgbClr val="000000"/>
                 </a:solidFill>
@@ -3033,11 +3033,11 @@
                 <a:spcPts val="0"/>
               </a:spcBef>
               <a:spcAft>
-                <a:spcPts val="175"/>
+                <a:spcPts val="158"/>
               </a:spcAft>
             </a:pPr>
             <a:r>
-              <a:rPr sz="1050" lang="zh-TW" dirty="0">
+              <a:rPr sz="950" lang="zh-TW" dirty="0">
                 <a:solidFill>
                   <a:srgbClr val="000000"/>
                 </a:solidFill>
@@ -3048,7 +3048,7 @@
               <a:t>現在想隧道。雪山隧道十二點九公里，時速八十，</a:t>
             </a:r>
             <a:r>
-              <a:rPr sz="1050" b="1" lang="zh-TW" dirty="0">
+              <a:rPr sz="950" b="1" lang="zh-TW" dirty="0">
                 <a:solidFill>
                   <a:srgbClr val="000000"/>
                 </a:solidFill>
@@ -3059,7 +3059,7 @@
               <a:t>五百八十秒</a:t>
             </a:r>
             <a:r>
-              <a:rPr sz="1050" lang="zh-TW" dirty="0">
+              <a:rPr sz="950" lang="zh-TW" dirty="0">
                 <a:solidFill>
                   <a:srgbClr val="000000"/>
                 </a:solidFill>
@@ -3077,11 +3077,11 @@
                 <a:spcPts val="0"/>
               </a:spcBef>
               <a:spcAft>
-                <a:spcPts val="175"/>
+                <a:spcPts val="158"/>
               </a:spcAft>
             </a:pPr>
             <a:r>
-              <a:rPr sz="1050" lang="zh-TW" dirty="0">
+              <a:rPr sz="950" lang="zh-TW" dirty="0">
                 <a:solidFill>
                   <a:srgbClr val="000000"/>
                 </a:solidFill>
@@ -3092,7 +3092,7 @@
               <a:t>所以 IMU 的用法不是「過隧道」，是</a:t>
             </a:r>
             <a:r>
-              <a:rPr sz="1050" b="1" lang="zh-TW" dirty="0">
+              <a:rPr sz="950" b="1" lang="zh-TW" dirty="0">
                 <a:solidFill>
                   <a:srgbClr val="000000"/>
                 </a:solidFill>
@@ -3103,15 +3103,81 @@
               <a:t>補洞</a:t>
             </a:r>
             <a:r>
-              <a:rPr sz="1050" lang="zh-TW" dirty="0">
-                <a:solidFill>
-                  <a:srgbClr val="000000"/>
-                </a:solidFill>
-                <a:latin typeface="Arial Unicode MS"/>
-                <a:ea typeface="Arial Unicode MS"/>
-                <a:cs typeface="Arial Unicode MS"/>
-              </a:rPr>
-              <a:t>：衛星斷一秒、兩秒、十秒的時候，它把這幾秒接起來。真的要過隧道，得靠別的——輪速、相機看車道線、高精地圖。這是第五章的事。
+              <a:rPr sz="950" lang="zh-TW" dirty="0">
+                <a:solidFill>
+                  <a:srgbClr val="000000"/>
+                </a:solidFill>
+                <a:latin typeface="Arial Unicode MS"/>
+                <a:ea typeface="Arial Unicode MS"/>
+                <a:cs typeface="Arial Unicode MS"/>
+              </a:rPr>
+              <a:t>：衛星斷一秒、兩秒、十秒的時候，它把這幾秒接起來。真的要過隧道，得靠別的，三樣各管一件事。</a:t>
+            </a:r>
+            <a:r>
+              <a:rPr sz="950" b="1" lang="zh-TW" dirty="0">
+                <a:solidFill>
+                  <a:srgbClr val="000000"/>
+                </a:solidFill>
+                <a:latin typeface="Arial Unicode MS"/>
+                <a:ea typeface="Arial Unicode MS"/>
+                <a:cs typeface="Arial Unicode MS"/>
+              </a:rPr>
+              <a:t>輪速</a:t>
+            </a:r>
+            <a:r>
+              <a:rPr sz="950" lang="zh-TW" dirty="0">
+                <a:solidFill>
+                  <a:srgbClr val="000000"/>
+                </a:solidFill>
+                <a:latin typeface="Arial Unicode MS"/>
+                <a:ea typeface="Arial Unicode MS"/>
+                <a:cs typeface="Arial Unicode MS"/>
+              </a:rPr>
+              <a:t>：每個輪子旁邊都有感測器，本來是給 ABS 用的，數輪子轉幾圈，就知道走了多遠、開多快；塞車停下來時，它說「車子沒動」，陀螺儀讀到的就全是零偏，可以趁機重新歸零。可是輪速不知道你在車道裡偏左還是偏右，那要靠</a:t>
+            </a:r>
+            <a:r>
+              <a:rPr sz="950" b="1" lang="zh-TW" dirty="0">
+                <a:solidFill>
+                  <a:srgbClr val="000000"/>
+                </a:solidFill>
+                <a:latin typeface="Arial Unicode MS"/>
+                <a:ea typeface="Arial Unicode MS"/>
+                <a:cs typeface="Arial Unicode MS"/>
+              </a:rPr>
+              <a:t>相機看車道線</a:t>
+            </a:r>
+            <a:r>
+              <a:rPr sz="950" lang="zh-TW" dirty="0">
+                <a:solidFill>
+                  <a:srgbClr val="000000"/>
+                </a:solidFill>
+                <a:latin typeface="Arial Unicode MS"/>
+                <a:ea typeface="Arial Unicode MS"/>
+                <a:cs typeface="Arial Unicode MS"/>
+              </a:rPr>
+              <a:t>。在隧道第幾公里、前面要不要轉彎，看</a:t>
+            </a:r>
+            <a:r>
+              <a:rPr sz="950" b="1" lang="zh-TW" dirty="0">
+                <a:solidFill>
+                  <a:srgbClr val="000000"/>
+                </a:solidFill>
+                <a:latin typeface="Arial Unicode MS"/>
+                <a:ea typeface="Arial Unicode MS"/>
+                <a:cs typeface="Arial Unicode MS"/>
+              </a:rPr>
+              <a:t>高精地圖</a:t>
+            </a:r>
+            <a:r>
+              <a:rPr sz="950" lang="zh-TW" dirty="0">
+                <a:solidFill>
+                  <a:srgbClr val="000000"/>
+                </a:solidFill>
+                <a:latin typeface="Arial Unicode MS"/>
+                <a:ea typeface="Arial Unicode MS"/>
+                <a:cs typeface="Arial Unicode MS"/>
+              </a:rPr>
+              <a:t>。就像閉著眼睛走路：數步數知道走了多遠，伸手摸到牆才知道有沒有歪。這是第五章的事。
 </a:t>
             </a:r>
           </a:p>
@@ -3121,11 +3187,11 @@
                 <a:spcPts val="0"/>
               </a:spcBef>
               <a:spcAft>
-                <a:spcPts val="175"/>
+                <a:spcPts val="158"/>
               </a:spcAft>
             </a:pPr>
             <a:r>
-              <a:rPr sz="1050" lang="zh-TW" dirty="0">
+              <a:rPr sz="950" lang="zh-TW" dirty="0">
                 <a:solidFill>
                   <a:srgbClr val="000000"/>
                 </a:solidFill>

--- a/第六週(10-15)/第六週_第2節_簡報.pptx
+++ b/第六週(10-15)/第六週_第2節_簡報.pptx
@@ -4134,7 +4134,7 @@
                 <a:ea typeface="Arial Unicode MS"/>
                 <a:cs typeface="Arial Unicode MS"/>
               </a:rPr>
-              <a:t>下一節整節上機。八個新型號、五個情境、四張表。每個人交一張。
+              <a:t>下一節一題一題講作業：八個新型號、五個情境、四張表，我講一題、各位填一題，下課前每個人交一張。
 </a:t>
             </a:r>
           </a:p>

--- a/第六週(10-15)/第六週_第2節_簡報.pptx
+++ b/第六週(10-15)/第六週_第2節_簡報.pptx
@@ -7478,7 +7478,7 @@
                 <a:ea typeface="Arial Unicode MS"/>
                 <a:cs typeface="Arial Unicode MS"/>
               </a:rPr>
-              <a:t>。u-blox 是瑞士的公司，做衛星定位模組最大的幾家之一。這一顆是導航等級，無人機、行車記錄器、很多手機外接的 GPS 都是它。左邊是規格書第六頁的表。
+              <a:t>。u-blox 是瑞士的公司，做衛星定位模組最大的幾家之一。這一顆是導航等級，無人機、行車記錄器、很多手機外接的 GPS 都是它。左邊是規格書第六頁的表，下面淡黃色那一行是同一頁最底下的註腳，中間省略了幾行。
 </a:t>
             </a:r>
           </a:p>
@@ -7533,7 +7533,7 @@
                 <a:ea typeface="Arial Unicode MS"/>
                 <a:cs typeface="Arial Unicode MS"/>
               </a:rPr>
-              <a:t>現在請各位看那個數字右上角的小 3，翻到表下面的</a:t>
+              <a:t>現在請各位看那個數字右上角的小 3，再看圖下面淡黃色那一行，就是</a:t>
             </a:r>
             <a:r>
               <a:rPr sz="900" b="1" lang="zh-TW" dirty="0">
@@ -7555,7 +7555,7 @@
                 <a:ea typeface="Arial Unicode MS"/>
                 <a:cs typeface="Arial Unicode MS"/>
               </a:rPr>
-              <a:t>：</a:t>
+              <a:t>，右邊第二條把它翻成中文：</a:t>
             </a:r>
             <a:r>
               <a:rPr sz="900" b="1" lang="zh-TW" dirty="0">
@@ -7797,6 +7797,28 @@
                 <a:ea typeface="Arial Unicode MS"/>
                 <a:cs typeface="Arial Unicode MS"/>
               </a:rPr>
+              <a:t>−130 dBm</a:t>
+            </a:r>
+            <a:r>
+              <a:rPr sz="900" lang="zh-TW" dirty="0">
+                <a:solidFill>
+                  <a:srgbClr val="000000"/>
+                </a:solidFill>
+                <a:latin typeface="Arial Unicode MS"/>
+                <a:ea typeface="Arial Unicode MS"/>
+                <a:cs typeface="Arial Unicode MS"/>
+              </a:rPr>
+              <a:t>：衛星訊號的強度，大約是天空開闊時收到的正常強度；樹下、窄巷裡會更弱。</a:t>
+            </a:r>
+            <a:r>
+              <a:rPr sz="900" b="1" lang="zh-TW" dirty="0">
+                <a:solidFill>
+                  <a:srgbClr val="000000"/>
+                </a:solidFill>
+                <a:latin typeface="Arial Unicode MS"/>
+                <a:ea typeface="Arial Unicode MS"/>
+                <a:cs typeface="Arial Unicode MS"/>
+              </a:rPr>
               <a:t>more than 6 SVs</a:t>
             </a:r>
             <a:r>
@@ -7808,7 +7830,7 @@
                 <a:ea typeface="Arial Unicode MS"/>
                 <a:cs typeface="Arial Unicode MS"/>
               </a:rPr>
-              <a:t>：至少看得到六顆衛星，窄巷裡看不到六顆。
+              <a:t>：SV 是衛星，至少看得到六顆，窄巷裡看不到六顆。
 </a:t>
             </a:r>
           </a:p>
@@ -21822,11 +21844,11 @@
         <p:spPr>
           <a:xfrm>
             <a:off x="502920" y="877824"/>
-            <a:ext cx="3291840" cy="1330945"/>
+            <a:ext cx="3657600" cy="1621185"/>
           </a:xfrm>
           <a:prstGeom prst="roundRect">
             <a:avLst>
-              <a:gd name="adj" fmla="val 8244"/>
+              <a:gd name="adj" fmla="val 6768"/>
             </a:avLst>
           </a:prstGeom>
           <a:solidFill>
@@ -21842,7 +21864,7 @@
       </p:sp>
       <p:pic>
         <p:nvPicPr>
-          <p:cNvPr id="4" name="Image 0" descr="/Users/tsengchenghsun/Class/carClass/Claude outputs/第六週(10-15)/src/img/w6_neom8_acc.png">    </p:cNvPr>
+          <p:cNvPr id="4" name="Image 0" descr="/Users/tsengchenghsun/Class/carClass/Claude outputs/第六週(10-15)/src/img/w6_neom8_accfn.png">    </p:cNvPr>
           <p:cNvPicPr>
             <a:picLocks noChangeAspect="1"/>
           </p:cNvPicPr>
@@ -21856,8 +21878,8 @@
         </p:blipFill>
         <p:spPr>
           <a:xfrm>
-            <a:off x="576072" y="973237"/>
-            <a:ext cx="3145536" cy="957239"/>
+            <a:off x="576072" y="976816"/>
+            <a:ext cx="3511296" cy="1240321"/>
           </a:xfrm>
           <a:prstGeom prst="rect">
             <a:avLst/>
@@ -21872,8 +21894,8 @@
         </p:nvSpPr>
         <p:spPr>
           <a:xfrm>
-            <a:off x="576072" y="1971025"/>
-            <a:ext cx="3145536" cy="182880"/>
+            <a:off x="576072" y="2261265"/>
+            <a:ext cx="3511296" cy="182880"/>
           </a:xfrm>
           <a:prstGeom prst="rect">
             <a:avLst/>
@@ -21897,7 +21919,7 @@
                 <a:ea typeface="Arial" pitchFamily="34" charset="-122"/>
                 <a:cs typeface="Arial" pitchFamily="34" charset="-120"/>
               </a:rPr>
-              <a:t>u-blox NEO-M8 Data sheet (UBX-15031086 R14), §1.3 Table 1 · 節錄 · 讀取 2026/10/08</a:t>
+              <a:t>u-blox NEO-M8 Data sheet (UBX-15031086 R14), §1.3 Table 1 與註腳 3（中間省略）· 節錄 · 讀取 2026/10/08</a:t>
             </a:r>
             <a:endParaRPr lang="en-US" sz="700" dirty="0"/>
           </a:p>
@@ -21911,8 +21933,8 @@
         </p:nvSpPr>
         <p:spPr>
           <a:xfrm>
-            <a:off x="4069080" y="786384"/>
-            <a:ext cx="4572000" cy="1052585"/>
+            <a:off x="4434840" y="786384"/>
+            <a:ext cx="4206240" cy="787475"/>
           </a:xfrm>
           <a:prstGeom prst="rect">
             <a:avLst/>
@@ -21939,7 +21961,7 @@
                 <a:ea typeface="Arial" pitchFamily="34" charset="-122"/>
                 <a:cs typeface="Arial" pitchFamily="34" charset="-120"/>
               </a:rPr>
-              <a:t>Độ chính xác của NEO-M8N: 2,5 m CEP — một nửa số điểm định vị nằm trong 2,5 m</a:t>
+              <a:t>NEO-M8N: 2,5 m CEP — một nửa số điểm nằm trong vòng</a:t>
             </a:r>
             <a:endParaRPr lang="en-US" sz="1800" dirty="0"/>
           </a:p>
@@ -21959,7 +21981,7 @@
                 <a:ea typeface="微軟正黑體" pitchFamily="34" charset="-122"/>
                 <a:cs typeface="微軟正黑體" pitchFamily="34" charset="-120"/>
               </a:rPr>
-              <a:t>NEO-M8N 的精度 2.5 m CEP：一半的定位點在 2.5 m 內</a:t>
+              <a:t>NEO-M8N：2.5 m CEP，一半的定位點在圈內</a:t>
             </a:r>
             <a:endParaRPr lang="en-US" sz="1800" dirty="0"/>
           </a:p>
@@ -21973,7 +21995,7 @@
         </p:nvSpPr>
         <p:spPr>
           <a:xfrm>
-            <a:off x="4069080" y="1930409"/>
+            <a:off x="4434840" y="1665299"/>
             <a:ext cx="1060704" cy="441959"/>
           </a:xfrm>
           <a:prstGeom prst="roundRect">
@@ -21995,7 +22017,7 @@
         </p:nvSpPr>
         <p:spPr>
           <a:xfrm>
-            <a:off x="4123944" y="1966985"/>
+            <a:off x="4489704" y="1701875"/>
             <a:ext cx="950976" cy="387095"/>
           </a:xfrm>
           <a:prstGeom prst="rect">
@@ -22057,8 +22079,8 @@
         </p:nvSpPr>
         <p:spPr>
           <a:xfrm>
-            <a:off x="5276088" y="1930409"/>
-            <a:ext cx="3364992" cy="496823"/>
+            <a:off x="5641848" y="1665299"/>
+            <a:ext cx="2999232" cy="496823"/>
           </a:xfrm>
           <a:prstGeom prst="rect">
             <a:avLst/>
@@ -22085,7 +22107,7 @@
                 <a:ea typeface="Arial" pitchFamily="34" charset="-122"/>
                 <a:cs typeface="Arial" pitchFamily="34" charset="-120"/>
               </a:rPr>
-              <a:t>2,5 m (chú thích: CEP 50%, đứng yên 24 h)</a:t>
+              <a:t>2,5 m; có SBAS 2,0 m</a:t>
             </a:r>
             <a:endParaRPr lang="en-US" sz="1100" dirty="0"/>
           </a:p>
@@ -22105,7 +22127,7 @@
                 <a:ea typeface="微軟正黑體" pitchFamily="34" charset="-122"/>
                 <a:cs typeface="微軟正黑體" pitchFamily="34" charset="-120"/>
               </a:rPr>
-              <a:t>2.5 m（註腳：CEP 50%、靜止 24 小時）</a:t>
+              <a:t>2.5 m；有 SBAS 修正 2.0 m</a:t>
             </a:r>
             <a:endParaRPr lang="en-US" sz="1100" dirty="0"/>
           </a:p>
@@ -22119,7 +22141,7 @@
         </p:nvSpPr>
         <p:spPr>
           <a:xfrm>
-            <a:off x="4069080" y="2491240"/>
+            <a:off x="4434840" y="2226130"/>
             <a:ext cx="1060704" cy="441959"/>
           </a:xfrm>
           <a:prstGeom prst="roundRect">
@@ -22141,7 +22163,7 @@
         </p:nvSpPr>
         <p:spPr>
           <a:xfrm>
-            <a:off x="4123944" y="2527816"/>
+            <a:off x="4489704" y="2262706"/>
             <a:ext cx="950976" cy="387095"/>
           </a:xfrm>
           <a:prstGeom prst="rect">
@@ -22169,7 +22191,7 @@
                 <a:ea typeface="Arial" pitchFamily="34" charset="-122"/>
                 <a:cs typeface="Arial" pitchFamily="34" charset="-120"/>
               </a:rPr>
-              <a:t>Cập nhật</a:t>
+              <a:t>Chú thích 3</a:t>
             </a:r>
             <a:endParaRPr lang="en-US" sz="900" dirty="0"/>
           </a:p>
@@ -22189,7 +22211,7 @@
                 <a:ea typeface="微軟正黑體" pitchFamily="34" charset="-122"/>
                 <a:cs typeface="微軟正黑體" pitchFamily="34" charset="-120"/>
               </a:rPr>
-              <a:t>更新率</a:t>
+              <a:t>註腳 3</a:t>
             </a:r>
             <a:endParaRPr lang="en-US" sz="900" dirty="0"/>
           </a:p>
@@ -22203,8 +22225,8 @@
         </p:nvSpPr>
         <p:spPr>
           <a:xfrm>
-            <a:off x="5276088" y="2491240"/>
-            <a:ext cx="3364992" cy="496823"/>
+            <a:off x="5641848" y="2226130"/>
+            <a:ext cx="2999232" cy="635187"/>
           </a:xfrm>
           <a:prstGeom prst="rect">
             <a:avLst/>
@@ -22231,7 +22253,7 @@
                 <a:ea typeface="Arial" pitchFamily="34" charset="-122"/>
                 <a:cs typeface="Arial" pitchFamily="34" charset="-120"/>
               </a:rPr>
-              <a:t>5 Hz: mỗi 200 ms một vị trí</a:t>
+              <a:t>CEP 50% · đứng yên 24 h · −130 dBm · &gt; 6 vệ tinh</a:t>
             </a:r>
             <a:endParaRPr lang="en-US" sz="1100" dirty="0"/>
           </a:p>
@@ -22251,7 +22273,7 @@
                 <a:ea typeface="微軟正黑體" pitchFamily="34" charset="-122"/>
                 <a:cs typeface="微軟正黑體" pitchFamily="34" charset="-120"/>
               </a:rPr>
-              <a:t>5 Hz：每 200 毫秒一個位置</a:t>
+              <a:t>CEP 50%・靜止 24 小時・−130 dBm・6 顆以上衛星</a:t>
             </a:r>
             <a:endParaRPr lang="en-US" sz="1100" dirty="0"/>
           </a:p>
@@ -22265,12 +22287,12 @@
         </p:nvSpPr>
         <p:spPr>
           <a:xfrm>
-            <a:off x="4069080" y="3052071"/>
-            <a:ext cx="1060704" cy="441959"/>
+            <a:off x="4434840" y="2925325"/>
+            <a:ext cx="1060704" cy="575199"/>
           </a:xfrm>
           <a:prstGeom prst="roundRect">
             <a:avLst>
-              <a:gd name="adj" fmla="val 12414"/>
+              <a:gd name="adj" fmla="val 9538"/>
             </a:avLst>
           </a:prstGeom>
           <a:solidFill>
@@ -22287,8 +22309,8 @@
         </p:nvSpPr>
         <p:spPr>
           <a:xfrm>
-            <a:off x="4123944" y="3088647"/>
-            <a:ext cx="950976" cy="387095"/>
+            <a:off x="4489704" y="2961901"/>
+            <a:ext cx="950976" cy="520335"/>
           </a:xfrm>
           <a:prstGeom prst="rect">
             <a:avLst/>
@@ -22315,7 +22337,7 @@
                 <a:ea typeface="Arial" pitchFamily="34" charset="-122"/>
                 <a:cs typeface="Arial" pitchFamily="34" charset="-120"/>
               </a:rPr>
-              <a:t>Khởi động</a:t>
+              <a:t>Cập nhật · khởi động</a:t>
             </a:r>
             <a:endParaRPr lang="en-US" sz="900" dirty="0"/>
           </a:p>
@@ -22335,7 +22357,7 @@
                 <a:ea typeface="微軟正黑體" pitchFamily="34" charset="-122"/>
                 <a:cs typeface="微軟正黑體" pitchFamily="34" charset="-120"/>
               </a:rPr>
-              <a:t>開機</a:t>
+              <a:t>更新・開機</a:t>
             </a:r>
             <a:endParaRPr lang="en-US" sz="900" dirty="0"/>
           </a:p>
@@ -22349,8 +22371,8 @@
         </p:nvSpPr>
         <p:spPr>
           <a:xfrm>
-            <a:off x="5276088" y="3052071"/>
-            <a:ext cx="3364992" cy="496823"/>
+            <a:off x="5641848" y="2925325"/>
+            <a:ext cx="2999232" cy="630063"/>
           </a:xfrm>
           <a:prstGeom prst="rect">
             <a:avLst/>
@@ -22377,7 +22399,7 @@
                 <a:ea typeface="Arial" pitchFamily="34" charset="-122"/>
                 <a:cs typeface="Arial" pitchFamily="34" charset="-120"/>
               </a:rPr>
-              <a:t>Cold start 26 s</a:t>
+              <a:t>5 Hz; khởi động lạnh 26 s</a:t>
             </a:r>
             <a:endParaRPr lang="en-US" sz="1100" dirty="0"/>
           </a:p>
@@ -22397,7 +22419,7 @@
                 <a:ea typeface="微軟正黑體" pitchFamily="34" charset="-122"/>
                 <a:cs typeface="微軟正黑體" pitchFamily="34" charset="-120"/>
               </a:rPr>
-              <a:t>冷開機 26 秒才有第一個位置</a:t>
+              <a:t>5 Hz；冷開機 26 秒</a:t>
             </a:r>
             <a:endParaRPr lang="en-US" sz="1100" dirty="0"/>
           </a:p>
@@ -22419,8 +22441,8 @@
         </p:blipFill>
         <p:spPr>
           <a:xfrm>
-            <a:off x="1459966" y="2227057"/>
-            <a:ext cx="1377748" cy="1143000"/>
+            <a:off x="1655493" y="2517297"/>
+            <a:ext cx="1352453" cy="1122015"/>
           </a:xfrm>
           <a:prstGeom prst="rect">
             <a:avLst/>
@@ -22435,8 +22457,8 @@
         </p:nvSpPr>
         <p:spPr>
           <a:xfrm>
-            <a:off x="502920" y="3406633"/>
-            <a:ext cx="3291840" cy="164592"/>
+            <a:off x="502920" y="3675888"/>
+            <a:ext cx="3657600" cy="164592"/>
           </a:xfrm>
           <a:prstGeom prst="rect">
             <a:avLst/>

--- a/第六週(10-15)/第六週_第2節_簡報.pptx
+++ b/第六週(10-15)/第六週_第2節_簡報.pptx
@@ -7444,11 +7444,11 @@
                 <a:spcPts val="0"/>
               </a:spcBef>
               <a:spcAft>
-                <a:spcPts val="150"/>
+                <a:spcPts val="142"/>
               </a:spcAft>
             </a:pPr>
             <a:r>
-              <a:rPr sz="900" lang="zh-TW" dirty="0">
+              <a:rPr sz="850" lang="zh-TW" dirty="0">
                 <a:solidFill>
                   <a:srgbClr val="000000"/>
                 </a:solidFill>
@@ -7459,7 +7459,7 @@
               <a:t>第一顆，u-blox 的 </a:t>
             </a:r>
             <a:r>
-              <a:rPr sz="900" b="1" lang="zh-TW" dirty="0">
+              <a:rPr sz="850" b="1" lang="zh-TW" dirty="0">
                 <a:solidFill>
                   <a:srgbClr val="000000"/>
                 </a:solidFill>
@@ -7470,7 +7470,7 @@
               <a:t>NEO-M8N</a:t>
             </a:r>
             <a:r>
-              <a:rPr sz="900" lang="zh-TW" dirty="0">
+              <a:rPr sz="850" lang="zh-TW" dirty="0">
                 <a:solidFill>
                   <a:srgbClr val="000000"/>
                 </a:solidFill>
@@ -7488,11 +7488,11 @@
                 <a:spcPts val="0"/>
               </a:spcBef>
               <a:spcAft>
-                <a:spcPts val="150"/>
+                <a:spcPts val="142"/>
               </a:spcAft>
             </a:pPr>
             <a:r>
-              <a:rPr sz="900" b="1" lang="zh-TW" dirty="0">
+              <a:rPr sz="850" b="1" lang="zh-TW" dirty="0">
                 <a:solidFill>
                   <a:srgbClr val="000000"/>
                 </a:solidFill>
@@ -7503,15 +7503,37 @@
               <a:t>Horizontal position accuracy，水平精度，2.5 公尺。</a:t>
             </a:r>
             <a:r>
-              <a:rPr sz="900" lang="zh-TW" dirty="0">
-                <a:solidFill>
-                  <a:srgbClr val="000000"/>
-                </a:solidFill>
-                <a:latin typeface="Arial Unicode MS"/>
-                <a:ea typeface="Arial Unicode MS"/>
-                <a:cs typeface="Arial Unicode MS"/>
-              </a:rPr>
-              <a:t>同時收 GPS 和 GLONASS 的時候。旁邊有一欄 With SBAS，2.0 公尺——SBAS 是另外一套衛星送來的修正，台灣和越南上空是日本的那一套，收得到的話好一點。
+              <a:rPr sz="850" lang="zh-TW" dirty="0">
+                <a:solidFill>
+                  <a:srgbClr val="000000"/>
+                </a:solidFill>
+                <a:latin typeface="Arial Unicode MS"/>
+                <a:ea typeface="Arial Unicode MS"/>
+                <a:cs typeface="Arial Unicode MS"/>
+              </a:rPr>
+              <a:t>同時收 GPS 和 GLONASS 的時候。旁邊有一欄 With SBAS，2.0 公尺。SBAS 是</a:t>
+            </a:r>
+            <a:r>
+              <a:rPr sz="850" b="1" lang="zh-TW" dirty="0">
+                <a:solidFill>
+                  <a:srgbClr val="000000"/>
+                </a:solidFill>
+                <a:latin typeface="Arial Unicode MS"/>
+                <a:ea typeface="Arial Unicode MS"/>
+                <a:cs typeface="Arial Unicode MS"/>
+              </a:rPr>
+              <a:t>衛星增強系統</a:t>
+            </a:r>
+            <a:r>
+              <a:rPr sz="850" lang="zh-TW" dirty="0">
+                <a:solidFill>
+                  <a:srgbClr val="000000"/>
+                </a:solidFill>
+                <a:latin typeface="Arial Unicode MS"/>
+                <a:ea typeface="Arial Unicode MS"/>
+                <a:cs typeface="Arial Unicode MS"/>
+              </a:rPr>
+              <a:t>：一國在地面設很多監測站，量出 GPS 現在差多少，算好修正，再從一顆停在赤道上空的衛星，用跟 GPS 同一個頻率廣播下來。接收機不用接網路，也不用付錢，收得到就準一點。美國有 WAAS、歐洲有 EGNOS、日本有 MSAS、印度有 GAGAN、中國有北斗的 BDSBAS。可是每一套的修正，是替自己國家那一區算的。台灣和越南不在任何一套的主要服務範圍裡，收得到鄰國的訊號，效果有限。就像收音機的路況報導：免費、一打開就有，可是播的是別的城市的路況。所以本課判讀用沒有 SBAS 的 2.5 公尺。
 </a:t>
             </a:r>
           </a:p>
@@ -7521,11 +7543,11 @@
                 <a:spcPts val="0"/>
               </a:spcBef>
               <a:spcAft>
-                <a:spcPts val="150"/>
+                <a:spcPts val="142"/>
               </a:spcAft>
             </a:pPr>
             <a:r>
-              <a:rPr sz="900" lang="zh-TW" dirty="0">
+              <a:rPr sz="850" lang="zh-TW" dirty="0">
                 <a:solidFill>
                   <a:srgbClr val="000000"/>
                 </a:solidFill>
@@ -7536,7 +7558,7 @@
               <a:t>現在請各位看那個數字右上角的小 3，再看圖下面淡黃色那一行，就是</a:t>
             </a:r>
             <a:r>
-              <a:rPr sz="900" b="1" lang="zh-TW" dirty="0">
+              <a:rPr sz="850" b="1" lang="zh-TW" dirty="0">
                 <a:solidFill>
                   <a:srgbClr val="000000"/>
                 </a:solidFill>
@@ -7547,7 +7569,7 @@
               <a:t>註腳 3</a:t>
             </a:r>
             <a:r>
-              <a:rPr sz="900" lang="zh-TW" dirty="0">
+              <a:rPr sz="850" lang="zh-TW" dirty="0">
                 <a:solidFill>
                   <a:srgbClr val="000000"/>
                 </a:solidFill>
@@ -7558,7 +7580,7 @@
               <a:t>，右邊第二條把它翻成中文：</a:t>
             </a:r>
             <a:r>
-              <a:rPr sz="900" b="1" lang="zh-TW" dirty="0">
+              <a:rPr sz="850" b="1" lang="zh-TW" dirty="0">
                 <a:solidFill>
                   <a:srgbClr val="000000"/>
                 </a:solidFill>
@@ -7569,7 +7591,7 @@
               <a:t>CEP, 50%, 24 hours static, −130 dBm, more than 6 SVs</a:t>
             </a:r>
             <a:r>
-              <a:rPr sz="900" lang="zh-TW" dirty="0">
+              <a:rPr sz="850" lang="zh-TW" dirty="0">
                 <a:solidFill>
                   <a:srgbClr val="000000"/>
                 </a:solidFill>
@@ -7587,11 +7609,11 @@
                 <a:spcPts val="0"/>
               </a:spcBef>
               <a:spcAft>
-                <a:spcPts val="150"/>
+                <a:spcPts val="142"/>
               </a:spcAft>
             </a:pPr>
             <a:r>
-              <a:rPr sz="900" lang="zh-TW" dirty="0">
+              <a:rPr sz="850" lang="zh-TW" dirty="0">
                 <a:solidFill>
                   <a:srgbClr val="000000"/>
                 </a:solidFill>
@@ -7602,7 +7624,7 @@
               <a:t>一個一個講。</a:t>
             </a:r>
             <a:r>
-              <a:rPr sz="900" b="1" lang="zh-TW" dirty="0">
+              <a:rPr sz="850" b="1" lang="zh-TW" dirty="0">
                 <a:solidFill>
                   <a:srgbClr val="000000"/>
                 </a:solidFill>
@@ -7613,7 +7635,7 @@
               <a:t>CEP</a:t>
             </a:r>
             <a:r>
-              <a:rPr sz="900" lang="zh-TW" dirty="0">
+              <a:rPr sz="850" lang="zh-TW" dirty="0">
                 <a:solidFill>
                   <a:srgbClr val="000000"/>
                 </a:solidFill>
@@ -7624,7 +7646,7 @@
               <a:t> 是圓機率誤差，</a:t>
             </a:r>
             <a:r>
-              <a:rPr sz="900" b="1" lang="zh-TW" dirty="0">
+              <a:rPr sz="850" b="1" lang="zh-TW" dirty="0">
                 <a:solidFill>
                   <a:srgbClr val="000000"/>
                 </a:solidFill>
@@ -7635,7 +7657,7 @@
               <a:t>50%</a:t>
             </a:r>
             <a:r>
-              <a:rPr sz="900" lang="zh-TW" dirty="0">
+              <a:rPr sz="850" lang="zh-TW" dirty="0">
                 <a:solidFill>
                   <a:srgbClr val="000000"/>
                 </a:solidFill>
@@ -7653,11 +7675,11 @@
                 <a:spcPts val="0"/>
               </a:spcBef>
               <a:spcAft>
-                <a:spcPts val="150"/>
+                <a:spcPts val="142"/>
               </a:spcAft>
             </a:pPr>
             <a:r>
-              <a:rPr sz="900" lang="zh-TW" dirty="0">
+              <a:rPr sz="850" lang="zh-TW" dirty="0">
                 <a:solidFill>
                   <a:srgbClr val="000000"/>
                 </a:solidFill>
@@ -7668,7 +7690,7 @@
               <a:t>聽起來好像一半都不準？不是。圈外那一半，大多只是稍微出界。想成射飛鏢：朝靶心射一百支，五十支落在 2.5 公尺的圈裡；把圈畫大一倍，五公尺，大約九十五支都在裡面。偏得很遠的只有少數幾支，通常是大樓反射那種，第九張講。所以看到 CEP 有一個簡單的換算：</a:t>
             </a:r>
             <a:r>
-              <a:rPr sz="900" b="1" lang="zh-TW" dirty="0">
+              <a:rPr sz="850" b="1" lang="zh-TW" dirty="0">
                 <a:solidFill>
                   <a:srgbClr val="000000"/>
                 </a:solidFill>
@@ -7679,7 +7701,7 @@
               <a:t>乘以二，大約就是九成五的範圍</a:t>
             </a:r>
             <a:r>
-              <a:rPr sz="900" lang="zh-TW" dirty="0">
+              <a:rPr sz="850" lang="zh-TW" dirty="0">
                 <a:solidFill>
                   <a:srgbClr val="000000"/>
                 </a:solidFill>
@@ -7697,11 +7719,11 @@
                 <a:spcPts val="0"/>
               </a:spcBef>
               <a:spcAft>
-                <a:spcPts val="150"/>
+                <a:spcPts val="142"/>
               </a:spcAft>
             </a:pPr>
             <a:r>
-              <a:rPr sz="900" lang="zh-TW" dirty="0">
+              <a:rPr sz="850" lang="zh-TW" dirty="0">
                 <a:solidFill>
                   <a:srgbClr val="000000"/>
                 </a:solidFill>
@@ -7719,11 +7741,11 @@
                 <a:spcPts val="0"/>
               </a:spcBef>
               <a:spcAft>
-                <a:spcPts val="150"/>
+                <a:spcPts val="142"/>
               </a:spcAft>
             </a:pPr>
             <a:r>
-              <a:rPr sz="900" lang="zh-TW" dirty="0">
+              <a:rPr sz="850" lang="zh-TW" dirty="0">
                 <a:solidFill>
                   <a:srgbClr val="000000"/>
                 </a:solidFill>
@@ -7734,7 +7756,7 @@
               <a:t>各位還記得上週 OS1 那行 </a:t>
             </a:r>
             <a:r>
-              <a:rPr sz="900" b="1" lang="zh-TW" dirty="0">
+              <a:rPr sz="850" b="1" lang="zh-TW" dirty="0">
                 <a:solidFill>
                   <a:srgbClr val="000000"/>
                 </a:solidFill>
@@ -7745,7 +7767,7 @@
               <a:t>&gt;90% detection probability</a:t>
             </a:r>
             <a:r>
-              <a:rPr sz="900" lang="zh-TW" dirty="0">
+              <a:rPr sz="850" lang="zh-TW" dirty="0">
                 <a:solidFill>
                   <a:srgbClr val="000000"/>
                 </a:solidFill>
@@ -7763,11 +7785,11 @@
                 <a:spcPts val="0"/>
               </a:spcBef>
               <a:spcAft>
-                <a:spcPts val="150"/>
+                <a:spcPts val="142"/>
               </a:spcAft>
             </a:pPr>
             <a:r>
-              <a:rPr sz="900" b="1" lang="zh-TW" dirty="0">
+              <a:rPr sz="850" b="1" lang="zh-TW" dirty="0">
                 <a:solidFill>
                   <a:srgbClr val="000000"/>
                 </a:solidFill>
@@ -7778,7 +7800,7 @@
               <a:t>24 hours static</a:t>
             </a:r>
             <a:r>
-              <a:rPr sz="900" lang="zh-TW" dirty="0">
+              <a:rPr sz="850" lang="zh-TW" dirty="0">
                 <a:solidFill>
                   <a:srgbClr val="000000"/>
                 </a:solidFill>
@@ -7789,7 +7811,7 @@
               <a:t>：接收機放著不動，量二十四小時。你在河內的路上以時速四十在跑，條件比這個差。</a:t>
             </a:r>
             <a:r>
-              <a:rPr sz="900" b="1" lang="zh-TW" dirty="0">
+              <a:rPr sz="850" b="1" lang="zh-TW" dirty="0">
                 <a:solidFill>
                   <a:srgbClr val="000000"/>
                 </a:solidFill>
@@ -7800,7 +7822,7 @@
               <a:t>−130 dBm</a:t>
             </a:r>
             <a:r>
-              <a:rPr sz="900" lang="zh-TW" dirty="0">
+              <a:rPr sz="850" lang="zh-TW" dirty="0">
                 <a:solidFill>
                   <a:srgbClr val="000000"/>
                 </a:solidFill>
@@ -7811,7 +7833,7 @@
               <a:t>：衛星訊號的強度，大約是天空開闊時收到的正常強度；樹下、窄巷裡會更弱。</a:t>
             </a:r>
             <a:r>
-              <a:rPr sz="900" b="1" lang="zh-TW" dirty="0">
+              <a:rPr sz="850" b="1" lang="zh-TW" dirty="0">
                 <a:solidFill>
                   <a:srgbClr val="000000"/>
                 </a:solidFill>
@@ -7822,7 +7844,7 @@
               <a:t>more than 6 SVs</a:t>
             </a:r>
             <a:r>
-              <a:rPr sz="900" lang="zh-TW" dirty="0">
+              <a:rPr sz="850" lang="zh-TW" dirty="0">
                 <a:solidFill>
                   <a:srgbClr val="000000"/>
                 </a:solidFill>
@@ -7840,11 +7862,11 @@
                 <a:spcPts val="0"/>
               </a:spcBef>
               <a:spcAft>
-                <a:spcPts val="150"/>
+                <a:spcPts val="142"/>
               </a:spcAft>
             </a:pPr>
             <a:r>
-              <a:rPr sz="900" lang="zh-TW" dirty="0">
+              <a:rPr sz="850" lang="zh-TW" dirty="0">
                 <a:solidFill>
                   <a:srgbClr val="000000"/>
                 </a:solidFill>
@@ -7855,7 +7877,7 @@
               <a:t>往下，</a:t>
             </a:r>
             <a:r>
-              <a:rPr sz="900" b="1" lang="zh-TW" dirty="0">
+              <a:rPr sz="850" b="1" lang="zh-TW" dirty="0">
                 <a:solidFill>
                   <a:srgbClr val="000000"/>
                 </a:solidFill>
@@ -7866,7 +7888,7 @@
               <a:t>更新率 5 Hz</a:t>
             </a:r>
             <a:r>
-              <a:rPr sz="900" lang="zh-TW" dirty="0">
+              <a:rPr sz="850" lang="zh-TW" dirty="0">
                 <a:solidFill>
                   <a:srgbClr val="000000"/>
                 </a:solidFill>
@@ -7884,11 +7906,11 @@
                 <a:spcPts val="0"/>
               </a:spcBef>
               <a:spcAft>
-                <a:spcPts val="150"/>
+                <a:spcPts val="142"/>
               </a:spcAft>
             </a:pPr>
             <a:r>
-              <a:rPr sz="900" b="1" lang="zh-TW" dirty="0">
+              <a:rPr sz="850" b="1" lang="zh-TW" dirty="0">
                 <a:solidFill>
                   <a:srgbClr val="000000"/>
                 </a:solidFill>
@@ -7899,7 +7921,7 @@
               <a:t>Time-To-First-Fix，Cold start 26 秒。</a:t>
             </a:r>
             <a:r>
-              <a:rPr sz="900" lang="zh-TW" dirty="0">
+              <a:rPr sz="850" lang="zh-TW" dirty="0">
                 <a:solidFill>
                   <a:srgbClr val="000000"/>
                 </a:solidFill>
@@ -7917,11 +7939,11 @@
                 <a:spcPts val="0"/>
               </a:spcBef>
               <a:spcAft>
-                <a:spcPts val="150"/>
+                <a:spcPts val="142"/>
               </a:spcAft>
             </a:pPr>
             <a:r>
-              <a:rPr sz="900" lang="zh-TW" dirty="0">
+              <a:rPr sz="850" lang="zh-TW" dirty="0">
                 <a:solidFill>
                   <a:srgbClr val="000000"/>
                 </a:solidFill>
@@ -8248,7 +8270,7 @@
                 <a:ea typeface="Arial Unicode MS"/>
                 <a:cs typeface="Arial Unicode MS"/>
               </a:rPr>
-              <a:t>：上一張講過，另一套衛星送來的修正，收得到就再好一點。
+              <a:t>：上一張講過的衛星增強系統。台灣和越南不在它的主要服務範圍，所以本課不算它。
 </a:t>
             </a:r>
           </a:p>

--- a/第六週(10-15)/第六週_第2節_簡報.pptx
+++ b/第六週(10-15)/第六週_第2節_簡報.pptx
@@ -1878,11 +1878,11 @@
                 <a:spcPts val="0"/>
               </a:spcBef>
               <a:spcAft>
-                <a:spcPts val="192"/>
+                <a:spcPts val="183"/>
               </a:spcAft>
             </a:pPr>
             <a:r>
-              <a:rPr sz="1150" lang="zh-TW" dirty="0">
+              <a:rPr sz="1100" lang="zh-TW" dirty="0">
                 <a:solidFill>
                   <a:srgbClr val="000000"/>
                 </a:solidFill>
@@ -1893,7 +1893,7 @@
               <a:t>第二顆，Analog Devices 的 </a:t>
             </a:r>
             <a:r>
-              <a:rPr sz="1150" b="1" lang="zh-TW" dirty="0">
+              <a:rPr sz="1100" b="1" lang="zh-TW" dirty="0">
                 <a:solidFill>
                   <a:srgbClr val="000000"/>
                 </a:solidFill>
@@ -1904,7 +1904,7 @@
               <a:t>ADIS16470</a:t>
             </a:r>
             <a:r>
-              <a:rPr sz="1150" lang="zh-TW" dirty="0">
+              <a:rPr sz="1100" lang="zh-TW" dirty="0">
                 <a:solidFill>
                   <a:srgbClr val="000000"/>
                 </a:solidFill>
@@ -1922,11 +1922,11 @@
                 <a:spcPts val="0"/>
               </a:spcBef>
               <a:spcAft>
-                <a:spcPts val="192"/>
+                <a:spcPts val="183"/>
               </a:spcAft>
             </a:pPr>
             <a:r>
-              <a:rPr sz="1150" lang="zh-TW" dirty="0">
+              <a:rPr sz="1100" lang="zh-TW" dirty="0">
                 <a:solidFill>
                   <a:srgbClr val="000000"/>
                 </a:solidFill>
@@ -1937,7 +1937,7 @@
               <a:t>從上往下。</a:t>
             </a:r>
             <a:r>
-              <a:rPr sz="1150" b="1" lang="zh-TW" dirty="0">
+              <a:rPr sz="1100" b="1" lang="zh-TW" dirty="0">
                 <a:solidFill>
                   <a:srgbClr val="000000"/>
                 </a:solidFill>
@@ -1948,7 +1948,7 @@
               <a:t>Dynamic Range，±2000 °/sec。</a:t>
             </a:r>
             <a:r>
-              <a:rPr sz="1150" lang="zh-TW" dirty="0">
+              <a:rPr sz="1100" lang="zh-TW" dirty="0">
                 <a:solidFill>
                   <a:srgbClr val="000000"/>
                 </a:solidFill>
@@ -1959,7 +1959,7 @@
               <a:t>各位可能會想：上週相機也有動態範圍，那是同一件事嗎？</a:t>
             </a:r>
             <a:r>
-              <a:rPr sz="1150" b="1" lang="zh-TW" dirty="0">
+              <a:rPr sz="1100" b="1" lang="zh-TW" dirty="0">
                 <a:solidFill>
                   <a:srgbClr val="000000"/>
                 </a:solidFill>
@@ -1970,7 +1970,7 @@
               <a:t>不是。</a:t>
             </a:r>
             <a:r>
-              <a:rPr sz="1150" lang="zh-TW" dirty="0">
+              <a:rPr sz="1100" lang="zh-TW" dirty="0">
                 <a:solidFill>
                   <a:srgbClr val="000000"/>
                 </a:solidFill>
@@ -1981,7 +1981,7 @@
               <a:t>上週相機的動態範圍，講的是最亮和最暗差多少倍，單位是 dB，逆光、隧道口就看它。這裡的 Dynamic Range，看單位是 °/sec，講的是最快量得到轉多快，就是剛剛 TDK 那張表叫 </a:t>
             </a:r>
             <a:r>
-              <a:rPr sz="1150" b="1" lang="zh-TW" dirty="0">
+              <a:rPr sz="1100" b="1" lang="zh-TW" dirty="0">
                 <a:solidFill>
                   <a:srgbClr val="000000"/>
                 </a:solidFill>
@@ -1992,7 +1992,7 @@
               <a:t>Full-Scale Range</a:t>
             </a:r>
             <a:r>
-              <a:rPr sz="1150" lang="zh-TW" dirty="0">
+              <a:rPr sz="1100" lang="zh-TW" dirty="0">
                 <a:solidFill>
                   <a:srgbClr val="000000"/>
                 </a:solidFill>
@@ -2003,7 +2003,7 @@
               <a:t> 的那一行，量程。兩家公司用不同的名字講同一件事；同一個英文詞，放在不同感測器上，意思也可能不一樣。所以讀規格表，</a:t>
             </a:r>
             <a:r>
-              <a:rPr sz="1150" b="1" lang="zh-TW" dirty="0">
+              <a:rPr sz="1100" b="1" lang="zh-TW" dirty="0">
                 <a:solidFill>
                   <a:srgbClr val="000000"/>
                 </a:solidFill>
@@ -2014,7 +2014,7 @@
               <a:t>先看單位</a:t>
             </a:r>
             <a:r>
-              <a:rPr sz="1150" lang="zh-TW" dirty="0">
+              <a:rPr sz="1100" lang="zh-TW" dirty="0">
                 <a:solidFill>
                   <a:srgbClr val="000000"/>
                 </a:solidFill>
@@ -2032,11 +2032,11 @@
                 <a:spcPts val="0"/>
               </a:spcBef>
               <a:spcAft>
-                <a:spcPts val="192"/>
+                <a:spcPts val="183"/>
               </a:spcAft>
             </a:pPr>
             <a:r>
-              <a:rPr sz="1150" lang="zh-TW" dirty="0">
+              <a:rPr sz="1100" lang="zh-TW" dirty="0">
                 <a:solidFill>
                   <a:srgbClr val="000000"/>
                 </a:solidFill>
@@ -2054,11 +2054,11 @@
                 <a:spcPts val="0"/>
               </a:spcBef>
               <a:spcAft>
-                <a:spcPts val="192"/>
+                <a:spcPts val="183"/>
               </a:spcAft>
             </a:pPr>
             <a:r>
-              <a:rPr sz="1150" lang="zh-TW" dirty="0">
+              <a:rPr sz="1100" lang="zh-TW" dirty="0">
                 <a:solidFill>
                   <a:srgbClr val="000000"/>
                 </a:solidFill>
@@ -2069,7 +2069,7 @@
               <a:t>往下看 </a:t>
             </a:r>
             <a:r>
-              <a:rPr sz="1150" b="1" lang="zh-TW" dirty="0">
+              <a:rPr sz="1100" b="1" lang="zh-TW" dirty="0">
                 <a:solidFill>
                   <a:srgbClr val="000000"/>
                 </a:solidFill>
@@ -2080,7 +2080,7 @@
               <a:t>Bias</a:t>
             </a:r>
             <a:r>
-              <a:rPr sz="1150" lang="zh-TW" dirty="0">
+              <a:rPr sz="1100" lang="zh-TW" dirty="0">
                 <a:solidFill>
                   <a:srgbClr val="000000"/>
                 </a:solidFill>
@@ -2091,7 +2091,7 @@
               <a:t> 那一塊，前兩列就是剛剛手機級找不到的。</a:t>
             </a:r>
             <a:r>
-              <a:rPr sz="1150" b="1" lang="zh-TW" dirty="0">
+              <a:rPr sz="1100" b="1" lang="zh-TW" dirty="0">
                 <a:solidFill>
                   <a:srgbClr val="000000"/>
                 </a:solidFill>
@@ -2102,18 +2102,18 @@
               <a:t>In Run Stability，8 °/hr</a:t>
             </a:r>
             <a:r>
-              <a:rPr sz="1150" lang="zh-TW" dirty="0">
-                <a:solidFill>
-                  <a:srgbClr val="000000"/>
-                </a:solidFill>
-                <a:latin typeface="Arial Unicode MS"/>
-                <a:ea typeface="Arial Unicode MS"/>
-                <a:cs typeface="Arial Unicode MS"/>
-              </a:rPr>
-              <a:t>，後面寫 1 σ。意思是這顆靜止放著，一個小時偏差只飄八度，一分鐘零點一三度。用手錶來想：便宜的錶一天可能差一分鐘，好的錶一個月才差幾秒。偏差穩定度講的就是這種「走久了會差多少」。</a:t>
-            </a:r>
-            <a:r>
-              <a:rPr sz="1150" b="1" lang="zh-TW" dirty="0">
+              <a:rPr sz="1100" lang="zh-TW" dirty="0">
+                <a:solidFill>
+                  <a:srgbClr val="000000"/>
+                </a:solidFill>
+                <a:latin typeface="Arial Unicode MS"/>
+                <a:ea typeface="Arial Unicode MS"/>
+                <a:cs typeface="Arial Unicode MS"/>
+              </a:rPr>
+              <a:t>，後面寫 1 σ。σ 是希臘字母，唸「西格瑪」，越南文唸 xích-ma。1 σ 是統計上的一個標準差，意思是大約七成的時候落在這個數字以內。跟上一張的 CEP 50%、上週光達的 &gt;90% 一樣，是機率的寫法，不是保證。8 °/hr 的意思是這顆靜止放著，一個小時偏差只飄八度，一分鐘零點一三度。用手錶來想：便宜的錶一天可能差一分鐘，好的錶一個月才差幾秒。偏差穩定度講的就是這種「走久了會差多少」。</a:t>
+            </a:r>
+            <a:r>
+              <a:rPr sz="1100" b="1" lang="zh-TW" dirty="0">
                 <a:solidFill>
                   <a:srgbClr val="000000"/>
                 </a:solidFill>
@@ -2124,7 +2124,7 @@
               <a:t>Angular Random Walk，0.34 °/√hr</a:t>
             </a:r>
             <a:r>
-              <a:rPr sz="1150" lang="zh-TW" dirty="0">
+              <a:rPr sz="1100" lang="zh-TW" dirty="0">
                 <a:solidFill>
                   <a:srgbClr val="000000"/>
                 </a:solidFill>
@@ -2142,11 +2142,11 @@
                 <a:spcPts val="0"/>
               </a:spcBef>
               <a:spcAft>
-                <a:spcPts val="192"/>
+                <a:spcPts val="183"/>
               </a:spcAft>
             </a:pPr>
             <a:r>
-              <a:rPr sz="1150" lang="zh-TW" dirty="0">
+              <a:rPr sz="1100" lang="zh-TW" dirty="0">
                 <a:solidFill>
                   <a:srgbClr val="000000"/>
                 </a:solidFill>
@@ -2157,7 +2157,7 @@
               <a:t>再看 </a:t>
             </a:r>
             <a:r>
-              <a:rPr sz="1150" b="1" lang="zh-TW" dirty="0">
+              <a:rPr sz="1100" b="1" lang="zh-TW" dirty="0">
                 <a:solidFill>
                   <a:srgbClr val="000000"/>
                 </a:solidFill>
@@ -2168,7 +2168,7 @@
               <a:t>Rate Noise Density，0.008</a:t>
             </a:r>
             <a:r>
-              <a:rPr sz="1150" lang="zh-TW" dirty="0">
+              <a:rPr sz="1100" lang="zh-TW" dirty="0">
                 <a:solidFill>
                   <a:srgbClr val="000000"/>
                 </a:solidFill>
@@ -2186,11 +2186,11 @@
                 <a:spcPts val="0"/>
               </a:spcBef>
               <a:spcAft>
-                <a:spcPts val="192"/>
+                <a:spcPts val="183"/>
               </a:spcAft>
             </a:pPr>
             <a:r>
-              <a:rPr sz="1150" lang="zh-TW" dirty="0">
+              <a:rPr sz="1100" lang="zh-TW" dirty="0">
                 <a:solidFill>
                   <a:srgbClr val="000000"/>
                 </a:solidFill>
@@ -2201,7 +2201,7 @@
               <a:t>翻回規格書第一頁，Applications 那一欄寫的是 Navigation、</a:t>
             </a:r>
             <a:r>
-              <a:rPr sz="1150" b="1" lang="zh-TW" dirty="0">
+              <a:rPr sz="1100" b="1" lang="zh-TW" dirty="0">
                 <a:solidFill>
                   <a:srgbClr val="000000"/>
                 </a:solidFill>
@@ -2212,7 +2212,7 @@
               <a:t>Unmanned and autonomous vehicles</a:t>
             </a:r>
             <a:r>
-              <a:rPr sz="1150" lang="zh-TW" dirty="0">
+              <a:rPr sz="1100" lang="zh-TW" dirty="0">
                 <a:solidFill>
                   <a:srgbClr val="000000"/>
                 </a:solidFill>
@@ -2230,11 +2230,11 @@
                 <a:spcPts val="0"/>
               </a:spcBef>
               <a:spcAft>
-                <a:spcPts val="192"/>
+                <a:spcPts val="183"/>
               </a:spcAft>
             </a:pPr>
             <a:r>
-              <a:rPr sz="1150" lang="zh-TW" dirty="0">
+              <a:rPr sz="1100" lang="zh-TW" dirty="0">
                 <a:solidFill>
                   <a:srgbClr val="000000"/>
                 </a:solidFill>

--- a/第六週(10-15)/第六週_第2節_簡報.pptx
+++ b/第六週(10-15)/第六週_第2節_簡報.pptx
@@ -1878,11 +1878,11 @@
                 <a:spcPts val="0"/>
               </a:spcBef>
               <a:spcAft>
-                <a:spcPts val="183"/>
+                <a:spcPts val="158"/>
               </a:spcAft>
             </a:pPr>
             <a:r>
-              <a:rPr sz="1100" lang="zh-TW" dirty="0">
+              <a:rPr sz="950" lang="zh-TW" dirty="0">
                 <a:solidFill>
                   <a:srgbClr val="000000"/>
                 </a:solidFill>
@@ -1893,7 +1893,7 @@
               <a:t>第二顆，Analog Devices 的 </a:t>
             </a:r>
             <a:r>
-              <a:rPr sz="1100" b="1" lang="zh-TW" dirty="0">
+              <a:rPr sz="950" b="1" lang="zh-TW" dirty="0">
                 <a:solidFill>
                   <a:srgbClr val="000000"/>
                 </a:solidFill>
@@ -1904,7 +1904,7 @@
               <a:t>ADIS16470</a:t>
             </a:r>
             <a:r>
-              <a:rPr sz="1100" lang="zh-TW" dirty="0">
+              <a:rPr sz="950" lang="zh-TW" dirty="0">
                 <a:solidFill>
                   <a:srgbClr val="000000"/>
                 </a:solidFill>
@@ -1922,11 +1922,11 @@
                 <a:spcPts val="0"/>
               </a:spcBef>
               <a:spcAft>
-                <a:spcPts val="183"/>
+                <a:spcPts val="158"/>
               </a:spcAft>
             </a:pPr>
             <a:r>
-              <a:rPr sz="1100" lang="zh-TW" dirty="0">
+              <a:rPr sz="950" lang="zh-TW" dirty="0">
                 <a:solidFill>
                   <a:srgbClr val="000000"/>
                 </a:solidFill>
@@ -1937,7 +1937,7 @@
               <a:t>從上往下。</a:t>
             </a:r>
             <a:r>
-              <a:rPr sz="1100" b="1" lang="zh-TW" dirty="0">
+              <a:rPr sz="950" b="1" lang="zh-TW" dirty="0">
                 <a:solidFill>
                   <a:srgbClr val="000000"/>
                 </a:solidFill>
@@ -1948,7 +1948,7 @@
               <a:t>Dynamic Range，±2000 °/sec。</a:t>
             </a:r>
             <a:r>
-              <a:rPr sz="1100" lang="zh-TW" dirty="0">
+              <a:rPr sz="950" lang="zh-TW" dirty="0">
                 <a:solidFill>
                   <a:srgbClr val="000000"/>
                 </a:solidFill>
@@ -1959,7 +1959,7 @@
               <a:t>各位可能會想：上週相機也有動態範圍，那是同一件事嗎？</a:t>
             </a:r>
             <a:r>
-              <a:rPr sz="1100" b="1" lang="zh-TW" dirty="0">
+              <a:rPr sz="950" b="1" lang="zh-TW" dirty="0">
                 <a:solidFill>
                   <a:srgbClr val="000000"/>
                 </a:solidFill>
@@ -1970,7 +1970,7 @@
               <a:t>不是。</a:t>
             </a:r>
             <a:r>
-              <a:rPr sz="1100" lang="zh-TW" dirty="0">
+              <a:rPr sz="950" lang="zh-TW" dirty="0">
                 <a:solidFill>
                   <a:srgbClr val="000000"/>
                 </a:solidFill>
@@ -1981,7 +1981,7 @@
               <a:t>上週相機的動態範圍，講的是最亮和最暗差多少倍，單位是 dB，逆光、隧道口就看它。這裡的 Dynamic Range，看單位是 °/sec，講的是最快量得到轉多快，就是剛剛 TDK 那張表叫 </a:t>
             </a:r>
             <a:r>
-              <a:rPr sz="1100" b="1" lang="zh-TW" dirty="0">
+              <a:rPr sz="950" b="1" lang="zh-TW" dirty="0">
                 <a:solidFill>
                   <a:srgbClr val="000000"/>
                 </a:solidFill>
@@ -1992,7 +1992,7 @@
               <a:t>Full-Scale Range</a:t>
             </a:r>
             <a:r>
-              <a:rPr sz="1100" lang="zh-TW" dirty="0">
+              <a:rPr sz="950" lang="zh-TW" dirty="0">
                 <a:solidFill>
                   <a:srgbClr val="000000"/>
                 </a:solidFill>
@@ -2003,7 +2003,7 @@
               <a:t> 的那一行，量程。兩家公司用不同的名字講同一件事；同一個英文詞，放在不同感測器上，意思也可能不一樣。所以讀規格表，</a:t>
             </a:r>
             <a:r>
-              <a:rPr sz="1100" b="1" lang="zh-TW" dirty="0">
+              <a:rPr sz="950" b="1" lang="zh-TW" dirty="0">
                 <a:solidFill>
                   <a:srgbClr val="000000"/>
                 </a:solidFill>
@@ -2014,7 +2014,7 @@
               <a:t>先看單位</a:t>
             </a:r>
             <a:r>
-              <a:rPr sz="1100" lang="zh-TW" dirty="0">
+              <a:rPr sz="950" lang="zh-TW" dirty="0">
                 <a:solidFill>
                   <a:srgbClr val="000000"/>
                 </a:solidFill>
@@ -2032,11 +2032,11 @@
                 <a:spcPts val="0"/>
               </a:spcBef>
               <a:spcAft>
-                <a:spcPts val="183"/>
+                <a:spcPts val="158"/>
               </a:spcAft>
             </a:pPr>
             <a:r>
-              <a:rPr sz="1100" lang="zh-TW" dirty="0">
+              <a:rPr sz="950" lang="zh-TW" dirty="0">
                 <a:solidFill>
                   <a:srgbClr val="000000"/>
                 </a:solidFill>
@@ -2054,11 +2054,11 @@
                 <a:spcPts val="0"/>
               </a:spcBef>
               <a:spcAft>
-                <a:spcPts val="183"/>
+                <a:spcPts val="158"/>
               </a:spcAft>
             </a:pPr>
             <a:r>
-              <a:rPr sz="1100" lang="zh-TW" dirty="0">
+              <a:rPr sz="950" lang="zh-TW" dirty="0">
                 <a:solidFill>
                   <a:srgbClr val="000000"/>
                 </a:solidFill>
@@ -2069,7 +2069,7 @@
               <a:t>往下看 </a:t>
             </a:r>
             <a:r>
-              <a:rPr sz="1100" b="1" lang="zh-TW" dirty="0">
+              <a:rPr sz="950" b="1" lang="zh-TW" dirty="0">
                 <a:solidFill>
                   <a:srgbClr val="000000"/>
                 </a:solidFill>
@@ -2080,7 +2080,7 @@
               <a:t>Bias</a:t>
             </a:r>
             <a:r>
-              <a:rPr sz="1100" lang="zh-TW" dirty="0">
+              <a:rPr sz="950" lang="zh-TW" dirty="0">
                 <a:solidFill>
                   <a:srgbClr val="000000"/>
                 </a:solidFill>
@@ -2091,7 +2091,7 @@
               <a:t> 那一塊，前兩列就是剛剛手機級找不到的。</a:t>
             </a:r>
             <a:r>
-              <a:rPr sz="1100" b="1" lang="zh-TW" dirty="0">
+              <a:rPr sz="950" b="1" lang="zh-TW" dirty="0">
                 <a:solidFill>
                   <a:srgbClr val="000000"/>
                 </a:solidFill>
@@ -2102,7 +2102,7 @@
               <a:t>In Run Stability，8 °/hr</a:t>
             </a:r>
             <a:r>
-              <a:rPr sz="1100" lang="zh-TW" dirty="0">
+              <a:rPr sz="950" lang="zh-TW" dirty="0">
                 <a:solidFill>
                   <a:srgbClr val="000000"/>
                 </a:solidFill>
@@ -2113,7 +2113,7 @@
               <a:t>，後面寫 1 σ。σ 是希臘字母，唸「西格瑪」，越南文唸 xích-ma。1 σ 是統計上的一個標準差，意思是大約七成的時候落在這個數字以內。跟上一張的 CEP 50%、上週光達的 &gt;90% 一樣，是機率的寫法，不是保證。8 °/hr 的意思是這顆靜止放著，一個小時偏差只飄八度，一分鐘零點一三度。用手錶來想：便宜的錶一天可能差一分鐘，好的錶一個月才差幾秒。偏差穩定度講的就是這種「走久了會差多少」。</a:t>
             </a:r>
             <a:r>
-              <a:rPr sz="1100" b="1" lang="zh-TW" dirty="0">
+              <a:rPr sz="950" b="1" lang="zh-TW" dirty="0">
                 <a:solidFill>
                   <a:srgbClr val="000000"/>
                 </a:solidFill>
@@ -2124,7 +2124,7 @@
               <a:t>Angular Random Walk，0.34 °/√hr</a:t>
             </a:r>
             <a:r>
-              <a:rPr sz="1100" lang="zh-TW" dirty="0">
+              <a:rPr sz="950" lang="zh-TW" dirty="0">
                 <a:solidFill>
                   <a:srgbClr val="000000"/>
                 </a:solidFill>
@@ -2142,11 +2142,11 @@
                 <a:spcPts val="0"/>
               </a:spcBef>
               <a:spcAft>
-                <a:spcPts val="183"/>
+                <a:spcPts val="158"/>
               </a:spcAft>
             </a:pPr>
             <a:r>
-              <a:rPr sz="1100" lang="zh-TW" dirty="0">
+              <a:rPr sz="950" lang="zh-TW" dirty="0">
                 <a:solidFill>
                   <a:srgbClr val="000000"/>
                 </a:solidFill>
@@ -2157,26 +2157,70 @@
               <a:t>再看 </a:t>
             </a:r>
             <a:r>
-              <a:rPr sz="1100" b="1" lang="zh-TW" dirty="0">
-                <a:solidFill>
-                  <a:srgbClr val="000000"/>
-                </a:solidFill>
-                <a:latin typeface="Arial Unicode MS"/>
-                <a:ea typeface="Arial Unicode MS"/>
-                <a:cs typeface="Arial Unicode MS"/>
-              </a:rPr>
-              <a:t>Rate Noise Density，0.008</a:t>
-            </a:r>
-            <a:r>
-              <a:rPr sz="1100" lang="zh-TW" dirty="0">
-                <a:solidFill>
-                  <a:srgbClr val="000000"/>
-                </a:solidFill>
-                <a:latin typeface="Arial Unicode MS"/>
-                <a:ea typeface="Arial Unicode MS"/>
-                <a:cs typeface="Arial Unicode MS"/>
-              </a:rPr>
-              <a:t>。手機級那顆是 0.015，差一倍。這一行兩邊的表都有，可以直接比；Bias 那兩行只有這邊有。
+              <a:rPr sz="950" b="1" lang="zh-TW" dirty="0">
+                <a:solidFill>
+                  <a:srgbClr val="000000"/>
+                </a:solidFill>
+                <a:latin typeface="Arial Unicode MS"/>
+                <a:ea typeface="Arial Unicode MS"/>
+                <a:cs typeface="Arial Unicode MS"/>
+              </a:rPr>
+              <a:t>Rate Noise Density，雜訊密度，0.008</a:t>
+            </a:r>
+            <a:r>
+              <a:rPr sz="950" lang="zh-TW" dirty="0">
+                <a:solidFill>
+                  <a:srgbClr val="000000"/>
+                </a:solidFill>
+                <a:latin typeface="Arial Unicode MS"/>
+                <a:ea typeface="Arial Unicode MS"/>
+                <a:cs typeface="Arial Unicode MS"/>
+              </a:rPr>
+              <a:t>，單位是度每秒、再除以根號赫茲。它講的是讀數一直在「抖」的程度：東西靜止，讀數卻一下 +0.02、一下 −0.03，跳來跳去。這跟剛剛的零偏不一樣。用體重計來想：沒人站上去也顯示兩公斤，是</a:t>
+            </a:r>
+            <a:r>
+              <a:rPr sz="950" b="1" lang="zh-TW" dirty="0">
+                <a:solidFill>
+                  <a:srgbClr val="000000"/>
+                </a:solidFill>
+                <a:latin typeface="Arial Unicode MS"/>
+                <a:ea typeface="Arial Unicode MS"/>
+                <a:cs typeface="Arial Unicode MS"/>
+              </a:rPr>
+              <a:t>零偏</a:t>
+            </a:r>
+            <a:r>
+              <a:rPr sz="950" lang="zh-TW" dirty="0">
+                <a:solidFill>
+                  <a:srgbClr val="000000"/>
+                </a:solidFill>
+                <a:latin typeface="Arial Unicode MS"/>
+                <a:ea typeface="Arial Unicode MS"/>
+                <a:cs typeface="Arial Unicode MS"/>
+              </a:rPr>
+              <a:t>，一直偏同一邊；人站上去，數字在 60.1、59.9、60.2 之間跳，是</a:t>
+            </a:r>
+            <a:r>
+              <a:rPr sz="950" b="1" lang="zh-TW" dirty="0">
+                <a:solidFill>
+                  <a:srgbClr val="000000"/>
+                </a:solidFill>
+                <a:latin typeface="Arial Unicode MS"/>
+                <a:ea typeface="Arial Unicode MS"/>
+                <a:cs typeface="Arial Unicode MS"/>
+              </a:rPr>
+              <a:t>雜訊</a:t>
+            </a:r>
+            <a:r>
+              <a:rPr sz="950" lang="zh-TW" dirty="0">
+                <a:solidFill>
+                  <a:srgbClr val="000000"/>
+                </a:solidFill>
+                <a:latin typeface="Arial Unicode MS"/>
+                <a:ea typeface="Arial Unicode MS"/>
+                <a:cs typeface="Arial Unicode MS"/>
+              </a:rPr>
+              <a:t>，忽上忽下。零偏可以先量出來扣掉，雜訊扣不掉，只能平均。單位裡的「除以根號赫茲」是說：你要的更新愈快，抖得愈厲害。手機級那顆是 0.015，大約差一倍。這一行兩邊的表都有，可以直接比；Bias 那兩行只有這邊有。
 </a:t>
             </a:r>
           </a:p>
@@ -2186,22 +2230,22 @@
                 <a:spcPts val="0"/>
               </a:spcBef>
               <a:spcAft>
-                <a:spcPts val="183"/>
+                <a:spcPts val="158"/>
               </a:spcAft>
             </a:pPr>
             <a:r>
-              <a:rPr sz="1100" lang="zh-TW" dirty="0">
-                <a:solidFill>
-                  <a:srgbClr val="000000"/>
-                </a:solidFill>
-                <a:latin typeface="Arial Unicode MS"/>
-                <a:ea typeface="Arial Unicode MS"/>
-                <a:cs typeface="Arial Unicode MS"/>
-              </a:rPr>
-              <a:t>翻回規格書第一頁，Applications 那一欄寫的是 Navigation、</a:t>
-            </a:r>
-            <a:r>
-              <a:rPr sz="1100" b="1" lang="zh-TW" dirty="0">
+              <a:rPr sz="950" lang="zh-TW" dirty="0">
+                <a:solidFill>
+                  <a:srgbClr val="000000"/>
+                </a:solidFill>
+                <a:latin typeface="Arial Unicode MS"/>
+                <a:ea typeface="Arial Unicode MS"/>
+                <a:cs typeface="Arial Unicode MS"/>
+              </a:rPr>
+              <a:t>翻回規格書第一頁，Applications 那一欄寫的是 Navigation（導航）、</a:t>
+            </a:r>
+            <a:r>
+              <a:rPr sz="950" b="1" lang="zh-TW" dirty="0">
                 <a:solidFill>
                   <a:srgbClr val="000000"/>
                 </a:solidFill>
@@ -2212,15 +2256,37 @@
               <a:t>Unmanned and autonomous vehicles</a:t>
             </a:r>
             <a:r>
-              <a:rPr sz="1100" lang="zh-TW" dirty="0">
-                <a:solidFill>
-                  <a:srgbClr val="000000"/>
-                </a:solidFill>
-                <a:latin typeface="Arial Unicode MS"/>
-                <a:ea typeface="Arial Unicode MS"/>
-                <a:cs typeface="Arial Unicode MS"/>
-              </a:rPr>
-              <a:t>、robotics。手機級那顆寫的是 Smartphones。規格書自己告訴你它是給誰用的。
+              <a:rPr sz="950" lang="zh-TW" dirty="0">
+                <a:solidFill>
+                  <a:srgbClr val="000000"/>
+                </a:solidFill>
+                <a:latin typeface="Arial Unicode MS"/>
+                <a:ea typeface="Arial Unicode MS"/>
+                <a:cs typeface="Arial Unicode MS"/>
+              </a:rPr>
+              <a:t>、robotics（機器人）。中間那個是「</a:t>
+            </a:r>
+            <a:r>
+              <a:rPr sz="950" b="1" lang="zh-TW" dirty="0">
+                <a:solidFill>
+                  <a:srgbClr val="000000"/>
+                </a:solidFill>
+                <a:latin typeface="Arial Unicode MS"/>
+                <a:ea typeface="Arial Unicode MS"/>
+                <a:cs typeface="Arial Unicode MS"/>
+              </a:rPr>
+              <a:t>無人載具與自駕載具</a:t>
+            </a:r>
+            <a:r>
+              <a:rPr sz="950" lang="zh-TW" dirty="0">
+                <a:solidFill>
+                  <a:srgbClr val="000000"/>
+                </a:solidFill>
+                <a:latin typeface="Arial Unicode MS"/>
+                <a:ea typeface="Arial Unicode MS"/>
+                <a:cs typeface="Arial Unicode MS"/>
+              </a:rPr>
+              <a:t>」：unmanned 是裡面沒有人在開，像無人機、工廠裡的無人搬運車；autonomous 是自己判斷、自己開，像自駕車。底下的結論條寫的就是這一句。手機級那顆寫的是 Smartphones。規格書自己告訴你它是給誰用的。
 </a:t>
             </a:r>
           </a:p>
@@ -2230,11 +2296,11 @@
                 <a:spcPts val="0"/>
               </a:spcBef>
               <a:spcAft>
-                <a:spcPts val="183"/>
+                <a:spcPts val="158"/>
               </a:spcAft>
             </a:pPr>
             <a:r>
-              <a:rPr sz="1100" lang="zh-TW" dirty="0">
+              <a:rPr sz="950" lang="zh-TW" dirty="0">
                 <a:solidFill>
                   <a:srgbClr val="000000"/>
                 </a:solidFill>
